--- a/episodes/01-what-is-an-agent/slides/ep01-what-is-an-agent.pptx
+++ b/episodes/01-what-is-an-agent/slides/ep01-what-is-an-agent.pptx
@@ -2108,8 +2108,8 @@
         </p:nvSpPr>
         <p:spPr>
           <a:xfrm>
-            <a:off x="548640" y="1143000"/>
-            <a:ext cx="8229600" cy="726440"/>
+            <a:off x="548640" y="1051560"/>
+            <a:ext cx="8229600" cy="782320"/>
           </a:xfrm>
           <a:prstGeom prst="rect">
             <a:avLst/>
@@ -2125,7 +2125,7 @@
               <a:buNone/>
             </a:pPr>
             <a:r>
-              <a:rPr lang="en-US" sz="4400" b="1" spc="-200" kern="0" dirty="0">
+              <a:rPr lang="en-US" sz="4400" b="1" spc="100" kern="0" dirty="0">
                 <a:solidFill>
                   <a:srgbClr val="FFFFFF"/>
                 </a:solidFill>
@@ -2133,13 +2133,13 @@
                 <a:ea typeface="Geist" pitchFamily="34" charset="-122"/>
                 <a:cs typeface="Geist" pitchFamily="34" charset="-120"/>
               </a:rPr>
-              <a:t>learn with </a:t>
-            </a:r>
-            <a:pPr indent="0" marL="0">
-              <a:buNone/>
-            </a:pPr>
-            <a:r>
-              <a:rPr lang="en-US" sz="4400" b="1" spc="-200" kern="0" dirty="0">
+              <a:t>learn  with  </a:t>
+            </a:r>
+            <a:pPr indent="0" marL="0">
+              <a:buNone/>
+            </a:pPr>
+            <a:r>
+              <a:rPr lang="en-US" sz="4400" b="1" spc="100" kern="0" dirty="0">
                 <a:solidFill>
                   <a:srgbClr val="FF5700"/>
                 </a:solidFill>
@@ -2153,7 +2153,7 @@
               <a:buNone/>
             </a:pPr>
             <a:r>
-              <a:rPr lang="en-US" sz="1800" b="1" spc="-200" kern="0" dirty="0">
+              <a:rPr lang="en-US" sz="1800" b="1" spc="100" kern="0" dirty="0">
                 <a:solidFill>
                   <a:srgbClr val="FF5700"/>
                 </a:solidFill>
@@ -2161,7 +2161,7 @@
                 <a:ea typeface="Geist" pitchFamily="34" charset="-122"/>
                 <a:cs typeface="Geist" pitchFamily="34" charset="-120"/>
               </a:rPr>
-              <a:t>■</a:t>
+              <a:t>  ■</a:t>
             </a:r>
             <a:endParaRPr lang="en-US" sz="4400" dirty="0"/>
           </a:p>
@@ -2175,7 +2175,7 @@
         </p:nvSpPr>
         <p:spPr>
           <a:xfrm>
-            <a:off x="548640" y="2057400"/>
+            <a:off x="548640" y="2194560"/>
             <a:ext cx="7680960" cy="1371600"/>
           </a:xfrm>
           <a:prstGeom prst="rect">
@@ -2416,8 +2416,8 @@
         </p:nvSpPr>
         <p:spPr>
           <a:xfrm>
-            <a:off x="457200" y="292608"/>
-            <a:ext cx="8229600" cy="231140"/>
+            <a:off x="457200" y="274320"/>
+            <a:ext cx="8229600" cy="248920"/>
           </a:xfrm>
           <a:prstGeom prst="rect">
             <a:avLst/>
@@ -2433,7 +2433,7 @@
               <a:buNone/>
             </a:pPr>
             <a:r>
-              <a:rPr lang="en-US" sz="1400" b="1" spc="-200" kern="0" dirty="0">
+              <a:rPr lang="en-US" sz="1400" b="1" spc="100" kern="0" dirty="0">
                 <a:solidFill>
                   <a:srgbClr val="1C1C1C"/>
                 </a:solidFill>
@@ -2441,13 +2441,13 @@
                 <a:ea typeface="Geist" pitchFamily="34" charset="-122"/>
                 <a:cs typeface="Geist" pitchFamily="34" charset="-120"/>
               </a:rPr>
-              <a:t>learn with </a:t>
-            </a:r>
-            <a:pPr indent="0" marL="0">
-              <a:buNone/>
-            </a:pPr>
-            <a:r>
-              <a:rPr lang="en-US" sz="1400" b="1" spc="-200" kern="0" dirty="0">
+              <a:t>learn  with  </a:t>
+            </a:r>
+            <a:pPr indent="0" marL="0">
+              <a:buNone/>
+            </a:pPr>
+            <a:r>
+              <a:rPr lang="en-US" sz="1400" b="1" spc="100" kern="0" dirty="0">
                 <a:solidFill>
                   <a:srgbClr val="FF5700"/>
                 </a:solidFill>
@@ -2461,7 +2461,7 @@
               <a:buNone/>
             </a:pPr>
             <a:r>
-              <a:rPr lang="en-US" sz="600" b="1" spc="-200" kern="0" dirty="0">
+              <a:rPr lang="en-US" sz="600" b="1" spc="100" kern="0" dirty="0">
                 <a:solidFill>
                   <a:srgbClr val="FF5700"/>
                 </a:solidFill>
@@ -2469,7 +2469,7 @@
                 <a:ea typeface="Geist" pitchFamily="34" charset="-122"/>
                 <a:cs typeface="Geist" pitchFamily="34" charset="-120"/>
               </a:rPr>
-              <a:t>■</a:t>
+              <a:t>  ■</a:t>
             </a:r>
             <a:endParaRPr lang="en-US" sz="1400" dirty="0"/>
           </a:p>
@@ -2483,7 +2483,7 @@
         </p:nvSpPr>
         <p:spPr>
           <a:xfrm>
-            <a:off x="457200" y="813816"/>
+            <a:off x="457200" y="905256"/>
             <a:ext cx="91440" cy="91440"/>
           </a:xfrm>
           <a:prstGeom prst="rect">
@@ -2503,7 +2503,7 @@
         </p:nvSpPr>
         <p:spPr>
           <a:xfrm>
-            <a:off x="621792" y="713232"/>
+            <a:off x="621792" y="804672"/>
             <a:ext cx="6400800" cy="292608"/>
           </a:xfrm>
           <a:prstGeom prst="rect">
@@ -2542,7 +2542,7 @@
         </p:nvSpPr>
         <p:spPr>
           <a:xfrm>
-            <a:off x="457200" y="987552"/>
+            <a:off x="457200" y="1078992"/>
             <a:ext cx="8229600" cy="640080"/>
           </a:xfrm>
           <a:prstGeom prst="rect">
@@ -3814,8 +3814,8 @@
         </p:nvSpPr>
         <p:spPr>
           <a:xfrm>
-            <a:off x="457200" y="292608"/>
-            <a:ext cx="8229600" cy="231140"/>
+            <a:off x="457200" y="274320"/>
+            <a:ext cx="8229600" cy="248920"/>
           </a:xfrm>
           <a:prstGeom prst="rect">
             <a:avLst/>
@@ -3831,7 +3831,7 @@
               <a:buNone/>
             </a:pPr>
             <a:r>
-              <a:rPr lang="en-US" sz="1400" b="1" spc="-200" kern="0" dirty="0">
+              <a:rPr lang="en-US" sz="1400" b="1" spc="100" kern="0" dirty="0">
                 <a:solidFill>
                   <a:srgbClr val="1C1C1C"/>
                 </a:solidFill>
@@ -3839,13 +3839,13 @@
                 <a:ea typeface="Geist" pitchFamily="34" charset="-122"/>
                 <a:cs typeface="Geist" pitchFamily="34" charset="-120"/>
               </a:rPr>
-              <a:t>learn with </a:t>
-            </a:r>
-            <a:pPr indent="0" marL="0">
-              <a:buNone/>
-            </a:pPr>
-            <a:r>
-              <a:rPr lang="en-US" sz="1400" b="1" spc="-200" kern="0" dirty="0">
+              <a:t>learn  with  </a:t>
+            </a:r>
+            <a:pPr indent="0" marL="0">
+              <a:buNone/>
+            </a:pPr>
+            <a:r>
+              <a:rPr lang="en-US" sz="1400" b="1" spc="100" kern="0" dirty="0">
                 <a:solidFill>
                   <a:srgbClr val="FF5700"/>
                 </a:solidFill>
@@ -3859,7 +3859,7 @@
               <a:buNone/>
             </a:pPr>
             <a:r>
-              <a:rPr lang="en-US" sz="600" b="1" spc="-200" kern="0" dirty="0">
+              <a:rPr lang="en-US" sz="600" b="1" spc="100" kern="0" dirty="0">
                 <a:solidFill>
                   <a:srgbClr val="FF5700"/>
                 </a:solidFill>
@@ -3867,7 +3867,7 @@
                 <a:ea typeface="Geist" pitchFamily="34" charset="-122"/>
                 <a:cs typeface="Geist" pitchFamily="34" charset="-120"/>
               </a:rPr>
-              <a:t>■</a:t>
+              <a:t>  ■</a:t>
             </a:r>
             <a:endParaRPr lang="en-US" sz="1400" dirty="0"/>
           </a:p>
@@ -3881,7 +3881,7 @@
         </p:nvSpPr>
         <p:spPr>
           <a:xfrm>
-            <a:off x="457200" y="813816"/>
+            <a:off x="457200" y="905256"/>
             <a:ext cx="91440" cy="91440"/>
           </a:xfrm>
           <a:prstGeom prst="rect">
@@ -3901,7 +3901,7 @@
         </p:nvSpPr>
         <p:spPr>
           <a:xfrm>
-            <a:off x="621792" y="713232"/>
+            <a:off x="621792" y="804672"/>
             <a:ext cx="6400800" cy="292608"/>
           </a:xfrm>
           <a:prstGeom prst="rect">
@@ -3940,7 +3940,7 @@
         </p:nvSpPr>
         <p:spPr>
           <a:xfrm>
-            <a:off x="457200" y="987552"/>
+            <a:off x="457200" y="1078992"/>
             <a:ext cx="8229600" cy="640080"/>
           </a:xfrm>
           <a:prstGeom prst="rect">
@@ -4783,8 +4783,8 @@
         </p:nvSpPr>
         <p:spPr>
           <a:xfrm>
-            <a:off x="548640" y="411480"/>
-            <a:ext cx="8229600" cy="297180"/>
+            <a:off x="548640" y="384048"/>
+            <a:ext cx="8229600" cy="320040"/>
           </a:xfrm>
           <a:prstGeom prst="rect">
             <a:avLst/>
@@ -4800,7 +4800,7 @@
               <a:buNone/>
             </a:pPr>
             <a:r>
-              <a:rPr lang="en-US" sz="1800" b="1" spc="-200" kern="0" dirty="0">
+              <a:rPr lang="en-US" sz="1800" b="1" spc="100" kern="0" dirty="0">
                 <a:solidFill>
                   <a:srgbClr val="FFFFFF"/>
                 </a:solidFill>
@@ -4808,13 +4808,13 @@
                 <a:ea typeface="Geist" pitchFamily="34" charset="-122"/>
                 <a:cs typeface="Geist" pitchFamily="34" charset="-120"/>
               </a:rPr>
-              <a:t>learn with </a:t>
-            </a:r>
-            <a:pPr indent="0" marL="0">
-              <a:buNone/>
-            </a:pPr>
-            <a:r>
-              <a:rPr lang="en-US" sz="1800" b="1" spc="-200" kern="0" dirty="0">
+              <a:t>learn  with  </a:t>
+            </a:r>
+            <a:pPr indent="0" marL="0">
+              <a:buNone/>
+            </a:pPr>
+            <a:r>
+              <a:rPr lang="en-US" sz="1800" b="1" spc="100" kern="0" dirty="0">
                 <a:solidFill>
                   <a:srgbClr val="FF5700"/>
                 </a:solidFill>
@@ -4828,7 +4828,7 @@
               <a:buNone/>
             </a:pPr>
             <a:r>
-              <a:rPr lang="en-US" sz="800" b="1" spc="-200" kern="0" dirty="0">
+              <a:rPr lang="en-US" sz="700" b="1" spc="100" kern="0" dirty="0">
                 <a:solidFill>
                   <a:srgbClr val="FF5700"/>
                 </a:solidFill>
@@ -4836,7 +4836,7 @@
                 <a:ea typeface="Geist" pitchFamily="34" charset="-122"/>
                 <a:cs typeface="Geist" pitchFamily="34" charset="-120"/>
               </a:rPr>
-              <a:t>■</a:t>
+              <a:t>  ■</a:t>
             </a:r>
             <a:endParaRPr lang="en-US" sz="1800" dirty="0"/>
           </a:p>
@@ -5457,8 +5457,8 @@
         </p:nvSpPr>
         <p:spPr>
           <a:xfrm>
-            <a:off x="457200" y="292608"/>
-            <a:ext cx="8229600" cy="231140"/>
+            <a:off x="457200" y="274320"/>
+            <a:ext cx="8229600" cy="248920"/>
           </a:xfrm>
           <a:prstGeom prst="rect">
             <a:avLst/>
@@ -5474,7 +5474,7 @@
               <a:buNone/>
             </a:pPr>
             <a:r>
-              <a:rPr lang="en-US" sz="1400" b="1" spc="-200" kern="0" dirty="0">
+              <a:rPr lang="en-US" sz="1400" b="1" spc="100" kern="0" dirty="0">
                 <a:solidFill>
                   <a:srgbClr val="1C1C1C"/>
                 </a:solidFill>
@@ -5482,13 +5482,13 @@
                 <a:ea typeface="Geist" pitchFamily="34" charset="-122"/>
                 <a:cs typeface="Geist" pitchFamily="34" charset="-120"/>
               </a:rPr>
-              <a:t>learn with </a:t>
-            </a:r>
-            <a:pPr indent="0" marL="0">
-              <a:buNone/>
-            </a:pPr>
-            <a:r>
-              <a:rPr lang="en-US" sz="1400" b="1" spc="-200" kern="0" dirty="0">
+              <a:t>learn  with  </a:t>
+            </a:r>
+            <a:pPr indent="0" marL="0">
+              <a:buNone/>
+            </a:pPr>
+            <a:r>
+              <a:rPr lang="en-US" sz="1400" b="1" spc="100" kern="0" dirty="0">
                 <a:solidFill>
                   <a:srgbClr val="FF5700"/>
                 </a:solidFill>
@@ -5502,7 +5502,7 @@
               <a:buNone/>
             </a:pPr>
             <a:r>
-              <a:rPr lang="en-US" sz="600" b="1" spc="-200" kern="0" dirty="0">
+              <a:rPr lang="en-US" sz="600" b="1" spc="100" kern="0" dirty="0">
                 <a:solidFill>
                   <a:srgbClr val="FF5700"/>
                 </a:solidFill>
@@ -5510,7 +5510,7 @@
                 <a:ea typeface="Geist" pitchFamily="34" charset="-122"/>
                 <a:cs typeface="Geist" pitchFamily="34" charset="-120"/>
               </a:rPr>
-              <a:t>■</a:t>
+              <a:t>  ■</a:t>
             </a:r>
             <a:endParaRPr lang="en-US" sz="1400" dirty="0"/>
           </a:p>
@@ -5524,7 +5524,7 @@
         </p:nvSpPr>
         <p:spPr>
           <a:xfrm>
-            <a:off x="457200" y="813816"/>
+            <a:off x="457200" y="905256"/>
             <a:ext cx="91440" cy="91440"/>
           </a:xfrm>
           <a:prstGeom prst="rect">
@@ -5544,7 +5544,7 @@
         </p:nvSpPr>
         <p:spPr>
           <a:xfrm>
-            <a:off x="621792" y="713232"/>
+            <a:off x="621792" y="804672"/>
             <a:ext cx="6400800" cy="292608"/>
           </a:xfrm>
           <a:prstGeom prst="rect">
@@ -5583,7 +5583,7 @@
         </p:nvSpPr>
         <p:spPr>
           <a:xfrm>
-            <a:off x="457200" y="987552"/>
+            <a:off x="457200" y="1078992"/>
             <a:ext cx="8229600" cy="640080"/>
           </a:xfrm>
           <a:prstGeom prst="rect">
@@ -6303,8 +6303,8 @@
         </p:nvSpPr>
         <p:spPr>
           <a:xfrm>
-            <a:off x="457200" y="292608"/>
-            <a:ext cx="8229600" cy="231140"/>
+            <a:off x="457200" y="274320"/>
+            <a:ext cx="8229600" cy="248920"/>
           </a:xfrm>
           <a:prstGeom prst="rect">
             <a:avLst/>
@@ -6320,7 +6320,7 @@
               <a:buNone/>
             </a:pPr>
             <a:r>
-              <a:rPr lang="en-US" sz="1400" b="1" spc="-200" kern="0" dirty="0">
+              <a:rPr lang="en-US" sz="1400" b="1" spc="100" kern="0" dirty="0">
                 <a:solidFill>
                   <a:srgbClr val="1C1C1C"/>
                 </a:solidFill>
@@ -6328,13 +6328,13 @@
                 <a:ea typeface="Geist" pitchFamily="34" charset="-122"/>
                 <a:cs typeface="Geist" pitchFamily="34" charset="-120"/>
               </a:rPr>
-              <a:t>learn with </a:t>
-            </a:r>
-            <a:pPr indent="0" marL="0">
-              <a:buNone/>
-            </a:pPr>
-            <a:r>
-              <a:rPr lang="en-US" sz="1400" b="1" spc="-200" kern="0" dirty="0">
+              <a:t>learn  with  </a:t>
+            </a:r>
+            <a:pPr indent="0" marL="0">
+              <a:buNone/>
+            </a:pPr>
+            <a:r>
+              <a:rPr lang="en-US" sz="1400" b="1" spc="100" kern="0" dirty="0">
                 <a:solidFill>
                   <a:srgbClr val="FF5700"/>
                 </a:solidFill>
@@ -6348,7 +6348,7 @@
               <a:buNone/>
             </a:pPr>
             <a:r>
-              <a:rPr lang="en-US" sz="600" b="1" spc="-200" kern="0" dirty="0">
+              <a:rPr lang="en-US" sz="600" b="1" spc="100" kern="0" dirty="0">
                 <a:solidFill>
                   <a:srgbClr val="FF5700"/>
                 </a:solidFill>
@@ -6356,7 +6356,7 @@
                 <a:ea typeface="Geist" pitchFamily="34" charset="-122"/>
                 <a:cs typeface="Geist" pitchFamily="34" charset="-120"/>
               </a:rPr>
-              <a:t>■</a:t>
+              <a:t>  ■</a:t>
             </a:r>
             <a:endParaRPr lang="en-US" sz="1400" dirty="0"/>
           </a:p>
@@ -6370,7 +6370,7 @@
         </p:nvSpPr>
         <p:spPr>
           <a:xfrm>
-            <a:off x="457200" y="813816"/>
+            <a:off x="457200" y="905256"/>
             <a:ext cx="91440" cy="91440"/>
           </a:xfrm>
           <a:prstGeom prst="rect">
@@ -6390,7 +6390,7 @@
         </p:nvSpPr>
         <p:spPr>
           <a:xfrm>
-            <a:off x="621792" y="713232"/>
+            <a:off x="621792" y="804672"/>
             <a:ext cx="6400800" cy="292608"/>
           </a:xfrm>
           <a:prstGeom prst="rect">
@@ -7038,8 +7038,8 @@
         </p:nvSpPr>
         <p:spPr>
           <a:xfrm>
-            <a:off x="457200" y="292608"/>
-            <a:ext cx="8229600" cy="231140"/>
+            <a:off x="457200" y="274320"/>
+            <a:ext cx="8229600" cy="248920"/>
           </a:xfrm>
           <a:prstGeom prst="rect">
             <a:avLst/>
@@ -7055,7 +7055,7 @@
               <a:buNone/>
             </a:pPr>
             <a:r>
-              <a:rPr lang="en-US" sz="1400" b="1" spc="-200" kern="0" dirty="0">
+              <a:rPr lang="en-US" sz="1400" b="1" spc="100" kern="0" dirty="0">
                 <a:solidFill>
                   <a:srgbClr val="1C1C1C"/>
                 </a:solidFill>
@@ -7063,13 +7063,13 @@
                 <a:ea typeface="Geist" pitchFamily="34" charset="-122"/>
                 <a:cs typeface="Geist" pitchFamily="34" charset="-120"/>
               </a:rPr>
-              <a:t>learn with </a:t>
-            </a:r>
-            <a:pPr indent="0" marL="0">
-              <a:buNone/>
-            </a:pPr>
-            <a:r>
-              <a:rPr lang="en-US" sz="1400" b="1" spc="-200" kern="0" dirty="0">
+              <a:t>learn  with  </a:t>
+            </a:r>
+            <a:pPr indent="0" marL="0">
+              <a:buNone/>
+            </a:pPr>
+            <a:r>
+              <a:rPr lang="en-US" sz="1400" b="1" spc="100" kern="0" dirty="0">
                 <a:solidFill>
                   <a:srgbClr val="FF5700"/>
                 </a:solidFill>
@@ -7083,7 +7083,7 @@
               <a:buNone/>
             </a:pPr>
             <a:r>
-              <a:rPr lang="en-US" sz="600" b="1" spc="-200" kern="0" dirty="0">
+              <a:rPr lang="en-US" sz="600" b="1" spc="100" kern="0" dirty="0">
                 <a:solidFill>
                   <a:srgbClr val="FF5700"/>
                 </a:solidFill>
@@ -7091,7 +7091,7 @@
                 <a:ea typeface="Geist" pitchFamily="34" charset="-122"/>
                 <a:cs typeface="Geist" pitchFamily="34" charset="-120"/>
               </a:rPr>
-              <a:t>■</a:t>
+              <a:t>  ■</a:t>
             </a:r>
             <a:endParaRPr lang="en-US" sz="1400" dirty="0"/>
           </a:p>
@@ -7105,7 +7105,7 @@
         </p:nvSpPr>
         <p:spPr>
           <a:xfrm>
-            <a:off x="457200" y="813816"/>
+            <a:off x="457200" y="905256"/>
             <a:ext cx="91440" cy="91440"/>
           </a:xfrm>
           <a:prstGeom prst="rect">
@@ -7125,7 +7125,7 @@
         </p:nvSpPr>
         <p:spPr>
           <a:xfrm>
-            <a:off x="621792" y="713232"/>
+            <a:off x="621792" y="804672"/>
             <a:ext cx="6400800" cy="292608"/>
           </a:xfrm>
           <a:prstGeom prst="rect">
@@ -7164,7 +7164,7 @@
         </p:nvSpPr>
         <p:spPr>
           <a:xfrm>
-            <a:off x="457200" y="987552"/>
+            <a:off x="457200" y="1078992"/>
             <a:ext cx="8229600" cy="640080"/>
           </a:xfrm>
           <a:prstGeom prst="rect">
@@ -7915,8 +7915,8 @@
         </p:nvSpPr>
         <p:spPr>
           <a:xfrm>
-            <a:off x="457200" y="292608"/>
-            <a:ext cx="8229600" cy="231140"/>
+            <a:off x="457200" y="274320"/>
+            <a:ext cx="8229600" cy="248920"/>
           </a:xfrm>
           <a:prstGeom prst="rect">
             <a:avLst/>
@@ -7932,7 +7932,7 @@
               <a:buNone/>
             </a:pPr>
             <a:r>
-              <a:rPr lang="en-US" sz="1400" b="1" spc="-200" kern="0" dirty="0">
+              <a:rPr lang="en-US" sz="1400" b="1" spc="100" kern="0" dirty="0">
                 <a:solidFill>
                   <a:srgbClr val="1C1C1C"/>
                 </a:solidFill>
@@ -7940,13 +7940,13 @@
                 <a:ea typeface="Geist" pitchFamily="34" charset="-122"/>
                 <a:cs typeface="Geist" pitchFamily="34" charset="-120"/>
               </a:rPr>
-              <a:t>learn with </a:t>
-            </a:r>
-            <a:pPr indent="0" marL="0">
-              <a:buNone/>
-            </a:pPr>
-            <a:r>
-              <a:rPr lang="en-US" sz="1400" b="1" spc="-200" kern="0" dirty="0">
+              <a:t>learn  with  </a:t>
+            </a:r>
+            <a:pPr indent="0" marL="0">
+              <a:buNone/>
+            </a:pPr>
+            <a:r>
+              <a:rPr lang="en-US" sz="1400" b="1" spc="100" kern="0" dirty="0">
                 <a:solidFill>
                   <a:srgbClr val="FF5700"/>
                 </a:solidFill>
@@ -7960,7 +7960,7 @@
               <a:buNone/>
             </a:pPr>
             <a:r>
-              <a:rPr lang="en-US" sz="600" b="1" spc="-200" kern="0" dirty="0">
+              <a:rPr lang="en-US" sz="600" b="1" spc="100" kern="0" dirty="0">
                 <a:solidFill>
                   <a:srgbClr val="FF5700"/>
                 </a:solidFill>
@@ -7968,7 +7968,7 @@
                 <a:ea typeface="Geist" pitchFamily="34" charset="-122"/>
                 <a:cs typeface="Geist" pitchFamily="34" charset="-120"/>
               </a:rPr>
-              <a:t>■</a:t>
+              <a:t>  ■</a:t>
             </a:r>
             <a:endParaRPr lang="en-US" sz="1400" dirty="0"/>
           </a:p>
@@ -7982,7 +7982,7 @@
         </p:nvSpPr>
         <p:spPr>
           <a:xfrm>
-            <a:off x="457200" y="813816"/>
+            <a:off x="457200" y="905256"/>
             <a:ext cx="91440" cy="91440"/>
           </a:xfrm>
           <a:prstGeom prst="rect">
@@ -8002,7 +8002,7 @@
         </p:nvSpPr>
         <p:spPr>
           <a:xfrm>
-            <a:off x="621792" y="713232"/>
+            <a:off x="621792" y="804672"/>
             <a:ext cx="6400800" cy="292608"/>
           </a:xfrm>
           <a:prstGeom prst="rect">
@@ -8041,7 +8041,7 @@
         </p:nvSpPr>
         <p:spPr>
           <a:xfrm>
-            <a:off x="457200" y="987552"/>
+            <a:off x="457200" y="1078992"/>
             <a:ext cx="8229600" cy="640080"/>
           </a:xfrm>
           <a:prstGeom prst="rect">
@@ -8995,8 +8995,8 @@
         </p:nvSpPr>
         <p:spPr>
           <a:xfrm>
-            <a:off x="457200" y="292608"/>
-            <a:ext cx="8229600" cy="231140"/>
+            <a:off x="457200" y="274320"/>
+            <a:ext cx="8229600" cy="248920"/>
           </a:xfrm>
           <a:prstGeom prst="rect">
             <a:avLst/>
@@ -9012,7 +9012,7 @@
               <a:buNone/>
             </a:pPr>
             <a:r>
-              <a:rPr lang="en-US" sz="1400" b="1" spc="-200" kern="0" dirty="0">
+              <a:rPr lang="en-US" sz="1400" b="1" spc="100" kern="0" dirty="0">
                 <a:solidFill>
                   <a:srgbClr val="1C1C1C"/>
                 </a:solidFill>
@@ -9020,13 +9020,13 @@
                 <a:ea typeface="Geist" pitchFamily="34" charset="-122"/>
                 <a:cs typeface="Geist" pitchFamily="34" charset="-120"/>
               </a:rPr>
-              <a:t>learn with </a:t>
-            </a:r>
-            <a:pPr indent="0" marL="0">
-              <a:buNone/>
-            </a:pPr>
-            <a:r>
-              <a:rPr lang="en-US" sz="1400" b="1" spc="-200" kern="0" dirty="0">
+              <a:t>learn  with  </a:t>
+            </a:r>
+            <a:pPr indent="0" marL="0">
+              <a:buNone/>
+            </a:pPr>
+            <a:r>
+              <a:rPr lang="en-US" sz="1400" b="1" spc="100" kern="0" dirty="0">
                 <a:solidFill>
                   <a:srgbClr val="FF5700"/>
                 </a:solidFill>
@@ -9040,7 +9040,7 @@
               <a:buNone/>
             </a:pPr>
             <a:r>
-              <a:rPr lang="en-US" sz="600" b="1" spc="-200" kern="0" dirty="0">
+              <a:rPr lang="en-US" sz="600" b="1" spc="100" kern="0" dirty="0">
                 <a:solidFill>
                   <a:srgbClr val="FF5700"/>
                 </a:solidFill>
@@ -9048,7 +9048,7 @@
                 <a:ea typeface="Geist" pitchFamily="34" charset="-122"/>
                 <a:cs typeface="Geist" pitchFamily="34" charset="-120"/>
               </a:rPr>
-              <a:t>■</a:t>
+              <a:t>  ■</a:t>
             </a:r>
             <a:endParaRPr lang="en-US" sz="1400" dirty="0"/>
           </a:p>
@@ -9062,7 +9062,7 @@
         </p:nvSpPr>
         <p:spPr>
           <a:xfrm>
-            <a:off x="457200" y="813816"/>
+            <a:off x="457200" y="905256"/>
             <a:ext cx="91440" cy="91440"/>
           </a:xfrm>
           <a:prstGeom prst="rect">
@@ -9082,7 +9082,7 @@
         </p:nvSpPr>
         <p:spPr>
           <a:xfrm>
-            <a:off x="621792" y="713232"/>
+            <a:off x="621792" y="804672"/>
             <a:ext cx="6400800" cy="292608"/>
           </a:xfrm>
           <a:prstGeom prst="rect">
@@ -9121,7 +9121,7 @@
         </p:nvSpPr>
         <p:spPr>
           <a:xfrm>
-            <a:off x="457200" y="987552"/>
+            <a:off x="457200" y="1078992"/>
             <a:ext cx="8229600" cy="640080"/>
           </a:xfrm>
           <a:prstGeom prst="rect">
@@ -10071,8 +10071,8 @@
         </p:nvSpPr>
         <p:spPr>
           <a:xfrm>
-            <a:off x="457200" y="292608"/>
-            <a:ext cx="8229600" cy="231140"/>
+            <a:off x="457200" y="274320"/>
+            <a:ext cx="8229600" cy="248920"/>
           </a:xfrm>
           <a:prstGeom prst="rect">
             <a:avLst/>
@@ -10088,7 +10088,7 @@
               <a:buNone/>
             </a:pPr>
             <a:r>
-              <a:rPr lang="en-US" sz="1400" b="1" spc="-200" kern="0" dirty="0">
+              <a:rPr lang="en-US" sz="1400" b="1" spc="100" kern="0" dirty="0">
                 <a:solidFill>
                   <a:srgbClr val="1C1C1C"/>
                 </a:solidFill>
@@ -10096,13 +10096,13 @@
                 <a:ea typeface="Geist" pitchFamily="34" charset="-122"/>
                 <a:cs typeface="Geist" pitchFamily="34" charset="-120"/>
               </a:rPr>
-              <a:t>learn with </a:t>
-            </a:r>
-            <a:pPr indent="0" marL="0">
-              <a:buNone/>
-            </a:pPr>
-            <a:r>
-              <a:rPr lang="en-US" sz="1400" b="1" spc="-200" kern="0" dirty="0">
+              <a:t>learn  with  </a:t>
+            </a:r>
+            <a:pPr indent="0" marL="0">
+              <a:buNone/>
+            </a:pPr>
+            <a:r>
+              <a:rPr lang="en-US" sz="1400" b="1" spc="100" kern="0" dirty="0">
                 <a:solidFill>
                   <a:srgbClr val="FF5700"/>
                 </a:solidFill>
@@ -10116,7 +10116,7 @@
               <a:buNone/>
             </a:pPr>
             <a:r>
-              <a:rPr lang="en-US" sz="600" b="1" spc="-200" kern="0" dirty="0">
+              <a:rPr lang="en-US" sz="600" b="1" spc="100" kern="0" dirty="0">
                 <a:solidFill>
                   <a:srgbClr val="FF5700"/>
                 </a:solidFill>
@@ -10124,7 +10124,7 @@
                 <a:ea typeface="Geist" pitchFamily="34" charset="-122"/>
                 <a:cs typeface="Geist" pitchFamily="34" charset="-120"/>
               </a:rPr>
-              <a:t>■</a:t>
+              <a:t>  ■</a:t>
             </a:r>
             <a:endParaRPr lang="en-US" sz="1400" dirty="0"/>
           </a:p>
@@ -10138,7 +10138,7 @@
         </p:nvSpPr>
         <p:spPr>
           <a:xfrm>
-            <a:off x="457200" y="813816"/>
+            <a:off x="457200" y="905256"/>
             <a:ext cx="91440" cy="91440"/>
           </a:xfrm>
           <a:prstGeom prst="rect">
@@ -10158,7 +10158,7 @@
         </p:nvSpPr>
         <p:spPr>
           <a:xfrm>
-            <a:off x="621792" y="713232"/>
+            <a:off x="621792" y="804672"/>
             <a:ext cx="6400800" cy="292608"/>
           </a:xfrm>
           <a:prstGeom prst="rect">
@@ -10197,7 +10197,7 @@
         </p:nvSpPr>
         <p:spPr>
           <a:xfrm>
-            <a:off x="457200" y="987552"/>
+            <a:off x="457200" y="1078992"/>
             <a:ext cx="8229600" cy="640080"/>
           </a:xfrm>
           <a:prstGeom prst="rect">
@@ -10917,8 +10917,8 @@
         </p:nvSpPr>
         <p:spPr>
           <a:xfrm>
-            <a:off x="457200" y="292608"/>
-            <a:ext cx="8229600" cy="231140"/>
+            <a:off x="457200" y="274320"/>
+            <a:ext cx="8229600" cy="248920"/>
           </a:xfrm>
           <a:prstGeom prst="rect">
             <a:avLst/>
@@ -10934,7 +10934,7 @@
               <a:buNone/>
             </a:pPr>
             <a:r>
-              <a:rPr lang="en-US" sz="1400" b="1" spc="-200" kern="0" dirty="0">
+              <a:rPr lang="en-US" sz="1400" b="1" spc="100" kern="0" dirty="0">
                 <a:solidFill>
                   <a:srgbClr val="1C1C1C"/>
                 </a:solidFill>
@@ -10942,13 +10942,13 @@
                 <a:ea typeface="Geist" pitchFamily="34" charset="-122"/>
                 <a:cs typeface="Geist" pitchFamily="34" charset="-120"/>
               </a:rPr>
-              <a:t>learn with </a:t>
-            </a:r>
-            <a:pPr indent="0" marL="0">
-              <a:buNone/>
-            </a:pPr>
-            <a:r>
-              <a:rPr lang="en-US" sz="1400" b="1" spc="-200" kern="0" dirty="0">
+              <a:t>learn  with  </a:t>
+            </a:r>
+            <a:pPr indent="0" marL="0">
+              <a:buNone/>
+            </a:pPr>
+            <a:r>
+              <a:rPr lang="en-US" sz="1400" b="1" spc="100" kern="0" dirty="0">
                 <a:solidFill>
                   <a:srgbClr val="FF5700"/>
                 </a:solidFill>
@@ -10962,7 +10962,7 @@
               <a:buNone/>
             </a:pPr>
             <a:r>
-              <a:rPr lang="en-US" sz="600" b="1" spc="-200" kern="0" dirty="0">
+              <a:rPr lang="en-US" sz="600" b="1" spc="100" kern="0" dirty="0">
                 <a:solidFill>
                   <a:srgbClr val="FF5700"/>
                 </a:solidFill>
@@ -10970,7 +10970,7 @@
                 <a:ea typeface="Geist" pitchFamily="34" charset="-122"/>
                 <a:cs typeface="Geist" pitchFamily="34" charset="-120"/>
               </a:rPr>
-              <a:t>■</a:t>
+              <a:t>  ■</a:t>
             </a:r>
             <a:endParaRPr lang="en-US" sz="1400" dirty="0"/>
           </a:p>
@@ -10984,7 +10984,7 @@
         </p:nvSpPr>
         <p:spPr>
           <a:xfrm>
-            <a:off x="457200" y="813816"/>
+            <a:off x="457200" y="905256"/>
             <a:ext cx="91440" cy="91440"/>
           </a:xfrm>
           <a:prstGeom prst="rect">
@@ -11004,7 +11004,7 @@
         </p:nvSpPr>
         <p:spPr>
           <a:xfrm>
-            <a:off x="621792" y="713232"/>
+            <a:off x="621792" y="804672"/>
             <a:ext cx="6400800" cy="292608"/>
           </a:xfrm>
           <a:prstGeom prst="rect">
@@ -11043,7 +11043,7 @@
         </p:nvSpPr>
         <p:spPr>
           <a:xfrm>
-            <a:off x="457200" y="987552"/>
+            <a:off x="457200" y="1078992"/>
             <a:ext cx="8229600" cy="640080"/>
           </a:xfrm>
           <a:prstGeom prst="rect">
@@ -12090,8 +12090,8 @@
         </p:nvSpPr>
         <p:spPr>
           <a:xfrm>
-            <a:off x="457200" y="292608"/>
-            <a:ext cx="8229600" cy="231140"/>
+            <a:off x="457200" y="274320"/>
+            <a:ext cx="8229600" cy="248920"/>
           </a:xfrm>
           <a:prstGeom prst="rect">
             <a:avLst/>
@@ -12107,7 +12107,7 @@
               <a:buNone/>
             </a:pPr>
             <a:r>
-              <a:rPr lang="en-US" sz="1400" b="1" spc="-200" kern="0" dirty="0">
+              <a:rPr lang="en-US" sz="1400" b="1" spc="100" kern="0" dirty="0">
                 <a:solidFill>
                   <a:srgbClr val="1C1C1C"/>
                 </a:solidFill>
@@ -12115,13 +12115,13 @@
                 <a:ea typeface="Geist" pitchFamily="34" charset="-122"/>
                 <a:cs typeface="Geist" pitchFamily="34" charset="-120"/>
               </a:rPr>
-              <a:t>learn with </a:t>
-            </a:r>
-            <a:pPr indent="0" marL="0">
-              <a:buNone/>
-            </a:pPr>
-            <a:r>
-              <a:rPr lang="en-US" sz="1400" b="1" spc="-200" kern="0" dirty="0">
+              <a:t>learn  with  </a:t>
+            </a:r>
+            <a:pPr indent="0" marL="0">
+              <a:buNone/>
+            </a:pPr>
+            <a:r>
+              <a:rPr lang="en-US" sz="1400" b="1" spc="100" kern="0" dirty="0">
                 <a:solidFill>
                   <a:srgbClr val="FF5700"/>
                 </a:solidFill>
@@ -12135,7 +12135,7 @@
               <a:buNone/>
             </a:pPr>
             <a:r>
-              <a:rPr lang="en-US" sz="600" b="1" spc="-200" kern="0" dirty="0">
+              <a:rPr lang="en-US" sz="600" b="1" spc="100" kern="0" dirty="0">
                 <a:solidFill>
                   <a:srgbClr val="FF5700"/>
                 </a:solidFill>
@@ -12143,7 +12143,7 @@
                 <a:ea typeface="Geist" pitchFamily="34" charset="-122"/>
                 <a:cs typeface="Geist" pitchFamily="34" charset="-120"/>
               </a:rPr>
-              <a:t>■</a:t>
+              <a:t>  ■</a:t>
             </a:r>
             <a:endParaRPr lang="en-US" sz="1400" dirty="0"/>
           </a:p>
@@ -12157,7 +12157,7 @@
         </p:nvSpPr>
         <p:spPr>
           <a:xfrm>
-            <a:off x="457200" y="813816"/>
+            <a:off x="457200" y="905256"/>
             <a:ext cx="91440" cy="91440"/>
           </a:xfrm>
           <a:prstGeom prst="rect">
@@ -12177,7 +12177,7 @@
         </p:nvSpPr>
         <p:spPr>
           <a:xfrm>
-            <a:off x="621792" y="713232"/>
+            <a:off x="621792" y="804672"/>
             <a:ext cx="6400800" cy="292608"/>
           </a:xfrm>
           <a:prstGeom prst="rect">
@@ -12216,7 +12216,7 @@
         </p:nvSpPr>
         <p:spPr>
           <a:xfrm>
-            <a:off x="457200" y="987552"/>
+            <a:off x="457200" y="1078992"/>
             <a:ext cx="8229600" cy="640080"/>
           </a:xfrm>
           <a:prstGeom prst="rect">

--- a/episodes/01-what-is-an-agent/slides/ep01-what-is-an-agent.pptx
+++ b/episodes/01-what-is-an-agent/slides/ep01-what-is-an-agent.pptx
@@ -17,9 +17,10 @@
     <p:sldId id="265" r:id="rId11"/>
     <p:sldId id="266" r:id="rId12"/>
     <p:sldId id="267" r:id="rId13"/>
+    <p:sldId id="268" r:id="rId14"/>
   </p:sldIdLst>
   <p:notesMasterIdLst>
-    <p:notesMasterId r:id="rId14"/>
+    <p:notesMasterId r:id="rId15"/>
   </p:notesMasterIdLst>
   <p:sldSz cx="9144000" cy="5143500"/>
   <p:notesSz cx="5143500" cy="9144000"/>
@@ -601,7 +602,7 @@
           <a:p>
             <a:r>
               <a:rPr lang="en-US" dirty="0"/>
-              <a:t>Second breakpoint: one ERP, many companies. Memory, tools and retrieval each have to be isolated per company — or you've shipped a data leak with a chat window. The company filter is a column on every table from day one, set by the deployment, never by the model.</a:t>
+              <a:t>First breakpoint. The agent posts a credit note to the ledger — as whom? Walk the three options. The enterprise answer is the third: its own identity, scoped per company, per user, per task, least-privilege tools.</a:t>
             </a:r>
             <a:endParaRPr lang="en-US" dirty="0"/>
           </a:p>
@@ -689,7 +690,7 @@
           <a:p>
             <a:r>
               <a:rPr lang="en-US" dirty="0"/>
-              <a:t>Third breakpoint. Who approved the credit note? How do you audit a decision the model made at step 7 of 12? Four things before an agent touches production — each one is an episode.</a:t>
+              <a:t>Second breakpoint: one ERP, many companies. Memory, tools and retrieval each have to be isolated per company — or you've shipped a data leak with a chat window. The company filter is a column on every table from day one, set by the deployment, never by the model.</a:t>
             </a:r>
             <a:endParaRPr lang="en-US" dirty="0"/>
           </a:p>
@@ -777,7 +778,7 @@
           <a:p>
             <a:r>
               <a:rPr lang="en-US" dirty="0"/>
-              <a:t>Recap in 30 seconds, then the call to action: next episode we build the first agent live, inside the ERP.</a:t>
+              <a:t>Third breakpoint. Who approved the credit note? How do you audit a decision the model made at step 7 of 12? Four things before an agent touches production — each one is an episode.</a:t>
             </a:r>
             <a:endParaRPr lang="en-US" dirty="0"/>
           </a:p>
@@ -801,6 +802,94 @@
             <a:fld id="{F7021451-1387-4CA6-816F-3879F97B5CBC}" type="slidenum">
               <a:rPr lang="en-US"/>
               <a:t>12</a:t>
+            </a:fld>
+            <a:endParaRPr lang="en-US"/>
+          </a:p>
+        </p:txBody>
+      </p:sp>
+    </p:spTree>
+    <p:extLst>
+      <p:ext uri="{BB962C8B-B14F-4D97-AF65-F5344CB8AC3E}">
+        <p14:creationId xmlns:p14="http://schemas.microsoft.com/office/powerpoint/2010/main" val="1024086991"/>
+      </p:ext>
+    </p:extLst>
+  </p:cSld>
+  <p:clrMapOvr>
+    <a:masterClrMapping/>
+  </p:clrMapOvr>
+</p:notes>
+</file>
+
+<file path=ppt/notesSlides/notesSlide13.xml><?xml version="1.0" encoding="utf-8"?>
+<p:notes xmlns:a="http://schemas.openxmlformats.org/drawingml/2006/main" xmlns:r="http://schemas.openxmlformats.org/officeDocument/2006/relationships" xmlns:p="http://schemas.openxmlformats.org/presentationml/2006/main">
+  <p:cSld>
+    <p:spTree>
+      <p:nvGrpSpPr>
+        <p:cNvPr id="1" name=""/>
+        <p:cNvGrpSpPr/>
+        <p:nvPr/>
+      </p:nvGrpSpPr>
+      <p:grpSpPr>
+        <a:xfrm>
+          <a:off x="0" y="0"/>
+          <a:ext cx="0" cy="0"/>
+          <a:chOff x="0" y="0"/>
+          <a:chExt cx="0" cy="0"/>
+        </a:xfrm>
+      </p:grpSpPr>
+      <p:sp>
+        <p:nvSpPr>
+          <p:cNvPr id="2" name="Slide Image Placeholder 1"/>
+          <p:cNvSpPr>
+            <a:spLocks noGrp="1" noRot="1" noChangeAspect="1"/>
+          </p:cNvSpPr>
+          <p:nvPr>
+            <p:ph type="sldImg"/>
+          </p:nvPr>
+        </p:nvSpPr>
+        <p:spPr/>
+      </p:sp>
+      <p:sp>
+        <p:nvSpPr>
+          <p:cNvPr id="3" name="Notes Placeholder 2"/>
+          <p:cNvSpPr>
+            <a:spLocks noGrp="1"/>
+          </p:cNvSpPr>
+          <p:nvPr>
+            <p:ph type="body" idx="1"/>
+          </p:nvPr>
+        </p:nvSpPr>
+        <p:spPr/>
+        <p:txBody>
+          <a:bodyPr/>
+          <a:lstStyle/>
+          <a:p>
+            <a:r>
+              <a:rPr lang="en-US" dirty="0"/>
+              <a:t>Recap in 30 seconds, then the call to action: next episode we build the first agent live, inside the ERP.</a:t>
+            </a:r>
+            <a:endParaRPr lang="en-US" dirty="0"/>
+          </a:p>
+        </p:txBody>
+      </p:sp>
+      <p:sp>
+        <p:nvSpPr>
+          <p:cNvPr id="4" name="Slide Number Placeholder 3"/>
+          <p:cNvSpPr>
+            <a:spLocks noGrp="1"/>
+          </p:cNvSpPr>
+          <p:nvPr>
+            <p:ph type="sldNum" sz="quarter" idx="10"/>
+          </p:nvPr>
+        </p:nvSpPr>
+        <p:spPr/>
+        <p:txBody>
+          <a:bodyPr/>
+          <a:lstStyle/>
+          <a:p>
+            <a:fld id="{F7021451-1387-4CA6-816F-3879F97B5CBC}" type="slidenum">
+              <a:rPr lang="en-US"/>
+              <a:t>13</a:t>
             </a:fld>
             <a:endParaRPr lang="en-US"/>
           </a:p>
@@ -1393,7 +1482,7 @@
           <a:p>
             <a:r>
               <a:rPr lang="en-US" dirty="0"/>
-              <a:t>The series map. Every one of these is a loop over tools with an approval in the middle. We build them in this order: sales returns first (next episode), then MCP, then the platform concerns.</a:t>
+              <a:t>The question the sceptical architect is already asking: how is this different from code, a scheduler, a rules engine? Structurally an agent IS code — a for loop calling a function. The difference is who writes the branch conditions. In code they were written before the program ran. In an agent, each branch is computed at runtime by the model from the goal and whatever the last tool returned. That buys coverage of the long tail and costs predictability — which is why limits, approvals and evals are not optional.</a:t>
             </a:r>
             <a:endParaRPr lang="en-US" dirty="0"/>
           </a:p>
@@ -1481,7 +1570,7 @@
           <a:p>
             <a:r>
               <a:rPr lang="en-US" dirty="0"/>
-              <a:t>First breakpoint. The agent posts a credit note to the ledger — as whom? Walk the three options. The enterprise answer is the third: its own identity, scoped per company, per user, per task, least-privilege tools.</a:t>
+              <a:t>The series map. Every one of these is a loop over tools with an approval in the middle. We build them in this order: sales returns first (next episode), then MCP, then the platform concerns.</a:t>
             </a:r>
             <a:endParaRPr lang="en-US" dirty="0"/>
           </a:p>
@@ -2528,7 +2617,7 @@
                 <a:ea typeface="IBM Plex Mono" pitchFamily="34" charset="-122"/>
                 <a:cs typeface="IBM Plex Mono" pitchFamily="34" charset="-120"/>
               </a:rPr>
-              <a:t>WHAT BREAKS IN THE ENTERPRISE · 2 OF 3</a:t>
+              <a:t>WHAT BREAKS IN THE ENTERPRISE · 1 OF 3</a:t>
             </a:r>
             <a:endParaRPr lang="en-US" sz="1000" dirty="0"/>
           </a:p>
@@ -2559,7 +2648,7 @@
               <a:buNone/>
             </a:pPr>
             <a:r>
-              <a:rPr lang="en-US" sz="2800" b="1" spc="-100" kern="0" dirty="0">
+              <a:rPr lang="en-US" sz="2300" b="1" spc="-100" kern="0" dirty="0">
                 <a:solidFill>
                   <a:srgbClr val="1C1C1C"/>
                 </a:solidFill>
@@ -2567,9 +2656,9 @@
                 <a:ea typeface="Geist" pitchFamily="34" charset="-122"/>
                 <a:cs typeface="Geist" pitchFamily="34" charset="-120"/>
               </a:rPr>
-              <a:t>Tenancy: one ERP, many companies</a:t>
-            </a:r>
-            <a:endParaRPr lang="en-US" sz="2800" dirty="0"/>
+              <a:t>Identity: the agent posts to the ledger — as whom?</a:t>
+            </a:r>
+            <a:endParaRPr lang="en-US" sz="2300" dirty="0"/>
           </a:p>
         </p:txBody>
       </p:sp>
@@ -2659,113 +2748,8 @@
         </p:nvSpPr>
         <p:spPr>
           <a:xfrm>
-            <a:off x="457200" y="2423160"/>
-            <a:ext cx="1828800" cy="1188720"/>
-          </a:xfrm>
-          <a:prstGeom prst="rect">
-            <a:avLst/>
-          </a:prstGeom>
-          <a:solidFill>
-            <a:srgbClr val="FFFFFF"/>
-          </a:solidFill>
-          <a:ln w="15875">
-            <a:solidFill>
-              <a:srgbClr val="FF5700"/>
-            </a:solidFill>
-            <a:prstDash val="solid"/>
-          </a:ln>
-        </p:spPr>
-      </p:sp>
-      <p:sp>
-        <p:nvSpPr>
-          <p:cNvPr id="10" name="Text 7"/>
-          <p:cNvSpPr txBox="1"/>
-          <p:nvPr/>
-        </p:nvSpPr>
-        <p:spPr>
-          <a:xfrm>
-            <a:off x="457200" y="2423160"/>
-            <a:ext cx="1828800" cy="1188720"/>
-          </a:xfrm>
-          <a:prstGeom prst="rect">
-            <a:avLst/>
-          </a:prstGeom>
-          <a:noFill/>
-          <a:ln/>
-        </p:spPr>
-        <p:txBody>
-          <a:bodyPr wrap="square" lIns="635" tIns="635" rIns="635" bIns="635" rtlCol="0" anchor="ctr"/>
-          <a:lstStyle/>
-          <a:p>
-            <a:pPr algn="ctr" indent="0" marL="0">
-              <a:buNone/>
-            </a:pPr>
-            <a:r>
-              <a:rPr lang="en-US" sz="1300" b="1" dirty="0">
-                <a:solidFill>
-                  <a:srgbClr val="FF5700"/>
-                </a:solidFill>
-                <a:latin typeface="Geist" pitchFamily="34" charset="0"/>
-                <a:ea typeface="Geist" pitchFamily="34" charset="-122"/>
-                <a:cs typeface="Geist" pitchFamily="34" charset="-120"/>
-              </a:rPr>
-              <a:t>Agent</a:t>
-            </a:r>
-            <a:endParaRPr lang="en-US" sz="1300" dirty="0"/>
-          </a:p>
-          <a:p>
-            <a:pPr algn="ctr" indent="0" marL="0">
-              <a:buNone/>
-            </a:pPr>
-            <a:r>
-              <a:rPr lang="en-US" sz="1300" b="1" dirty="0">
-                <a:solidFill>
-                  <a:srgbClr val="FF5700"/>
-                </a:solidFill>
-                <a:latin typeface="Geist" pitchFamily="34" charset="0"/>
-                <a:ea typeface="Geist" pitchFamily="34" charset="-122"/>
-                <a:cs typeface="Geist" pitchFamily="34" charset="-120"/>
-              </a:rPr>
-              <a:t>(model + loop)</a:t>
-            </a:r>
-            <a:endParaRPr lang="en-US" sz="1300" dirty="0"/>
-          </a:p>
-        </p:txBody>
-      </p:sp>
-      <p:sp>
-        <p:nvSpPr>
-          <p:cNvPr id="11" name="Shape 8"/>
-          <p:cNvSpPr/>
-          <p:nvPr/>
-        </p:nvSpPr>
-        <p:spPr>
-          <a:xfrm>
-            <a:off x="2377440" y="2286000"/>
-            <a:ext cx="457200" cy="0"/>
-          </a:xfrm>
-          <a:prstGeom prst="line">
-            <a:avLst/>
-          </a:prstGeom>
-          <a:noFill/>
-          <a:ln w="15875">
-            <a:solidFill>
-              <a:srgbClr val="919191"/>
-            </a:solidFill>
-            <a:prstDash val="solid"/>
-            <a:tailEnd type="triangle"/>
-          </a:ln>
-        </p:spPr>
-      </p:sp>
-      <p:sp>
-        <p:nvSpPr>
-          <p:cNvPr id="12" name="Shape 9"/>
-          <p:cNvSpPr/>
-          <p:nvPr/>
-        </p:nvSpPr>
-        <p:spPr>
-          <a:xfrm>
-            <a:off x="2926080" y="1965960"/>
-            <a:ext cx="2651760" cy="685800"/>
+            <a:off x="457200" y="1828800"/>
+            <a:ext cx="2606040" cy="2103120"/>
           </a:xfrm>
           <a:prstGeom prst="rect">
             <a:avLst/>
@@ -2783,14 +2767,112 @@
       </p:sp>
       <p:sp>
         <p:nvSpPr>
+          <p:cNvPr id="10" name="Shape 7"/>
+          <p:cNvSpPr/>
+          <p:nvPr/>
+        </p:nvSpPr>
+        <p:spPr>
+          <a:xfrm>
+            <a:off x="685800" y="2057400"/>
+            <a:ext cx="329184" cy="329184"/>
+          </a:xfrm>
+          <a:prstGeom prst="rect">
+            <a:avLst/>
+          </a:prstGeom>
+          <a:solidFill>
+            <a:srgbClr val="D14343"/>
+          </a:solidFill>
+          <a:ln/>
+        </p:spPr>
+      </p:sp>
+      <p:sp>
+        <p:nvSpPr>
+          <p:cNvPr id="11" name="Text 8"/>
+          <p:cNvSpPr txBox="1"/>
+          <p:nvPr/>
+        </p:nvSpPr>
+        <p:spPr>
+          <a:xfrm>
+            <a:off x="685800" y="2057400"/>
+            <a:ext cx="329184" cy="329184"/>
+          </a:xfrm>
+          <a:prstGeom prst="rect">
+            <a:avLst/>
+          </a:prstGeom>
+          <a:noFill/>
+          <a:ln/>
+        </p:spPr>
+        <p:txBody>
+          <a:bodyPr wrap="square" lIns="0" tIns="0" rIns="0" bIns="0" rtlCol="0" anchor="ctr"/>
+          <a:lstStyle/>
+          <a:p>
+            <a:pPr algn="ctr" indent="0" marL="0">
+              <a:buNone/>
+            </a:pPr>
+            <a:r>
+              <a:rPr lang="en-US" sz="1200" b="1" dirty="0">
+                <a:solidFill>
+                  <a:srgbClr val="FFFFFF"/>
+                </a:solidFill>
+                <a:latin typeface="Geist" pitchFamily="34" charset="0"/>
+                <a:ea typeface="Geist" pitchFamily="34" charset="-122"/>
+                <a:cs typeface="Geist" pitchFamily="34" charset="-120"/>
+              </a:rPr>
+              <a:t>✕</a:t>
+            </a:r>
+            <a:endParaRPr lang="en-US" sz="1200" dirty="0"/>
+          </a:p>
+        </p:txBody>
+      </p:sp>
+      <p:sp>
+        <p:nvSpPr>
+          <p:cNvPr id="12" name="Text 9"/>
+          <p:cNvSpPr txBox="1"/>
+          <p:nvPr/>
+        </p:nvSpPr>
+        <p:spPr>
+          <a:xfrm>
+            <a:off x="685800" y="2514600"/>
+            <a:ext cx="2194560" cy="365760"/>
+          </a:xfrm>
+          <a:prstGeom prst="rect">
+            <a:avLst/>
+          </a:prstGeom>
+          <a:noFill/>
+          <a:ln/>
+        </p:spPr>
+        <p:txBody>
+          <a:bodyPr wrap="square" lIns="0" tIns="0" rIns="0" bIns="0" rtlCol="0" anchor="t"/>
+          <a:lstStyle/>
+          <a:p>
+            <a:pPr indent="0" marL="0">
+              <a:buNone/>
+            </a:pPr>
+            <a:r>
+              <a:rPr lang="en-US" sz="1400" b="1" spc="-50" kern="0" dirty="0">
+                <a:solidFill>
+                  <a:srgbClr val="1C1C1C"/>
+                </a:solidFill>
+                <a:latin typeface="Geist" pitchFamily="34" charset="0"/>
+                <a:ea typeface="Geist" pitchFamily="34" charset="-122"/>
+                <a:cs typeface="Geist" pitchFamily="34" charset="-120"/>
+              </a:rPr>
+              <a:t>Service account</a:t>
+            </a:r>
+            <a:endParaRPr lang="en-US" sz="1400" dirty="0"/>
+          </a:p>
+        </p:txBody>
+      </p:sp>
+      <p:sp>
+        <p:nvSpPr>
           <p:cNvPr id="13" name="Text 10"/>
           <p:cNvSpPr txBox="1"/>
           <p:nvPr/>
         </p:nvSpPr>
         <p:spPr>
           <a:xfrm>
-            <a:off x="3108960" y="2039112"/>
-            <a:ext cx="2286000" cy="274320"/>
+            <a:off x="685800" y="2880360"/>
+            <a:ext cx="2194560" cy="1005840"/>
           </a:xfrm>
           <a:prstGeom prst="rect">
             <a:avLst/>
@@ -2806,46 +2888,7 @@
               <a:buNone/>
             </a:pPr>
             <a:r>
-              <a:rPr lang="en-US" sz="1300" b="1" spc="-50" kern="0" dirty="0">
-                <a:solidFill>
-                  <a:srgbClr val="1C1C1C"/>
-                </a:solidFill>
-                <a:latin typeface="Geist" pitchFamily="34" charset="0"/>
-                <a:ea typeface="Geist" pitchFamily="34" charset="-122"/>
-                <a:cs typeface="Geist" pitchFamily="34" charset="-120"/>
-              </a:rPr>
-              <a:t>Memory</a:t>
-            </a:r>
-            <a:endParaRPr lang="en-US" sz="1300" dirty="0"/>
-          </a:p>
-        </p:txBody>
-      </p:sp>
-      <p:sp>
-        <p:nvSpPr>
-          <p:cNvPr id="14" name="Text 11"/>
-          <p:cNvSpPr txBox="1"/>
-          <p:nvPr/>
-        </p:nvSpPr>
-        <p:spPr>
-          <a:xfrm>
-            <a:off x="3108960" y="2331720"/>
-            <a:ext cx="2377440" cy="320040"/>
-          </a:xfrm>
-          <a:prstGeom prst="rect">
-            <a:avLst/>
-          </a:prstGeom>
-          <a:noFill/>
-          <a:ln/>
-        </p:spPr>
-        <p:txBody>
-          <a:bodyPr wrap="square" lIns="0" tIns="0" rIns="0" bIns="0" rtlCol="0" anchor="t"/>
-          <a:lstStyle/>
-          <a:p>
-            <a:pPr indent="0" marL="0">
-              <a:buNone/>
-            </a:pPr>
-            <a:r>
-              <a:rPr lang="en-US" sz="950" dirty="0">
+              <a:rPr lang="en-US" sz="1100" dirty="0">
                 <a:solidFill>
                   <a:srgbClr val="6B7280"/>
                 </a:solidFill>
@@ -2853,22 +2896,22 @@
                 <a:ea typeface="Geist" pitchFamily="34" charset="-122"/>
                 <a:cs typeface="Geist" pitchFamily="34" charset="-120"/>
               </a:rPr>
-              <a:t>per-company store, never shared context</a:t>
-            </a:r>
-            <a:endParaRPr lang="en-US" sz="950" dirty="0"/>
-          </a:p>
-        </p:txBody>
-      </p:sp>
-      <p:sp>
-        <p:nvSpPr>
-          <p:cNvPr id="15" name="Shape 12"/>
+              <a:t>Simple. Over-privileged. One prompt injection away from every company's books.</a:t>
+            </a:r>
+            <a:endParaRPr lang="en-US" sz="1100" dirty="0"/>
+          </a:p>
+        </p:txBody>
+      </p:sp>
+      <p:sp>
+        <p:nvSpPr>
+          <p:cNvPr id="14" name="Shape 11"/>
           <p:cNvSpPr/>
           <p:nvPr/>
         </p:nvSpPr>
         <p:spPr>
           <a:xfrm>
-            <a:off x="5852160" y="2075688"/>
-            <a:ext cx="822960" cy="457200"/>
+            <a:off x="3246120" y="1828800"/>
+            <a:ext cx="2606040" cy="2103120"/>
           </a:xfrm>
           <a:prstGeom prst="rect">
             <a:avLst/>
@@ -2886,59 +2929,157 @@
       </p:sp>
       <p:sp>
         <p:nvSpPr>
+          <p:cNvPr id="15" name="Shape 12"/>
+          <p:cNvSpPr/>
+          <p:nvPr/>
+        </p:nvSpPr>
+        <p:spPr>
+          <a:xfrm>
+            <a:off x="3474720" y="2057400"/>
+            <a:ext cx="329184" cy="329184"/>
+          </a:xfrm>
+          <a:prstGeom prst="rect">
+            <a:avLst/>
+          </a:prstGeom>
+          <a:solidFill>
+            <a:srgbClr val="FF5700"/>
+          </a:solidFill>
+          <a:ln/>
+        </p:spPr>
+      </p:sp>
+      <p:sp>
+        <p:nvSpPr>
           <p:cNvPr id="16" name="Text 13"/>
           <p:cNvSpPr txBox="1"/>
           <p:nvPr/>
         </p:nvSpPr>
         <p:spPr>
           <a:xfrm>
-            <a:off x="5852160" y="2075688"/>
-            <a:ext cx="822960" cy="457200"/>
-          </a:xfrm>
-          <a:prstGeom prst="rect">
-            <a:avLst/>
-          </a:prstGeom>
-          <a:noFill/>
-          <a:ln/>
-        </p:spPr>
-        <p:txBody>
-          <a:bodyPr wrap="square" lIns="635" tIns="635" rIns="635" bIns="635" rtlCol="0" anchor="ctr"/>
+            <a:off x="3474720" y="2057400"/>
+            <a:ext cx="329184" cy="329184"/>
+          </a:xfrm>
+          <a:prstGeom prst="rect">
+            <a:avLst/>
+          </a:prstGeom>
+          <a:noFill/>
+          <a:ln/>
+        </p:spPr>
+        <p:txBody>
+          <a:bodyPr wrap="square" lIns="0" tIns="0" rIns="0" bIns="0" rtlCol="0" anchor="ctr"/>
           <a:lstStyle/>
           <a:p>
             <a:pPr algn="ctr" indent="0" marL="0">
               <a:buNone/>
             </a:pPr>
             <a:r>
-              <a:rPr lang="en-US" sz="900" b="1" dirty="0">
-                <a:solidFill>
-                  <a:srgbClr val="0E7C7B"/>
-                </a:solidFill>
-                <a:latin typeface="Geist" pitchFamily="34" charset="0"/>
-                <a:ea typeface="Geist" pitchFamily="34" charset="-122"/>
-                <a:cs typeface="Geist" pitchFamily="34" charset="-120"/>
-              </a:rPr>
-              <a:t>ACME</a:t>
-            </a:r>
-            <a:endParaRPr lang="en-US" sz="900" dirty="0"/>
-          </a:p>
-        </p:txBody>
-      </p:sp>
-      <p:sp>
-        <p:nvSpPr>
-          <p:cNvPr id="17" name="Shape 14"/>
+              <a:rPr lang="en-US" sz="1200" b="1" dirty="0">
+                <a:solidFill>
+                  <a:srgbClr val="FFFFFF"/>
+                </a:solidFill>
+                <a:latin typeface="Geist" pitchFamily="34" charset="0"/>
+                <a:ea typeface="Geist" pitchFamily="34" charset="-122"/>
+                <a:cs typeface="Geist" pitchFamily="34" charset="-120"/>
+              </a:rPr>
+              <a:t>~</a:t>
+            </a:r>
+            <a:endParaRPr lang="en-US" sz="1200" dirty="0"/>
+          </a:p>
+        </p:txBody>
+      </p:sp>
+      <p:sp>
+        <p:nvSpPr>
+          <p:cNvPr id="17" name="Text 14"/>
+          <p:cNvSpPr txBox="1"/>
+          <p:nvPr/>
+        </p:nvSpPr>
+        <p:spPr>
+          <a:xfrm>
+            <a:off x="3474720" y="2514600"/>
+            <a:ext cx="2194560" cy="365760"/>
+          </a:xfrm>
+          <a:prstGeom prst="rect">
+            <a:avLst/>
+          </a:prstGeom>
+          <a:noFill/>
+          <a:ln/>
+        </p:spPr>
+        <p:txBody>
+          <a:bodyPr wrap="square" lIns="0" tIns="0" rIns="0" bIns="0" rtlCol="0" anchor="t"/>
+          <a:lstStyle/>
+          <a:p>
+            <a:pPr indent="0" marL="0">
+              <a:buNone/>
+            </a:pPr>
+            <a:r>
+              <a:rPr lang="en-US" sz="1400" b="1" spc="-50" kern="0" dirty="0">
+                <a:solidFill>
+                  <a:srgbClr val="1C1C1C"/>
+                </a:solidFill>
+                <a:latin typeface="Geist" pitchFamily="34" charset="0"/>
+                <a:ea typeface="Geist" pitchFamily="34" charset="-122"/>
+                <a:cs typeface="Geist" pitchFamily="34" charset="-120"/>
+              </a:rPr>
+              <a:t>The user's token</a:t>
+            </a:r>
+            <a:endParaRPr lang="en-US" sz="1400" dirty="0"/>
+          </a:p>
+        </p:txBody>
+      </p:sp>
+      <p:sp>
+        <p:nvSpPr>
+          <p:cNvPr id="18" name="Text 15"/>
+          <p:cNvSpPr txBox="1"/>
+          <p:nvPr/>
+        </p:nvSpPr>
+        <p:spPr>
+          <a:xfrm>
+            <a:off x="3474720" y="2880360"/>
+            <a:ext cx="2194560" cy="1005840"/>
+          </a:xfrm>
+          <a:prstGeom prst="rect">
+            <a:avLst/>
+          </a:prstGeom>
+          <a:noFill/>
+          <a:ln/>
+        </p:spPr>
+        <p:txBody>
+          <a:bodyPr wrap="square" lIns="0" tIns="0" rIns="0" bIns="0" rtlCol="0" anchor="t"/>
+          <a:lstStyle/>
+          <a:p>
+            <a:pPr indent="0" marL="0">
+              <a:buNone/>
+            </a:pPr>
+            <a:r>
+              <a:rPr lang="en-US" sz="1100" dirty="0">
+                <a:solidFill>
+                  <a:srgbClr val="6B7280"/>
+                </a:solidFill>
+                <a:latin typeface="Geist" pitchFamily="34" charset="0"/>
+                <a:ea typeface="Geist" pitchFamily="34" charset="-122"/>
+                <a:cs typeface="Geist" pitchFamily="34" charset="-120"/>
+              </a:rPr>
+              <a:t>Scoped right — but how do you delegate it safely to a process that runs for minutes?</a:t>
+            </a:r>
+            <a:endParaRPr lang="en-US" sz="1100" dirty="0"/>
+          </a:p>
+        </p:txBody>
+      </p:sp>
+      <p:sp>
+        <p:nvSpPr>
+          <p:cNvPr id="19" name="Shape 16"/>
           <p:cNvSpPr/>
           <p:nvPr/>
         </p:nvSpPr>
         <p:spPr>
           <a:xfrm>
-            <a:off x="6812280" y="2075688"/>
-            <a:ext cx="822960" cy="457200"/>
+            <a:off x="6035040" y="1828800"/>
+            <a:ext cx="2606040" cy="2103120"/>
           </a:xfrm>
           <a:prstGeom prst="rect">
             <a:avLst/>
           </a:prstGeom>
           <a:solidFill>
-            <a:srgbClr val="FFFFFF"/>
+            <a:srgbClr val="F7F7F5"/>
           </a:solidFill>
           <a:ln w="9525">
             <a:solidFill>
@@ -2950,155 +3091,101 @@
       </p:sp>
       <p:sp>
         <p:nvSpPr>
-          <p:cNvPr id="18" name="Text 15"/>
-          <p:cNvSpPr txBox="1"/>
-          <p:nvPr/>
-        </p:nvSpPr>
-        <p:spPr>
-          <a:xfrm>
-            <a:off x="6812280" y="2075688"/>
-            <a:ext cx="822960" cy="457200"/>
-          </a:xfrm>
-          <a:prstGeom prst="rect">
-            <a:avLst/>
-          </a:prstGeom>
-          <a:noFill/>
-          <a:ln/>
-        </p:spPr>
-        <p:txBody>
-          <a:bodyPr wrap="square" lIns="635" tIns="635" rIns="635" bIns="635" rtlCol="0" anchor="ctr"/>
+          <p:cNvPr id="20" name="Shape 17"/>
+          <p:cNvSpPr/>
+          <p:nvPr/>
+        </p:nvSpPr>
+        <p:spPr>
+          <a:xfrm>
+            <a:off x="6263640" y="2057400"/>
+            <a:ext cx="329184" cy="329184"/>
+          </a:xfrm>
+          <a:prstGeom prst="rect">
+            <a:avLst/>
+          </a:prstGeom>
+          <a:solidFill>
+            <a:srgbClr val="0E7C7B"/>
+          </a:solidFill>
+          <a:ln/>
+        </p:spPr>
+      </p:sp>
+      <p:sp>
+        <p:nvSpPr>
+          <p:cNvPr id="21" name="Text 18"/>
+          <p:cNvSpPr txBox="1"/>
+          <p:nvPr/>
+        </p:nvSpPr>
+        <p:spPr>
+          <a:xfrm>
+            <a:off x="6263640" y="2057400"/>
+            <a:ext cx="329184" cy="329184"/>
+          </a:xfrm>
+          <a:prstGeom prst="rect">
+            <a:avLst/>
+          </a:prstGeom>
+          <a:noFill/>
+          <a:ln/>
+        </p:spPr>
+        <p:txBody>
+          <a:bodyPr wrap="square" lIns="0" tIns="0" rIns="0" bIns="0" rtlCol="0" anchor="ctr"/>
           <a:lstStyle/>
           <a:p>
             <a:pPr algn="ctr" indent="0" marL="0">
               <a:buNone/>
             </a:pPr>
             <a:r>
-              <a:rPr lang="en-US" sz="900" b="1" dirty="0">
-                <a:solidFill>
-                  <a:srgbClr val="0E7C7B"/>
-                </a:solidFill>
-                <a:latin typeface="Geist" pitchFamily="34" charset="0"/>
-                <a:ea typeface="Geist" pitchFamily="34" charset="-122"/>
-                <a:cs typeface="Geist" pitchFamily="34" charset="-120"/>
-              </a:rPr>
-              <a:t>NORTH</a:t>
-            </a:r>
-            <a:endParaRPr lang="en-US" sz="900" dirty="0"/>
-          </a:p>
-        </p:txBody>
-      </p:sp>
-      <p:sp>
-        <p:nvSpPr>
-          <p:cNvPr id="19" name="Shape 16"/>
-          <p:cNvSpPr/>
-          <p:nvPr/>
-        </p:nvSpPr>
-        <p:spPr>
-          <a:xfrm>
-            <a:off x="7772400" y="2075688"/>
-            <a:ext cx="822960" cy="457200"/>
-          </a:xfrm>
-          <a:prstGeom prst="rect">
-            <a:avLst/>
-          </a:prstGeom>
-          <a:solidFill>
-            <a:srgbClr val="FFFFFF"/>
-          </a:solidFill>
-          <a:ln w="9525">
-            <a:solidFill>
-              <a:srgbClr val="E5E5E5"/>
-            </a:solidFill>
-            <a:prstDash val="solid"/>
-          </a:ln>
-        </p:spPr>
-      </p:sp>
-      <p:sp>
-        <p:nvSpPr>
-          <p:cNvPr id="20" name="Text 17"/>
-          <p:cNvSpPr txBox="1"/>
-          <p:nvPr/>
-        </p:nvSpPr>
-        <p:spPr>
-          <a:xfrm>
-            <a:off x="7772400" y="2075688"/>
-            <a:ext cx="822960" cy="457200"/>
-          </a:xfrm>
-          <a:prstGeom prst="rect">
-            <a:avLst/>
-          </a:prstGeom>
-          <a:noFill/>
-          <a:ln/>
-        </p:spPr>
-        <p:txBody>
-          <a:bodyPr wrap="square" lIns="635" tIns="635" rIns="635" bIns="635" rtlCol="0" anchor="ctr"/>
-          <a:lstStyle/>
-          <a:p>
-            <a:pPr algn="ctr" indent="0" marL="0">
-              <a:buNone/>
-            </a:pPr>
-            <a:r>
-              <a:rPr lang="en-US" sz="900" b="1" dirty="0">
-                <a:solidFill>
-                  <a:srgbClr val="0E7C7B"/>
-                </a:solidFill>
-                <a:latin typeface="Geist" pitchFamily="34" charset="0"/>
-                <a:ea typeface="Geist" pitchFamily="34" charset="-122"/>
-                <a:cs typeface="Geist" pitchFamily="34" charset="-120"/>
-              </a:rPr>
-              <a:t>C3</a:t>
-            </a:r>
-            <a:endParaRPr lang="en-US" sz="900" dirty="0"/>
-          </a:p>
-        </p:txBody>
-      </p:sp>
-      <p:sp>
-        <p:nvSpPr>
-          <p:cNvPr id="21" name="Shape 18"/>
-          <p:cNvSpPr/>
-          <p:nvPr/>
-        </p:nvSpPr>
-        <p:spPr>
-          <a:xfrm>
-            <a:off x="2377440" y="3108960"/>
-            <a:ext cx="457200" cy="0"/>
-          </a:xfrm>
-          <a:prstGeom prst="line">
-            <a:avLst/>
-          </a:prstGeom>
-          <a:noFill/>
-          <a:ln w="15875">
-            <a:solidFill>
-              <a:srgbClr val="919191"/>
-            </a:solidFill>
-            <a:prstDash val="solid"/>
-            <a:tailEnd type="triangle"/>
-          </a:ln>
-        </p:spPr>
-      </p:sp>
-      <p:sp>
-        <p:nvSpPr>
-          <p:cNvPr id="22" name="Shape 19"/>
-          <p:cNvSpPr/>
-          <p:nvPr/>
-        </p:nvSpPr>
-        <p:spPr>
-          <a:xfrm>
-            <a:off x="2926080" y="2788920"/>
-            <a:ext cx="2651760" cy="685800"/>
-          </a:xfrm>
-          <a:prstGeom prst="rect">
-            <a:avLst/>
-          </a:prstGeom>
-          <a:solidFill>
-            <a:srgbClr val="FFFFFF"/>
-          </a:solidFill>
-          <a:ln w="9525">
-            <a:solidFill>
-              <a:srgbClr val="E5E5E5"/>
-            </a:solidFill>
-            <a:prstDash val="solid"/>
-          </a:ln>
-        </p:spPr>
+              <a:rPr lang="en-US" sz="1200" b="1" dirty="0">
+                <a:solidFill>
+                  <a:srgbClr val="FFFFFF"/>
+                </a:solidFill>
+                <a:latin typeface="Geist" pitchFamily="34" charset="0"/>
+                <a:ea typeface="Geist" pitchFamily="34" charset="-122"/>
+                <a:cs typeface="Geist" pitchFamily="34" charset="-120"/>
+              </a:rPr>
+              <a:t>✓</a:t>
+            </a:r>
+            <a:endParaRPr lang="en-US" sz="1200" dirty="0"/>
+          </a:p>
+        </p:txBody>
+      </p:sp>
+      <p:sp>
+        <p:nvSpPr>
+          <p:cNvPr id="22" name="Text 19"/>
+          <p:cNvSpPr txBox="1"/>
+          <p:nvPr/>
+        </p:nvSpPr>
+        <p:spPr>
+          <a:xfrm>
+            <a:off x="6263640" y="2514600"/>
+            <a:ext cx="2194560" cy="365760"/>
+          </a:xfrm>
+          <a:prstGeom prst="rect">
+            <a:avLst/>
+          </a:prstGeom>
+          <a:noFill/>
+          <a:ln/>
+        </p:spPr>
+        <p:txBody>
+          <a:bodyPr wrap="square" lIns="0" tIns="0" rIns="0" bIns="0" rtlCol="0" anchor="t"/>
+          <a:lstStyle/>
+          <a:p>
+            <a:pPr indent="0" marL="0">
+              <a:buNone/>
+            </a:pPr>
+            <a:r>
+              <a:rPr lang="en-US" sz="1400" b="1" spc="-50" kern="0" dirty="0">
+                <a:solidFill>
+                  <a:srgbClr val="1C1C1C"/>
+                </a:solidFill>
+                <a:latin typeface="Geist" pitchFamily="34" charset="0"/>
+                <a:ea typeface="Geist" pitchFamily="34" charset="-122"/>
+                <a:cs typeface="Geist" pitchFamily="34" charset="-120"/>
+              </a:rPr>
+              <a:t>Agent identity</a:t>
+            </a:r>
+            <a:endParaRPr lang="en-US" sz="1400" dirty="0"/>
+          </a:p>
+        </p:txBody>
       </p:sp>
       <p:sp>
         <p:nvSpPr>
@@ -3108,8 +3195,8 @@
         </p:nvSpPr>
         <p:spPr>
           <a:xfrm>
-            <a:off x="3108960" y="2862072"/>
-            <a:ext cx="2286000" cy="274320"/>
+            <a:off x="6263640" y="2880360"/>
+            <a:ext cx="2194560" cy="1005840"/>
           </a:xfrm>
           <a:prstGeom prst="rect">
             <a:avLst/>
@@ -3125,17 +3212,17 @@
               <a:buNone/>
             </a:pPr>
             <a:r>
-              <a:rPr lang="en-US" sz="1300" b="1" spc="-50" kern="0" dirty="0">
-                <a:solidFill>
-                  <a:srgbClr val="1C1C1C"/>
-                </a:solidFill>
-                <a:latin typeface="Geist" pitchFamily="34" charset="0"/>
-                <a:ea typeface="Geist" pitchFamily="34" charset="-122"/>
-                <a:cs typeface="Geist" pitchFamily="34" charset="-120"/>
-              </a:rPr>
-              <a:t>Tools</a:t>
-            </a:r>
-            <a:endParaRPr lang="en-US" sz="1300" dirty="0"/>
+              <a:rPr lang="en-US" sz="1100" dirty="0">
+                <a:solidFill>
+                  <a:srgbClr val="6B7280"/>
+                </a:solidFill>
+                <a:latin typeface="Geist" pitchFamily="34" charset="0"/>
+                <a:ea typeface="Geist" pitchFamily="34" charset="-122"/>
+                <a:cs typeface="Geist" pitchFamily="34" charset="-120"/>
+              </a:rPr>
+              <a:t>Its own principal, scoped per company, per user, per task. Least-privilege tools. Auditable.</a:t>
+            </a:r>
+            <a:endParaRPr lang="en-US" sz="1100" dirty="0"/>
           </a:p>
         </p:txBody>
       </p:sp>
@@ -3147,8 +3234,8 @@
         </p:nvSpPr>
         <p:spPr>
           <a:xfrm>
-            <a:off x="3108960" y="3154680"/>
-            <a:ext cx="2377440" cy="320040"/>
+            <a:off x="457200" y="4160520"/>
+            <a:ext cx="8229600" cy="274320"/>
           </a:xfrm>
           <a:prstGeom prst="rect">
             <a:avLst/>
@@ -3164,595 +3251,6 @@
               <a:buNone/>
             </a:pPr>
             <a:r>
-              <a:rPr lang="en-US" sz="950" dirty="0">
-                <a:solidFill>
-                  <a:srgbClr val="6B7280"/>
-                </a:solidFill>
-                <a:latin typeface="Geist" pitchFamily="34" charset="0"/>
-                <a:ea typeface="Geist" pitchFamily="34" charset="-122"/>
-                <a:cs typeface="Geist" pitchFamily="34" charset="-120"/>
-              </a:rPr>
-              <a:t>company_id injected server-side on every call</a:t>
-            </a:r>
-            <a:endParaRPr lang="en-US" sz="950" dirty="0"/>
-          </a:p>
-        </p:txBody>
-      </p:sp>
-      <p:sp>
-        <p:nvSpPr>
-          <p:cNvPr id="25" name="Shape 22"/>
-          <p:cNvSpPr/>
-          <p:nvPr/>
-        </p:nvSpPr>
-        <p:spPr>
-          <a:xfrm>
-            <a:off x="5852160" y="2898648"/>
-            <a:ext cx="822960" cy="457200"/>
-          </a:xfrm>
-          <a:prstGeom prst="rect">
-            <a:avLst/>
-          </a:prstGeom>
-          <a:solidFill>
-            <a:srgbClr val="FFFFFF"/>
-          </a:solidFill>
-          <a:ln w="9525">
-            <a:solidFill>
-              <a:srgbClr val="E5E5E5"/>
-            </a:solidFill>
-            <a:prstDash val="solid"/>
-          </a:ln>
-        </p:spPr>
-      </p:sp>
-      <p:sp>
-        <p:nvSpPr>
-          <p:cNvPr id="26" name="Text 23"/>
-          <p:cNvSpPr txBox="1"/>
-          <p:nvPr/>
-        </p:nvSpPr>
-        <p:spPr>
-          <a:xfrm>
-            <a:off x="5852160" y="2898648"/>
-            <a:ext cx="822960" cy="457200"/>
-          </a:xfrm>
-          <a:prstGeom prst="rect">
-            <a:avLst/>
-          </a:prstGeom>
-          <a:noFill/>
-          <a:ln/>
-        </p:spPr>
-        <p:txBody>
-          <a:bodyPr wrap="square" lIns="635" tIns="635" rIns="635" bIns="635" rtlCol="0" anchor="ctr"/>
-          <a:lstStyle/>
-          <a:p>
-            <a:pPr algn="ctr" indent="0" marL="0">
-              <a:buNone/>
-            </a:pPr>
-            <a:r>
-              <a:rPr lang="en-US" sz="900" b="1" dirty="0">
-                <a:solidFill>
-                  <a:srgbClr val="0E7C7B"/>
-                </a:solidFill>
-                <a:latin typeface="Geist" pitchFamily="34" charset="0"/>
-                <a:ea typeface="Geist" pitchFamily="34" charset="-122"/>
-                <a:cs typeface="Geist" pitchFamily="34" charset="-120"/>
-              </a:rPr>
-              <a:t>ACME</a:t>
-            </a:r>
-            <a:endParaRPr lang="en-US" sz="900" dirty="0"/>
-          </a:p>
-        </p:txBody>
-      </p:sp>
-      <p:sp>
-        <p:nvSpPr>
-          <p:cNvPr id="27" name="Shape 24"/>
-          <p:cNvSpPr/>
-          <p:nvPr/>
-        </p:nvSpPr>
-        <p:spPr>
-          <a:xfrm>
-            <a:off x="6812280" y="2898648"/>
-            <a:ext cx="822960" cy="457200"/>
-          </a:xfrm>
-          <a:prstGeom prst="rect">
-            <a:avLst/>
-          </a:prstGeom>
-          <a:solidFill>
-            <a:srgbClr val="FFFFFF"/>
-          </a:solidFill>
-          <a:ln w="9525">
-            <a:solidFill>
-              <a:srgbClr val="E5E5E5"/>
-            </a:solidFill>
-            <a:prstDash val="solid"/>
-          </a:ln>
-        </p:spPr>
-      </p:sp>
-      <p:sp>
-        <p:nvSpPr>
-          <p:cNvPr id="28" name="Text 25"/>
-          <p:cNvSpPr txBox="1"/>
-          <p:nvPr/>
-        </p:nvSpPr>
-        <p:spPr>
-          <a:xfrm>
-            <a:off x="6812280" y="2898648"/>
-            <a:ext cx="822960" cy="457200"/>
-          </a:xfrm>
-          <a:prstGeom prst="rect">
-            <a:avLst/>
-          </a:prstGeom>
-          <a:noFill/>
-          <a:ln/>
-        </p:spPr>
-        <p:txBody>
-          <a:bodyPr wrap="square" lIns="635" tIns="635" rIns="635" bIns="635" rtlCol="0" anchor="ctr"/>
-          <a:lstStyle/>
-          <a:p>
-            <a:pPr algn="ctr" indent="0" marL="0">
-              <a:buNone/>
-            </a:pPr>
-            <a:r>
-              <a:rPr lang="en-US" sz="900" b="1" dirty="0">
-                <a:solidFill>
-                  <a:srgbClr val="0E7C7B"/>
-                </a:solidFill>
-                <a:latin typeface="Geist" pitchFamily="34" charset="0"/>
-                <a:ea typeface="Geist" pitchFamily="34" charset="-122"/>
-                <a:cs typeface="Geist" pitchFamily="34" charset="-120"/>
-              </a:rPr>
-              <a:t>NORTH</a:t>
-            </a:r>
-            <a:endParaRPr lang="en-US" sz="900" dirty="0"/>
-          </a:p>
-        </p:txBody>
-      </p:sp>
-      <p:sp>
-        <p:nvSpPr>
-          <p:cNvPr id="29" name="Shape 26"/>
-          <p:cNvSpPr/>
-          <p:nvPr/>
-        </p:nvSpPr>
-        <p:spPr>
-          <a:xfrm>
-            <a:off x="7772400" y="2898648"/>
-            <a:ext cx="822960" cy="457200"/>
-          </a:xfrm>
-          <a:prstGeom prst="rect">
-            <a:avLst/>
-          </a:prstGeom>
-          <a:solidFill>
-            <a:srgbClr val="FFFFFF"/>
-          </a:solidFill>
-          <a:ln w="9525">
-            <a:solidFill>
-              <a:srgbClr val="E5E5E5"/>
-            </a:solidFill>
-            <a:prstDash val="solid"/>
-          </a:ln>
-        </p:spPr>
-      </p:sp>
-      <p:sp>
-        <p:nvSpPr>
-          <p:cNvPr id="30" name="Text 27"/>
-          <p:cNvSpPr txBox="1"/>
-          <p:nvPr/>
-        </p:nvSpPr>
-        <p:spPr>
-          <a:xfrm>
-            <a:off x="7772400" y="2898648"/>
-            <a:ext cx="822960" cy="457200"/>
-          </a:xfrm>
-          <a:prstGeom prst="rect">
-            <a:avLst/>
-          </a:prstGeom>
-          <a:noFill/>
-          <a:ln/>
-        </p:spPr>
-        <p:txBody>
-          <a:bodyPr wrap="square" lIns="635" tIns="635" rIns="635" bIns="635" rtlCol="0" anchor="ctr"/>
-          <a:lstStyle/>
-          <a:p>
-            <a:pPr algn="ctr" indent="0" marL="0">
-              <a:buNone/>
-            </a:pPr>
-            <a:r>
-              <a:rPr lang="en-US" sz="900" b="1" dirty="0">
-                <a:solidFill>
-                  <a:srgbClr val="0E7C7B"/>
-                </a:solidFill>
-                <a:latin typeface="Geist" pitchFamily="34" charset="0"/>
-                <a:ea typeface="Geist" pitchFamily="34" charset="-122"/>
-                <a:cs typeface="Geist" pitchFamily="34" charset="-120"/>
-              </a:rPr>
-              <a:t>C3</a:t>
-            </a:r>
-            <a:endParaRPr lang="en-US" sz="900" dirty="0"/>
-          </a:p>
-        </p:txBody>
-      </p:sp>
-      <p:sp>
-        <p:nvSpPr>
-          <p:cNvPr id="31" name="Shape 28"/>
-          <p:cNvSpPr/>
-          <p:nvPr/>
-        </p:nvSpPr>
-        <p:spPr>
-          <a:xfrm>
-            <a:off x="2377440" y="3931920"/>
-            <a:ext cx="457200" cy="0"/>
-          </a:xfrm>
-          <a:prstGeom prst="line">
-            <a:avLst/>
-          </a:prstGeom>
-          <a:noFill/>
-          <a:ln w="15875">
-            <a:solidFill>
-              <a:srgbClr val="919191"/>
-            </a:solidFill>
-            <a:prstDash val="solid"/>
-            <a:tailEnd type="triangle"/>
-          </a:ln>
-        </p:spPr>
-      </p:sp>
-      <p:sp>
-        <p:nvSpPr>
-          <p:cNvPr id="32" name="Shape 29"/>
-          <p:cNvSpPr/>
-          <p:nvPr/>
-        </p:nvSpPr>
-        <p:spPr>
-          <a:xfrm>
-            <a:off x="2926080" y="3611880"/>
-            <a:ext cx="2651760" cy="685800"/>
-          </a:xfrm>
-          <a:prstGeom prst="rect">
-            <a:avLst/>
-          </a:prstGeom>
-          <a:solidFill>
-            <a:srgbClr val="FFFFFF"/>
-          </a:solidFill>
-          <a:ln w="9525">
-            <a:solidFill>
-              <a:srgbClr val="E5E5E5"/>
-            </a:solidFill>
-            <a:prstDash val="solid"/>
-          </a:ln>
-        </p:spPr>
-      </p:sp>
-      <p:sp>
-        <p:nvSpPr>
-          <p:cNvPr id="33" name="Text 30"/>
-          <p:cNvSpPr txBox="1"/>
-          <p:nvPr/>
-        </p:nvSpPr>
-        <p:spPr>
-          <a:xfrm>
-            <a:off x="3108960" y="3685032"/>
-            <a:ext cx="2286000" cy="274320"/>
-          </a:xfrm>
-          <a:prstGeom prst="rect">
-            <a:avLst/>
-          </a:prstGeom>
-          <a:noFill/>
-          <a:ln/>
-        </p:spPr>
-        <p:txBody>
-          <a:bodyPr wrap="square" lIns="0" tIns="0" rIns="0" bIns="0" rtlCol="0" anchor="t"/>
-          <a:lstStyle/>
-          <a:p>
-            <a:pPr indent="0" marL="0">
-              <a:buNone/>
-            </a:pPr>
-            <a:r>
-              <a:rPr lang="en-US" sz="1300" b="1" spc="-50" kern="0" dirty="0">
-                <a:solidFill>
-                  <a:srgbClr val="1C1C1C"/>
-                </a:solidFill>
-                <a:latin typeface="Geist" pitchFamily="34" charset="0"/>
-                <a:ea typeface="Geist" pitchFamily="34" charset="-122"/>
-                <a:cs typeface="Geist" pitchFamily="34" charset="-120"/>
-              </a:rPr>
-              <a:t>Retrieval</a:t>
-            </a:r>
-            <a:endParaRPr lang="en-US" sz="1300" dirty="0"/>
-          </a:p>
-        </p:txBody>
-      </p:sp>
-      <p:sp>
-        <p:nvSpPr>
-          <p:cNvPr id="34" name="Text 31"/>
-          <p:cNvSpPr txBox="1"/>
-          <p:nvPr/>
-        </p:nvSpPr>
-        <p:spPr>
-          <a:xfrm>
-            <a:off x="3108960" y="3977640"/>
-            <a:ext cx="2377440" cy="320040"/>
-          </a:xfrm>
-          <a:prstGeom prst="rect">
-            <a:avLst/>
-          </a:prstGeom>
-          <a:noFill/>
-          <a:ln/>
-        </p:spPr>
-        <p:txBody>
-          <a:bodyPr wrap="square" lIns="0" tIns="0" rIns="0" bIns="0" rtlCol="0" anchor="t"/>
-          <a:lstStyle/>
-          <a:p>
-            <a:pPr indent="0" marL="0">
-              <a:buNone/>
-            </a:pPr>
-            <a:r>
-              <a:rPr lang="en-US" sz="950" dirty="0">
-                <a:solidFill>
-                  <a:srgbClr val="6B7280"/>
-                </a:solidFill>
-                <a:latin typeface="Geist" pitchFamily="34" charset="0"/>
-                <a:ea typeface="Geist" pitchFamily="34" charset="-122"/>
-                <a:cs typeface="Geist" pitchFamily="34" charset="-120"/>
-              </a:rPr>
-              <a:t>index partitioned, filtered before ranking</a:t>
-            </a:r>
-            <a:endParaRPr lang="en-US" sz="950" dirty="0"/>
-          </a:p>
-        </p:txBody>
-      </p:sp>
-      <p:sp>
-        <p:nvSpPr>
-          <p:cNvPr id="35" name="Shape 32"/>
-          <p:cNvSpPr/>
-          <p:nvPr/>
-        </p:nvSpPr>
-        <p:spPr>
-          <a:xfrm>
-            <a:off x="5852160" y="3721608"/>
-            <a:ext cx="822960" cy="457200"/>
-          </a:xfrm>
-          <a:prstGeom prst="rect">
-            <a:avLst/>
-          </a:prstGeom>
-          <a:solidFill>
-            <a:srgbClr val="FFFFFF"/>
-          </a:solidFill>
-          <a:ln w="9525">
-            <a:solidFill>
-              <a:srgbClr val="E5E5E5"/>
-            </a:solidFill>
-            <a:prstDash val="solid"/>
-          </a:ln>
-        </p:spPr>
-      </p:sp>
-      <p:sp>
-        <p:nvSpPr>
-          <p:cNvPr id="36" name="Text 33"/>
-          <p:cNvSpPr txBox="1"/>
-          <p:nvPr/>
-        </p:nvSpPr>
-        <p:spPr>
-          <a:xfrm>
-            <a:off x="5852160" y="3721608"/>
-            <a:ext cx="822960" cy="457200"/>
-          </a:xfrm>
-          <a:prstGeom prst="rect">
-            <a:avLst/>
-          </a:prstGeom>
-          <a:noFill/>
-          <a:ln/>
-        </p:spPr>
-        <p:txBody>
-          <a:bodyPr wrap="square" lIns="635" tIns="635" rIns="635" bIns="635" rtlCol="0" anchor="ctr"/>
-          <a:lstStyle/>
-          <a:p>
-            <a:pPr algn="ctr" indent="0" marL="0">
-              <a:buNone/>
-            </a:pPr>
-            <a:r>
-              <a:rPr lang="en-US" sz="900" b="1" dirty="0">
-                <a:solidFill>
-                  <a:srgbClr val="0E7C7B"/>
-                </a:solidFill>
-                <a:latin typeface="Geist" pitchFamily="34" charset="0"/>
-                <a:ea typeface="Geist" pitchFamily="34" charset="-122"/>
-                <a:cs typeface="Geist" pitchFamily="34" charset="-120"/>
-              </a:rPr>
-              <a:t>ACME</a:t>
-            </a:r>
-            <a:endParaRPr lang="en-US" sz="900" dirty="0"/>
-          </a:p>
-        </p:txBody>
-      </p:sp>
-      <p:sp>
-        <p:nvSpPr>
-          <p:cNvPr id="37" name="Shape 34"/>
-          <p:cNvSpPr/>
-          <p:nvPr/>
-        </p:nvSpPr>
-        <p:spPr>
-          <a:xfrm>
-            <a:off x="6812280" y="3721608"/>
-            <a:ext cx="822960" cy="457200"/>
-          </a:xfrm>
-          <a:prstGeom prst="rect">
-            <a:avLst/>
-          </a:prstGeom>
-          <a:solidFill>
-            <a:srgbClr val="FFFFFF"/>
-          </a:solidFill>
-          <a:ln w="9525">
-            <a:solidFill>
-              <a:srgbClr val="E5E5E5"/>
-            </a:solidFill>
-            <a:prstDash val="solid"/>
-          </a:ln>
-        </p:spPr>
-      </p:sp>
-      <p:sp>
-        <p:nvSpPr>
-          <p:cNvPr id="38" name="Text 35"/>
-          <p:cNvSpPr txBox="1"/>
-          <p:nvPr/>
-        </p:nvSpPr>
-        <p:spPr>
-          <a:xfrm>
-            <a:off x="6812280" y="3721608"/>
-            <a:ext cx="822960" cy="457200"/>
-          </a:xfrm>
-          <a:prstGeom prst="rect">
-            <a:avLst/>
-          </a:prstGeom>
-          <a:noFill/>
-          <a:ln/>
-        </p:spPr>
-        <p:txBody>
-          <a:bodyPr wrap="square" lIns="635" tIns="635" rIns="635" bIns="635" rtlCol="0" anchor="ctr"/>
-          <a:lstStyle/>
-          <a:p>
-            <a:pPr algn="ctr" indent="0" marL="0">
-              <a:buNone/>
-            </a:pPr>
-            <a:r>
-              <a:rPr lang="en-US" sz="900" b="1" dirty="0">
-                <a:solidFill>
-                  <a:srgbClr val="0E7C7B"/>
-                </a:solidFill>
-                <a:latin typeface="Geist" pitchFamily="34" charset="0"/>
-                <a:ea typeface="Geist" pitchFamily="34" charset="-122"/>
-                <a:cs typeface="Geist" pitchFamily="34" charset="-120"/>
-              </a:rPr>
-              <a:t>NORTH</a:t>
-            </a:r>
-            <a:endParaRPr lang="en-US" sz="900" dirty="0"/>
-          </a:p>
-        </p:txBody>
-      </p:sp>
-      <p:sp>
-        <p:nvSpPr>
-          <p:cNvPr id="39" name="Shape 36"/>
-          <p:cNvSpPr/>
-          <p:nvPr/>
-        </p:nvSpPr>
-        <p:spPr>
-          <a:xfrm>
-            <a:off x="7772400" y="3721608"/>
-            <a:ext cx="822960" cy="457200"/>
-          </a:xfrm>
-          <a:prstGeom prst="rect">
-            <a:avLst/>
-          </a:prstGeom>
-          <a:solidFill>
-            <a:srgbClr val="FFFFFF"/>
-          </a:solidFill>
-          <a:ln w="9525">
-            <a:solidFill>
-              <a:srgbClr val="E5E5E5"/>
-            </a:solidFill>
-            <a:prstDash val="solid"/>
-          </a:ln>
-        </p:spPr>
-      </p:sp>
-      <p:sp>
-        <p:nvSpPr>
-          <p:cNvPr id="40" name="Text 37"/>
-          <p:cNvSpPr txBox="1"/>
-          <p:nvPr/>
-        </p:nvSpPr>
-        <p:spPr>
-          <a:xfrm>
-            <a:off x="7772400" y="3721608"/>
-            <a:ext cx="822960" cy="457200"/>
-          </a:xfrm>
-          <a:prstGeom prst="rect">
-            <a:avLst/>
-          </a:prstGeom>
-          <a:noFill/>
-          <a:ln/>
-        </p:spPr>
-        <p:txBody>
-          <a:bodyPr wrap="square" lIns="635" tIns="635" rIns="635" bIns="635" rtlCol="0" anchor="ctr"/>
-          <a:lstStyle/>
-          <a:p>
-            <a:pPr algn="ctr" indent="0" marL="0">
-              <a:buNone/>
-            </a:pPr>
-            <a:r>
-              <a:rPr lang="en-US" sz="900" b="1" dirty="0">
-                <a:solidFill>
-                  <a:srgbClr val="0E7C7B"/>
-                </a:solidFill>
-                <a:latin typeface="Geist" pitchFamily="34" charset="0"/>
-                <a:ea typeface="Geist" pitchFamily="34" charset="-122"/>
-                <a:cs typeface="Geist" pitchFamily="34" charset="-120"/>
-              </a:rPr>
-              <a:t>C3</a:t>
-            </a:r>
-            <a:endParaRPr lang="en-US" sz="900" dirty="0"/>
-          </a:p>
-        </p:txBody>
-      </p:sp>
-      <p:sp>
-        <p:nvSpPr>
-          <p:cNvPr id="41" name="Text 38"/>
-          <p:cNvSpPr txBox="1"/>
-          <p:nvPr/>
-        </p:nvSpPr>
-        <p:spPr>
-          <a:xfrm>
-            <a:off x="5852160" y="1691640"/>
-            <a:ext cx="2834640" cy="274320"/>
-          </a:xfrm>
-          <a:prstGeom prst="rect">
-            <a:avLst/>
-          </a:prstGeom>
-          <a:noFill/>
-          <a:ln/>
-        </p:spPr>
-        <p:txBody>
-          <a:bodyPr wrap="square" lIns="0" tIns="0" rIns="0" bIns="0" rtlCol="0" anchor="t"/>
-          <a:lstStyle/>
-          <a:p>
-            <a:pPr indent="0" marL="0">
-              <a:buNone/>
-            </a:pPr>
-            <a:r>
-              <a:rPr lang="en-US" sz="800" dirty="0">
-                <a:solidFill>
-                  <a:srgbClr val="0E7C7B"/>
-                </a:solidFill>
-                <a:latin typeface="IBM Plex Mono" pitchFamily="34" charset="0"/>
-                <a:ea typeface="IBM Plex Mono" pitchFamily="34" charset="-122"/>
-                <a:cs typeface="IBM Plex Mono" pitchFamily="34" charset="-120"/>
-              </a:rPr>
-              <a:t>COMPANIES — ISOLATED AT EVERY LAYER</a:t>
-            </a:r>
-            <a:endParaRPr lang="en-US" sz="800" dirty="0"/>
-          </a:p>
-        </p:txBody>
-      </p:sp>
-      <p:sp>
-        <p:nvSpPr>
-          <p:cNvPr id="42" name="Text 39"/>
-          <p:cNvSpPr txBox="1"/>
-          <p:nvPr/>
-        </p:nvSpPr>
-        <p:spPr>
-          <a:xfrm>
-            <a:off x="457200" y="4343400"/>
-            <a:ext cx="8229600" cy="274320"/>
-          </a:xfrm>
-          <a:prstGeom prst="rect">
-            <a:avLst/>
-          </a:prstGeom>
-          <a:noFill/>
-          <a:ln/>
-        </p:spPr>
-        <p:txBody>
-          <a:bodyPr wrap="square" lIns="0" tIns="0" rIns="0" bIns="0" rtlCol="0" anchor="t"/>
-          <a:lstStyle/>
-          <a:p>
-            <a:pPr indent="0" marL="0">
-              <a:buNone/>
-            </a:pPr>
-            <a:r>
               <a:rPr lang="en-US" sz="1000" dirty="0">
                 <a:solidFill>
                   <a:srgbClr val="919191"/>
@@ -3761,7 +3259,7 @@
                 <a:ea typeface="Geist" pitchFamily="34" charset="-122"/>
                 <a:cs typeface="Geist" pitchFamily="34" charset="-120"/>
               </a:rPr>
-              <a:t>Get one lane wrong and you've built a data leak with a chat window.</a:t>
+              <a:t>Episode 15 goes deep on delegated auth and least-privilege tools.</a:t>
             </a:r>
             <a:endParaRPr lang="en-US" sz="1000" dirty="0"/>
           </a:p>
@@ -3926,7 +3424,7 @@
                 <a:ea typeface="IBM Plex Mono" pitchFamily="34" charset="-122"/>
                 <a:cs typeface="IBM Plex Mono" pitchFamily="34" charset="-120"/>
               </a:rPr>
-              <a:t>WHAT BREAKS IN THE ENTERPRISE · 3 OF 3</a:t>
+              <a:t>WHAT BREAKS IN THE ENTERPRISE · 2 OF 3</a:t>
             </a:r>
             <a:endParaRPr lang="en-US" sz="1000" dirty="0"/>
           </a:p>
@@ -3957,7 +3455,7 @@
               <a:buNone/>
             </a:pPr>
             <a:r>
-              <a:rPr lang="en-US" sz="2300" b="1" spc="-100" kern="0" dirty="0">
+              <a:rPr lang="en-US" sz="2800" b="1" spc="-100" kern="0" dirty="0">
                 <a:solidFill>
                   <a:srgbClr val="1C1C1C"/>
                 </a:solidFill>
@@ -3965,9 +3463,9 @@
                 <a:ea typeface="Geist" pitchFamily="34" charset="-122"/>
                 <a:cs typeface="Geist" pitchFamily="34" charset="-120"/>
               </a:rPr>
-              <a:t>Accountability: who answers for step 7 of 12?</a:t>
-            </a:r>
-            <a:endParaRPr lang="en-US" sz="2300" dirty="0"/>
+              <a:t>Tenancy: one ERP, many companies</a:t>
+            </a:r>
+            <a:endParaRPr lang="en-US" sz="2800" dirty="0"/>
           </a:p>
         </p:txBody>
       </p:sp>
@@ -4057,8 +3555,113 @@
         </p:nvSpPr>
         <p:spPr>
           <a:xfrm>
-            <a:off x="457200" y="1783080"/>
-            <a:ext cx="4023360" cy="1097280"/>
+            <a:off x="457200" y="2423160"/>
+            <a:ext cx="1828800" cy="1188720"/>
+          </a:xfrm>
+          <a:prstGeom prst="rect">
+            <a:avLst/>
+          </a:prstGeom>
+          <a:solidFill>
+            <a:srgbClr val="FFFFFF"/>
+          </a:solidFill>
+          <a:ln w="15875">
+            <a:solidFill>
+              <a:srgbClr val="FF5700"/>
+            </a:solidFill>
+            <a:prstDash val="solid"/>
+          </a:ln>
+        </p:spPr>
+      </p:sp>
+      <p:sp>
+        <p:nvSpPr>
+          <p:cNvPr id="10" name="Text 7"/>
+          <p:cNvSpPr txBox="1"/>
+          <p:nvPr/>
+        </p:nvSpPr>
+        <p:spPr>
+          <a:xfrm>
+            <a:off x="457200" y="2423160"/>
+            <a:ext cx="1828800" cy="1188720"/>
+          </a:xfrm>
+          <a:prstGeom prst="rect">
+            <a:avLst/>
+          </a:prstGeom>
+          <a:noFill/>
+          <a:ln/>
+        </p:spPr>
+        <p:txBody>
+          <a:bodyPr wrap="square" lIns="635" tIns="635" rIns="635" bIns="635" rtlCol="0" anchor="ctr"/>
+          <a:lstStyle/>
+          <a:p>
+            <a:pPr algn="ctr" indent="0" marL="0">
+              <a:buNone/>
+            </a:pPr>
+            <a:r>
+              <a:rPr lang="en-US" sz="1300" b="1" dirty="0">
+                <a:solidFill>
+                  <a:srgbClr val="FF5700"/>
+                </a:solidFill>
+                <a:latin typeface="Geist" pitchFamily="34" charset="0"/>
+                <a:ea typeface="Geist" pitchFamily="34" charset="-122"/>
+                <a:cs typeface="Geist" pitchFamily="34" charset="-120"/>
+              </a:rPr>
+              <a:t>Agent</a:t>
+            </a:r>
+            <a:endParaRPr lang="en-US" sz="1300" dirty="0"/>
+          </a:p>
+          <a:p>
+            <a:pPr algn="ctr" indent="0" marL="0">
+              <a:buNone/>
+            </a:pPr>
+            <a:r>
+              <a:rPr lang="en-US" sz="1300" b="1" dirty="0">
+                <a:solidFill>
+                  <a:srgbClr val="FF5700"/>
+                </a:solidFill>
+                <a:latin typeface="Geist" pitchFamily="34" charset="0"/>
+                <a:ea typeface="Geist" pitchFamily="34" charset="-122"/>
+                <a:cs typeface="Geist" pitchFamily="34" charset="-120"/>
+              </a:rPr>
+              <a:t>(model + loop)</a:t>
+            </a:r>
+            <a:endParaRPr lang="en-US" sz="1300" dirty="0"/>
+          </a:p>
+        </p:txBody>
+      </p:sp>
+      <p:sp>
+        <p:nvSpPr>
+          <p:cNvPr id="11" name="Shape 8"/>
+          <p:cNvSpPr/>
+          <p:nvPr/>
+        </p:nvSpPr>
+        <p:spPr>
+          <a:xfrm>
+            <a:off x="2377440" y="2286000"/>
+            <a:ext cx="457200" cy="0"/>
+          </a:xfrm>
+          <a:prstGeom prst="line">
+            <a:avLst/>
+          </a:prstGeom>
+          <a:noFill/>
+          <a:ln w="15875">
+            <a:solidFill>
+              <a:srgbClr val="919191"/>
+            </a:solidFill>
+            <a:prstDash val="solid"/>
+            <a:tailEnd type="triangle"/>
+          </a:ln>
+        </p:spPr>
+      </p:sp>
+      <p:sp>
+        <p:nvSpPr>
+          <p:cNvPr id="12" name="Shape 9"/>
+          <p:cNvSpPr/>
+          <p:nvPr/>
+        </p:nvSpPr>
+        <p:spPr>
+          <a:xfrm>
+            <a:off x="2926080" y="1965960"/>
+            <a:ext cx="2651760" cy="685800"/>
           </a:xfrm>
           <a:prstGeom prst="rect">
             <a:avLst/>
@@ -4076,151 +3679,92 @@
       </p:sp>
       <p:sp>
         <p:nvSpPr>
-          <p:cNvPr id="10" name="Shape 7"/>
+          <p:cNvPr id="13" name="Text 10"/>
+          <p:cNvSpPr txBox="1"/>
+          <p:nvPr/>
+        </p:nvSpPr>
+        <p:spPr>
+          <a:xfrm>
+            <a:off x="3108960" y="2039112"/>
+            <a:ext cx="2286000" cy="274320"/>
+          </a:xfrm>
+          <a:prstGeom prst="rect">
+            <a:avLst/>
+          </a:prstGeom>
+          <a:noFill/>
+          <a:ln/>
+        </p:spPr>
+        <p:txBody>
+          <a:bodyPr wrap="square" lIns="0" tIns="0" rIns="0" bIns="0" rtlCol="0" anchor="t"/>
+          <a:lstStyle/>
+          <a:p>
+            <a:pPr indent="0" marL="0">
+              <a:buNone/>
+            </a:pPr>
+            <a:r>
+              <a:rPr lang="en-US" sz="1300" b="1" spc="-50" kern="0" dirty="0">
+                <a:solidFill>
+                  <a:srgbClr val="1C1C1C"/>
+                </a:solidFill>
+                <a:latin typeface="Geist" pitchFamily="34" charset="0"/>
+                <a:ea typeface="Geist" pitchFamily="34" charset="-122"/>
+                <a:cs typeface="Geist" pitchFamily="34" charset="-120"/>
+              </a:rPr>
+              <a:t>Memory</a:t>
+            </a:r>
+            <a:endParaRPr lang="en-US" sz="1300" dirty="0"/>
+          </a:p>
+        </p:txBody>
+      </p:sp>
+      <p:sp>
+        <p:nvSpPr>
+          <p:cNvPr id="14" name="Text 11"/>
+          <p:cNvSpPr txBox="1"/>
+          <p:nvPr/>
+        </p:nvSpPr>
+        <p:spPr>
+          <a:xfrm>
+            <a:off x="3108960" y="2331720"/>
+            <a:ext cx="2377440" cy="320040"/>
+          </a:xfrm>
+          <a:prstGeom prst="rect">
+            <a:avLst/>
+          </a:prstGeom>
+          <a:noFill/>
+          <a:ln/>
+        </p:spPr>
+        <p:txBody>
+          <a:bodyPr wrap="square" lIns="0" tIns="0" rIns="0" bIns="0" rtlCol="0" anchor="t"/>
+          <a:lstStyle/>
+          <a:p>
+            <a:pPr indent="0" marL="0">
+              <a:buNone/>
+            </a:pPr>
+            <a:r>
+              <a:rPr lang="en-US" sz="950" dirty="0">
+                <a:solidFill>
+                  <a:srgbClr val="6B7280"/>
+                </a:solidFill>
+                <a:latin typeface="Geist" pitchFamily="34" charset="0"/>
+                <a:ea typeface="Geist" pitchFamily="34" charset="-122"/>
+                <a:cs typeface="Geist" pitchFamily="34" charset="-120"/>
+              </a:rPr>
+              <a:t>per-company store, never shared context</a:t>
+            </a:r>
+            <a:endParaRPr lang="en-US" sz="950" dirty="0"/>
+          </a:p>
+        </p:txBody>
+      </p:sp>
+      <p:sp>
+        <p:nvSpPr>
+          <p:cNvPr id="15" name="Shape 12"/>
           <p:cNvSpPr/>
           <p:nvPr/>
         </p:nvSpPr>
         <p:spPr>
           <a:xfrm>
-            <a:off x="685800" y="1984248"/>
-            <a:ext cx="310896" cy="310896"/>
-          </a:xfrm>
-          <a:prstGeom prst="rect">
-            <a:avLst/>
-          </a:prstGeom>
-          <a:solidFill>
-            <a:srgbClr val="FF5700"/>
-          </a:solidFill>
-          <a:ln/>
-        </p:spPr>
-      </p:sp>
-      <p:sp>
-        <p:nvSpPr>
-          <p:cNvPr id="11" name="Text 8"/>
-          <p:cNvSpPr txBox="1"/>
-          <p:nvPr/>
-        </p:nvSpPr>
-        <p:spPr>
-          <a:xfrm>
-            <a:off x="685800" y="1984248"/>
-            <a:ext cx="310896" cy="310896"/>
-          </a:xfrm>
-          <a:prstGeom prst="rect">
-            <a:avLst/>
-          </a:prstGeom>
-          <a:noFill/>
-          <a:ln/>
-        </p:spPr>
-        <p:txBody>
-          <a:bodyPr wrap="square" lIns="0" tIns="0" rIns="0" bIns="0" rtlCol="0" anchor="ctr"/>
-          <a:lstStyle/>
-          <a:p>
-            <a:pPr algn="ctr" indent="0" marL="0">
-              <a:buNone/>
-            </a:pPr>
-            <a:r>
-              <a:rPr lang="en-US" sz="1100" b="1" dirty="0">
-                <a:solidFill>
-                  <a:srgbClr val="FFFFFF"/>
-                </a:solidFill>
-                <a:latin typeface="IBM Plex Mono" pitchFamily="34" charset="0"/>
-                <a:ea typeface="IBM Plex Mono" pitchFamily="34" charset="-122"/>
-                <a:cs typeface="IBM Plex Mono" pitchFamily="34" charset="-120"/>
-              </a:rPr>
-              <a:t>1</a:t>
-            </a:r>
-            <a:endParaRPr lang="en-US" sz="1100" dirty="0"/>
-          </a:p>
-        </p:txBody>
-      </p:sp>
-      <p:sp>
-        <p:nvSpPr>
-          <p:cNvPr id="12" name="Text 9"/>
-          <p:cNvSpPr txBox="1"/>
-          <p:nvPr/>
-        </p:nvSpPr>
-        <p:spPr>
-          <a:xfrm>
-            <a:off x="1143000" y="1947672"/>
-            <a:ext cx="3200400" cy="365760"/>
-          </a:xfrm>
-          <a:prstGeom prst="rect">
-            <a:avLst/>
-          </a:prstGeom>
-          <a:noFill/>
-          <a:ln/>
-        </p:spPr>
-        <p:txBody>
-          <a:bodyPr wrap="square" lIns="0" tIns="0" rIns="0" bIns="0" rtlCol="0" anchor="t"/>
-          <a:lstStyle/>
-          <a:p>
-            <a:pPr indent="0" marL="0">
-              <a:buNone/>
-            </a:pPr>
-            <a:r>
-              <a:rPr lang="en-US" sz="1400" b="1" spc="-50" kern="0" dirty="0">
-                <a:solidFill>
-                  <a:srgbClr val="1C1C1C"/>
-                </a:solidFill>
-                <a:latin typeface="Geist" pitchFamily="34" charset="0"/>
-                <a:ea typeface="Geist" pitchFamily="34" charset="-122"/>
-                <a:cs typeface="Geist" pitchFamily="34" charset="-120"/>
-              </a:rPr>
-              <a:t>Trace every step</a:t>
-            </a:r>
-            <a:endParaRPr lang="en-US" sz="1400" dirty="0"/>
-          </a:p>
-        </p:txBody>
-      </p:sp>
-      <p:sp>
-        <p:nvSpPr>
-          <p:cNvPr id="13" name="Text 10"/>
-          <p:cNvSpPr txBox="1"/>
-          <p:nvPr/>
-        </p:nvSpPr>
-        <p:spPr>
-          <a:xfrm>
-            <a:off x="1143000" y="2313432"/>
-            <a:ext cx="3200400" cy="502920"/>
-          </a:xfrm>
-          <a:prstGeom prst="rect">
-            <a:avLst/>
-          </a:prstGeom>
-          <a:noFill/>
-          <a:ln/>
-        </p:spPr>
-        <p:txBody>
-          <a:bodyPr wrap="square" lIns="0" tIns="0" rIns="0" bIns="0" rtlCol="0" anchor="t"/>
-          <a:lstStyle/>
-          <a:p>
-            <a:pPr indent="0" marL="0">
-              <a:buNone/>
-            </a:pPr>
-            <a:r>
-              <a:rPr lang="en-US" sz="1050" dirty="0">
-                <a:solidFill>
-                  <a:srgbClr val="6B7280"/>
-                </a:solidFill>
-                <a:latin typeface="Geist" pitchFamily="34" charset="0"/>
-                <a:ea typeface="Geist" pitchFamily="34" charset="-122"/>
-                <a:cs typeface="Geist" pitchFamily="34" charset="-120"/>
-              </a:rPr>
-              <a:t>every model call, tool call and result, tied to a user and a company</a:t>
-            </a:r>
-            <a:endParaRPr lang="en-US" sz="1050" dirty="0"/>
-          </a:p>
-        </p:txBody>
-      </p:sp>
-      <p:sp>
-        <p:nvSpPr>
-          <p:cNvPr id="14" name="Shape 11"/>
-          <p:cNvSpPr/>
-          <p:nvPr/>
-        </p:nvSpPr>
-        <p:spPr>
-          <a:xfrm>
-            <a:off x="4663440" y="1783080"/>
-            <a:ext cx="4023360" cy="1097280"/>
+            <a:off x="5852160" y="2075688"/>
+            <a:ext cx="822960" cy="457200"/>
           </a:xfrm>
           <a:prstGeom prst="rect">
             <a:avLst/>
@@ -4238,151 +3782,53 @@
       </p:sp>
       <p:sp>
         <p:nvSpPr>
-          <p:cNvPr id="15" name="Shape 12"/>
+          <p:cNvPr id="16" name="Text 13"/>
+          <p:cNvSpPr txBox="1"/>
+          <p:nvPr/>
+        </p:nvSpPr>
+        <p:spPr>
+          <a:xfrm>
+            <a:off x="5852160" y="2075688"/>
+            <a:ext cx="822960" cy="457200"/>
+          </a:xfrm>
+          <a:prstGeom prst="rect">
+            <a:avLst/>
+          </a:prstGeom>
+          <a:noFill/>
+          <a:ln/>
+        </p:spPr>
+        <p:txBody>
+          <a:bodyPr wrap="square" lIns="635" tIns="635" rIns="635" bIns="635" rtlCol="0" anchor="ctr"/>
+          <a:lstStyle/>
+          <a:p>
+            <a:pPr algn="ctr" indent="0" marL="0">
+              <a:buNone/>
+            </a:pPr>
+            <a:r>
+              <a:rPr lang="en-US" sz="900" b="1" dirty="0">
+                <a:solidFill>
+                  <a:srgbClr val="0E7C7B"/>
+                </a:solidFill>
+                <a:latin typeface="Geist" pitchFamily="34" charset="0"/>
+                <a:ea typeface="Geist" pitchFamily="34" charset="-122"/>
+                <a:cs typeface="Geist" pitchFamily="34" charset="-120"/>
+              </a:rPr>
+              <a:t>ACME</a:t>
+            </a:r>
+            <a:endParaRPr lang="en-US" sz="900" dirty="0"/>
+          </a:p>
+        </p:txBody>
+      </p:sp>
+      <p:sp>
+        <p:nvSpPr>
+          <p:cNvPr id="17" name="Shape 14"/>
           <p:cNvSpPr/>
           <p:nvPr/>
         </p:nvSpPr>
         <p:spPr>
           <a:xfrm>
-            <a:off x="4892040" y="1984248"/>
-            <a:ext cx="310896" cy="310896"/>
-          </a:xfrm>
-          <a:prstGeom prst="rect">
-            <a:avLst/>
-          </a:prstGeom>
-          <a:solidFill>
-            <a:srgbClr val="FF5700"/>
-          </a:solidFill>
-          <a:ln/>
-        </p:spPr>
-      </p:sp>
-      <p:sp>
-        <p:nvSpPr>
-          <p:cNvPr id="16" name="Text 13"/>
-          <p:cNvSpPr txBox="1"/>
-          <p:nvPr/>
-        </p:nvSpPr>
-        <p:spPr>
-          <a:xfrm>
-            <a:off x="4892040" y="1984248"/>
-            <a:ext cx="310896" cy="310896"/>
-          </a:xfrm>
-          <a:prstGeom prst="rect">
-            <a:avLst/>
-          </a:prstGeom>
-          <a:noFill/>
-          <a:ln/>
-        </p:spPr>
-        <p:txBody>
-          <a:bodyPr wrap="square" lIns="0" tIns="0" rIns="0" bIns="0" rtlCol="0" anchor="ctr"/>
-          <a:lstStyle/>
-          <a:p>
-            <a:pPr algn="ctr" indent="0" marL="0">
-              <a:buNone/>
-            </a:pPr>
-            <a:r>
-              <a:rPr lang="en-US" sz="1100" b="1" dirty="0">
-                <a:solidFill>
-                  <a:srgbClr val="FFFFFF"/>
-                </a:solidFill>
-                <a:latin typeface="IBM Plex Mono" pitchFamily="34" charset="0"/>
-                <a:ea typeface="IBM Plex Mono" pitchFamily="34" charset="-122"/>
-                <a:cs typeface="IBM Plex Mono" pitchFamily="34" charset="-120"/>
-              </a:rPr>
-              <a:t>2</a:t>
-            </a:r>
-            <a:endParaRPr lang="en-US" sz="1100" dirty="0"/>
-          </a:p>
-        </p:txBody>
-      </p:sp>
-      <p:sp>
-        <p:nvSpPr>
-          <p:cNvPr id="17" name="Text 14"/>
-          <p:cNvSpPr txBox="1"/>
-          <p:nvPr/>
-        </p:nvSpPr>
-        <p:spPr>
-          <a:xfrm>
-            <a:off x="5349240" y="1947672"/>
-            <a:ext cx="3200400" cy="365760"/>
-          </a:xfrm>
-          <a:prstGeom prst="rect">
-            <a:avLst/>
-          </a:prstGeom>
-          <a:noFill/>
-          <a:ln/>
-        </p:spPr>
-        <p:txBody>
-          <a:bodyPr wrap="square" lIns="0" tIns="0" rIns="0" bIns="0" rtlCol="0" anchor="t"/>
-          <a:lstStyle/>
-          <a:p>
-            <a:pPr indent="0" marL="0">
-              <a:buNone/>
-            </a:pPr>
-            <a:r>
-              <a:rPr lang="en-US" sz="1400" b="1" spc="-50" kern="0" dirty="0">
-                <a:solidFill>
-                  <a:srgbClr val="1C1C1C"/>
-                </a:solidFill>
-                <a:latin typeface="Geist" pitchFamily="34" charset="0"/>
-                <a:ea typeface="Geist" pitchFamily="34" charset="-122"/>
-                <a:cs typeface="Geist" pitchFamily="34" charset="-120"/>
-              </a:rPr>
-              <a:t>Human-in-the-loop</a:t>
-            </a:r>
-            <a:endParaRPr lang="en-US" sz="1400" dirty="0"/>
-          </a:p>
-        </p:txBody>
-      </p:sp>
-      <p:sp>
-        <p:nvSpPr>
-          <p:cNvPr id="18" name="Text 15"/>
-          <p:cNvSpPr txBox="1"/>
-          <p:nvPr/>
-        </p:nvSpPr>
-        <p:spPr>
-          <a:xfrm>
-            <a:off x="5349240" y="2313432"/>
-            <a:ext cx="3200400" cy="502920"/>
-          </a:xfrm>
-          <a:prstGeom prst="rect">
-            <a:avLst/>
-          </a:prstGeom>
-          <a:noFill/>
-          <a:ln/>
-        </p:spPr>
-        <p:txBody>
-          <a:bodyPr wrap="square" lIns="0" tIns="0" rIns="0" bIns="0" rtlCol="0" anchor="t"/>
-          <a:lstStyle/>
-          <a:p>
-            <a:pPr indent="0" marL="0">
-              <a:buNone/>
-            </a:pPr>
-            <a:r>
-              <a:rPr lang="en-US" sz="1050" dirty="0">
-                <a:solidFill>
-                  <a:srgbClr val="6B7280"/>
-                </a:solidFill>
-                <a:latin typeface="Geist" pitchFamily="34" charset="0"/>
-                <a:ea typeface="Geist" pitchFamily="34" charset="-122"/>
-                <a:cs typeface="Geist" pitchFamily="34" charset="-120"/>
-              </a:rPr>
-              <a:t>irreversible or high-value actions pause for a person — by design, not by prompt</a:t>
-            </a:r>
-            <a:endParaRPr lang="en-US" sz="1050" dirty="0"/>
-          </a:p>
-        </p:txBody>
-      </p:sp>
-      <p:sp>
-        <p:nvSpPr>
-          <p:cNvPr id="19" name="Shape 16"/>
-          <p:cNvSpPr/>
-          <p:nvPr/>
-        </p:nvSpPr>
-        <p:spPr>
-          <a:xfrm>
-            <a:off x="457200" y="3017520"/>
-            <a:ext cx="4023360" cy="1097280"/>
+            <a:off x="6812280" y="2075688"/>
+            <a:ext cx="822960" cy="457200"/>
           </a:xfrm>
           <a:prstGeom prst="rect">
             <a:avLst/>
@@ -4400,151 +3846,53 @@
       </p:sp>
       <p:sp>
         <p:nvSpPr>
-          <p:cNvPr id="20" name="Shape 17"/>
+          <p:cNvPr id="18" name="Text 15"/>
+          <p:cNvSpPr txBox="1"/>
+          <p:nvPr/>
+        </p:nvSpPr>
+        <p:spPr>
+          <a:xfrm>
+            <a:off x="6812280" y="2075688"/>
+            <a:ext cx="822960" cy="457200"/>
+          </a:xfrm>
+          <a:prstGeom prst="rect">
+            <a:avLst/>
+          </a:prstGeom>
+          <a:noFill/>
+          <a:ln/>
+        </p:spPr>
+        <p:txBody>
+          <a:bodyPr wrap="square" lIns="635" tIns="635" rIns="635" bIns="635" rtlCol="0" anchor="ctr"/>
+          <a:lstStyle/>
+          <a:p>
+            <a:pPr algn="ctr" indent="0" marL="0">
+              <a:buNone/>
+            </a:pPr>
+            <a:r>
+              <a:rPr lang="en-US" sz="900" b="1" dirty="0">
+                <a:solidFill>
+                  <a:srgbClr val="0E7C7B"/>
+                </a:solidFill>
+                <a:latin typeface="Geist" pitchFamily="34" charset="0"/>
+                <a:ea typeface="Geist" pitchFamily="34" charset="-122"/>
+                <a:cs typeface="Geist" pitchFamily="34" charset="-120"/>
+              </a:rPr>
+              <a:t>NORTH</a:t>
+            </a:r>
+            <a:endParaRPr lang="en-US" sz="900" dirty="0"/>
+          </a:p>
+        </p:txBody>
+      </p:sp>
+      <p:sp>
+        <p:nvSpPr>
+          <p:cNvPr id="19" name="Shape 16"/>
           <p:cNvSpPr/>
           <p:nvPr/>
         </p:nvSpPr>
         <p:spPr>
           <a:xfrm>
-            <a:off x="685800" y="3218688"/>
-            <a:ext cx="310896" cy="310896"/>
-          </a:xfrm>
-          <a:prstGeom prst="rect">
-            <a:avLst/>
-          </a:prstGeom>
-          <a:solidFill>
-            <a:srgbClr val="FF5700"/>
-          </a:solidFill>
-          <a:ln/>
-        </p:spPr>
-      </p:sp>
-      <p:sp>
-        <p:nvSpPr>
-          <p:cNvPr id="21" name="Text 18"/>
-          <p:cNvSpPr txBox="1"/>
-          <p:nvPr/>
-        </p:nvSpPr>
-        <p:spPr>
-          <a:xfrm>
-            <a:off x="685800" y="3218688"/>
-            <a:ext cx="310896" cy="310896"/>
-          </a:xfrm>
-          <a:prstGeom prst="rect">
-            <a:avLst/>
-          </a:prstGeom>
-          <a:noFill/>
-          <a:ln/>
-        </p:spPr>
-        <p:txBody>
-          <a:bodyPr wrap="square" lIns="0" tIns="0" rIns="0" bIns="0" rtlCol="0" anchor="ctr"/>
-          <a:lstStyle/>
-          <a:p>
-            <a:pPr algn="ctr" indent="0" marL="0">
-              <a:buNone/>
-            </a:pPr>
-            <a:r>
-              <a:rPr lang="en-US" sz="1100" b="1" dirty="0">
-                <a:solidFill>
-                  <a:srgbClr val="FFFFFF"/>
-                </a:solidFill>
-                <a:latin typeface="IBM Plex Mono" pitchFamily="34" charset="0"/>
-                <a:ea typeface="IBM Plex Mono" pitchFamily="34" charset="-122"/>
-                <a:cs typeface="IBM Plex Mono" pitchFamily="34" charset="-120"/>
-              </a:rPr>
-              <a:t>3</a:t>
-            </a:r>
-            <a:endParaRPr lang="en-US" sz="1100" dirty="0"/>
-          </a:p>
-        </p:txBody>
-      </p:sp>
-      <p:sp>
-        <p:nvSpPr>
-          <p:cNvPr id="22" name="Text 19"/>
-          <p:cNvSpPr txBox="1"/>
-          <p:nvPr/>
-        </p:nvSpPr>
-        <p:spPr>
-          <a:xfrm>
-            <a:off x="1143000" y="3182112"/>
-            <a:ext cx="3200400" cy="365760"/>
-          </a:xfrm>
-          <a:prstGeom prst="rect">
-            <a:avLst/>
-          </a:prstGeom>
-          <a:noFill/>
-          <a:ln/>
-        </p:spPr>
-        <p:txBody>
-          <a:bodyPr wrap="square" lIns="0" tIns="0" rIns="0" bIns="0" rtlCol="0" anchor="t"/>
-          <a:lstStyle/>
-          <a:p>
-            <a:pPr indent="0" marL="0">
-              <a:buNone/>
-            </a:pPr>
-            <a:r>
-              <a:rPr lang="en-US" sz="1400" b="1" spc="-50" kern="0" dirty="0">
-                <a:solidFill>
-                  <a:srgbClr val="1C1C1C"/>
-                </a:solidFill>
-                <a:latin typeface="Geist" pitchFamily="34" charset="0"/>
-                <a:ea typeface="Geist" pitchFamily="34" charset="-122"/>
-                <a:cs typeface="Geist" pitchFamily="34" charset="-120"/>
-              </a:rPr>
-              <a:t>Caps on steps, cost, time</a:t>
-            </a:r>
-            <a:endParaRPr lang="en-US" sz="1400" dirty="0"/>
-          </a:p>
-        </p:txBody>
-      </p:sp>
-      <p:sp>
-        <p:nvSpPr>
-          <p:cNvPr id="23" name="Text 20"/>
-          <p:cNvSpPr txBox="1"/>
-          <p:nvPr/>
-        </p:nvSpPr>
-        <p:spPr>
-          <a:xfrm>
-            <a:off x="1143000" y="3547872"/>
-            <a:ext cx="3200400" cy="502920"/>
-          </a:xfrm>
-          <a:prstGeom prst="rect">
-            <a:avLst/>
-          </a:prstGeom>
-          <a:noFill/>
-          <a:ln/>
-        </p:spPr>
-        <p:txBody>
-          <a:bodyPr wrap="square" lIns="0" tIns="0" rIns="0" bIns="0" rtlCol="0" anchor="t"/>
-          <a:lstStyle/>
-          <a:p>
-            <a:pPr indent="0" marL="0">
-              <a:buNone/>
-            </a:pPr>
-            <a:r>
-              <a:rPr lang="en-US" sz="1050" dirty="0">
-                <a:solidFill>
-                  <a:srgbClr val="6B7280"/>
-                </a:solidFill>
-                <a:latin typeface="Geist" pitchFamily="34" charset="0"/>
-                <a:ea typeface="Geist" pitchFamily="34" charset="-122"/>
-                <a:cs typeface="Geist" pitchFamily="34" charset="-120"/>
-              </a:rPr>
-              <a:t>a runaway loop is a budget incident; the cap is the circuit breaker</a:t>
-            </a:r>
-            <a:endParaRPr lang="en-US" sz="1050" dirty="0"/>
-          </a:p>
-        </p:txBody>
-      </p:sp>
-      <p:sp>
-        <p:nvSpPr>
-          <p:cNvPr id="24" name="Shape 21"/>
-          <p:cNvSpPr/>
-          <p:nvPr/>
-        </p:nvSpPr>
-        <p:spPr>
-          <a:xfrm>
-            <a:off x="4663440" y="3017520"/>
-            <a:ext cx="4023360" cy="1097280"/>
+            <a:off x="7772400" y="2075688"/>
+            <a:ext cx="822960" cy="457200"/>
           </a:xfrm>
           <a:prstGeom prst="rect">
             <a:avLst/>
@@ -4562,22 +3910,193 @@
       </p:sp>
       <p:sp>
         <p:nvSpPr>
+          <p:cNvPr id="20" name="Text 17"/>
+          <p:cNvSpPr txBox="1"/>
+          <p:nvPr/>
+        </p:nvSpPr>
+        <p:spPr>
+          <a:xfrm>
+            <a:off x="7772400" y="2075688"/>
+            <a:ext cx="822960" cy="457200"/>
+          </a:xfrm>
+          <a:prstGeom prst="rect">
+            <a:avLst/>
+          </a:prstGeom>
+          <a:noFill/>
+          <a:ln/>
+        </p:spPr>
+        <p:txBody>
+          <a:bodyPr wrap="square" lIns="635" tIns="635" rIns="635" bIns="635" rtlCol="0" anchor="ctr"/>
+          <a:lstStyle/>
+          <a:p>
+            <a:pPr algn="ctr" indent="0" marL="0">
+              <a:buNone/>
+            </a:pPr>
+            <a:r>
+              <a:rPr lang="en-US" sz="900" b="1" dirty="0">
+                <a:solidFill>
+                  <a:srgbClr val="0E7C7B"/>
+                </a:solidFill>
+                <a:latin typeface="Geist" pitchFamily="34" charset="0"/>
+                <a:ea typeface="Geist" pitchFamily="34" charset="-122"/>
+                <a:cs typeface="Geist" pitchFamily="34" charset="-120"/>
+              </a:rPr>
+              <a:t>C3</a:t>
+            </a:r>
+            <a:endParaRPr lang="en-US" sz="900" dirty="0"/>
+          </a:p>
+        </p:txBody>
+      </p:sp>
+      <p:sp>
+        <p:nvSpPr>
+          <p:cNvPr id="21" name="Shape 18"/>
+          <p:cNvSpPr/>
+          <p:nvPr/>
+        </p:nvSpPr>
+        <p:spPr>
+          <a:xfrm>
+            <a:off x="2377440" y="3108960"/>
+            <a:ext cx="457200" cy="0"/>
+          </a:xfrm>
+          <a:prstGeom prst="line">
+            <a:avLst/>
+          </a:prstGeom>
+          <a:noFill/>
+          <a:ln w="15875">
+            <a:solidFill>
+              <a:srgbClr val="919191"/>
+            </a:solidFill>
+            <a:prstDash val="solid"/>
+            <a:tailEnd type="triangle"/>
+          </a:ln>
+        </p:spPr>
+      </p:sp>
+      <p:sp>
+        <p:nvSpPr>
+          <p:cNvPr id="22" name="Shape 19"/>
+          <p:cNvSpPr/>
+          <p:nvPr/>
+        </p:nvSpPr>
+        <p:spPr>
+          <a:xfrm>
+            <a:off x="2926080" y="2788920"/>
+            <a:ext cx="2651760" cy="685800"/>
+          </a:xfrm>
+          <a:prstGeom prst="rect">
+            <a:avLst/>
+          </a:prstGeom>
+          <a:solidFill>
+            <a:srgbClr val="FFFFFF"/>
+          </a:solidFill>
+          <a:ln w="9525">
+            <a:solidFill>
+              <a:srgbClr val="E5E5E5"/>
+            </a:solidFill>
+            <a:prstDash val="solid"/>
+          </a:ln>
+        </p:spPr>
+      </p:sp>
+      <p:sp>
+        <p:nvSpPr>
+          <p:cNvPr id="23" name="Text 20"/>
+          <p:cNvSpPr txBox="1"/>
+          <p:nvPr/>
+        </p:nvSpPr>
+        <p:spPr>
+          <a:xfrm>
+            <a:off x="3108960" y="2862072"/>
+            <a:ext cx="2286000" cy="274320"/>
+          </a:xfrm>
+          <a:prstGeom prst="rect">
+            <a:avLst/>
+          </a:prstGeom>
+          <a:noFill/>
+          <a:ln/>
+        </p:spPr>
+        <p:txBody>
+          <a:bodyPr wrap="square" lIns="0" tIns="0" rIns="0" bIns="0" rtlCol="0" anchor="t"/>
+          <a:lstStyle/>
+          <a:p>
+            <a:pPr indent="0" marL="0">
+              <a:buNone/>
+            </a:pPr>
+            <a:r>
+              <a:rPr lang="en-US" sz="1300" b="1" spc="-50" kern="0" dirty="0">
+                <a:solidFill>
+                  <a:srgbClr val="1C1C1C"/>
+                </a:solidFill>
+                <a:latin typeface="Geist" pitchFamily="34" charset="0"/>
+                <a:ea typeface="Geist" pitchFamily="34" charset="-122"/>
+                <a:cs typeface="Geist" pitchFamily="34" charset="-120"/>
+              </a:rPr>
+              <a:t>Tools</a:t>
+            </a:r>
+            <a:endParaRPr lang="en-US" sz="1300" dirty="0"/>
+          </a:p>
+        </p:txBody>
+      </p:sp>
+      <p:sp>
+        <p:nvSpPr>
+          <p:cNvPr id="24" name="Text 21"/>
+          <p:cNvSpPr txBox="1"/>
+          <p:nvPr/>
+        </p:nvSpPr>
+        <p:spPr>
+          <a:xfrm>
+            <a:off x="3108960" y="3154680"/>
+            <a:ext cx="2377440" cy="320040"/>
+          </a:xfrm>
+          <a:prstGeom prst="rect">
+            <a:avLst/>
+          </a:prstGeom>
+          <a:noFill/>
+          <a:ln/>
+        </p:spPr>
+        <p:txBody>
+          <a:bodyPr wrap="square" lIns="0" tIns="0" rIns="0" bIns="0" rtlCol="0" anchor="t"/>
+          <a:lstStyle/>
+          <a:p>
+            <a:pPr indent="0" marL="0">
+              <a:buNone/>
+            </a:pPr>
+            <a:r>
+              <a:rPr lang="en-US" sz="950" dirty="0">
+                <a:solidFill>
+                  <a:srgbClr val="6B7280"/>
+                </a:solidFill>
+                <a:latin typeface="Geist" pitchFamily="34" charset="0"/>
+                <a:ea typeface="Geist" pitchFamily="34" charset="-122"/>
+                <a:cs typeface="Geist" pitchFamily="34" charset="-120"/>
+              </a:rPr>
+              <a:t>company_id injected server-side on every call</a:t>
+            </a:r>
+            <a:endParaRPr lang="en-US" sz="950" dirty="0"/>
+          </a:p>
+        </p:txBody>
+      </p:sp>
+      <p:sp>
+        <p:nvSpPr>
           <p:cNvPr id="25" name="Shape 22"/>
           <p:cNvSpPr/>
           <p:nvPr/>
         </p:nvSpPr>
         <p:spPr>
           <a:xfrm>
-            <a:off x="4892040" y="3218688"/>
-            <a:ext cx="310896" cy="310896"/>
+            <a:off x="5852160" y="2898648"/>
+            <a:ext cx="822960" cy="457200"/>
           </a:xfrm>
           <a:prstGeom prst="rect">
             <a:avLst/>
           </a:prstGeom>
           <a:solidFill>
-            <a:srgbClr val="FF5700"/>
+            <a:srgbClr val="FFFFFF"/>
           </a:solidFill>
-          <a:ln/>
+          <a:ln w="9525">
+            <a:solidFill>
+              <a:srgbClr val="E5E5E5"/>
+            </a:solidFill>
+            <a:prstDash val="solid"/>
+          </a:ln>
         </p:spPr>
       </p:sp>
       <p:sp>
@@ -4588,47 +4107,533 @@
         </p:nvSpPr>
         <p:spPr>
           <a:xfrm>
-            <a:off x="4892040" y="3218688"/>
-            <a:ext cx="310896" cy="310896"/>
-          </a:xfrm>
-          <a:prstGeom prst="rect">
-            <a:avLst/>
-          </a:prstGeom>
-          <a:noFill/>
-          <a:ln/>
-        </p:spPr>
-        <p:txBody>
-          <a:bodyPr wrap="square" lIns="0" tIns="0" rIns="0" bIns="0" rtlCol="0" anchor="ctr"/>
+            <a:off x="5852160" y="2898648"/>
+            <a:ext cx="822960" cy="457200"/>
+          </a:xfrm>
+          <a:prstGeom prst="rect">
+            <a:avLst/>
+          </a:prstGeom>
+          <a:noFill/>
+          <a:ln/>
+        </p:spPr>
+        <p:txBody>
+          <a:bodyPr wrap="square" lIns="635" tIns="635" rIns="635" bIns="635" rtlCol="0" anchor="ctr"/>
           <a:lstStyle/>
           <a:p>
             <a:pPr algn="ctr" indent="0" marL="0">
               <a:buNone/>
             </a:pPr>
             <a:r>
-              <a:rPr lang="en-US" sz="1100" b="1" dirty="0">
-                <a:solidFill>
-                  <a:srgbClr val="FFFFFF"/>
+              <a:rPr lang="en-US" sz="900" b="1" dirty="0">
+                <a:solidFill>
+                  <a:srgbClr val="0E7C7B"/>
+                </a:solidFill>
+                <a:latin typeface="Geist" pitchFamily="34" charset="0"/>
+                <a:ea typeface="Geist" pitchFamily="34" charset="-122"/>
+                <a:cs typeface="Geist" pitchFamily="34" charset="-120"/>
+              </a:rPr>
+              <a:t>ACME</a:t>
+            </a:r>
+            <a:endParaRPr lang="en-US" sz="900" dirty="0"/>
+          </a:p>
+        </p:txBody>
+      </p:sp>
+      <p:sp>
+        <p:nvSpPr>
+          <p:cNvPr id="27" name="Shape 24"/>
+          <p:cNvSpPr/>
+          <p:nvPr/>
+        </p:nvSpPr>
+        <p:spPr>
+          <a:xfrm>
+            <a:off x="6812280" y="2898648"/>
+            <a:ext cx="822960" cy="457200"/>
+          </a:xfrm>
+          <a:prstGeom prst="rect">
+            <a:avLst/>
+          </a:prstGeom>
+          <a:solidFill>
+            <a:srgbClr val="FFFFFF"/>
+          </a:solidFill>
+          <a:ln w="9525">
+            <a:solidFill>
+              <a:srgbClr val="E5E5E5"/>
+            </a:solidFill>
+            <a:prstDash val="solid"/>
+          </a:ln>
+        </p:spPr>
+      </p:sp>
+      <p:sp>
+        <p:nvSpPr>
+          <p:cNvPr id="28" name="Text 25"/>
+          <p:cNvSpPr txBox="1"/>
+          <p:nvPr/>
+        </p:nvSpPr>
+        <p:spPr>
+          <a:xfrm>
+            <a:off x="6812280" y="2898648"/>
+            <a:ext cx="822960" cy="457200"/>
+          </a:xfrm>
+          <a:prstGeom prst="rect">
+            <a:avLst/>
+          </a:prstGeom>
+          <a:noFill/>
+          <a:ln/>
+        </p:spPr>
+        <p:txBody>
+          <a:bodyPr wrap="square" lIns="635" tIns="635" rIns="635" bIns="635" rtlCol="0" anchor="ctr"/>
+          <a:lstStyle/>
+          <a:p>
+            <a:pPr algn="ctr" indent="0" marL="0">
+              <a:buNone/>
+            </a:pPr>
+            <a:r>
+              <a:rPr lang="en-US" sz="900" b="1" dirty="0">
+                <a:solidFill>
+                  <a:srgbClr val="0E7C7B"/>
+                </a:solidFill>
+                <a:latin typeface="Geist" pitchFamily="34" charset="0"/>
+                <a:ea typeface="Geist" pitchFamily="34" charset="-122"/>
+                <a:cs typeface="Geist" pitchFamily="34" charset="-120"/>
+              </a:rPr>
+              <a:t>NORTH</a:t>
+            </a:r>
+            <a:endParaRPr lang="en-US" sz="900" dirty="0"/>
+          </a:p>
+        </p:txBody>
+      </p:sp>
+      <p:sp>
+        <p:nvSpPr>
+          <p:cNvPr id="29" name="Shape 26"/>
+          <p:cNvSpPr/>
+          <p:nvPr/>
+        </p:nvSpPr>
+        <p:spPr>
+          <a:xfrm>
+            <a:off x="7772400" y="2898648"/>
+            <a:ext cx="822960" cy="457200"/>
+          </a:xfrm>
+          <a:prstGeom prst="rect">
+            <a:avLst/>
+          </a:prstGeom>
+          <a:solidFill>
+            <a:srgbClr val="FFFFFF"/>
+          </a:solidFill>
+          <a:ln w="9525">
+            <a:solidFill>
+              <a:srgbClr val="E5E5E5"/>
+            </a:solidFill>
+            <a:prstDash val="solid"/>
+          </a:ln>
+        </p:spPr>
+      </p:sp>
+      <p:sp>
+        <p:nvSpPr>
+          <p:cNvPr id="30" name="Text 27"/>
+          <p:cNvSpPr txBox="1"/>
+          <p:nvPr/>
+        </p:nvSpPr>
+        <p:spPr>
+          <a:xfrm>
+            <a:off x="7772400" y="2898648"/>
+            <a:ext cx="822960" cy="457200"/>
+          </a:xfrm>
+          <a:prstGeom prst="rect">
+            <a:avLst/>
+          </a:prstGeom>
+          <a:noFill/>
+          <a:ln/>
+        </p:spPr>
+        <p:txBody>
+          <a:bodyPr wrap="square" lIns="635" tIns="635" rIns="635" bIns="635" rtlCol="0" anchor="ctr"/>
+          <a:lstStyle/>
+          <a:p>
+            <a:pPr algn="ctr" indent="0" marL="0">
+              <a:buNone/>
+            </a:pPr>
+            <a:r>
+              <a:rPr lang="en-US" sz="900" b="1" dirty="0">
+                <a:solidFill>
+                  <a:srgbClr val="0E7C7B"/>
+                </a:solidFill>
+                <a:latin typeface="Geist" pitchFamily="34" charset="0"/>
+                <a:ea typeface="Geist" pitchFamily="34" charset="-122"/>
+                <a:cs typeface="Geist" pitchFamily="34" charset="-120"/>
+              </a:rPr>
+              <a:t>C3</a:t>
+            </a:r>
+            <a:endParaRPr lang="en-US" sz="900" dirty="0"/>
+          </a:p>
+        </p:txBody>
+      </p:sp>
+      <p:sp>
+        <p:nvSpPr>
+          <p:cNvPr id="31" name="Shape 28"/>
+          <p:cNvSpPr/>
+          <p:nvPr/>
+        </p:nvSpPr>
+        <p:spPr>
+          <a:xfrm>
+            <a:off x="2377440" y="3931920"/>
+            <a:ext cx="457200" cy="0"/>
+          </a:xfrm>
+          <a:prstGeom prst="line">
+            <a:avLst/>
+          </a:prstGeom>
+          <a:noFill/>
+          <a:ln w="15875">
+            <a:solidFill>
+              <a:srgbClr val="919191"/>
+            </a:solidFill>
+            <a:prstDash val="solid"/>
+            <a:tailEnd type="triangle"/>
+          </a:ln>
+        </p:spPr>
+      </p:sp>
+      <p:sp>
+        <p:nvSpPr>
+          <p:cNvPr id="32" name="Shape 29"/>
+          <p:cNvSpPr/>
+          <p:nvPr/>
+        </p:nvSpPr>
+        <p:spPr>
+          <a:xfrm>
+            <a:off x="2926080" y="3611880"/>
+            <a:ext cx="2651760" cy="685800"/>
+          </a:xfrm>
+          <a:prstGeom prst="rect">
+            <a:avLst/>
+          </a:prstGeom>
+          <a:solidFill>
+            <a:srgbClr val="FFFFFF"/>
+          </a:solidFill>
+          <a:ln w="9525">
+            <a:solidFill>
+              <a:srgbClr val="E5E5E5"/>
+            </a:solidFill>
+            <a:prstDash val="solid"/>
+          </a:ln>
+        </p:spPr>
+      </p:sp>
+      <p:sp>
+        <p:nvSpPr>
+          <p:cNvPr id="33" name="Text 30"/>
+          <p:cNvSpPr txBox="1"/>
+          <p:nvPr/>
+        </p:nvSpPr>
+        <p:spPr>
+          <a:xfrm>
+            <a:off x="3108960" y="3685032"/>
+            <a:ext cx="2286000" cy="274320"/>
+          </a:xfrm>
+          <a:prstGeom prst="rect">
+            <a:avLst/>
+          </a:prstGeom>
+          <a:noFill/>
+          <a:ln/>
+        </p:spPr>
+        <p:txBody>
+          <a:bodyPr wrap="square" lIns="0" tIns="0" rIns="0" bIns="0" rtlCol="0" anchor="t"/>
+          <a:lstStyle/>
+          <a:p>
+            <a:pPr indent="0" marL="0">
+              <a:buNone/>
+            </a:pPr>
+            <a:r>
+              <a:rPr lang="en-US" sz="1300" b="1" spc="-50" kern="0" dirty="0">
+                <a:solidFill>
+                  <a:srgbClr val="1C1C1C"/>
+                </a:solidFill>
+                <a:latin typeface="Geist" pitchFamily="34" charset="0"/>
+                <a:ea typeface="Geist" pitchFamily="34" charset="-122"/>
+                <a:cs typeface="Geist" pitchFamily="34" charset="-120"/>
+              </a:rPr>
+              <a:t>Retrieval</a:t>
+            </a:r>
+            <a:endParaRPr lang="en-US" sz="1300" dirty="0"/>
+          </a:p>
+        </p:txBody>
+      </p:sp>
+      <p:sp>
+        <p:nvSpPr>
+          <p:cNvPr id="34" name="Text 31"/>
+          <p:cNvSpPr txBox="1"/>
+          <p:nvPr/>
+        </p:nvSpPr>
+        <p:spPr>
+          <a:xfrm>
+            <a:off x="3108960" y="3977640"/>
+            <a:ext cx="2377440" cy="320040"/>
+          </a:xfrm>
+          <a:prstGeom prst="rect">
+            <a:avLst/>
+          </a:prstGeom>
+          <a:noFill/>
+          <a:ln/>
+        </p:spPr>
+        <p:txBody>
+          <a:bodyPr wrap="square" lIns="0" tIns="0" rIns="0" bIns="0" rtlCol="0" anchor="t"/>
+          <a:lstStyle/>
+          <a:p>
+            <a:pPr indent="0" marL="0">
+              <a:buNone/>
+            </a:pPr>
+            <a:r>
+              <a:rPr lang="en-US" sz="950" dirty="0">
+                <a:solidFill>
+                  <a:srgbClr val="6B7280"/>
+                </a:solidFill>
+                <a:latin typeface="Geist" pitchFamily="34" charset="0"/>
+                <a:ea typeface="Geist" pitchFamily="34" charset="-122"/>
+                <a:cs typeface="Geist" pitchFamily="34" charset="-120"/>
+              </a:rPr>
+              <a:t>index partitioned, filtered before ranking</a:t>
+            </a:r>
+            <a:endParaRPr lang="en-US" sz="950" dirty="0"/>
+          </a:p>
+        </p:txBody>
+      </p:sp>
+      <p:sp>
+        <p:nvSpPr>
+          <p:cNvPr id="35" name="Shape 32"/>
+          <p:cNvSpPr/>
+          <p:nvPr/>
+        </p:nvSpPr>
+        <p:spPr>
+          <a:xfrm>
+            <a:off x="5852160" y="3721608"/>
+            <a:ext cx="822960" cy="457200"/>
+          </a:xfrm>
+          <a:prstGeom prst="rect">
+            <a:avLst/>
+          </a:prstGeom>
+          <a:solidFill>
+            <a:srgbClr val="FFFFFF"/>
+          </a:solidFill>
+          <a:ln w="9525">
+            <a:solidFill>
+              <a:srgbClr val="E5E5E5"/>
+            </a:solidFill>
+            <a:prstDash val="solid"/>
+          </a:ln>
+        </p:spPr>
+      </p:sp>
+      <p:sp>
+        <p:nvSpPr>
+          <p:cNvPr id="36" name="Text 33"/>
+          <p:cNvSpPr txBox="1"/>
+          <p:nvPr/>
+        </p:nvSpPr>
+        <p:spPr>
+          <a:xfrm>
+            <a:off x="5852160" y="3721608"/>
+            <a:ext cx="822960" cy="457200"/>
+          </a:xfrm>
+          <a:prstGeom prst="rect">
+            <a:avLst/>
+          </a:prstGeom>
+          <a:noFill/>
+          <a:ln/>
+        </p:spPr>
+        <p:txBody>
+          <a:bodyPr wrap="square" lIns="635" tIns="635" rIns="635" bIns="635" rtlCol="0" anchor="ctr"/>
+          <a:lstStyle/>
+          <a:p>
+            <a:pPr algn="ctr" indent="0" marL="0">
+              <a:buNone/>
+            </a:pPr>
+            <a:r>
+              <a:rPr lang="en-US" sz="900" b="1" dirty="0">
+                <a:solidFill>
+                  <a:srgbClr val="0E7C7B"/>
+                </a:solidFill>
+                <a:latin typeface="Geist" pitchFamily="34" charset="0"/>
+                <a:ea typeface="Geist" pitchFamily="34" charset="-122"/>
+                <a:cs typeface="Geist" pitchFamily="34" charset="-120"/>
+              </a:rPr>
+              <a:t>ACME</a:t>
+            </a:r>
+            <a:endParaRPr lang="en-US" sz="900" dirty="0"/>
+          </a:p>
+        </p:txBody>
+      </p:sp>
+      <p:sp>
+        <p:nvSpPr>
+          <p:cNvPr id="37" name="Shape 34"/>
+          <p:cNvSpPr/>
+          <p:nvPr/>
+        </p:nvSpPr>
+        <p:spPr>
+          <a:xfrm>
+            <a:off x="6812280" y="3721608"/>
+            <a:ext cx="822960" cy="457200"/>
+          </a:xfrm>
+          <a:prstGeom prst="rect">
+            <a:avLst/>
+          </a:prstGeom>
+          <a:solidFill>
+            <a:srgbClr val="FFFFFF"/>
+          </a:solidFill>
+          <a:ln w="9525">
+            <a:solidFill>
+              <a:srgbClr val="E5E5E5"/>
+            </a:solidFill>
+            <a:prstDash val="solid"/>
+          </a:ln>
+        </p:spPr>
+      </p:sp>
+      <p:sp>
+        <p:nvSpPr>
+          <p:cNvPr id="38" name="Text 35"/>
+          <p:cNvSpPr txBox="1"/>
+          <p:nvPr/>
+        </p:nvSpPr>
+        <p:spPr>
+          <a:xfrm>
+            <a:off x="6812280" y="3721608"/>
+            <a:ext cx="822960" cy="457200"/>
+          </a:xfrm>
+          <a:prstGeom prst="rect">
+            <a:avLst/>
+          </a:prstGeom>
+          <a:noFill/>
+          <a:ln/>
+        </p:spPr>
+        <p:txBody>
+          <a:bodyPr wrap="square" lIns="635" tIns="635" rIns="635" bIns="635" rtlCol="0" anchor="ctr"/>
+          <a:lstStyle/>
+          <a:p>
+            <a:pPr algn="ctr" indent="0" marL="0">
+              <a:buNone/>
+            </a:pPr>
+            <a:r>
+              <a:rPr lang="en-US" sz="900" b="1" dirty="0">
+                <a:solidFill>
+                  <a:srgbClr val="0E7C7B"/>
+                </a:solidFill>
+                <a:latin typeface="Geist" pitchFamily="34" charset="0"/>
+                <a:ea typeface="Geist" pitchFamily="34" charset="-122"/>
+                <a:cs typeface="Geist" pitchFamily="34" charset="-120"/>
+              </a:rPr>
+              <a:t>NORTH</a:t>
+            </a:r>
+            <a:endParaRPr lang="en-US" sz="900" dirty="0"/>
+          </a:p>
+        </p:txBody>
+      </p:sp>
+      <p:sp>
+        <p:nvSpPr>
+          <p:cNvPr id="39" name="Shape 36"/>
+          <p:cNvSpPr/>
+          <p:nvPr/>
+        </p:nvSpPr>
+        <p:spPr>
+          <a:xfrm>
+            <a:off x="7772400" y="3721608"/>
+            <a:ext cx="822960" cy="457200"/>
+          </a:xfrm>
+          <a:prstGeom prst="rect">
+            <a:avLst/>
+          </a:prstGeom>
+          <a:solidFill>
+            <a:srgbClr val="FFFFFF"/>
+          </a:solidFill>
+          <a:ln w="9525">
+            <a:solidFill>
+              <a:srgbClr val="E5E5E5"/>
+            </a:solidFill>
+            <a:prstDash val="solid"/>
+          </a:ln>
+        </p:spPr>
+      </p:sp>
+      <p:sp>
+        <p:nvSpPr>
+          <p:cNvPr id="40" name="Text 37"/>
+          <p:cNvSpPr txBox="1"/>
+          <p:nvPr/>
+        </p:nvSpPr>
+        <p:spPr>
+          <a:xfrm>
+            <a:off x="7772400" y="3721608"/>
+            <a:ext cx="822960" cy="457200"/>
+          </a:xfrm>
+          <a:prstGeom prst="rect">
+            <a:avLst/>
+          </a:prstGeom>
+          <a:noFill/>
+          <a:ln/>
+        </p:spPr>
+        <p:txBody>
+          <a:bodyPr wrap="square" lIns="635" tIns="635" rIns="635" bIns="635" rtlCol="0" anchor="ctr"/>
+          <a:lstStyle/>
+          <a:p>
+            <a:pPr algn="ctr" indent="0" marL="0">
+              <a:buNone/>
+            </a:pPr>
+            <a:r>
+              <a:rPr lang="en-US" sz="900" b="1" dirty="0">
+                <a:solidFill>
+                  <a:srgbClr val="0E7C7B"/>
+                </a:solidFill>
+                <a:latin typeface="Geist" pitchFamily="34" charset="0"/>
+                <a:ea typeface="Geist" pitchFamily="34" charset="-122"/>
+                <a:cs typeface="Geist" pitchFamily="34" charset="-120"/>
+              </a:rPr>
+              <a:t>C3</a:t>
+            </a:r>
+            <a:endParaRPr lang="en-US" sz="900" dirty="0"/>
+          </a:p>
+        </p:txBody>
+      </p:sp>
+      <p:sp>
+        <p:nvSpPr>
+          <p:cNvPr id="41" name="Text 38"/>
+          <p:cNvSpPr txBox="1"/>
+          <p:nvPr/>
+        </p:nvSpPr>
+        <p:spPr>
+          <a:xfrm>
+            <a:off x="5852160" y="1691640"/>
+            <a:ext cx="2834640" cy="274320"/>
+          </a:xfrm>
+          <a:prstGeom prst="rect">
+            <a:avLst/>
+          </a:prstGeom>
+          <a:noFill/>
+          <a:ln/>
+        </p:spPr>
+        <p:txBody>
+          <a:bodyPr wrap="square" lIns="0" tIns="0" rIns="0" bIns="0" rtlCol="0" anchor="t"/>
+          <a:lstStyle/>
+          <a:p>
+            <a:pPr indent="0" marL="0">
+              <a:buNone/>
+            </a:pPr>
+            <a:r>
+              <a:rPr lang="en-US" sz="800" dirty="0">
+                <a:solidFill>
+                  <a:srgbClr val="0E7C7B"/>
                 </a:solidFill>
                 <a:latin typeface="IBM Plex Mono" pitchFamily="34" charset="0"/>
                 <a:ea typeface="IBM Plex Mono" pitchFamily="34" charset="-122"/>
                 <a:cs typeface="IBM Plex Mono" pitchFamily="34" charset="-120"/>
               </a:rPr>
-              <a:t>4</a:t>
-            </a:r>
-            <a:endParaRPr lang="en-US" sz="1100" dirty="0"/>
-          </a:p>
-        </p:txBody>
-      </p:sp>
-      <p:sp>
-        <p:nvSpPr>
-          <p:cNvPr id="27" name="Text 24"/>
-          <p:cNvSpPr txBox="1"/>
-          <p:nvPr/>
-        </p:nvSpPr>
-        <p:spPr>
-          <a:xfrm>
-            <a:off x="5349240" y="3182112"/>
-            <a:ext cx="3200400" cy="365760"/>
+              <a:t>COMPANIES — ISOLATED AT EVERY LAYER</a:t>
+            </a:r>
+            <a:endParaRPr lang="en-US" sz="800" dirty="0"/>
+          </a:p>
+        </p:txBody>
+      </p:sp>
+      <p:sp>
+        <p:nvSpPr>
+          <p:cNvPr id="42" name="Text 39"/>
+          <p:cNvSpPr txBox="1"/>
+          <p:nvPr/>
+        </p:nvSpPr>
+        <p:spPr>
+          <a:xfrm>
+            <a:off x="457200" y="4343400"/>
+            <a:ext cx="8229600" cy="274320"/>
           </a:xfrm>
           <a:prstGeom prst="rect">
             <a:avLst/>
@@ -4644,84 +4649,6 @@
               <a:buNone/>
             </a:pPr>
             <a:r>
-              <a:rPr lang="en-US" sz="1400" b="1" spc="-50" kern="0" dirty="0">
-                <a:solidFill>
-                  <a:srgbClr val="1C1C1C"/>
-                </a:solidFill>
-                <a:latin typeface="Geist" pitchFamily="34" charset="0"/>
-                <a:ea typeface="Geist" pitchFamily="34" charset="-122"/>
-                <a:cs typeface="Geist" pitchFamily="34" charset="-120"/>
-              </a:rPr>
-              <a:t>Evals before release</a:t>
-            </a:r>
-            <a:endParaRPr lang="en-US" sz="1400" dirty="0"/>
-          </a:p>
-        </p:txBody>
-      </p:sp>
-      <p:sp>
-        <p:nvSpPr>
-          <p:cNvPr id="28" name="Text 25"/>
-          <p:cNvSpPr txBox="1"/>
-          <p:nvPr/>
-        </p:nvSpPr>
-        <p:spPr>
-          <a:xfrm>
-            <a:off x="5349240" y="3547872"/>
-            <a:ext cx="3200400" cy="502920"/>
-          </a:xfrm>
-          <a:prstGeom prst="rect">
-            <a:avLst/>
-          </a:prstGeom>
-          <a:noFill/>
-          <a:ln/>
-        </p:spPr>
-        <p:txBody>
-          <a:bodyPr wrap="square" lIns="0" tIns="0" rIns="0" bIns="0" rtlCol="0" anchor="t"/>
-          <a:lstStyle/>
-          <a:p>
-            <a:pPr indent="0" marL="0">
-              <a:buNone/>
-            </a:pPr>
-            <a:r>
-              <a:rPr lang="en-US" sz="1050" dirty="0">
-                <a:solidFill>
-                  <a:srgbClr val="6B7280"/>
-                </a:solidFill>
-                <a:latin typeface="Geist" pitchFamily="34" charset="0"/>
-                <a:ea typeface="Geist" pitchFamily="34" charset="-122"/>
-                <a:cs typeface="Geist" pitchFamily="34" charset="-120"/>
-              </a:rPr>
-              <a:t>a test set of real tasks, scored, run on every change — like any other software</a:t>
-            </a:r>
-            <a:endParaRPr lang="en-US" sz="1050" dirty="0"/>
-          </a:p>
-        </p:txBody>
-      </p:sp>
-      <p:sp>
-        <p:nvSpPr>
-          <p:cNvPr id="29" name="Text 26"/>
-          <p:cNvSpPr txBox="1"/>
-          <p:nvPr/>
-        </p:nvSpPr>
-        <p:spPr>
-          <a:xfrm>
-            <a:off x="457200" y="4297680"/>
-            <a:ext cx="8229600" cy="274320"/>
-          </a:xfrm>
-          <a:prstGeom prst="rect">
-            <a:avLst/>
-          </a:prstGeom>
-          <a:noFill/>
-          <a:ln/>
-        </p:spPr>
-        <p:txBody>
-          <a:bodyPr wrap="square" lIns="0" tIns="0" rIns="0" bIns="0" rtlCol="0" anchor="t"/>
-          <a:lstStyle/>
-          <a:p>
-            <a:pPr indent="0" marL="0">
-              <a:buNone/>
-            </a:pPr>
-            <a:r>
               <a:rPr lang="en-US" sz="1000" dirty="0">
                 <a:solidFill>
                   <a:srgbClr val="919191"/>
@@ -4730,7 +4657,7 @@
                 <a:ea typeface="Geist" pitchFamily="34" charset="-122"/>
                 <a:cs typeface="Geist" pitchFamily="34" charset="-120"/>
               </a:rPr>
-              <a:t>Episodes 9, 10, 18 and 25 cover each of these in depth.</a:t>
+              <a:t>Get one lane wrong and you've built a data leak with a chat window.</a:t>
             </a:r>
             <a:endParaRPr lang="en-US" sz="1000" dirty="0"/>
           </a:p>
@@ -4783,6 +4710,975 @@
         </p:nvSpPr>
         <p:spPr>
           <a:xfrm>
+            <a:off x="457200" y="274320"/>
+            <a:ext cx="8229600" cy="248920"/>
+          </a:xfrm>
+          <a:prstGeom prst="rect">
+            <a:avLst/>
+          </a:prstGeom>
+          <a:noFill/>
+          <a:ln/>
+        </p:spPr>
+        <p:txBody>
+          <a:bodyPr wrap="square" lIns="0" tIns="0" rIns="0" bIns="0" rtlCol="0" anchor="ctr"/>
+          <a:lstStyle/>
+          <a:p>
+            <a:pPr indent="0" marL="0">
+              <a:buNone/>
+            </a:pPr>
+            <a:r>
+              <a:rPr lang="en-US" sz="1400" b="1" spc="100" kern="0" dirty="0">
+                <a:solidFill>
+                  <a:srgbClr val="1C1C1C"/>
+                </a:solidFill>
+                <a:latin typeface="Geist" pitchFamily="34" charset="0"/>
+                <a:ea typeface="Geist" pitchFamily="34" charset="-122"/>
+                <a:cs typeface="Geist" pitchFamily="34" charset="-120"/>
+              </a:rPr>
+              <a:t>learn  with  </a:t>
+            </a:r>
+            <a:pPr indent="0" marL="0">
+              <a:buNone/>
+            </a:pPr>
+            <a:r>
+              <a:rPr lang="en-US" sz="1400" b="1" spc="100" kern="0" dirty="0">
+                <a:solidFill>
+                  <a:srgbClr val="FF5700"/>
+                </a:solidFill>
+                <a:latin typeface="Geist" pitchFamily="34" charset="0"/>
+                <a:ea typeface="Geist" pitchFamily="34" charset="-122"/>
+                <a:cs typeface="Geist" pitchFamily="34" charset="-120"/>
+              </a:rPr>
+              <a:t>harsha</a:t>
+            </a:r>
+            <a:pPr indent="0" marL="0">
+              <a:buNone/>
+            </a:pPr>
+            <a:r>
+              <a:rPr lang="en-US" sz="600" b="1" spc="100" kern="0" dirty="0">
+                <a:solidFill>
+                  <a:srgbClr val="FF5700"/>
+                </a:solidFill>
+                <a:latin typeface="Geist" pitchFamily="34" charset="0"/>
+                <a:ea typeface="Geist" pitchFamily="34" charset="-122"/>
+                <a:cs typeface="Geist" pitchFamily="34" charset="-120"/>
+              </a:rPr>
+              <a:t>  ■</a:t>
+            </a:r>
+            <a:endParaRPr lang="en-US" sz="1400" dirty="0"/>
+          </a:p>
+        </p:txBody>
+      </p:sp>
+      <p:sp>
+        <p:nvSpPr>
+          <p:cNvPr id="4" name="Shape 1"/>
+          <p:cNvSpPr/>
+          <p:nvPr/>
+        </p:nvSpPr>
+        <p:spPr>
+          <a:xfrm>
+            <a:off x="457200" y="905256"/>
+            <a:ext cx="91440" cy="91440"/>
+          </a:xfrm>
+          <a:prstGeom prst="rect">
+            <a:avLst/>
+          </a:prstGeom>
+          <a:solidFill>
+            <a:srgbClr val="FF5700"/>
+          </a:solidFill>
+          <a:ln/>
+        </p:spPr>
+      </p:sp>
+      <p:sp>
+        <p:nvSpPr>
+          <p:cNvPr id="5" name="Text 2"/>
+          <p:cNvSpPr txBox="1"/>
+          <p:nvPr/>
+        </p:nvSpPr>
+        <p:spPr>
+          <a:xfrm>
+            <a:off x="621792" y="804672"/>
+            <a:ext cx="6400800" cy="292608"/>
+          </a:xfrm>
+          <a:prstGeom prst="rect">
+            <a:avLst/>
+          </a:prstGeom>
+          <a:noFill/>
+          <a:ln/>
+        </p:spPr>
+        <p:txBody>
+          <a:bodyPr wrap="square" lIns="0" tIns="0" rIns="0" bIns="0" rtlCol="0" anchor="ctr"/>
+          <a:lstStyle/>
+          <a:p>
+            <a:pPr indent="0" marL="0">
+              <a:buNone/>
+            </a:pPr>
+            <a:r>
+              <a:rPr lang="en-US" sz="1000" spc="400" kern="0" dirty="0">
+                <a:solidFill>
+                  <a:srgbClr val="FF5700"/>
+                </a:solidFill>
+                <a:latin typeface="IBM Plex Mono" pitchFamily="34" charset="0"/>
+                <a:ea typeface="IBM Plex Mono" pitchFamily="34" charset="-122"/>
+                <a:cs typeface="IBM Plex Mono" pitchFamily="34" charset="-120"/>
+              </a:rPr>
+              <a:t>WHAT BREAKS IN THE ENTERPRISE · 3 OF 3</a:t>
+            </a:r>
+            <a:endParaRPr lang="en-US" sz="1000" dirty="0"/>
+          </a:p>
+        </p:txBody>
+      </p:sp>
+      <p:sp>
+        <p:nvSpPr>
+          <p:cNvPr id="6" name="Text 3"/>
+          <p:cNvSpPr txBox="1"/>
+          <p:nvPr/>
+        </p:nvSpPr>
+        <p:spPr>
+          <a:xfrm>
+            <a:off x="457200" y="1078992"/>
+            <a:ext cx="8229600" cy="640080"/>
+          </a:xfrm>
+          <a:prstGeom prst="rect">
+            <a:avLst/>
+          </a:prstGeom>
+          <a:noFill/>
+          <a:ln/>
+        </p:spPr>
+        <p:txBody>
+          <a:bodyPr wrap="square" lIns="0" tIns="0" rIns="0" bIns="0" rtlCol="0" anchor="ctr"/>
+          <a:lstStyle/>
+          <a:p>
+            <a:pPr indent="0" marL="0">
+              <a:buNone/>
+            </a:pPr>
+            <a:r>
+              <a:rPr lang="en-US" sz="2300" b="1" spc="-100" kern="0" dirty="0">
+                <a:solidFill>
+                  <a:srgbClr val="1C1C1C"/>
+                </a:solidFill>
+                <a:latin typeface="Geist" pitchFamily="34" charset="0"/>
+                <a:ea typeface="Geist" pitchFamily="34" charset="-122"/>
+                <a:cs typeface="Geist" pitchFamily="34" charset="-120"/>
+              </a:rPr>
+              <a:t>Accountability: who answers for step 7 of 12?</a:t>
+            </a:r>
+            <a:endParaRPr lang="en-US" sz="2300" dirty="0"/>
+          </a:p>
+        </p:txBody>
+      </p:sp>
+      <p:sp>
+        <p:nvSpPr>
+          <p:cNvPr id="7" name="Text 4"/>
+          <p:cNvSpPr txBox="1"/>
+          <p:nvPr/>
+        </p:nvSpPr>
+        <p:spPr>
+          <a:xfrm>
+            <a:off x="457200" y="4754880"/>
+            <a:ext cx="5943600" cy="228600"/>
+          </a:xfrm>
+          <a:prstGeom prst="rect">
+            <a:avLst/>
+          </a:prstGeom>
+          <a:noFill/>
+          <a:ln/>
+        </p:spPr>
+        <p:txBody>
+          <a:bodyPr wrap="square" lIns="0" tIns="0" rIns="0" bIns="0" rtlCol="0" anchor="ctr"/>
+          <a:lstStyle/>
+          <a:p>
+            <a:pPr indent="0" marL="0">
+              <a:buNone/>
+            </a:pPr>
+            <a:r>
+              <a:rPr lang="en-US" sz="800" spc="100" kern="0" dirty="0">
+                <a:solidFill>
+                  <a:srgbClr val="919191"/>
+                </a:solidFill>
+                <a:latin typeface="IBM Plex Mono" pitchFamily="34" charset="0"/>
+                <a:ea typeface="IBM Plex Mono" pitchFamily="34" charset="-122"/>
+                <a:cs typeface="IBM Plex Mono" pitchFamily="34" charset="-120"/>
+              </a:rPr>
+              <a:t>Arthashastra Learning · The Agentic Enterprise</a:t>
+            </a:r>
+            <a:endParaRPr lang="en-US" sz="800" dirty="0"/>
+          </a:p>
+        </p:txBody>
+      </p:sp>
+      <p:sp>
+        <p:nvSpPr>
+          <p:cNvPr id="8" name="Text 5"/>
+          <p:cNvSpPr txBox="1"/>
+          <p:nvPr/>
+        </p:nvSpPr>
+        <p:spPr>
+          <a:xfrm>
+            <a:off x="6858000" y="4754880"/>
+            <a:ext cx="1828800" cy="228600"/>
+          </a:xfrm>
+          <a:prstGeom prst="rect">
+            <a:avLst/>
+          </a:prstGeom>
+          <a:noFill/>
+          <a:ln/>
+        </p:spPr>
+        <p:txBody>
+          <a:bodyPr wrap="square" lIns="0" tIns="0" rIns="0" bIns="0" rtlCol="0" anchor="ctr"/>
+          <a:lstStyle/>
+          <a:p>
+            <a:pPr algn="r" indent="0" marL="0">
+              <a:buNone/>
+            </a:pPr>
+            <a:r>
+              <a:rPr lang="en-US" sz="800" spc="100" kern="0" dirty="0">
+                <a:solidFill>
+                  <a:srgbClr val="919191"/>
+                </a:solidFill>
+                <a:latin typeface="IBM Plex Mono" pitchFamily="34" charset="0"/>
+                <a:ea typeface="IBM Plex Mono" pitchFamily="34" charset="-122"/>
+                <a:cs typeface="IBM Plex Mono" pitchFamily="34" charset="-120"/>
+              </a:rPr>
+              <a:t>arthashastra.ai</a:t>
+            </a:r>
+            <a:endParaRPr lang="en-US" sz="800" dirty="0"/>
+          </a:p>
+        </p:txBody>
+      </p:sp>
+      <p:sp>
+        <p:nvSpPr>
+          <p:cNvPr id="9" name="Shape 6"/>
+          <p:cNvSpPr/>
+          <p:nvPr/>
+        </p:nvSpPr>
+        <p:spPr>
+          <a:xfrm>
+            <a:off x="457200" y="1783080"/>
+            <a:ext cx="4023360" cy="1097280"/>
+          </a:xfrm>
+          <a:prstGeom prst="rect">
+            <a:avLst/>
+          </a:prstGeom>
+          <a:solidFill>
+            <a:srgbClr val="FFFFFF"/>
+          </a:solidFill>
+          <a:ln w="9525">
+            <a:solidFill>
+              <a:srgbClr val="E5E5E5"/>
+            </a:solidFill>
+            <a:prstDash val="solid"/>
+          </a:ln>
+        </p:spPr>
+      </p:sp>
+      <p:sp>
+        <p:nvSpPr>
+          <p:cNvPr id="10" name="Shape 7"/>
+          <p:cNvSpPr/>
+          <p:nvPr/>
+        </p:nvSpPr>
+        <p:spPr>
+          <a:xfrm>
+            <a:off x="685800" y="1984248"/>
+            <a:ext cx="310896" cy="310896"/>
+          </a:xfrm>
+          <a:prstGeom prst="rect">
+            <a:avLst/>
+          </a:prstGeom>
+          <a:solidFill>
+            <a:srgbClr val="FF5700"/>
+          </a:solidFill>
+          <a:ln/>
+        </p:spPr>
+      </p:sp>
+      <p:sp>
+        <p:nvSpPr>
+          <p:cNvPr id="11" name="Text 8"/>
+          <p:cNvSpPr txBox="1"/>
+          <p:nvPr/>
+        </p:nvSpPr>
+        <p:spPr>
+          <a:xfrm>
+            <a:off x="685800" y="1984248"/>
+            <a:ext cx="310896" cy="310896"/>
+          </a:xfrm>
+          <a:prstGeom prst="rect">
+            <a:avLst/>
+          </a:prstGeom>
+          <a:noFill/>
+          <a:ln/>
+        </p:spPr>
+        <p:txBody>
+          <a:bodyPr wrap="square" lIns="0" tIns="0" rIns="0" bIns="0" rtlCol="0" anchor="ctr"/>
+          <a:lstStyle/>
+          <a:p>
+            <a:pPr algn="ctr" indent="0" marL="0">
+              <a:buNone/>
+            </a:pPr>
+            <a:r>
+              <a:rPr lang="en-US" sz="1100" b="1" dirty="0">
+                <a:solidFill>
+                  <a:srgbClr val="FFFFFF"/>
+                </a:solidFill>
+                <a:latin typeface="IBM Plex Mono" pitchFamily="34" charset="0"/>
+                <a:ea typeface="IBM Plex Mono" pitchFamily="34" charset="-122"/>
+                <a:cs typeface="IBM Plex Mono" pitchFamily="34" charset="-120"/>
+              </a:rPr>
+              <a:t>1</a:t>
+            </a:r>
+            <a:endParaRPr lang="en-US" sz="1100" dirty="0"/>
+          </a:p>
+        </p:txBody>
+      </p:sp>
+      <p:sp>
+        <p:nvSpPr>
+          <p:cNvPr id="12" name="Text 9"/>
+          <p:cNvSpPr txBox="1"/>
+          <p:nvPr/>
+        </p:nvSpPr>
+        <p:spPr>
+          <a:xfrm>
+            <a:off x="1143000" y="1947672"/>
+            <a:ext cx="3200400" cy="365760"/>
+          </a:xfrm>
+          <a:prstGeom prst="rect">
+            <a:avLst/>
+          </a:prstGeom>
+          <a:noFill/>
+          <a:ln/>
+        </p:spPr>
+        <p:txBody>
+          <a:bodyPr wrap="square" lIns="0" tIns="0" rIns="0" bIns="0" rtlCol="0" anchor="t"/>
+          <a:lstStyle/>
+          <a:p>
+            <a:pPr indent="0" marL="0">
+              <a:buNone/>
+            </a:pPr>
+            <a:r>
+              <a:rPr lang="en-US" sz="1400" b="1" spc="-50" kern="0" dirty="0">
+                <a:solidFill>
+                  <a:srgbClr val="1C1C1C"/>
+                </a:solidFill>
+                <a:latin typeface="Geist" pitchFamily="34" charset="0"/>
+                <a:ea typeface="Geist" pitchFamily="34" charset="-122"/>
+                <a:cs typeface="Geist" pitchFamily="34" charset="-120"/>
+              </a:rPr>
+              <a:t>Trace every step</a:t>
+            </a:r>
+            <a:endParaRPr lang="en-US" sz="1400" dirty="0"/>
+          </a:p>
+        </p:txBody>
+      </p:sp>
+      <p:sp>
+        <p:nvSpPr>
+          <p:cNvPr id="13" name="Text 10"/>
+          <p:cNvSpPr txBox="1"/>
+          <p:nvPr/>
+        </p:nvSpPr>
+        <p:spPr>
+          <a:xfrm>
+            <a:off x="1143000" y="2313432"/>
+            <a:ext cx="3200400" cy="502920"/>
+          </a:xfrm>
+          <a:prstGeom prst="rect">
+            <a:avLst/>
+          </a:prstGeom>
+          <a:noFill/>
+          <a:ln/>
+        </p:spPr>
+        <p:txBody>
+          <a:bodyPr wrap="square" lIns="0" tIns="0" rIns="0" bIns="0" rtlCol="0" anchor="t"/>
+          <a:lstStyle/>
+          <a:p>
+            <a:pPr indent="0" marL="0">
+              <a:buNone/>
+            </a:pPr>
+            <a:r>
+              <a:rPr lang="en-US" sz="1050" dirty="0">
+                <a:solidFill>
+                  <a:srgbClr val="6B7280"/>
+                </a:solidFill>
+                <a:latin typeface="Geist" pitchFamily="34" charset="0"/>
+                <a:ea typeface="Geist" pitchFamily="34" charset="-122"/>
+                <a:cs typeface="Geist" pitchFamily="34" charset="-120"/>
+              </a:rPr>
+              <a:t>every model call, tool call and result, tied to a user and a company</a:t>
+            </a:r>
+            <a:endParaRPr lang="en-US" sz="1050" dirty="0"/>
+          </a:p>
+        </p:txBody>
+      </p:sp>
+      <p:sp>
+        <p:nvSpPr>
+          <p:cNvPr id="14" name="Shape 11"/>
+          <p:cNvSpPr/>
+          <p:nvPr/>
+        </p:nvSpPr>
+        <p:spPr>
+          <a:xfrm>
+            <a:off x="4663440" y="1783080"/>
+            <a:ext cx="4023360" cy="1097280"/>
+          </a:xfrm>
+          <a:prstGeom prst="rect">
+            <a:avLst/>
+          </a:prstGeom>
+          <a:solidFill>
+            <a:srgbClr val="FFFFFF"/>
+          </a:solidFill>
+          <a:ln w="9525">
+            <a:solidFill>
+              <a:srgbClr val="E5E5E5"/>
+            </a:solidFill>
+            <a:prstDash val="solid"/>
+          </a:ln>
+        </p:spPr>
+      </p:sp>
+      <p:sp>
+        <p:nvSpPr>
+          <p:cNvPr id="15" name="Shape 12"/>
+          <p:cNvSpPr/>
+          <p:nvPr/>
+        </p:nvSpPr>
+        <p:spPr>
+          <a:xfrm>
+            <a:off x="4892040" y="1984248"/>
+            <a:ext cx="310896" cy="310896"/>
+          </a:xfrm>
+          <a:prstGeom prst="rect">
+            <a:avLst/>
+          </a:prstGeom>
+          <a:solidFill>
+            <a:srgbClr val="FF5700"/>
+          </a:solidFill>
+          <a:ln/>
+        </p:spPr>
+      </p:sp>
+      <p:sp>
+        <p:nvSpPr>
+          <p:cNvPr id="16" name="Text 13"/>
+          <p:cNvSpPr txBox="1"/>
+          <p:nvPr/>
+        </p:nvSpPr>
+        <p:spPr>
+          <a:xfrm>
+            <a:off x="4892040" y="1984248"/>
+            <a:ext cx="310896" cy="310896"/>
+          </a:xfrm>
+          <a:prstGeom prst="rect">
+            <a:avLst/>
+          </a:prstGeom>
+          <a:noFill/>
+          <a:ln/>
+        </p:spPr>
+        <p:txBody>
+          <a:bodyPr wrap="square" lIns="0" tIns="0" rIns="0" bIns="0" rtlCol="0" anchor="ctr"/>
+          <a:lstStyle/>
+          <a:p>
+            <a:pPr algn="ctr" indent="0" marL="0">
+              <a:buNone/>
+            </a:pPr>
+            <a:r>
+              <a:rPr lang="en-US" sz="1100" b="1" dirty="0">
+                <a:solidFill>
+                  <a:srgbClr val="FFFFFF"/>
+                </a:solidFill>
+                <a:latin typeface="IBM Plex Mono" pitchFamily="34" charset="0"/>
+                <a:ea typeface="IBM Plex Mono" pitchFamily="34" charset="-122"/>
+                <a:cs typeface="IBM Plex Mono" pitchFamily="34" charset="-120"/>
+              </a:rPr>
+              <a:t>2</a:t>
+            </a:r>
+            <a:endParaRPr lang="en-US" sz="1100" dirty="0"/>
+          </a:p>
+        </p:txBody>
+      </p:sp>
+      <p:sp>
+        <p:nvSpPr>
+          <p:cNvPr id="17" name="Text 14"/>
+          <p:cNvSpPr txBox="1"/>
+          <p:nvPr/>
+        </p:nvSpPr>
+        <p:spPr>
+          <a:xfrm>
+            <a:off x="5349240" y="1947672"/>
+            <a:ext cx="3200400" cy="365760"/>
+          </a:xfrm>
+          <a:prstGeom prst="rect">
+            <a:avLst/>
+          </a:prstGeom>
+          <a:noFill/>
+          <a:ln/>
+        </p:spPr>
+        <p:txBody>
+          <a:bodyPr wrap="square" lIns="0" tIns="0" rIns="0" bIns="0" rtlCol="0" anchor="t"/>
+          <a:lstStyle/>
+          <a:p>
+            <a:pPr indent="0" marL="0">
+              <a:buNone/>
+            </a:pPr>
+            <a:r>
+              <a:rPr lang="en-US" sz="1400" b="1" spc="-50" kern="0" dirty="0">
+                <a:solidFill>
+                  <a:srgbClr val="1C1C1C"/>
+                </a:solidFill>
+                <a:latin typeface="Geist" pitchFamily="34" charset="0"/>
+                <a:ea typeface="Geist" pitchFamily="34" charset="-122"/>
+                <a:cs typeface="Geist" pitchFamily="34" charset="-120"/>
+              </a:rPr>
+              <a:t>Human-in-the-loop</a:t>
+            </a:r>
+            <a:endParaRPr lang="en-US" sz="1400" dirty="0"/>
+          </a:p>
+        </p:txBody>
+      </p:sp>
+      <p:sp>
+        <p:nvSpPr>
+          <p:cNvPr id="18" name="Text 15"/>
+          <p:cNvSpPr txBox="1"/>
+          <p:nvPr/>
+        </p:nvSpPr>
+        <p:spPr>
+          <a:xfrm>
+            <a:off x="5349240" y="2313432"/>
+            <a:ext cx="3200400" cy="502920"/>
+          </a:xfrm>
+          <a:prstGeom prst="rect">
+            <a:avLst/>
+          </a:prstGeom>
+          <a:noFill/>
+          <a:ln/>
+        </p:spPr>
+        <p:txBody>
+          <a:bodyPr wrap="square" lIns="0" tIns="0" rIns="0" bIns="0" rtlCol="0" anchor="t"/>
+          <a:lstStyle/>
+          <a:p>
+            <a:pPr indent="0" marL="0">
+              <a:buNone/>
+            </a:pPr>
+            <a:r>
+              <a:rPr lang="en-US" sz="1050" dirty="0">
+                <a:solidFill>
+                  <a:srgbClr val="6B7280"/>
+                </a:solidFill>
+                <a:latin typeface="Geist" pitchFamily="34" charset="0"/>
+                <a:ea typeface="Geist" pitchFamily="34" charset="-122"/>
+                <a:cs typeface="Geist" pitchFamily="34" charset="-120"/>
+              </a:rPr>
+              <a:t>irreversible or high-value actions pause for a person — by design, not by prompt</a:t>
+            </a:r>
+            <a:endParaRPr lang="en-US" sz="1050" dirty="0"/>
+          </a:p>
+        </p:txBody>
+      </p:sp>
+      <p:sp>
+        <p:nvSpPr>
+          <p:cNvPr id="19" name="Shape 16"/>
+          <p:cNvSpPr/>
+          <p:nvPr/>
+        </p:nvSpPr>
+        <p:spPr>
+          <a:xfrm>
+            <a:off x="457200" y="3017520"/>
+            <a:ext cx="4023360" cy="1097280"/>
+          </a:xfrm>
+          <a:prstGeom prst="rect">
+            <a:avLst/>
+          </a:prstGeom>
+          <a:solidFill>
+            <a:srgbClr val="FFFFFF"/>
+          </a:solidFill>
+          <a:ln w="9525">
+            <a:solidFill>
+              <a:srgbClr val="E5E5E5"/>
+            </a:solidFill>
+            <a:prstDash val="solid"/>
+          </a:ln>
+        </p:spPr>
+      </p:sp>
+      <p:sp>
+        <p:nvSpPr>
+          <p:cNvPr id="20" name="Shape 17"/>
+          <p:cNvSpPr/>
+          <p:nvPr/>
+        </p:nvSpPr>
+        <p:spPr>
+          <a:xfrm>
+            <a:off x="685800" y="3218688"/>
+            <a:ext cx="310896" cy="310896"/>
+          </a:xfrm>
+          <a:prstGeom prst="rect">
+            <a:avLst/>
+          </a:prstGeom>
+          <a:solidFill>
+            <a:srgbClr val="FF5700"/>
+          </a:solidFill>
+          <a:ln/>
+        </p:spPr>
+      </p:sp>
+      <p:sp>
+        <p:nvSpPr>
+          <p:cNvPr id="21" name="Text 18"/>
+          <p:cNvSpPr txBox="1"/>
+          <p:nvPr/>
+        </p:nvSpPr>
+        <p:spPr>
+          <a:xfrm>
+            <a:off x="685800" y="3218688"/>
+            <a:ext cx="310896" cy="310896"/>
+          </a:xfrm>
+          <a:prstGeom prst="rect">
+            <a:avLst/>
+          </a:prstGeom>
+          <a:noFill/>
+          <a:ln/>
+        </p:spPr>
+        <p:txBody>
+          <a:bodyPr wrap="square" lIns="0" tIns="0" rIns="0" bIns="0" rtlCol="0" anchor="ctr"/>
+          <a:lstStyle/>
+          <a:p>
+            <a:pPr algn="ctr" indent="0" marL="0">
+              <a:buNone/>
+            </a:pPr>
+            <a:r>
+              <a:rPr lang="en-US" sz="1100" b="1" dirty="0">
+                <a:solidFill>
+                  <a:srgbClr val="FFFFFF"/>
+                </a:solidFill>
+                <a:latin typeface="IBM Plex Mono" pitchFamily="34" charset="0"/>
+                <a:ea typeface="IBM Plex Mono" pitchFamily="34" charset="-122"/>
+                <a:cs typeface="IBM Plex Mono" pitchFamily="34" charset="-120"/>
+              </a:rPr>
+              <a:t>3</a:t>
+            </a:r>
+            <a:endParaRPr lang="en-US" sz="1100" dirty="0"/>
+          </a:p>
+        </p:txBody>
+      </p:sp>
+      <p:sp>
+        <p:nvSpPr>
+          <p:cNvPr id="22" name="Text 19"/>
+          <p:cNvSpPr txBox="1"/>
+          <p:nvPr/>
+        </p:nvSpPr>
+        <p:spPr>
+          <a:xfrm>
+            <a:off x="1143000" y="3182112"/>
+            <a:ext cx="3200400" cy="365760"/>
+          </a:xfrm>
+          <a:prstGeom prst="rect">
+            <a:avLst/>
+          </a:prstGeom>
+          <a:noFill/>
+          <a:ln/>
+        </p:spPr>
+        <p:txBody>
+          <a:bodyPr wrap="square" lIns="0" tIns="0" rIns="0" bIns="0" rtlCol="0" anchor="t"/>
+          <a:lstStyle/>
+          <a:p>
+            <a:pPr indent="0" marL="0">
+              <a:buNone/>
+            </a:pPr>
+            <a:r>
+              <a:rPr lang="en-US" sz="1400" b="1" spc="-50" kern="0" dirty="0">
+                <a:solidFill>
+                  <a:srgbClr val="1C1C1C"/>
+                </a:solidFill>
+                <a:latin typeface="Geist" pitchFamily="34" charset="0"/>
+                <a:ea typeface="Geist" pitchFamily="34" charset="-122"/>
+                <a:cs typeface="Geist" pitchFamily="34" charset="-120"/>
+              </a:rPr>
+              <a:t>Caps on steps, cost, time</a:t>
+            </a:r>
+            <a:endParaRPr lang="en-US" sz="1400" dirty="0"/>
+          </a:p>
+        </p:txBody>
+      </p:sp>
+      <p:sp>
+        <p:nvSpPr>
+          <p:cNvPr id="23" name="Text 20"/>
+          <p:cNvSpPr txBox="1"/>
+          <p:nvPr/>
+        </p:nvSpPr>
+        <p:spPr>
+          <a:xfrm>
+            <a:off x="1143000" y="3547872"/>
+            <a:ext cx="3200400" cy="502920"/>
+          </a:xfrm>
+          <a:prstGeom prst="rect">
+            <a:avLst/>
+          </a:prstGeom>
+          <a:noFill/>
+          <a:ln/>
+        </p:spPr>
+        <p:txBody>
+          <a:bodyPr wrap="square" lIns="0" tIns="0" rIns="0" bIns="0" rtlCol="0" anchor="t"/>
+          <a:lstStyle/>
+          <a:p>
+            <a:pPr indent="0" marL="0">
+              <a:buNone/>
+            </a:pPr>
+            <a:r>
+              <a:rPr lang="en-US" sz="1050" dirty="0">
+                <a:solidFill>
+                  <a:srgbClr val="6B7280"/>
+                </a:solidFill>
+                <a:latin typeface="Geist" pitchFamily="34" charset="0"/>
+                <a:ea typeface="Geist" pitchFamily="34" charset="-122"/>
+                <a:cs typeface="Geist" pitchFamily="34" charset="-120"/>
+              </a:rPr>
+              <a:t>a runaway loop is a budget incident; the cap is the circuit breaker</a:t>
+            </a:r>
+            <a:endParaRPr lang="en-US" sz="1050" dirty="0"/>
+          </a:p>
+        </p:txBody>
+      </p:sp>
+      <p:sp>
+        <p:nvSpPr>
+          <p:cNvPr id="24" name="Shape 21"/>
+          <p:cNvSpPr/>
+          <p:nvPr/>
+        </p:nvSpPr>
+        <p:spPr>
+          <a:xfrm>
+            <a:off x="4663440" y="3017520"/>
+            <a:ext cx="4023360" cy="1097280"/>
+          </a:xfrm>
+          <a:prstGeom prst="rect">
+            <a:avLst/>
+          </a:prstGeom>
+          <a:solidFill>
+            <a:srgbClr val="FFFFFF"/>
+          </a:solidFill>
+          <a:ln w="9525">
+            <a:solidFill>
+              <a:srgbClr val="E5E5E5"/>
+            </a:solidFill>
+            <a:prstDash val="solid"/>
+          </a:ln>
+        </p:spPr>
+      </p:sp>
+      <p:sp>
+        <p:nvSpPr>
+          <p:cNvPr id="25" name="Shape 22"/>
+          <p:cNvSpPr/>
+          <p:nvPr/>
+        </p:nvSpPr>
+        <p:spPr>
+          <a:xfrm>
+            <a:off x="4892040" y="3218688"/>
+            <a:ext cx="310896" cy="310896"/>
+          </a:xfrm>
+          <a:prstGeom prst="rect">
+            <a:avLst/>
+          </a:prstGeom>
+          <a:solidFill>
+            <a:srgbClr val="FF5700"/>
+          </a:solidFill>
+          <a:ln/>
+        </p:spPr>
+      </p:sp>
+      <p:sp>
+        <p:nvSpPr>
+          <p:cNvPr id="26" name="Text 23"/>
+          <p:cNvSpPr txBox="1"/>
+          <p:nvPr/>
+        </p:nvSpPr>
+        <p:spPr>
+          <a:xfrm>
+            <a:off x="4892040" y="3218688"/>
+            <a:ext cx="310896" cy="310896"/>
+          </a:xfrm>
+          <a:prstGeom prst="rect">
+            <a:avLst/>
+          </a:prstGeom>
+          <a:noFill/>
+          <a:ln/>
+        </p:spPr>
+        <p:txBody>
+          <a:bodyPr wrap="square" lIns="0" tIns="0" rIns="0" bIns="0" rtlCol="0" anchor="ctr"/>
+          <a:lstStyle/>
+          <a:p>
+            <a:pPr algn="ctr" indent="0" marL="0">
+              <a:buNone/>
+            </a:pPr>
+            <a:r>
+              <a:rPr lang="en-US" sz="1100" b="1" dirty="0">
+                <a:solidFill>
+                  <a:srgbClr val="FFFFFF"/>
+                </a:solidFill>
+                <a:latin typeface="IBM Plex Mono" pitchFamily="34" charset="0"/>
+                <a:ea typeface="IBM Plex Mono" pitchFamily="34" charset="-122"/>
+                <a:cs typeface="IBM Plex Mono" pitchFamily="34" charset="-120"/>
+              </a:rPr>
+              <a:t>4</a:t>
+            </a:r>
+            <a:endParaRPr lang="en-US" sz="1100" dirty="0"/>
+          </a:p>
+        </p:txBody>
+      </p:sp>
+      <p:sp>
+        <p:nvSpPr>
+          <p:cNvPr id="27" name="Text 24"/>
+          <p:cNvSpPr txBox="1"/>
+          <p:nvPr/>
+        </p:nvSpPr>
+        <p:spPr>
+          <a:xfrm>
+            <a:off x="5349240" y="3182112"/>
+            <a:ext cx="3200400" cy="365760"/>
+          </a:xfrm>
+          <a:prstGeom prst="rect">
+            <a:avLst/>
+          </a:prstGeom>
+          <a:noFill/>
+          <a:ln/>
+        </p:spPr>
+        <p:txBody>
+          <a:bodyPr wrap="square" lIns="0" tIns="0" rIns="0" bIns="0" rtlCol="0" anchor="t"/>
+          <a:lstStyle/>
+          <a:p>
+            <a:pPr indent="0" marL="0">
+              <a:buNone/>
+            </a:pPr>
+            <a:r>
+              <a:rPr lang="en-US" sz="1400" b="1" spc="-50" kern="0" dirty="0">
+                <a:solidFill>
+                  <a:srgbClr val="1C1C1C"/>
+                </a:solidFill>
+                <a:latin typeface="Geist" pitchFamily="34" charset="0"/>
+                <a:ea typeface="Geist" pitchFamily="34" charset="-122"/>
+                <a:cs typeface="Geist" pitchFamily="34" charset="-120"/>
+              </a:rPr>
+              <a:t>Evals before release</a:t>
+            </a:r>
+            <a:endParaRPr lang="en-US" sz="1400" dirty="0"/>
+          </a:p>
+        </p:txBody>
+      </p:sp>
+      <p:sp>
+        <p:nvSpPr>
+          <p:cNvPr id="28" name="Text 25"/>
+          <p:cNvSpPr txBox="1"/>
+          <p:nvPr/>
+        </p:nvSpPr>
+        <p:spPr>
+          <a:xfrm>
+            <a:off x="5349240" y="3547872"/>
+            <a:ext cx="3200400" cy="502920"/>
+          </a:xfrm>
+          <a:prstGeom prst="rect">
+            <a:avLst/>
+          </a:prstGeom>
+          <a:noFill/>
+          <a:ln/>
+        </p:spPr>
+        <p:txBody>
+          <a:bodyPr wrap="square" lIns="0" tIns="0" rIns="0" bIns="0" rtlCol="0" anchor="t"/>
+          <a:lstStyle/>
+          <a:p>
+            <a:pPr indent="0" marL="0">
+              <a:buNone/>
+            </a:pPr>
+            <a:r>
+              <a:rPr lang="en-US" sz="1050" dirty="0">
+                <a:solidFill>
+                  <a:srgbClr val="6B7280"/>
+                </a:solidFill>
+                <a:latin typeface="Geist" pitchFamily="34" charset="0"/>
+                <a:ea typeface="Geist" pitchFamily="34" charset="-122"/>
+                <a:cs typeface="Geist" pitchFamily="34" charset="-120"/>
+              </a:rPr>
+              <a:t>a test set of real tasks, scored, run on every change — like any other software</a:t>
+            </a:r>
+            <a:endParaRPr lang="en-US" sz="1050" dirty="0"/>
+          </a:p>
+        </p:txBody>
+      </p:sp>
+      <p:sp>
+        <p:nvSpPr>
+          <p:cNvPr id="29" name="Text 26"/>
+          <p:cNvSpPr txBox="1"/>
+          <p:nvPr/>
+        </p:nvSpPr>
+        <p:spPr>
+          <a:xfrm>
+            <a:off x="457200" y="4297680"/>
+            <a:ext cx="8229600" cy="274320"/>
+          </a:xfrm>
+          <a:prstGeom prst="rect">
+            <a:avLst/>
+          </a:prstGeom>
+          <a:noFill/>
+          <a:ln/>
+        </p:spPr>
+        <p:txBody>
+          <a:bodyPr wrap="square" lIns="0" tIns="0" rIns="0" bIns="0" rtlCol="0" anchor="t"/>
+          <a:lstStyle/>
+          <a:p>
+            <a:pPr indent="0" marL="0">
+              <a:buNone/>
+            </a:pPr>
+            <a:r>
+              <a:rPr lang="en-US" sz="1000" dirty="0">
+                <a:solidFill>
+                  <a:srgbClr val="919191"/>
+                </a:solidFill>
+                <a:latin typeface="Geist" pitchFamily="34" charset="0"/>
+                <a:ea typeface="Geist" pitchFamily="34" charset="-122"/>
+                <a:cs typeface="Geist" pitchFamily="34" charset="-120"/>
+              </a:rPr>
+              <a:t>Episodes 9, 10, 18 and 25 cover each of these in depth.</a:t>
+            </a:r>
+            <a:endParaRPr lang="en-US" sz="1000" dirty="0"/>
+          </a:p>
+        </p:txBody>
+      </p:sp>
+    </p:spTree>
+  </p:cSld>
+  <p:clrMapOvr>
+    <a:masterClrMapping/>
+  </p:clrMapOvr>
+</p:sld>
+</file>
+
+<file path=ppt/slides/slide13.xml><?xml version="1.0" encoding="utf-8"?>
+<p:sld xmlns:a="http://schemas.openxmlformats.org/drawingml/2006/main" xmlns:r="http://schemas.openxmlformats.org/officeDocument/2006/relationships" xmlns:p="http://schemas.openxmlformats.org/presentationml/2006/main">
+  <p:cSld name="Slide 13">
+    <p:bg>
+      <p:bgPr>
+        <a:blipFill dpi="0" rotWithShape="1">
+          <a:blip r:embed="rId1">
+            <a:lum/>
+          </a:blip>
+          <a:srcRect/>
+          <a:stretch>
+            <a:fillRect/>
+          </a:stretch>
+        </a:blipFill>
+        <a:effectLst/>
+      </p:bgPr>
+    </p:bg>
+    <p:spTree>
+      <p:nvGrpSpPr>
+        <p:cNvPr id="1" name=""/>
+        <p:cNvGrpSpPr/>
+        <p:nvPr/>
+      </p:nvGrpSpPr>
+      <p:grpSpPr>
+        <a:xfrm>
+          <a:off x="0" y="0"/>
+          <a:ext cx="0" cy="0"/>
+          <a:chOff x="0" y="0"/>
+          <a:chExt cx="0" cy="0"/>
+        </a:xfrm>
+      </p:grpSpPr>
+      <p:sp>
+        <p:nvSpPr>
+          <p:cNvPr id="3" name="Text 0"/>
+          <p:cNvSpPr txBox="1"/>
+          <p:nvPr/>
+        </p:nvSpPr>
+        <p:spPr>
+          <a:xfrm>
             <a:off x="548640" y="384048"/>
             <a:ext cx="8229600" cy="320040"/>
           </a:xfrm>
@@ -11029,7 +11925,7 @@
                 <a:ea typeface="IBM Plex Mono" pitchFamily="34" charset="-122"/>
                 <a:cs typeface="IBM Plex Mono" pitchFamily="34" charset="-120"/>
               </a:rPr>
-              <a:t>THE SERIES</a:t>
+              <a:t>THE REAL DIFFERENCE</a:t>
             </a:r>
             <a:endParaRPr lang="en-US" sz="1000" dirty="0"/>
           </a:p>
@@ -11068,7 +11964,7 @@
                 <a:ea typeface="Geist" pitchFamily="34" charset="-122"/>
                 <a:cs typeface="Geist" pitchFamily="34" charset="-120"/>
               </a:rPr>
-              <a:t>Where agents live in an ERP</a:t>
+              <a:t>Who writes the branch?</a:t>
             </a:r>
             <a:endParaRPr lang="en-US" sz="2800" dirty="0"/>
           </a:p>
@@ -11154,14 +12050,870 @@
       </p:sp>
       <p:sp>
         <p:nvSpPr>
-          <p:cNvPr id="9" name="Shape 6"/>
+          <p:cNvPr id="9" name="Text 6"/>
+          <p:cNvSpPr txBox="1"/>
+          <p:nvPr/>
+        </p:nvSpPr>
+        <p:spPr>
+          <a:xfrm>
+            <a:off x="457200" y="1874520"/>
+            <a:ext cx="1828800" cy="228600"/>
+          </a:xfrm>
+          <a:prstGeom prst="rect">
+            <a:avLst/>
+          </a:prstGeom>
+          <a:noFill/>
+          <a:ln/>
+        </p:spPr>
+        <p:txBody>
+          <a:bodyPr wrap="square" lIns="0" tIns="0" rIns="0" bIns="0" rtlCol="0" anchor="t"/>
+          <a:lstStyle/>
+          <a:p>
+            <a:pPr indent="0" marL="0">
+              <a:buNone/>
+            </a:pPr>
+            <a:endParaRPr lang="en-US" sz="800" dirty="0"/>
+          </a:p>
+        </p:txBody>
+      </p:sp>
+      <p:sp>
+        <p:nvSpPr>
+          <p:cNvPr id="10" name="Text 7"/>
+          <p:cNvSpPr txBox="1"/>
+          <p:nvPr/>
+        </p:nvSpPr>
+        <p:spPr>
+          <a:xfrm>
+            <a:off x="2286000" y="1874520"/>
+            <a:ext cx="2194560" cy="228600"/>
+          </a:xfrm>
+          <a:prstGeom prst="rect">
+            <a:avLst/>
+          </a:prstGeom>
+          <a:noFill/>
+          <a:ln/>
+        </p:spPr>
+        <p:txBody>
+          <a:bodyPr wrap="square" lIns="0" tIns="0" rIns="0" bIns="0" rtlCol="0" anchor="t"/>
+          <a:lstStyle/>
+          <a:p>
+            <a:pPr indent="0" marL="0">
+              <a:buNone/>
+            </a:pPr>
+            <a:r>
+              <a:rPr lang="en-US" sz="800" dirty="0">
+                <a:solidFill>
+                  <a:srgbClr val="FF5700"/>
+                </a:solidFill>
+                <a:latin typeface="IBM Plex Mono" pitchFamily="34" charset="0"/>
+                <a:ea typeface="IBM Plex Mono" pitchFamily="34" charset="-122"/>
+                <a:cs typeface="IBM Plex Mono" pitchFamily="34" charset="-120"/>
+              </a:rPr>
+              <a:t>WHAT IT DECIDES</a:t>
+            </a:r>
+            <a:endParaRPr lang="en-US" sz="800" dirty="0"/>
+          </a:p>
+        </p:txBody>
+      </p:sp>
+      <p:sp>
+        <p:nvSpPr>
+          <p:cNvPr id="11" name="Text 8"/>
+          <p:cNvSpPr txBox="1"/>
+          <p:nvPr/>
+        </p:nvSpPr>
+        <p:spPr>
+          <a:xfrm>
+            <a:off x="4526280" y="1874520"/>
+            <a:ext cx="2011680" cy="228600"/>
+          </a:xfrm>
+          <a:prstGeom prst="rect">
+            <a:avLst/>
+          </a:prstGeom>
+          <a:noFill/>
+          <a:ln/>
+        </p:spPr>
+        <p:txBody>
+          <a:bodyPr wrap="square" lIns="0" tIns="0" rIns="0" bIns="0" rtlCol="0" anchor="t"/>
+          <a:lstStyle/>
+          <a:p>
+            <a:pPr indent="0" marL="0">
+              <a:buNone/>
+            </a:pPr>
+            <a:r>
+              <a:rPr lang="en-US" sz="800" dirty="0">
+                <a:solidFill>
+                  <a:srgbClr val="FF5700"/>
+                </a:solidFill>
+                <a:latin typeface="IBM Plex Mono" pitchFamily="34" charset="0"/>
+                <a:ea typeface="IBM Plex Mono" pitchFamily="34" charset="-122"/>
+                <a:cs typeface="IBM Plex Mono" pitchFamily="34" charset="-120"/>
+              </a:rPr>
+              <a:t>WHO WROTE THE DECISION</a:t>
+            </a:r>
+            <a:endParaRPr lang="en-US" sz="800" dirty="0"/>
+          </a:p>
+        </p:txBody>
+      </p:sp>
+      <p:sp>
+        <p:nvSpPr>
+          <p:cNvPr id="12" name="Text 9"/>
+          <p:cNvSpPr txBox="1"/>
+          <p:nvPr/>
+        </p:nvSpPr>
+        <p:spPr>
+          <a:xfrm>
+            <a:off x="6583680" y="1874520"/>
+            <a:ext cx="2103120" cy="228600"/>
+          </a:xfrm>
+          <a:prstGeom prst="rect">
+            <a:avLst/>
+          </a:prstGeom>
+          <a:noFill/>
+          <a:ln/>
+        </p:spPr>
+        <p:txBody>
+          <a:bodyPr wrap="square" lIns="0" tIns="0" rIns="0" bIns="0" rtlCol="0" anchor="t"/>
+          <a:lstStyle/>
+          <a:p>
+            <a:pPr indent="0" marL="0">
+              <a:buNone/>
+            </a:pPr>
+            <a:r>
+              <a:rPr lang="en-US" sz="800" dirty="0">
+                <a:solidFill>
+                  <a:srgbClr val="FF5700"/>
+                </a:solidFill>
+                <a:latin typeface="IBM Plex Mono" pitchFamily="34" charset="0"/>
+                <a:ea typeface="IBM Plex Mono" pitchFamily="34" charset="-122"/>
+                <a:cs typeface="IBM Plex Mono" pitchFamily="34" charset="-120"/>
+              </a:rPr>
+              <a:t>HANDLES THE UNEXPECTED?</a:t>
+            </a:r>
+            <a:endParaRPr lang="en-US" sz="800" dirty="0"/>
+          </a:p>
+        </p:txBody>
+      </p:sp>
+      <p:sp>
+        <p:nvSpPr>
+          <p:cNvPr id="13" name="Shape 10"/>
           <p:cNvSpPr/>
           <p:nvPr/>
         </p:nvSpPr>
         <p:spPr>
           <a:xfrm>
-            <a:off x="457200" y="1783080"/>
-            <a:ext cx="2606040" cy="1097280"/>
+            <a:off x="457200" y="2130552"/>
+            <a:ext cx="8229600" cy="0"/>
+          </a:xfrm>
+          <a:prstGeom prst="line">
+            <a:avLst/>
+          </a:prstGeom>
+          <a:noFill/>
+          <a:ln w="9525">
+            <a:solidFill>
+              <a:srgbClr val="E5E5E5"/>
+            </a:solidFill>
+            <a:prstDash val="solid"/>
+          </a:ln>
+        </p:spPr>
+      </p:sp>
+      <p:sp>
+        <p:nvSpPr>
+          <p:cNvPr id="14" name="Text 11"/>
+          <p:cNvSpPr txBox="1"/>
+          <p:nvPr/>
+        </p:nvSpPr>
+        <p:spPr>
+          <a:xfrm>
+            <a:off x="548640" y="2240280"/>
+            <a:ext cx="1737360" cy="365760"/>
+          </a:xfrm>
+          <a:prstGeom prst="rect">
+            <a:avLst/>
+          </a:prstGeom>
+          <a:noFill/>
+          <a:ln/>
+        </p:spPr>
+        <p:txBody>
+          <a:bodyPr wrap="square" lIns="0" tIns="0" rIns="0" bIns="0" rtlCol="0" anchor="t"/>
+          <a:lstStyle/>
+          <a:p>
+            <a:pPr indent="0" marL="0">
+              <a:buNone/>
+            </a:pPr>
+            <a:r>
+              <a:rPr lang="en-US" sz="1200" b="1" spc="-50" kern="0" dirty="0">
+                <a:solidFill>
+                  <a:srgbClr val="1C1C1C"/>
+                </a:solidFill>
+                <a:latin typeface="Geist" pitchFamily="34" charset="0"/>
+                <a:ea typeface="Geist" pitchFamily="34" charset="-122"/>
+                <a:cs typeface="Geist" pitchFamily="34" charset="-120"/>
+              </a:rPr>
+              <a:t>Scheduler</a:t>
+            </a:r>
+            <a:endParaRPr lang="en-US" sz="1200" dirty="0"/>
+          </a:p>
+        </p:txBody>
+      </p:sp>
+      <p:sp>
+        <p:nvSpPr>
+          <p:cNvPr id="15" name="Text 12"/>
+          <p:cNvSpPr txBox="1"/>
+          <p:nvPr/>
+        </p:nvSpPr>
+        <p:spPr>
+          <a:xfrm>
+            <a:off x="548640" y="2432304"/>
+            <a:ext cx="1737360" cy="228600"/>
+          </a:xfrm>
+          <a:prstGeom prst="rect">
+            <a:avLst/>
+          </a:prstGeom>
+          <a:noFill/>
+          <a:ln/>
+        </p:spPr>
+        <p:txBody>
+          <a:bodyPr wrap="square" lIns="0" tIns="0" rIns="0" bIns="0" rtlCol="0" anchor="t"/>
+          <a:lstStyle/>
+          <a:p>
+            <a:pPr indent="0" marL="0">
+              <a:buNone/>
+            </a:pPr>
+            <a:r>
+              <a:rPr lang="en-US" sz="800" dirty="0">
+                <a:solidFill>
+                  <a:srgbClr val="919191"/>
+                </a:solidFill>
+                <a:latin typeface="Geist" pitchFamily="34" charset="0"/>
+                <a:ea typeface="Geist" pitchFamily="34" charset="-122"/>
+                <a:cs typeface="Geist" pitchFamily="34" charset="-120"/>
+              </a:rPr>
+              <a:t>cron, Airflow</a:t>
+            </a:r>
+            <a:endParaRPr lang="en-US" sz="800" dirty="0"/>
+          </a:p>
+        </p:txBody>
+      </p:sp>
+      <p:sp>
+        <p:nvSpPr>
+          <p:cNvPr id="16" name="Text 13"/>
+          <p:cNvSpPr txBox="1"/>
+          <p:nvPr/>
+        </p:nvSpPr>
+        <p:spPr>
+          <a:xfrm>
+            <a:off x="2286000" y="2258568"/>
+            <a:ext cx="2194560" cy="411480"/>
+          </a:xfrm>
+          <a:prstGeom prst="rect">
+            <a:avLst/>
+          </a:prstGeom>
+          <a:noFill/>
+          <a:ln/>
+        </p:spPr>
+        <p:txBody>
+          <a:bodyPr wrap="square" lIns="0" tIns="0" rIns="0" bIns="0" rtlCol="0" anchor="t"/>
+          <a:lstStyle/>
+          <a:p>
+            <a:pPr indent="0" marL="0">
+              <a:buNone/>
+            </a:pPr>
+            <a:r>
+              <a:rPr lang="en-US" sz="1050" dirty="0">
+                <a:solidFill>
+                  <a:srgbClr val="1C1C1C"/>
+                </a:solidFill>
+                <a:latin typeface="Geist" pitchFamily="34" charset="0"/>
+                <a:ea typeface="Geist" pitchFamily="34" charset="-122"/>
+                <a:cs typeface="Geist" pitchFamily="34" charset="-120"/>
+              </a:rPr>
+              <a:t>when to run a fixed thing</a:t>
+            </a:r>
+            <a:endParaRPr lang="en-US" sz="1050" dirty="0"/>
+          </a:p>
+        </p:txBody>
+      </p:sp>
+      <p:sp>
+        <p:nvSpPr>
+          <p:cNvPr id="17" name="Text 14"/>
+          <p:cNvSpPr txBox="1"/>
+          <p:nvPr/>
+        </p:nvSpPr>
+        <p:spPr>
+          <a:xfrm>
+            <a:off x="4526280" y="2258568"/>
+            <a:ext cx="2011680" cy="411480"/>
+          </a:xfrm>
+          <a:prstGeom prst="rect">
+            <a:avLst/>
+          </a:prstGeom>
+          <a:noFill/>
+          <a:ln/>
+        </p:spPr>
+        <p:txBody>
+          <a:bodyPr wrap="square" lIns="0" tIns="0" rIns="0" bIns="0" rtlCol="0" anchor="t"/>
+          <a:lstStyle/>
+          <a:p>
+            <a:pPr indent="0" marL="0">
+              <a:buNone/>
+            </a:pPr>
+            <a:r>
+              <a:rPr lang="en-US" sz="1050" dirty="0">
+                <a:solidFill>
+                  <a:srgbClr val="1C1C1C"/>
+                </a:solidFill>
+                <a:latin typeface="Geist" pitchFamily="34" charset="0"/>
+                <a:ea typeface="Geist" pitchFamily="34" charset="-122"/>
+                <a:cs typeface="Geist" pitchFamily="34" charset="-120"/>
+              </a:rPr>
+              <a:t>the developer</a:t>
+            </a:r>
+            <a:endParaRPr lang="en-US" sz="1050" dirty="0"/>
+          </a:p>
+        </p:txBody>
+      </p:sp>
+      <p:sp>
+        <p:nvSpPr>
+          <p:cNvPr id="18" name="Text 15"/>
+          <p:cNvSpPr txBox="1"/>
+          <p:nvPr/>
+        </p:nvSpPr>
+        <p:spPr>
+          <a:xfrm>
+            <a:off x="6583680" y="2258568"/>
+            <a:ext cx="2103120" cy="411480"/>
+          </a:xfrm>
+          <a:prstGeom prst="rect">
+            <a:avLst/>
+          </a:prstGeom>
+          <a:noFill/>
+          <a:ln/>
+        </p:spPr>
+        <p:txBody>
+          <a:bodyPr wrap="square" lIns="0" tIns="0" rIns="0" bIns="0" rtlCol="0" anchor="t"/>
+          <a:lstStyle/>
+          <a:p>
+            <a:pPr indent="0" marL="0">
+              <a:buNone/>
+            </a:pPr>
+            <a:r>
+              <a:rPr lang="en-US" sz="1050" dirty="0">
+                <a:solidFill>
+                  <a:srgbClr val="6B7280"/>
+                </a:solidFill>
+                <a:latin typeface="Geist" pitchFamily="34" charset="0"/>
+                <a:ea typeface="Geist" pitchFamily="34" charset="-122"/>
+                <a:cs typeface="Geist" pitchFamily="34" charset="-120"/>
+              </a:rPr>
+              <a:t>No</a:t>
+            </a:r>
+            <a:endParaRPr lang="en-US" sz="1050" dirty="0"/>
+          </a:p>
+        </p:txBody>
+      </p:sp>
+      <p:sp>
+        <p:nvSpPr>
+          <p:cNvPr id="19" name="Text 16"/>
+          <p:cNvSpPr txBox="1"/>
+          <p:nvPr/>
+        </p:nvSpPr>
+        <p:spPr>
+          <a:xfrm>
+            <a:off x="548640" y="2734056"/>
+            <a:ext cx="1737360" cy="365760"/>
+          </a:xfrm>
+          <a:prstGeom prst="rect">
+            <a:avLst/>
+          </a:prstGeom>
+          <a:noFill/>
+          <a:ln/>
+        </p:spPr>
+        <p:txBody>
+          <a:bodyPr wrap="square" lIns="0" tIns="0" rIns="0" bIns="0" rtlCol="0" anchor="t"/>
+          <a:lstStyle/>
+          <a:p>
+            <a:pPr indent="0" marL="0">
+              <a:buNone/>
+            </a:pPr>
+            <a:r>
+              <a:rPr lang="en-US" sz="1200" b="1" spc="-50" kern="0" dirty="0">
+                <a:solidFill>
+                  <a:srgbClr val="1C1C1C"/>
+                </a:solidFill>
+                <a:latin typeface="Geist" pitchFamily="34" charset="0"/>
+                <a:ea typeface="Geist" pitchFamily="34" charset="-122"/>
+                <a:cs typeface="Geist" pitchFamily="34" charset="-120"/>
+              </a:rPr>
+              <a:t>Workflow / state machine</a:t>
+            </a:r>
+            <a:endParaRPr lang="en-US" sz="1200" dirty="0"/>
+          </a:p>
+        </p:txBody>
+      </p:sp>
+      <p:sp>
+        <p:nvSpPr>
+          <p:cNvPr id="20" name="Text 17"/>
+          <p:cNvSpPr txBox="1"/>
+          <p:nvPr/>
+        </p:nvSpPr>
+        <p:spPr>
+          <a:xfrm>
+            <a:off x="2286000" y="2752344"/>
+            <a:ext cx="2194560" cy="411480"/>
+          </a:xfrm>
+          <a:prstGeom prst="rect">
+            <a:avLst/>
+          </a:prstGeom>
+          <a:noFill/>
+          <a:ln/>
+        </p:spPr>
+        <p:txBody>
+          <a:bodyPr wrap="square" lIns="0" tIns="0" rIns="0" bIns="0" rtlCol="0" anchor="t"/>
+          <a:lstStyle/>
+          <a:p>
+            <a:pPr indent="0" marL="0">
+              <a:buNone/>
+            </a:pPr>
+            <a:r>
+              <a:rPr lang="en-US" sz="1050" dirty="0">
+                <a:solidFill>
+                  <a:srgbClr val="1C1C1C"/>
+                </a:solidFill>
+                <a:latin typeface="Geist" pitchFamily="34" charset="0"/>
+                <a:ea typeface="Geist" pitchFamily="34" charset="-122"/>
+                <a:cs typeface="Geist" pitchFamily="34" charset="-120"/>
+              </a:rPr>
+              <a:t>which fixed step comes next</a:t>
+            </a:r>
+            <a:endParaRPr lang="en-US" sz="1050" dirty="0"/>
+          </a:p>
+        </p:txBody>
+      </p:sp>
+      <p:sp>
+        <p:nvSpPr>
+          <p:cNvPr id="21" name="Text 18"/>
+          <p:cNvSpPr txBox="1"/>
+          <p:nvPr/>
+        </p:nvSpPr>
+        <p:spPr>
+          <a:xfrm>
+            <a:off x="4526280" y="2752344"/>
+            <a:ext cx="2011680" cy="411480"/>
+          </a:xfrm>
+          <a:prstGeom prst="rect">
+            <a:avLst/>
+          </a:prstGeom>
+          <a:noFill/>
+          <a:ln/>
+        </p:spPr>
+        <p:txBody>
+          <a:bodyPr wrap="square" lIns="0" tIns="0" rIns="0" bIns="0" rtlCol="0" anchor="t"/>
+          <a:lstStyle/>
+          <a:p>
+            <a:pPr indent="0" marL="0">
+              <a:buNone/>
+            </a:pPr>
+            <a:r>
+              <a:rPr lang="en-US" sz="1050" dirty="0">
+                <a:solidFill>
+                  <a:srgbClr val="1C1C1C"/>
+                </a:solidFill>
+                <a:latin typeface="Geist" pitchFamily="34" charset="0"/>
+                <a:ea typeface="Geist" pitchFamily="34" charset="-122"/>
+                <a:cs typeface="Geist" pitchFamily="34" charset="-120"/>
+              </a:rPr>
+              <a:t>the developer</a:t>
+            </a:r>
+            <a:endParaRPr lang="en-US" sz="1050" dirty="0"/>
+          </a:p>
+        </p:txBody>
+      </p:sp>
+      <p:sp>
+        <p:nvSpPr>
+          <p:cNvPr id="22" name="Text 19"/>
+          <p:cNvSpPr txBox="1"/>
+          <p:nvPr/>
+        </p:nvSpPr>
+        <p:spPr>
+          <a:xfrm>
+            <a:off x="6583680" y="2752344"/>
+            <a:ext cx="2103120" cy="411480"/>
+          </a:xfrm>
+          <a:prstGeom prst="rect">
+            <a:avLst/>
+          </a:prstGeom>
+          <a:noFill/>
+          <a:ln/>
+        </p:spPr>
+        <p:txBody>
+          <a:bodyPr wrap="square" lIns="0" tIns="0" rIns="0" bIns="0" rtlCol="0" anchor="t"/>
+          <a:lstStyle/>
+          <a:p>
+            <a:pPr indent="0" marL="0">
+              <a:buNone/>
+            </a:pPr>
+            <a:r>
+              <a:rPr lang="en-US" sz="1050" dirty="0">
+                <a:solidFill>
+                  <a:srgbClr val="6B7280"/>
+                </a:solidFill>
+                <a:latin typeface="Geist" pitchFamily="34" charset="0"/>
+                <a:ea typeface="Geist" pitchFamily="34" charset="-122"/>
+                <a:cs typeface="Geist" pitchFamily="34" charset="-120"/>
+              </a:rPr>
+              <a:t>No — it takes the else branch</a:t>
+            </a:r>
+            <a:endParaRPr lang="en-US" sz="1050" dirty="0"/>
+          </a:p>
+        </p:txBody>
+      </p:sp>
+      <p:sp>
+        <p:nvSpPr>
+          <p:cNvPr id="23" name="Text 20"/>
+          <p:cNvSpPr txBox="1"/>
+          <p:nvPr/>
+        </p:nvSpPr>
+        <p:spPr>
+          <a:xfrm>
+            <a:off x="548640" y="3227832"/>
+            <a:ext cx="1737360" cy="365760"/>
+          </a:xfrm>
+          <a:prstGeom prst="rect">
+            <a:avLst/>
+          </a:prstGeom>
+          <a:noFill/>
+          <a:ln/>
+        </p:spPr>
+        <p:txBody>
+          <a:bodyPr wrap="square" lIns="0" tIns="0" rIns="0" bIns="0" rtlCol="0" anchor="t"/>
+          <a:lstStyle/>
+          <a:p>
+            <a:pPr indent="0" marL="0">
+              <a:buNone/>
+            </a:pPr>
+            <a:r>
+              <a:rPr lang="en-US" sz="1200" b="1" spc="-50" kern="0" dirty="0">
+                <a:solidFill>
+                  <a:srgbClr val="1C1C1C"/>
+                </a:solidFill>
+                <a:latin typeface="Geist" pitchFamily="34" charset="0"/>
+                <a:ea typeface="Geist" pitchFamily="34" charset="-122"/>
+                <a:cs typeface="Geist" pitchFamily="34" charset="-120"/>
+              </a:rPr>
+              <a:t>Rules engine</a:t>
+            </a:r>
+            <a:endParaRPr lang="en-US" sz="1200" dirty="0"/>
+          </a:p>
+        </p:txBody>
+      </p:sp>
+      <p:sp>
+        <p:nvSpPr>
+          <p:cNvPr id="24" name="Text 21"/>
+          <p:cNvSpPr txBox="1"/>
+          <p:nvPr/>
+        </p:nvSpPr>
+        <p:spPr>
+          <a:xfrm>
+            <a:off x="2286000" y="3246120"/>
+            <a:ext cx="2194560" cy="411480"/>
+          </a:xfrm>
+          <a:prstGeom prst="rect">
+            <a:avLst/>
+          </a:prstGeom>
+          <a:noFill/>
+          <a:ln/>
+        </p:spPr>
+        <p:txBody>
+          <a:bodyPr wrap="square" lIns="0" tIns="0" rIns="0" bIns="0" rtlCol="0" anchor="t"/>
+          <a:lstStyle/>
+          <a:p>
+            <a:pPr indent="0" marL="0">
+              <a:buNone/>
+            </a:pPr>
+            <a:r>
+              <a:rPr lang="en-US" sz="1050" dirty="0">
+                <a:solidFill>
+                  <a:srgbClr val="1C1C1C"/>
+                </a:solidFill>
+                <a:latin typeface="Geist" pitchFamily="34" charset="0"/>
+                <a:ea typeface="Geist" pitchFamily="34" charset="-122"/>
+                <a:cs typeface="Geist" pitchFamily="34" charset="-120"/>
+              </a:rPr>
+              <a:t>from explicit rules</a:t>
+            </a:r>
+            <a:endParaRPr lang="en-US" sz="1050" dirty="0"/>
+          </a:p>
+        </p:txBody>
+      </p:sp>
+      <p:sp>
+        <p:nvSpPr>
+          <p:cNvPr id="25" name="Text 22"/>
+          <p:cNvSpPr txBox="1"/>
+          <p:nvPr/>
+        </p:nvSpPr>
+        <p:spPr>
+          <a:xfrm>
+            <a:off x="4526280" y="3246120"/>
+            <a:ext cx="2011680" cy="411480"/>
+          </a:xfrm>
+          <a:prstGeom prst="rect">
+            <a:avLst/>
+          </a:prstGeom>
+          <a:noFill/>
+          <a:ln/>
+        </p:spPr>
+        <p:txBody>
+          <a:bodyPr wrap="square" lIns="0" tIns="0" rIns="0" bIns="0" rtlCol="0" anchor="t"/>
+          <a:lstStyle/>
+          <a:p>
+            <a:pPr indent="0" marL="0">
+              <a:buNone/>
+            </a:pPr>
+            <a:r>
+              <a:rPr lang="en-US" sz="1050" dirty="0">
+                <a:solidFill>
+                  <a:srgbClr val="1C1C1C"/>
+                </a:solidFill>
+                <a:latin typeface="Geist" pitchFamily="34" charset="0"/>
+                <a:ea typeface="Geist" pitchFamily="34" charset="-122"/>
+                <a:cs typeface="Geist" pitchFamily="34" charset="-120"/>
+              </a:rPr>
+              <a:t>the rule author</a:t>
+            </a:r>
+            <a:endParaRPr lang="en-US" sz="1050" dirty="0"/>
+          </a:p>
+        </p:txBody>
+      </p:sp>
+      <p:sp>
+        <p:nvSpPr>
+          <p:cNvPr id="26" name="Text 23"/>
+          <p:cNvSpPr txBox="1"/>
+          <p:nvPr/>
+        </p:nvSpPr>
+        <p:spPr>
+          <a:xfrm>
+            <a:off x="6583680" y="3246120"/>
+            <a:ext cx="2103120" cy="411480"/>
+          </a:xfrm>
+          <a:prstGeom prst="rect">
+            <a:avLst/>
+          </a:prstGeom>
+          <a:noFill/>
+          <a:ln/>
+        </p:spPr>
+        <p:txBody>
+          <a:bodyPr wrap="square" lIns="0" tIns="0" rIns="0" bIns="0" rtlCol="0" anchor="t"/>
+          <a:lstStyle/>
+          <a:p>
+            <a:pPr indent="0" marL="0">
+              <a:buNone/>
+            </a:pPr>
+            <a:r>
+              <a:rPr lang="en-US" sz="1050" dirty="0">
+                <a:solidFill>
+                  <a:srgbClr val="6B7280"/>
+                </a:solidFill>
+                <a:latin typeface="Geist" pitchFamily="34" charset="0"/>
+                <a:ea typeface="Geist" pitchFamily="34" charset="-122"/>
+                <a:cs typeface="Geist" pitchFamily="34" charset="-120"/>
+              </a:rPr>
+              <a:t>Only cases the rules cover</a:t>
+            </a:r>
+            <a:endParaRPr lang="en-US" sz="1050" dirty="0"/>
+          </a:p>
+        </p:txBody>
+      </p:sp>
+      <p:sp>
+        <p:nvSpPr>
+          <p:cNvPr id="27" name="Shape 24"/>
+          <p:cNvSpPr/>
+          <p:nvPr/>
+        </p:nvSpPr>
+        <p:spPr>
+          <a:xfrm>
+            <a:off x="457200" y="3648456"/>
+            <a:ext cx="8229600" cy="457200"/>
+          </a:xfrm>
+          <a:prstGeom prst="rect">
+            <a:avLst/>
+          </a:prstGeom>
+          <a:solidFill>
+            <a:srgbClr val="F7F7F5"/>
+          </a:solidFill>
+          <a:ln w="6350">
+            <a:solidFill>
+              <a:srgbClr val="E5E5E5"/>
+            </a:solidFill>
+            <a:prstDash val="solid"/>
+          </a:ln>
+        </p:spPr>
+      </p:sp>
+      <p:sp>
+        <p:nvSpPr>
+          <p:cNvPr id="28" name="Text 25"/>
+          <p:cNvSpPr txBox="1"/>
+          <p:nvPr/>
+        </p:nvSpPr>
+        <p:spPr>
+          <a:xfrm>
+            <a:off x="548640" y="3721608"/>
+            <a:ext cx="1737360" cy="365760"/>
+          </a:xfrm>
+          <a:prstGeom prst="rect">
+            <a:avLst/>
+          </a:prstGeom>
+          <a:noFill/>
+          <a:ln/>
+        </p:spPr>
+        <p:txBody>
+          <a:bodyPr wrap="square" lIns="0" tIns="0" rIns="0" bIns="0" rtlCol="0" anchor="t"/>
+          <a:lstStyle/>
+          <a:p>
+            <a:pPr indent="0" marL="0">
+              <a:buNone/>
+            </a:pPr>
+            <a:r>
+              <a:rPr lang="en-US" sz="1200" b="1" spc="-50" kern="0" dirty="0">
+                <a:solidFill>
+                  <a:srgbClr val="1C1C1C"/>
+                </a:solidFill>
+                <a:latin typeface="Geist" pitchFamily="34" charset="0"/>
+                <a:ea typeface="Geist" pitchFamily="34" charset="-122"/>
+                <a:cs typeface="Geist" pitchFamily="34" charset="-120"/>
+              </a:rPr>
+              <a:t>Agent</a:t>
+            </a:r>
+            <a:endParaRPr lang="en-US" sz="1200" dirty="0"/>
+          </a:p>
+        </p:txBody>
+      </p:sp>
+      <p:sp>
+        <p:nvSpPr>
+          <p:cNvPr id="29" name="Text 26"/>
+          <p:cNvSpPr txBox="1"/>
+          <p:nvPr/>
+        </p:nvSpPr>
+        <p:spPr>
+          <a:xfrm>
+            <a:off x="2286000" y="3739896"/>
+            <a:ext cx="2194560" cy="411480"/>
+          </a:xfrm>
+          <a:prstGeom prst="rect">
+            <a:avLst/>
+          </a:prstGeom>
+          <a:noFill/>
+          <a:ln/>
+        </p:spPr>
+        <p:txBody>
+          <a:bodyPr wrap="square" lIns="0" tIns="0" rIns="0" bIns="0" rtlCol="0" anchor="t"/>
+          <a:lstStyle/>
+          <a:p>
+            <a:pPr indent="0" marL="0">
+              <a:buNone/>
+            </a:pPr>
+            <a:r>
+              <a:rPr lang="en-US" sz="1050" dirty="0">
+                <a:solidFill>
+                  <a:srgbClr val="1C1C1C"/>
+                </a:solidFill>
+                <a:latin typeface="Geist" pitchFamily="34" charset="0"/>
+                <a:ea typeface="Geist" pitchFamily="34" charset="-122"/>
+                <a:cs typeface="Geist" pitchFamily="34" charset="-120"/>
+              </a:rPr>
+              <a:t>from the goal + what the last tool returned</a:t>
+            </a:r>
+            <a:endParaRPr lang="en-US" sz="1050" dirty="0"/>
+          </a:p>
+        </p:txBody>
+      </p:sp>
+      <p:sp>
+        <p:nvSpPr>
+          <p:cNvPr id="30" name="Text 27"/>
+          <p:cNvSpPr txBox="1"/>
+          <p:nvPr/>
+        </p:nvSpPr>
+        <p:spPr>
+          <a:xfrm>
+            <a:off x="4526280" y="3739896"/>
+            <a:ext cx="2011680" cy="411480"/>
+          </a:xfrm>
+          <a:prstGeom prst="rect">
+            <a:avLst/>
+          </a:prstGeom>
+          <a:noFill/>
+          <a:ln/>
+        </p:spPr>
+        <p:txBody>
+          <a:bodyPr wrap="square" lIns="0" tIns="0" rIns="0" bIns="0" rtlCol="0" anchor="t"/>
+          <a:lstStyle/>
+          <a:p>
+            <a:pPr indent="0" marL="0">
+              <a:buNone/>
+            </a:pPr>
+            <a:r>
+              <a:rPr lang="en-US" sz="1050" dirty="0">
+                <a:solidFill>
+                  <a:srgbClr val="FF5700"/>
+                </a:solidFill>
+                <a:latin typeface="Geist" pitchFamily="34" charset="0"/>
+                <a:ea typeface="Geist" pitchFamily="34" charset="-122"/>
+                <a:cs typeface="Geist" pitchFamily="34" charset="-120"/>
+              </a:rPr>
+              <a:t>the model, at runtime</a:t>
+            </a:r>
+            <a:endParaRPr lang="en-US" sz="1050" dirty="0"/>
+          </a:p>
+        </p:txBody>
+      </p:sp>
+      <p:sp>
+        <p:nvSpPr>
+          <p:cNvPr id="31" name="Text 28"/>
+          <p:cNvSpPr txBox="1"/>
+          <p:nvPr/>
+        </p:nvSpPr>
+        <p:spPr>
+          <a:xfrm>
+            <a:off x="6583680" y="3739896"/>
+            <a:ext cx="2103120" cy="411480"/>
+          </a:xfrm>
+          <a:prstGeom prst="rect">
+            <a:avLst/>
+          </a:prstGeom>
+          <a:noFill/>
+          <a:ln/>
+        </p:spPr>
+        <p:txBody>
+          <a:bodyPr wrap="square" lIns="0" tIns="0" rIns="0" bIns="0" rtlCol="0" anchor="t"/>
+          <a:lstStyle/>
+          <a:p>
+            <a:pPr indent="0" marL="0">
+              <a:buNone/>
+            </a:pPr>
+            <a:r>
+              <a:rPr lang="en-US" sz="1050" dirty="0">
+                <a:solidFill>
+                  <a:srgbClr val="FF5700"/>
+                </a:solidFill>
+                <a:latin typeface="Geist" pitchFamily="34" charset="0"/>
+                <a:ea typeface="Geist" pitchFamily="34" charset="-122"/>
+                <a:cs typeface="Geist" pitchFamily="34" charset="-120"/>
+              </a:rPr>
+              <a:t>Yes — including cases nobody wanted</a:t>
+            </a:r>
+            <a:endParaRPr lang="en-US" sz="1050" dirty="0"/>
+          </a:p>
+        </p:txBody>
+      </p:sp>
+      <p:sp>
+        <p:nvSpPr>
+          <p:cNvPr id="32" name="Shape 29"/>
+          <p:cNvSpPr/>
+          <p:nvPr/>
+        </p:nvSpPr>
+        <p:spPr>
+          <a:xfrm>
+            <a:off x="457200" y="4160520"/>
+            <a:ext cx="8229600" cy="548640"/>
           </a:xfrm>
           <a:prstGeom prst="rect">
             <a:avLst/>
@@ -11179,53 +12931,14 @@
       </p:sp>
       <p:sp>
         <p:nvSpPr>
-          <p:cNvPr id="10" name="Text 7"/>
-          <p:cNvSpPr txBox="1"/>
-          <p:nvPr/>
-        </p:nvSpPr>
-        <p:spPr>
-          <a:xfrm>
-            <a:off x="685800" y="1920240"/>
-            <a:ext cx="1645920" cy="320040"/>
-          </a:xfrm>
-          <a:prstGeom prst="rect">
-            <a:avLst/>
-          </a:prstGeom>
-          <a:noFill/>
-          <a:ln/>
-        </p:spPr>
-        <p:txBody>
-          <a:bodyPr wrap="square" lIns="0" tIns="0" rIns="0" bIns="0" rtlCol="0" anchor="t"/>
-          <a:lstStyle/>
-          <a:p>
-            <a:pPr indent="0" marL="0">
-              <a:buNone/>
-            </a:pPr>
-            <a:r>
-              <a:rPr lang="en-US" sz="1400" b="1" spc="-50" kern="0" dirty="0">
-                <a:solidFill>
-                  <a:srgbClr val="1C1C1C"/>
-                </a:solidFill>
-                <a:latin typeface="Geist" pitchFamily="34" charset="0"/>
-                <a:ea typeface="Geist" pitchFamily="34" charset="-122"/>
-                <a:cs typeface="Geist" pitchFamily="34" charset="-120"/>
-              </a:rPr>
-              <a:t>Sales / CRM</a:t>
-            </a:r>
-            <a:endParaRPr lang="en-US" sz="1400" dirty="0"/>
-          </a:p>
-        </p:txBody>
-      </p:sp>
-      <p:sp>
-        <p:nvSpPr>
-          <p:cNvPr id="11" name="Text 8"/>
-          <p:cNvSpPr txBox="1"/>
-          <p:nvPr/>
-        </p:nvSpPr>
-        <p:spPr>
-          <a:xfrm>
-            <a:off x="2194560" y="1938528"/>
-            <a:ext cx="685800" cy="274320"/>
+          <p:cNvPr id="33" name="Text 30"/>
+          <p:cNvSpPr txBox="1"/>
+          <p:nvPr/>
+        </p:nvSpPr>
+        <p:spPr>
+          <a:xfrm>
+            <a:off x="685800" y="4160520"/>
+            <a:ext cx="7772400" cy="548640"/>
           </a:xfrm>
           <a:prstGeom prst="rect">
             <a:avLst/>
@@ -11237,11 +12950,11 @@
           <a:bodyPr wrap="square" lIns="0" tIns="0" rIns="0" bIns="0" rtlCol="0" anchor="ctr"/>
           <a:lstStyle/>
           <a:p>
-            <a:pPr algn="r" indent="0" marL="0">
-              <a:buNone/>
-            </a:pPr>
-            <a:r>
-              <a:rPr lang="en-US" sz="800" dirty="0">
+            <a:pPr indent="0" marL="0">
+              <a:buNone/>
+            </a:pPr>
+            <a:r>
+              <a:rPr lang="en-US" sz="900" spc="200" kern="0" dirty="0">
                 <a:solidFill>
                   <a:srgbClr val="FF5700"/>
                 </a:solidFill>
@@ -11249,102 +12962,13 @@
                 <a:ea typeface="IBM Plex Mono" pitchFamily="34" charset="-122"/>
                 <a:cs typeface="IBM Plex Mono" pitchFamily="34" charset="-120"/>
               </a:rPr>
-              <a:t>Ep 2</a:t>
-            </a:r>
-            <a:endParaRPr lang="en-US" sz="800" dirty="0"/>
-          </a:p>
-        </p:txBody>
-      </p:sp>
-      <p:sp>
-        <p:nvSpPr>
-          <p:cNvPr id="12" name="Text 9"/>
-          <p:cNvSpPr txBox="1"/>
-          <p:nvPr/>
-        </p:nvSpPr>
-        <p:spPr>
-          <a:xfrm>
-            <a:off x="685800" y="2286000"/>
-            <a:ext cx="2194560" cy="548640"/>
-          </a:xfrm>
-          <a:prstGeom prst="rect">
-            <a:avLst/>
-          </a:prstGeom>
-          <a:noFill/>
-          <a:ln/>
-        </p:spPr>
-        <p:txBody>
-          <a:bodyPr wrap="square" lIns="0" tIns="0" rIns="0" bIns="0" rtlCol="0" anchor="t"/>
-          <a:lstStyle/>
-          <a:p>
-            <a:pPr indent="0" marL="0">
-              <a:buNone/>
-            </a:pPr>
-            <a:r>
-              <a:rPr lang="en-US" sz="1050" dirty="0">
-                <a:solidFill>
-                  <a:srgbClr val="6B7280"/>
-                </a:solidFill>
-                <a:latin typeface="Geist" pitchFamily="34" charset="0"/>
-                <a:ea typeface="Geist" pitchFamily="34" charset="-122"/>
-                <a:cs typeface="Geist" pitchFamily="34" charset="-120"/>
-              </a:rPr>
-              <a:t>quote-to-order · returns · lead triage</a:t>
-            </a:r>
-            <a:endParaRPr lang="en-US" sz="1050" dirty="0"/>
-          </a:p>
-        </p:txBody>
-      </p:sp>
-      <p:sp>
-        <p:nvSpPr>
-          <p:cNvPr id="13" name="Shape 10"/>
-          <p:cNvSpPr/>
-          <p:nvPr/>
-        </p:nvSpPr>
-        <p:spPr>
-          <a:xfrm>
-            <a:off x="3246120" y="1783080"/>
-            <a:ext cx="2606040" cy="1097280"/>
-          </a:xfrm>
-          <a:prstGeom prst="rect">
-            <a:avLst/>
-          </a:prstGeom>
-          <a:solidFill>
-            <a:srgbClr val="FFFFFF"/>
-          </a:solidFill>
-          <a:ln w="9525">
-            <a:solidFill>
-              <a:srgbClr val="E5E5E5"/>
-            </a:solidFill>
-            <a:prstDash val="solid"/>
-          </a:ln>
-        </p:spPr>
-      </p:sp>
-      <p:sp>
-        <p:nvSpPr>
-          <p:cNvPr id="14" name="Text 11"/>
-          <p:cNvSpPr txBox="1"/>
-          <p:nvPr/>
-        </p:nvSpPr>
-        <p:spPr>
-          <a:xfrm>
-            <a:off x="3474720" y="1920240"/>
-            <a:ext cx="1645920" cy="320040"/>
-          </a:xfrm>
-          <a:prstGeom prst="rect">
-            <a:avLst/>
-          </a:prstGeom>
-          <a:noFill/>
-          <a:ln/>
-        </p:spPr>
-        <p:txBody>
-          <a:bodyPr wrap="square" lIns="0" tIns="0" rIns="0" bIns="0" rtlCol="0" anchor="t"/>
-          <a:lstStyle/>
-          <a:p>
-            <a:pPr indent="0" marL="0">
-              <a:buNone/>
-            </a:pPr>
-            <a:r>
-              <a:rPr lang="en-US" sz="1400" b="1" spc="-50" kern="0" dirty="0">
+              <a:t>RULE  </a:t>
+            </a:r>
+            <a:pPr indent="0" marL="0">
+              <a:buNone/>
+            </a:pPr>
+            <a:r>
+              <a:rPr lang="en-US" sz="1150" dirty="0">
                 <a:solidFill>
                   <a:srgbClr val="1C1C1C"/>
                 </a:solidFill>
@@ -11352,694 +12976,9 @@
                 <a:ea typeface="Geist" pitchFamily="34" charset="-122"/>
                 <a:cs typeface="Geist" pitchFamily="34" charset="-120"/>
               </a:rPr>
-              <a:t>Inventory</a:t>
-            </a:r>
-            <a:endParaRPr lang="en-US" sz="1400" dirty="0"/>
-          </a:p>
-        </p:txBody>
-      </p:sp>
-      <p:sp>
-        <p:nvSpPr>
-          <p:cNvPr id="15" name="Text 12"/>
-          <p:cNvSpPr txBox="1"/>
-          <p:nvPr/>
-        </p:nvSpPr>
-        <p:spPr>
-          <a:xfrm>
-            <a:off x="4983480" y="1938528"/>
-            <a:ext cx="685800" cy="274320"/>
-          </a:xfrm>
-          <a:prstGeom prst="rect">
-            <a:avLst/>
-          </a:prstGeom>
-          <a:noFill/>
-          <a:ln/>
-        </p:spPr>
-        <p:txBody>
-          <a:bodyPr wrap="square" lIns="0" tIns="0" rIns="0" bIns="0" rtlCol="0" anchor="ctr"/>
-          <a:lstStyle/>
-          <a:p>
-            <a:pPr algn="r" indent="0" marL="0">
-              <a:buNone/>
-            </a:pPr>
-            <a:r>
-              <a:rPr lang="en-US" sz="800" dirty="0">
-                <a:solidFill>
-                  <a:srgbClr val="FF5700"/>
-                </a:solidFill>
-                <a:latin typeface="IBM Plex Mono" pitchFamily="34" charset="0"/>
-                <a:ea typeface="IBM Plex Mono" pitchFamily="34" charset="-122"/>
-                <a:cs typeface="IBM Plex Mono" pitchFamily="34" charset="-120"/>
-              </a:rPr>
-              <a:t>Ep 6</a:t>
-            </a:r>
-            <a:endParaRPr lang="en-US" sz="800" dirty="0"/>
-          </a:p>
-        </p:txBody>
-      </p:sp>
-      <p:sp>
-        <p:nvSpPr>
-          <p:cNvPr id="16" name="Text 13"/>
-          <p:cNvSpPr txBox="1"/>
-          <p:nvPr/>
-        </p:nvSpPr>
-        <p:spPr>
-          <a:xfrm>
-            <a:off x="3474720" y="2286000"/>
-            <a:ext cx="2194560" cy="548640"/>
-          </a:xfrm>
-          <a:prstGeom prst="rect">
-            <a:avLst/>
-          </a:prstGeom>
-          <a:noFill/>
-          <a:ln/>
-        </p:spPr>
-        <p:txBody>
-          <a:bodyPr wrap="square" lIns="0" tIns="0" rIns="0" bIns="0" rtlCol="0" anchor="t"/>
-          <a:lstStyle/>
-          <a:p>
-            <a:pPr indent="0" marL="0">
-              <a:buNone/>
-            </a:pPr>
-            <a:r>
-              <a:rPr lang="en-US" sz="1050" dirty="0">
-                <a:solidFill>
-                  <a:srgbClr val="6B7280"/>
-                </a:solidFill>
-                <a:latin typeface="Geist" pitchFamily="34" charset="0"/>
-                <a:ea typeface="Geist" pitchFamily="34" charset="-122"/>
-                <a:cs typeface="Geist" pitchFamily="34" charset="-120"/>
-              </a:rPr>
-              <a:t>reorder · stock exceptions</a:t>
-            </a:r>
-            <a:endParaRPr lang="en-US" sz="1050" dirty="0"/>
-          </a:p>
-        </p:txBody>
-      </p:sp>
-      <p:sp>
-        <p:nvSpPr>
-          <p:cNvPr id="17" name="Shape 14"/>
-          <p:cNvSpPr/>
-          <p:nvPr/>
-        </p:nvSpPr>
-        <p:spPr>
-          <a:xfrm>
-            <a:off x="6035040" y="1783080"/>
-            <a:ext cx="2606040" cy="1097280"/>
-          </a:xfrm>
-          <a:prstGeom prst="rect">
-            <a:avLst/>
-          </a:prstGeom>
-          <a:solidFill>
-            <a:srgbClr val="FFFFFF"/>
-          </a:solidFill>
-          <a:ln w="9525">
-            <a:solidFill>
-              <a:srgbClr val="E5E5E5"/>
-            </a:solidFill>
-            <a:prstDash val="solid"/>
-          </a:ln>
-        </p:spPr>
-      </p:sp>
-      <p:sp>
-        <p:nvSpPr>
-          <p:cNvPr id="18" name="Text 15"/>
-          <p:cNvSpPr txBox="1"/>
-          <p:nvPr/>
-        </p:nvSpPr>
-        <p:spPr>
-          <a:xfrm>
-            <a:off x="6263640" y="1920240"/>
-            <a:ext cx="1645920" cy="320040"/>
-          </a:xfrm>
-          <a:prstGeom prst="rect">
-            <a:avLst/>
-          </a:prstGeom>
-          <a:noFill/>
-          <a:ln/>
-        </p:spPr>
-        <p:txBody>
-          <a:bodyPr wrap="square" lIns="0" tIns="0" rIns="0" bIns="0" rtlCol="0" anchor="t"/>
-          <a:lstStyle/>
-          <a:p>
-            <a:pPr indent="0" marL="0">
-              <a:buNone/>
-            </a:pPr>
-            <a:r>
-              <a:rPr lang="en-US" sz="1400" b="1" spc="-50" kern="0" dirty="0">
-                <a:solidFill>
-                  <a:srgbClr val="1C1C1C"/>
-                </a:solidFill>
-                <a:latin typeface="Geist" pitchFamily="34" charset="0"/>
-                <a:ea typeface="Geist" pitchFamily="34" charset="-122"/>
-                <a:cs typeface="Geist" pitchFamily="34" charset="-120"/>
-              </a:rPr>
-              <a:t>Finance</a:t>
-            </a:r>
-            <a:endParaRPr lang="en-US" sz="1400" dirty="0"/>
-          </a:p>
-        </p:txBody>
-      </p:sp>
-      <p:sp>
-        <p:nvSpPr>
-          <p:cNvPr id="19" name="Text 16"/>
-          <p:cNvSpPr txBox="1"/>
-          <p:nvPr/>
-        </p:nvSpPr>
-        <p:spPr>
-          <a:xfrm>
-            <a:off x="7772400" y="1938528"/>
-            <a:ext cx="685800" cy="274320"/>
-          </a:xfrm>
-          <a:prstGeom prst="rect">
-            <a:avLst/>
-          </a:prstGeom>
-          <a:noFill/>
-          <a:ln/>
-        </p:spPr>
-        <p:txBody>
-          <a:bodyPr wrap="square" lIns="0" tIns="0" rIns="0" bIns="0" rtlCol="0" anchor="ctr"/>
-          <a:lstStyle/>
-          <a:p>
-            <a:pPr algn="r" indent="0" marL="0">
-              <a:buNone/>
-            </a:pPr>
-            <a:r>
-              <a:rPr lang="en-US" sz="800" dirty="0">
-                <a:solidFill>
-                  <a:srgbClr val="FF5700"/>
-                </a:solidFill>
-                <a:latin typeface="IBM Plex Mono" pitchFamily="34" charset="0"/>
-                <a:ea typeface="IBM Plex Mono" pitchFamily="34" charset="-122"/>
-                <a:cs typeface="IBM Plex Mono" pitchFamily="34" charset="-120"/>
-              </a:rPr>
-              <a:t>Ep 12, 26</a:t>
-            </a:r>
-            <a:endParaRPr lang="en-US" sz="800" dirty="0"/>
-          </a:p>
-        </p:txBody>
-      </p:sp>
-      <p:sp>
-        <p:nvSpPr>
-          <p:cNvPr id="20" name="Text 17"/>
-          <p:cNvSpPr txBox="1"/>
-          <p:nvPr/>
-        </p:nvSpPr>
-        <p:spPr>
-          <a:xfrm>
-            <a:off x="6263640" y="2286000"/>
-            <a:ext cx="2194560" cy="548640"/>
-          </a:xfrm>
-          <a:prstGeom prst="rect">
-            <a:avLst/>
-          </a:prstGeom>
-          <a:noFill/>
-          <a:ln/>
-        </p:spPr>
-        <p:txBody>
-          <a:bodyPr wrap="square" lIns="0" tIns="0" rIns="0" bIns="0" rtlCol="0" anchor="t"/>
-          <a:lstStyle/>
-          <a:p>
-            <a:pPr indent="0" marL="0">
-              <a:buNone/>
-            </a:pPr>
-            <a:r>
-              <a:rPr lang="en-US" sz="1050" dirty="0">
-                <a:solidFill>
-                  <a:srgbClr val="6B7280"/>
-                </a:solidFill>
-                <a:latin typeface="Geist" pitchFamily="34" charset="0"/>
-                <a:ea typeface="Geist" pitchFamily="34" charset="-122"/>
-                <a:cs typeface="Geist" pitchFamily="34" charset="-120"/>
-              </a:rPr>
-              <a:t>invoice matching · month-end reconciliation</a:t>
-            </a:r>
-            <a:endParaRPr lang="en-US" sz="1050" dirty="0"/>
-          </a:p>
-        </p:txBody>
-      </p:sp>
-      <p:sp>
-        <p:nvSpPr>
-          <p:cNvPr id="21" name="Shape 18"/>
-          <p:cNvSpPr/>
-          <p:nvPr/>
-        </p:nvSpPr>
-        <p:spPr>
-          <a:xfrm>
-            <a:off x="457200" y="3017520"/>
-            <a:ext cx="2606040" cy="1097280"/>
-          </a:xfrm>
-          <a:prstGeom prst="rect">
-            <a:avLst/>
-          </a:prstGeom>
-          <a:solidFill>
-            <a:srgbClr val="FFFFFF"/>
-          </a:solidFill>
-          <a:ln w="9525">
-            <a:solidFill>
-              <a:srgbClr val="E5E5E5"/>
-            </a:solidFill>
-            <a:prstDash val="solid"/>
-          </a:ln>
-        </p:spPr>
-      </p:sp>
-      <p:sp>
-        <p:nvSpPr>
-          <p:cNvPr id="22" name="Text 19"/>
-          <p:cNvSpPr txBox="1"/>
-          <p:nvPr/>
-        </p:nvSpPr>
-        <p:spPr>
-          <a:xfrm>
-            <a:off x="685800" y="3154680"/>
-            <a:ext cx="1645920" cy="320040"/>
-          </a:xfrm>
-          <a:prstGeom prst="rect">
-            <a:avLst/>
-          </a:prstGeom>
-          <a:noFill/>
-          <a:ln/>
-        </p:spPr>
-        <p:txBody>
-          <a:bodyPr wrap="square" lIns="0" tIns="0" rIns="0" bIns="0" rtlCol="0" anchor="t"/>
-          <a:lstStyle/>
-          <a:p>
-            <a:pPr indent="0" marL="0">
-              <a:buNone/>
-            </a:pPr>
-            <a:r>
-              <a:rPr lang="en-US" sz="1400" b="1" spc="-50" kern="0" dirty="0">
-                <a:solidFill>
-                  <a:srgbClr val="1C1C1C"/>
-                </a:solidFill>
-                <a:latin typeface="Geist" pitchFamily="34" charset="0"/>
-                <a:ea typeface="Geist" pitchFamily="34" charset="-122"/>
-                <a:cs typeface="Geist" pitchFamily="34" charset="-120"/>
-              </a:rPr>
-              <a:t>Procurement</a:t>
-            </a:r>
-            <a:endParaRPr lang="en-US" sz="1400" dirty="0"/>
-          </a:p>
-        </p:txBody>
-      </p:sp>
-      <p:sp>
-        <p:nvSpPr>
-          <p:cNvPr id="23" name="Text 20"/>
-          <p:cNvSpPr txBox="1"/>
-          <p:nvPr/>
-        </p:nvSpPr>
-        <p:spPr>
-          <a:xfrm>
-            <a:off x="2194560" y="3172968"/>
-            <a:ext cx="685800" cy="274320"/>
-          </a:xfrm>
-          <a:prstGeom prst="rect">
-            <a:avLst/>
-          </a:prstGeom>
-          <a:noFill/>
-          <a:ln/>
-        </p:spPr>
-        <p:txBody>
-          <a:bodyPr wrap="square" lIns="0" tIns="0" rIns="0" bIns="0" rtlCol="0" anchor="ctr"/>
-          <a:lstStyle/>
-          <a:p>
-            <a:pPr algn="r" indent="0" marL="0">
-              <a:buNone/>
-            </a:pPr>
-            <a:r>
-              <a:rPr lang="en-US" sz="800" dirty="0">
-                <a:solidFill>
-                  <a:srgbClr val="FF5700"/>
-                </a:solidFill>
-                <a:latin typeface="IBM Plex Mono" pitchFamily="34" charset="0"/>
-                <a:ea typeface="IBM Plex Mono" pitchFamily="34" charset="-122"/>
-                <a:cs typeface="IBM Plex Mono" pitchFamily="34" charset="-120"/>
-              </a:rPr>
-              <a:t>Ep 6–8</a:t>
-            </a:r>
-            <a:endParaRPr lang="en-US" sz="800" dirty="0"/>
-          </a:p>
-        </p:txBody>
-      </p:sp>
-      <p:sp>
-        <p:nvSpPr>
-          <p:cNvPr id="24" name="Text 21"/>
-          <p:cNvSpPr txBox="1"/>
-          <p:nvPr/>
-        </p:nvSpPr>
-        <p:spPr>
-          <a:xfrm>
-            <a:off x="685800" y="3520440"/>
-            <a:ext cx="2194560" cy="548640"/>
-          </a:xfrm>
-          <a:prstGeom prst="rect">
-            <a:avLst/>
-          </a:prstGeom>
-          <a:noFill/>
-          <a:ln/>
-        </p:spPr>
-        <p:txBody>
-          <a:bodyPr wrap="square" lIns="0" tIns="0" rIns="0" bIns="0" rtlCol="0" anchor="t"/>
-          <a:lstStyle/>
-          <a:p>
-            <a:pPr indent="0" marL="0">
-              <a:buNone/>
-            </a:pPr>
-            <a:r>
-              <a:rPr lang="en-US" sz="1050" dirty="0">
-                <a:solidFill>
-                  <a:srgbClr val="6B7280"/>
-                </a:solidFill>
-                <a:latin typeface="Geist" pitchFamily="34" charset="0"/>
-                <a:ea typeface="Geist" pitchFamily="34" charset="-122"/>
-                <a:cs typeface="Geist" pitchFamily="34" charset="-120"/>
-              </a:rPr>
-              <a:t>supplier search · PO approval</a:t>
-            </a:r>
-            <a:endParaRPr lang="en-US" sz="1050" dirty="0"/>
-          </a:p>
-        </p:txBody>
-      </p:sp>
-      <p:sp>
-        <p:nvSpPr>
-          <p:cNvPr id="25" name="Shape 22"/>
-          <p:cNvSpPr/>
-          <p:nvPr/>
-        </p:nvSpPr>
-        <p:spPr>
-          <a:xfrm>
-            <a:off x="3246120" y="3017520"/>
-            <a:ext cx="2606040" cy="1097280"/>
-          </a:xfrm>
-          <a:prstGeom prst="rect">
-            <a:avLst/>
-          </a:prstGeom>
-          <a:solidFill>
-            <a:srgbClr val="FFFFFF"/>
-          </a:solidFill>
-          <a:ln w="9525">
-            <a:solidFill>
-              <a:srgbClr val="E5E5E5"/>
-            </a:solidFill>
-            <a:prstDash val="solid"/>
-          </a:ln>
-        </p:spPr>
-      </p:sp>
-      <p:sp>
-        <p:nvSpPr>
-          <p:cNvPr id="26" name="Text 23"/>
-          <p:cNvSpPr txBox="1"/>
-          <p:nvPr/>
-        </p:nvSpPr>
-        <p:spPr>
-          <a:xfrm>
-            <a:off x="3474720" y="3154680"/>
-            <a:ext cx="1645920" cy="320040"/>
-          </a:xfrm>
-          <a:prstGeom prst="rect">
-            <a:avLst/>
-          </a:prstGeom>
-          <a:noFill/>
-          <a:ln/>
-        </p:spPr>
-        <p:txBody>
-          <a:bodyPr wrap="square" lIns="0" tIns="0" rIns="0" bIns="0" rtlCol="0" anchor="t"/>
-          <a:lstStyle/>
-          <a:p>
-            <a:pPr indent="0" marL="0">
-              <a:buNone/>
-            </a:pPr>
-            <a:r>
-              <a:rPr lang="en-US" sz="1400" b="1" spc="-50" kern="0" dirty="0">
-                <a:solidFill>
-                  <a:srgbClr val="1C1C1C"/>
-                </a:solidFill>
-                <a:latin typeface="Geist" pitchFamily="34" charset="0"/>
-                <a:ea typeface="Geist" pitchFamily="34" charset="-122"/>
-                <a:cs typeface="Geist" pitchFamily="34" charset="-120"/>
-              </a:rPr>
-              <a:t>HR</a:t>
-            </a:r>
-            <a:endParaRPr lang="en-US" sz="1400" dirty="0"/>
-          </a:p>
-        </p:txBody>
-      </p:sp>
-      <p:sp>
-        <p:nvSpPr>
-          <p:cNvPr id="27" name="Text 24"/>
-          <p:cNvSpPr txBox="1"/>
-          <p:nvPr/>
-        </p:nvSpPr>
-        <p:spPr>
-          <a:xfrm>
-            <a:off x="4983480" y="3172968"/>
-            <a:ext cx="685800" cy="274320"/>
-          </a:xfrm>
-          <a:prstGeom prst="rect">
-            <a:avLst/>
-          </a:prstGeom>
-          <a:noFill/>
-          <a:ln/>
-        </p:spPr>
-        <p:txBody>
-          <a:bodyPr wrap="square" lIns="0" tIns="0" rIns="0" bIns="0" rtlCol="0" anchor="ctr"/>
-          <a:lstStyle/>
-          <a:p>
-            <a:pPr algn="r" indent="0" marL="0">
-              <a:buNone/>
-            </a:pPr>
-            <a:r>
-              <a:rPr lang="en-US" sz="800" dirty="0">
-                <a:solidFill>
-                  <a:srgbClr val="FF5700"/>
-                </a:solidFill>
-                <a:latin typeface="IBM Plex Mono" pitchFamily="34" charset="0"/>
-                <a:ea typeface="IBM Plex Mono" pitchFamily="34" charset="-122"/>
-                <a:cs typeface="IBM Plex Mono" pitchFamily="34" charset="-120"/>
-              </a:rPr>
-              <a:t>later</a:t>
-            </a:r>
-            <a:endParaRPr lang="en-US" sz="800" dirty="0"/>
-          </a:p>
-        </p:txBody>
-      </p:sp>
-      <p:sp>
-        <p:nvSpPr>
-          <p:cNvPr id="28" name="Text 25"/>
-          <p:cNvSpPr txBox="1"/>
-          <p:nvPr/>
-        </p:nvSpPr>
-        <p:spPr>
-          <a:xfrm>
-            <a:off x="3474720" y="3520440"/>
-            <a:ext cx="2194560" cy="548640"/>
-          </a:xfrm>
-          <a:prstGeom prst="rect">
-            <a:avLst/>
-          </a:prstGeom>
-          <a:noFill/>
-          <a:ln/>
-        </p:spPr>
-        <p:txBody>
-          <a:bodyPr wrap="square" lIns="0" tIns="0" rIns="0" bIns="0" rtlCol="0" anchor="t"/>
-          <a:lstStyle/>
-          <a:p>
-            <a:pPr indent="0" marL="0">
-              <a:buNone/>
-            </a:pPr>
-            <a:r>
-              <a:rPr lang="en-US" sz="1050" dirty="0">
-                <a:solidFill>
-                  <a:srgbClr val="6B7280"/>
-                </a:solidFill>
-                <a:latin typeface="Geist" pitchFamily="34" charset="0"/>
-                <a:ea typeface="Geist" pitchFamily="34" charset="-122"/>
-                <a:cs typeface="Geist" pitchFamily="34" charset="-120"/>
-              </a:rPr>
-              <a:t>leave · expense approvals</a:t>
-            </a:r>
-            <a:endParaRPr lang="en-US" sz="1050" dirty="0"/>
-          </a:p>
-        </p:txBody>
-      </p:sp>
-      <p:sp>
-        <p:nvSpPr>
-          <p:cNvPr id="29" name="Shape 26"/>
-          <p:cNvSpPr/>
-          <p:nvPr/>
-        </p:nvSpPr>
-        <p:spPr>
-          <a:xfrm>
-            <a:off x="6035040" y="3017520"/>
-            <a:ext cx="2606040" cy="1097280"/>
-          </a:xfrm>
-          <a:prstGeom prst="rect">
-            <a:avLst/>
-          </a:prstGeom>
-          <a:solidFill>
-            <a:srgbClr val="FFFFFF"/>
-          </a:solidFill>
-          <a:ln w="9525">
-            <a:solidFill>
-              <a:srgbClr val="E5E5E5"/>
-            </a:solidFill>
-            <a:prstDash val="solid"/>
-          </a:ln>
-        </p:spPr>
-      </p:sp>
-      <p:sp>
-        <p:nvSpPr>
-          <p:cNvPr id="30" name="Text 27"/>
-          <p:cNvSpPr txBox="1"/>
-          <p:nvPr/>
-        </p:nvSpPr>
-        <p:spPr>
-          <a:xfrm>
-            <a:off x="6263640" y="3154680"/>
-            <a:ext cx="1645920" cy="320040"/>
-          </a:xfrm>
-          <a:prstGeom prst="rect">
-            <a:avLst/>
-          </a:prstGeom>
-          <a:noFill/>
-          <a:ln/>
-        </p:spPr>
-        <p:txBody>
-          <a:bodyPr wrap="square" lIns="0" tIns="0" rIns="0" bIns="0" rtlCol="0" anchor="t"/>
-          <a:lstStyle/>
-          <a:p>
-            <a:pPr indent="0" marL="0">
-              <a:buNone/>
-            </a:pPr>
-            <a:r>
-              <a:rPr lang="en-US" sz="1400" b="1" spc="-50" kern="0" dirty="0">
-                <a:solidFill>
-                  <a:srgbClr val="1C1C1C"/>
-                </a:solidFill>
-                <a:latin typeface="Geist" pitchFamily="34" charset="0"/>
-                <a:ea typeface="Geist" pitchFamily="34" charset="-122"/>
-                <a:cs typeface="Geist" pitchFamily="34" charset="-120"/>
-              </a:rPr>
-              <a:t>Platform</a:t>
-            </a:r>
-            <a:endParaRPr lang="en-US" sz="1400" dirty="0"/>
-          </a:p>
-        </p:txBody>
-      </p:sp>
-      <p:sp>
-        <p:nvSpPr>
-          <p:cNvPr id="31" name="Text 28"/>
-          <p:cNvSpPr txBox="1"/>
-          <p:nvPr/>
-        </p:nvSpPr>
-        <p:spPr>
-          <a:xfrm>
-            <a:off x="7772400" y="3172968"/>
-            <a:ext cx="685800" cy="274320"/>
-          </a:xfrm>
-          <a:prstGeom prst="rect">
-            <a:avLst/>
-          </a:prstGeom>
-          <a:noFill/>
-          <a:ln/>
-        </p:spPr>
-        <p:txBody>
-          <a:bodyPr wrap="square" lIns="0" tIns="0" rIns="0" bIns="0" rtlCol="0" anchor="ctr"/>
-          <a:lstStyle/>
-          <a:p>
-            <a:pPr algn="r" indent="0" marL="0">
-              <a:buNone/>
-            </a:pPr>
-            <a:r>
-              <a:rPr lang="en-US" sz="800" dirty="0">
-                <a:solidFill>
-                  <a:srgbClr val="FF5700"/>
-                </a:solidFill>
-                <a:latin typeface="IBM Plex Mono" pitchFamily="34" charset="0"/>
-                <a:ea typeface="IBM Plex Mono" pitchFamily="34" charset="-122"/>
-                <a:cs typeface="IBM Plex Mono" pitchFamily="34" charset="-120"/>
-              </a:rPr>
-              <a:t>Ep 4, 9–11, 15, 25</a:t>
-            </a:r>
-            <a:endParaRPr lang="en-US" sz="800" dirty="0"/>
-          </a:p>
-        </p:txBody>
-      </p:sp>
-      <p:sp>
-        <p:nvSpPr>
-          <p:cNvPr id="32" name="Text 29"/>
-          <p:cNvSpPr txBox="1"/>
-          <p:nvPr/>
-        </p:nvSpPr>
-        <p:spPr>
-          <a:xfrm>
-            <a:off x="6263640" y="3520440"/>
-            <a:ext cx="2194560" cy="548640"/>
-          </a:xfrm>
-          <a:prstGeom prst="rect">
-            <a:avLst/>
-          </a:prstGeom>
-          <a:noFill/>
-          <a:ln/>
-        </p:spPr>
-        <p:txBody>
-          <a:bodyPr wrap="square" lIns="0" tIns="0" rIns="0" bIns="0" rtlCol="0" anchor="t"/>
-          <a:lstStyle/>
-          <a:p>
-            <a:pPr indent="0" marL="0">
-              <a:buNone/>
-            </a:pPr>
-            <a:r>
-              <a:rPr lang="en-US" sz="1050" dirty="0">
-                <a:solidFill>
-                  <a:srgbClr val="6B7280"/>
-                </a:solidFill>
-                <a:latin typeface="Geist" pitchFamily="34" charset="0"/>
-                <a:ea typeface="Geist" pitchFamily="34" charset="-122"/>
-                <a:cs typeface="Geist" pitchFamily="34" charset="-120"/>
-              </a:rPr>
-              <a:t>identity · tenancy · evals · tracing · guardrails · cost</a:t>
-            </a:r>
-            <a:endParaRPr lang="en-US" sz="1050" dirty="0"/>
-          </a:p>
-        </p:txBody>
-      </p:sp>
-      <p:sp>
-        <p:nvSpPr>
-          <p:cNvPr id="33" name="Text 30"/>
-          <p:cNvSpPr txBox="1"/>
-          <p:nvPr/>
-        </p:nvSpPr>
-        <p:spPr>
-          <a:xfrm>
-            <a:off x="457200" y="4297680"/>
-            <a:ext cx="8229600" cy="274320"/>
-          </a:xfrm>
-          <a:prstGeom prst="rect">
-            <a:avLst/>
-          </a:prstGeom>
-          <a:noFill/>
-          <a:ln/>
-        </p:spPr>
-        <p:txBody>
-          <a:bodyPr wrap="square" lIns="0" tIns="0" rIns="0" bIns="0" rtlCol="0" anchor="t"/>
-          <a:lstStyle/>
-          <a:p>
-            <a:pPr indent="0" marL="0">
-              <a:buNone/>
-            </a:pPr>
-            <a:r>
-              <a:rPr lang="en-US" sz="1000" dirty="0">
-                <a:solidFill>
-                  <a:srgbClr val="919191"/>
-                </a:solidFill>
-                <a:latin typeface="Geist" pitchFamily="34" charset="0"/>
-                <a:ea typeface="Geist" pitchFamily="34" charset="-122"/>
-                <a:cs typeface="Geist" pitchFamily="34" charset="-120"/>
-              </a:rPr>
-              <a:t>Every one is a loop over tools with an approval in the middle.</a:t>
-            </a:r>
-            <a:endParaRPr lang="en-US" sz="1000" dirty="0"/>
+              <a:t>code decides before it runs; an agent decides as it runs. Use a workflow whenever the rules are known, an agent only when they aren't — and pay for it with limits, approvals and evals.</a:t>
+            </a:r>
+            <a:endParaRPr lang="en-US" sz="900" dirty="0"/>
           </a:p>
         </p:txBody>
       </p:sp>
@@ -12202,7 +13141,7 @@
                 <a:ea typeface="IBM Plex Mono" pitchFamily="34" charset="-122"/>
                 <a:cs typeface="IBM Plex Mono" pitchFamily="34" charset="-120"/>
               </a:rPr>
-              <a:t>WHAT BREAKS IN THE ENTERPRISE · 1 OF 3</a:t>
+              <a:t>THE SERIES</a:t>
             </a:r>
             <a:endParaRPr lang="en-US" sz="1000" dirty="0"/>
           </a:p>
@@ -12233,7 +13172,7 @@
               <a:buNone/>
             </a:pPr>
             <a:r>
-              <a:rPr lang="en-US" sz="2300" b="1" spc="-100" kern="0" dirty="0">
+              <a:rPr lang="en-US" sz="2800" b="1" spc="-100" kern="0" dirty="0">
                 <a:solidFill>
                   <a:srgbClr val="1C1C1C"/>
                 </a:solidFill>
@@ -12241,9 +13180,9 @@
                 <a:ea typeface="Geist" pitchFamily="34" charset="-122"/>
                 <a:cs typeface="Geist" pitchFamily="34" charset="-120"/>
               </a:rPr>
-              <a:t>Identity: the agent posts to the ledger — as whom?</a:t>
-            </a:r>
-            <a:endParaRPr lang="en-US" sz="2300" dirty="0"/>
+              <a:t>Where agents live in an ERP</a:t>
+            </a:r>
+            <a:endParaRPr lang="en-US" sz="2800" dirty="0"/>
           </a:p>
         </p:txBody>
       </p:sp>
@@ -12333,8 +13272,150 @@
         </p:nvSpPr>
         <p:spPr>
           <a:xfrm>
-            <a:off x="457200" y="1828800"/>
-            <a:ext cx="2606040" cy="2103120"/>
+            <a:off x="457200" y="1783080"/>
+            <a:ext cx="2606040" cy="1097280"/>
+          </a:xfrm>
+          <a:prstGeom prst="rect">
+            <a:avLst/>
+          </a:prstGeom>
+          <a:solidFill>
+            <a:srgbClr val="F7F7F5"/>
+          </a:solidFill>
+          <a:ln w="9525">
+            <a:solidFill>
+              <a:srgbClr val="E5E5E5"/>
+            </a:solidFill>
+            <a:prstDash val="solid"/>
+          </a:ln>
+        </p:spPr>
+      </p:sp>
+      <p:sp>
+        <p:nvSpPr>
+          <p:cNvPr id="10" name="Text 7"/>
+          <p:cNvSpPr txBox="1"/>
+          <p:nvPr/>
+        </p:nvSpPr>
+        <p:spPr>
+          <a:xfrm>
+            <a:off x="685800" y="1920240"/>
+            <a:ext cx="1645920" cy="320040"/>
+          </a:xfrm>
+          <a:prstGeom prst="rect">
+            <a:avLst/>
+          </a:prstGeom>
+          <a:noFill/>
+          <a:ln/>
+        </p:spPr>
+        <p:txBody>
+          <a:bodyPr wrap="square" lIns="0" tIns="0" rIns="0" bIns="0" rtlCol="0" anchor="t"/>
+          <a:lstStyle/>
+          <a:p>
+            <a:pPr indent="0" marL="0">
+              <a:buNone/>
+            </a:pPr>
+            <a:r>
+              <a:rPr lang="en-US" sz="1400" b="1" spc="-50" kern="0" dirty="0">
+                <a:solidFill>
+                  <a:srgbClr val="1C1C1C"/>
+                </a:solidFill>
+                <a:latin typeface="Geist" pitchFamily="34" charset="0"/>
+                <a:ea typeface="Geist" pitchFamily="34" charset="-122"/>
+                <a:cs typeface="Geist" pitchFamily="34" charset="-120"/>
+              </a:rPr>
+              <a:t>Sales / CRM</a:t>
+            </a:r>
+            <a:endParaRPr lang="en-US" sz="1400" dirty="0"/>
+          </a:p>
+        </p:txBody>
+      </p:sp>
+      <p:sp>
+        <p:nvSpPr>
+          <p:cNvPr id="11" name="Text 8"/>
+          <p:cNvSpPr txBox="1"/>
+          <p:nvPr/>
+        </p:nvSpPr>
+        <p:spPr>
+          <a:xfrm>
+            <a:off x="2194560" y="1938528"/>
+            <a:ext cx="685800" cy="274320"/>
+          </a:xfrm>
+          <a:prstGeom prst="rect">
+            <a:avLst/>
+          </a:prstGeom>
+          <a:noFill/>
+          <a:ln/>
+        </p:spPr>
+        <p:txBody>
+          <a:bodyPr wrap="square" lIns="0" tIns="0" rIns="0" bIns="0" rtlCol="0" anchor="ctr"/>
+          <a:lstStyle/>
+          <a:p>
+            <a:pPr algn="r" indent="0" marL="0">
+              <a:buNone/>
+            </a:pPr>
+            <a:r>
+              <a:rPr lang="en-US" sz="800" dirty="0">
+                <a:solidFill>
+                  <a:srgbClr val="FF5700"/>
+                </a:solidFill>
+                <a:latin typeface="IBM Plex Mono" pitchFamily="34" charset="0"/>
+                <a:ea typeface="IBM Plex Mono" pitchFamily="34" charset="-122"/>
+                <a:cs typeface="IBM Plex Mono" pitchFamily="34" charset="-120"/>
+              </a:rPr>
+              <a:t>Ep 2</a:t>
+            </a:r>
+            <a:endParaRPr lang="en-US" sz="800" dirty="0"/>
+          </a:p>
+        </p:txBody>
+      </p:sp>
+      <p:sp>
+        <p:nvSpPr>
+          <p:cNvPr id="12" name="Text 9"/>
+          <p:cNvSpPr txBox="1"/>
+          <p:nvPr/>
+        </p:nvSpPr>
+        <p:spPr>
+          <a:xfrm>
+            <a:off x="685800" y="2286000"/>
+            <a:ext cx="2194560" cy="548640"/>
+          </a:xfrm>
+          <a:prstGeom prst="rect">
+            <a:avLst/>
+          </a:prstGeom>
+          <a:noFill/>
+          <a:ln/>
+        </p:spPr>
+        <p:txBody>
+          <a:bodyPr wrap="square" lIns="0" tIns="0" rIns="0" bIns="0" rtlCol="0" anchor="t"/>
+          <a:lstStyle/>
+          <a:p>
+            <a:pPr indent="0" marL="0">
+              <a:buNone/>
+            </a:pPr>
+            <a:r>
+              <a:rPr lang="en-US" sz="1050" dirty="0">
+                <a:solidFill>
+                  <a:srgbClr val="6B7280"/>
+                </a:solidFill>
+                <a:latin typeface="Geist" pitchFamily="34" charset="0"/>
+                <a:ea typeface="Geist" pitchFamily="34" charset="-122"/>
+                <a:cs typeface="Geist" pitchFamily="34" charset="-120"/>
+              </a:rPr>
+              <a:t>quote-to-order · returns · lead triage</a:t>
+            </a:r>
+            <a:endParaRPr lang="en-US" sz="1050" dirty="0"/>
+          </a:p>
+        </p:txBody>
+      </p:sp>
+      <p:sp>
+        <p:nvSpPr>
+          <p:cNvPr id="13" name="Shape 10"/>
+          <p:cNvSpPr/>
+          <p:nvPr/>
+        </p:nvSpPr>
+        <p:spPr>
+          <a:xfrm>
+            <a:off x="3246120" y="1783080"/>
+            <a:ext cx="2606040" cy="1097280"/>
           </a:xfrm>
           <a:prstGeom prst="rect">
             <a:avLst/>
@@ -12352,151 +13433,131 @@
       </p:sp>
       <p:sp>
         <p:nvSpPr>
-          <p:cNvPr id="10" name="Shape 7"/>
+          <p:cNvPr id="14" name="Text 11"/>
+          <p:cNvSpPr txBox="1"/>
+          <p:nvPr/>
+        </p:nvSpPr>
+        <p:spPr>
+          <a:xfrm>
+            <a:off x="3474720" y="1920240"/>
+            <a:ext cx="1645920" cy="320040"/>
+          </a:xfrm>
+          <a:prstGeom prst="rect">
+            <a:avLst/>
+          </a:prstGeom>
+          <a:noFill/>
+          <a:ln/>
+        </p:spPr>
+        <p:txBody>
+          <a:bodyPr wrap="square" lIns="0" tIns="0" rIns="0" bIns="0" rtlCol="0" anchor="t"/>
+          <a:lstStyle/>
+          <a:p>
+            <a:pPr indent="0" marL="0">
+              <a:buNone/>
+            </a:pPr>
+            <a:r>
+              <a:rPr lang="en-US" sz="1400" b="1" spc="-50" kern="0" dirty="0">
+                <a:solidFill>
+                  <a:srgbClr val="1C1C1C"/>
+                </a:solidFill>
+                <a:latin typeface="Geist" pitchFamily="34" charset="0"/>
+                <a:ea typeface="Geist" pitchFamily="34" charset="-122"/>
+                <a:cs typeface="Geist" pitchFamily="34" charset="-120"/>
+              </a:rPr>
+              <a:t>Inventory</a:t>
+            </a:r>
+            <a:endParaRPr lang="en-US" sz="1400" dirty="0"/>
+          </a:p>
+        </p:txBody>
+      </p:sp>
+      <p:sp>
+        <p:nvSpPr>
+          <p:cNvPr id="15" name="Text 12"/>
+          <p:cNvSpPr txBox="1"/>
+          <p:nvPr/>
+        </p:nvSpPr>
+        <p:spPr>
+          <a:xfrm>
+            <a:off x="4983480" y="1938528"/>
+            <a:ext cx="685800" cy="274320"/>
+          </a:xfrm>
+          <a:prstGeom prst="rect">
+            <a:avLst/>
+          </a:prstGeom>
+          <a:noFill/>
+          <a:ln/>
+        </p:spPr>
+        <p:txBody>
+          <a:bodyPr wrap="square" lIns="0" tIns="0" rIns="0" bIns="0" rtlCol="0" anchor="ctr"/>
+          <a:lstStyle/>
+          <a:p>
+            <a:pPr algn="r" indent="0" marL="0">
+              <a:buNone/>
+            </a:pPr>
+            <a:r>
+              <a:rPr lang="en-US" sz="800" dirty="0">
+                <a:solidFill>
+                  <a:srgbClr val="FF5700"/>
+                </a:solidFill>
+                <a:latin typeface="IBM Plex Mono" pitchFamily="34" charset="0"/>
+                <a:ea typeface="IBM Plex Mono" pitchFamily="34" charset="-122"/>
+                <a:cs typeface="IBM Plex Mono" pitchFamily="34" charset="-120"/>
+              </a:rPr>
+              <a:t>Ep 6</a:t>
+            </a:r>
+            <a:endParaRPr lang="en-US" sz="800" dirty="0"/>
+          </a:p>
+        </p:txBody>
+      </p:sp>
+      <p:sp>
+        <p:nvSpPr>
+          <p:cNvPr id="16" name="Text 13"/>
+          <p:cNvSpPr txBox="1"/>
+          <p:nvPr/>
+        </p:nvSpPr>
+        <p:spPr>
+          <a:xfrm>
+            <a:off x="3474720" y="2286000"/>
+            <a:ext cx="2194560" cy="548640"/>
+          </a:xfrm>
+          <a:prstGeom prst="rect">
+            <a:avLst/>
+          </a:prstGeom>
+          <a:noFill/>
+          <a:ln/>
+        </p:spPr>
+        <p:txBody>
+          <a:bodyPr wrap="square" lIns="0" tIns="0" rIns="0" bIns="0" rtlCol="0" anchor="t"/>
+          <a:lstStyle/>
+          <a:p>
+            <a:pPr indent="0" marL="0">
+              <a:buNone/>
+            </a:pPr>
+            <a:r>
+              <a:rPr lang="en-US" sz="1050" dirty="0">
+                <a:solidFill>
+                  <a:srgbClr val="6B7280"/>
+                </a:solidFill>
+                <a:latin typeface="Geist" pitchFamily="34" charset="0"/>
+                <a:ea typeface="Geist" pitchFamily="34" charset="-122"/>
+                <a:cs typeface="Geist" pitchFamily="34" charset="-120"/>
+              </a:rPr>
+              <a:t>reorder · stock exceptions</a:t>
+            </a:r>
+            <a:endParaRPr lang="en-US" sz="1050" dirty="0"/>
+          </a:p>
+        </p:txBody>
+      </p:sp>
+      <p:sp>
+        <p:nvSpPr>
+          <p:cNvPr id="17" name="Shape 14"/>
           <p:cNvSpPr/>
           <p:nvPr/>
         </p:nvSpPr>
         <p:spPr>
           <a:xfrm>
-            <a:off x="685800" y="2057400"/>
-            <a:ext cx="329184" cy="329184"/>
-          </a:xfrm>
-          <a:prstGeom prst="rect">
-            <a:avLst/>
-          </a:prstGeom>
-          <a:solidFill>
-            <a:srgbClr val="D14343"/>
-          </a:solidFill>
-          <a:ln/>
-        </p:spPr>
-      </p:sp>
-      <p:sp>
-        <p:nvSpPr>
-          <p:cNvPr id="11" name="Text 8"/>
-          <p:cNvSpPr txBox="1"/>
-          <p:nvPr/>
-        </p:nvSpPr>
-        <p:spPr>
-          <a:xfrm>
-            <a:off x="685800" y="2057400"/>
-            <a:ext cx="329184" cy="329184"/>
-          </a:xfrm>
-          <a:prstGeom prst="rect">
-            <a:avLst/>
-          </a:prstGeom>
-          <a:noFill/>
-          <a:ln/>
-        </p:spPr>
-        <p:txBody>
-          <a:bodyPr wrap="square" lIns="0" tIns="0" rIns="0" bIns="0" rtlCol="0" anchor="ctr"/>
-          <a:lstStyle/>
-          <a:p>
-            <a:pPr algn="ctr" indent="0" marL="0">
-              <a:buNone/>
-            </a:pPr>
-            <a:r>
-              <a:rPr lang="en-US" sz="1200" b="1" dirty="0">
-                <a:solidFill>
-                  <a:srgbClr val="FFFFFF"/>
-                </a:solidFill>
-                <a:latin typeface="Geist" pitchFamily="34" charset="0"/>
-                <a:ea typeface="Geist" pitchFamily="34" charset="-122"/>
-                <a:cs typeface="Geist" pitchFamily="34" charset="-120"/>
-              </a:rPr>
-              <a:t>✕</a:t>
-            </a:r>
-            <a:endParaRPr lang="en-US" sz="1200" dirty="0"/>
-          </a:p>
-        </p:txBody>
-      </p:sp>
-      <p:sp>
-        <p:nvSpPr>
-          <p:cNvPr id="12" name="Text 9"/>
-          <p:cNvSpPr txBox="1"/>
-          <p:nvPr/>
-        </p:nvSpPr>
-        <p:spPr>
-          <a:xfrm>
-            <a:off x="685800" y="2514600"/>
-            <a:ext cx="2194560" cy="365760"/>
-          </a:xfrm>
-          <a:prstGeom prst="rect">
-            <a:avLst/>
-          </a:prstGeom>
-          <a:noFill/>
-          <a:ln/>
-        </p:spPr>
-        <p:txBody>
-          <a:bodyPr wrap="square" lIns="0" tIns="0" rIns="0" bIns="0" rtlCol="0" anchor="t"/>
-          <a:lstStyle/>
-          <a:p>
-            <a:pPr indent="0" marL="0">
-              <a:buNone/>
-            </a:pPr>
-            <a:r>
-              <a:rPr lang="en-US" sz="1400" b="1" spc="-50" kern="0" dirty="0">
-                <a:solidFill>
-                  <a:srgbClr val="1C1C1C"/>
-                </a:solidFill>
-                <a:latin typeface="Geist" pitchFamily="34" charset="0"/>
-                <a:ea typeface="Geist" pitchFamily="34" charset="-122"/>
-                <a:cs typeface="Geist" pitchFamily="34" charset="-120"/>
-              </a:rPr>
-              <a:t>Service account</a:t>
-            </a:r>
-            <a:endParaRPr lang="en-US" sz="1400" dirty="0"/>
-          </a:p>
-        </p:txBody>
-      </p:sp>
-      <p:sp>
-        <p:nvSpPr>
-          <p:cNvPr id="13" name="Text 10"/>
-          <p:cNvSpPr txBox="1"/>
-          <p:nvPr/>
-        </p:nvSpPr>
-        <p:spPr>
-          <a:xfrm>
-            <a:off x="685800" y="2880360"/>
-            <a:ext cx="2194560" cy="1005840"/>
-          </a:xfrm>
-          <a:prstGeom prst="rect">
-            <a:avLst/>
-          </a:prstGeom>
-          <a:noFill/>
-          <a:ln/>
-        </p:spPr>
-        <p:txBody>
-          <a:bodyPr wrap="square" lIns="0" tIns="0" rIns="0" bIns="0" rtlCol="0" anchor="t"/>
-          <a:lstStyle/>
-          <a:p>
-            <a:pPr indent="0" marL="0">
-              <a:buNone/>
-            </a:pPr>
-            <a:r>
-              <a:rPr lang="en-US" sz="1100" dirty="0">
-                <a:solidFill>
-                  <a:srgbClr val="6B7280"/>
-                </a:solidFill>
-                <a:latin typeface="Geist" pitchFamily="34" charset="0"/>
-                <a:ea typeface="Geist" pitchFamily="34" charset="-122"/>
-                <a:cs typeface="Geist" pitchFamily="34" charset="-120"/>
-              </a:rPr>
-              <a:t>Simple. Over-privileged. One prompt injection away from every company's books.</a:t>
-            </a:r>
-            <a:endParaRPr lang="en-US" sz="1100" dirty="0"/>
-          </a:p>
-        </p:txBody>
-      </p:sp>
-      <p:sp>
-        <p:nvSpPr>
-          <p:cNvPr id="14" name="Shape 11"/>
-          <p:cNvSpPr/>
-          <p:nvPr/>
-        </p:nvSpPr>
-        <p:spPr>
-          <a:xfrm>
-            <a:off x="3246120" y="1828800"/>
-            <a:ext cx="2606040" cy="2103120"/>
+            <a:off x="6035040" y="1783080"/>
+            <a:ext cx="2606040" cy="1097280"/>
           </a:xfrm>
           <a:prstGeom prst="rect">
             <a:avLst/>
@@ -12514,157 +13575,137 @@
       </p:sp>
       <p:sp>
         <p:nvSpPr>
-          <p:cNvPr id="15" name="Shape 12"/>
+          <p:cNvPr id="18" name="Text 15"/>
+          <p:cNvSpPr txBox="1"/>
+          <p:nvPr/>
+        </p:nvSpPr>
+        <p:spPr>
+          <a:xfrm>
+            <a:off x="6263640" y="1920240"/>
+            <a:ext cx="1645920" cy="320040"/>
+          </a:xfrm>
+          <a:prstGeom prst="rect">
+            <a:avLst/>
+          </a:prstGeom>
+          <a:noFill/>
+          <a:ln/>
+        </p:spPr>
+        <p:txBody>
+          <a:bodyPr wrap="square" lIns="0" tIns="0" rIns="0" bIns="0" rtlCol="0" anchor="t"/>
+          <a:lstStyle/>
+          <a:p>
+            <a:pPr indent="0" marL="0">
+              <a:buNone/>
+            </a:pPr>
+            <a:r>
+              <a:rPr lang="en-US" sz="1400" b="1" spc="-50" kern="0" dirty="0">
+                <a:solidFill>
+                  <a:srgbClr val="1C1C1C"/>
+                </a:solidFill>
+                <a:latin typeface="Geist" pitchFamily="34" charset="0"/>
+                <a:ea typeface="Geist" pitchFamily="34" charset="-122"/>
+                <a:cs typeface="Geist" pitchFamily="34" charset="-120"/>
+              </a:rPr>
+              <a:t>Finance</a:t>
+            </a:r>
+            <a:endParaRPr lang="en-US" sz="1400" dirty="0"/>
+          </a:p>
+        </p:txBody>
+      </p:sp>
+      <p:sp>
+        <p:nvSpPr>
+          <p:cNvPr id="19" name="Text 16"/>
+          <p:cNvSpPr txBox="1"/>
+          <p:nvPr/>
+        </p:nvSpPr>
+        <p:spPr>
+          <a:xfrm>
+            <a:off x="7772400" y="1938528"/>
+            <a:ext cx="685800" cy="274320"/>
+          </a:xfrm>
+          <a:prstGeom prst="rect">
+            <a:avLst/>
+          </a:prstGeom>
+          <a:noFill/>
+          <a:ln/>
+        </p:spPr>
+        <p:txBody>
+          <a:bodyPr wrap="square" lIns="0" tIns="0" rIns="0" bIns="0" rtlCol="0" anchor="ctr"/>
+          <a:lstStyle/>
+          <a:p>
+            <a:pPr algn="r" indent="0" marL="0">
+              <a:buNone/>
+            </a:pPr>
+            <a:r>
+              <a:rPr lang="en-US" sz="800" dirty="0">
+                <a:solidFill>
+                  <a:srgbClr val="FF5700"/>
+                </a:solidFill>
+                <a:latin typeface="IBM Plex Mono" pitchFamily="34" charset="0"/>
+                <a:ea typeface="IBM Plex Mono" pitchFamily="34" charset="-122"/>
+                <a:cs typeface="IBM Plex Mono" pitchFamily="34" charset="-120"/>
+              </a:rPr>
+              <a:t>Ep 12, 26</a:t>
+            </a:r>
+            <a:endParaRPr lang="en-US" sz="800" dirty="0"/>
+          </a:p>
+        </p:txBody>
+      </p:sp>
+      <p:sp>
+        <p:nvSpPr>
+          <p:cNvPr id="20" name="Text 17"/>
+          <p:cNvSpPr txBox="1"/>
+          <p:nvPr/>
+        </p:nvSpPr>
+        <p:spPr>
+          <a:xfrm>
+            <a:off x="6263640" y="2286000"/>
+            <a:ext cx="2194560" cy="548640"/>
+          </a:xfrm>
+          <a:prstGeom prst="rect">
+            <a:avLst/>
+          </a:prstGeom>
+          <a:noFill/>
+          <a:ln/>
+        </p:spPr>
+        <p:txBody>
+          <a:bodyPr wrap="square" lIns="0" tIns="0" rIns="0" bIns="0" rtlCol="0" anchor="t"/>
+          <a:lstStyle/>
+          <a:p>
+            <a:pPr indent="0" marL="0">
+              <a:buNone/>
+            </a:pPr>
+            <a:r>
+              <a:rPr lang="en-US" sz="1050" dirty="0">
+                <a:solidFill>
+                  <a:srgbClr val="6B7280"/>
+                </a:solidFill>
+                <a:latin typeface="Geist" pitchFamily="34" charset="0"/>
+                <a:ea typeface="Geist" pitchFamily="34" charset="-122"/>
+                <a:cs typeface="Geist" pitchFamily="34" charset="-120"/>
+              </a:rPr>
+              <a:t>invoice matching · month-end reconciliation</a:t>
+            </a:r>
+            <a:endParaRPr lang="en-US" sz="1050" dirty="0"/>
+          </a:p>
+        </p:txBody>
+      </p:sp>
+      <p:sp>
+        <p:nvSpPr>
+          <p:cNvPr id="21" name="Shape 18"/>
           <p:cNvSpPr/>
           <p:nvPr/>
         </p:nvSpPr>
         <p:spPr>
           <a:xfrm>
-            <a:off x="3474720" y="2057400"/>
-            <a:ext cx="329184" cy="329184"/>
+            <a:off x="457200" y="3017520"/>
+            <a:ext cx="2606040" cy="1097280"/>
           </a:xfrm>
           <a:prstGeom prst="rect">
             <a:avLst/>
           </a:prstGeom>
           <a:solidFill>
-            <a:srgbClr val="FF5700"/>
-          </a:solidFill>
-          <a:ln/>
-        </p:spPr>
-      </p:sp>
-      <p:sp>
-        <p:nvSpPr>
-          <p:cNvPr id="16" name="Text 13"/>
-          <p:cNvSpPr txBox="1"/>
-          <p:nvPr/>
-        </p:nvSpPr>
-        <p:spPr>
-          <a:xfrm>
-            <a:off x="3474720" y="2057400"/>
-            <a:ext cx="329184" cy="329184"/>
-          </a:xfrm>
-          <a:prstGeom prst="rect">
-            <a:avLst/>
-          </a:prstGeom>
-          <a:noFill/>
-          <a:ln/>
-        </p:spPr>
-        <p:txBody>
-          <a:bodyPr wrap="square" lIns="0" tIns="0" rIns="0" bIns="0" rtlCol="0" anchor="ctr"/>
-          <a:lstStyle/>
-          <a:p>
-            <a:pPr algn="ctr" indent="0" marL="0">
-              <a:buNone/>
-            </a:pPr>
-            <a:r>
-              <a:rPr lang="en-US" sz="1200" b="1" dirty="0">
-                <a:solidFill>
-                  <a:srgbClr val="FFFFFF"/>
-                </a:solidFill>
-                <a:latin typeface="Geist" pitchFamily="34" charset="0"/>
-                <a:ea typeface="Geist" pitchFamily="34" charset="-122"/>
-                <a:cs typeface="Geist" pitchFamily="34" charset="-120"/>
-              </a:rPr>
-              <a:t>~</a:t>
-            </a:r>
-            <a:endParaRPr lang="en-US" sz="1200" dirty="0"/>
-          </a:p>
-        </p:txBody>
-      </p:sp>
-      <p:sp>
-        <p:nvSpPr>
-          <p:cNvPr id="17" name="Text 14"/>
-          <p:cNvSpPr txBox="1"/>
-          <p:nvPr/>
-        </p:nvSpPr>
-        <p:spPr>
-          <a:xfrm>
-            <a:off x="3474720" y="2514600"/>
-            <a:ext cx="2194560" cy="365760"/>
-          </a:xfrm>
-          <a:prstGeom prst="rect">
-            <a:avLst/>
-          </a:prstGeom>
-          <a:noFill/>
-          <a:ln/>
-        </p:spPr>
-        <p:txBody>
-          <a:bodyPr wrap="square" lIns="0" tIns="0" rIns="0" bIns="0" rtlCol="0" anchor="t"/>
-          <a:lstStyle/>
-          <a:p>
-            <a:pPr indent="0" marL="0">
-              <a:buNone/>
-            </a:pPr>
-            <a:r>
-              <a:rPr lang="en-US" sz="1400" b="1" spc="-50" kern="0" dirty="0">
-                <a:solidFill>
-                  <a:srgbClr val="1C1C1C"/>
-                </a:solidFill>
-                <a:latin typeface="Geist" pitchFamily="34" charset="0"/>
-                <a:ea typeface="Geist" pitchFamily="34" charset="-122"/>
-                <a:cs typeface="Geist" pitchFamily="34" charset="-120"/>
-              </a:rPr>
-              <a:t>The user's token</a:t>
-            </a:r>
-            <a:endParaRPr lang="en-US" sz="1400" dirty="0"/>
-          </a:p>
-        </p:txBody>
-      </p:sp>
-      <p:sp>
-        <p:nvSpPr>
-          <p:cNvPr id="18" name="Text 15"/>
-          <p:cNvSpPr txBox="1"/>
-          <p:nvPr/>
-        </p:nvSpPr>
-        <p:spPr>
-          <a:xfrm>
-            <a:off x="3474720" y="2880360"/>
-            <a:ext cx="2194560" cy="1005840"/>
-          </a:xfrm>
-          <a:prstGeom prst="rect">
-            <a:avLst/>
-          </a:prstGeom>
-          <a:noFill/>
-          <a:ln/>
-        </p:spPr>
-        <p:txBody>
-          <a:bodyPr wrap="square" lIns="0" tIns="0" rIns="0" bIns="0" rtlCol="0" anchor="t"/>
-          <a:lstStyle/>
-          <a:p>
-            <a:pPr indent="0" marL="0">
-              <a:buNone/>
-            </a:pPr>
-            <a:r>
-              <a:rPr lang="en-US" sz="1100" dirty="0">
-                <a:solidFill>
-                  <a:srgbClr val="6B7280"/>
-                </a:solidFill>
-                <a:latin typeface="Geist" pitchFamily="34" charset="0"/>
-                <a:ea typeface="Geist" pitchFamily="34" charset="-122"/>
-                <a:cs typeface="Geist" pitchFamily="34" charset="-120"/>
-              </a:rPr>
-              <a:t>Scoped right — but how do you delegate it safely to a process that runs for minutes?</a:t>
-            </a:r>
-            <a:endParaRPr lang="en-US" sz="1100" dirty="0"/>
-          </a:p>
-        </p:txBody>
-      </p:sp>
-      <p:sp>
-        <p:nvSpPr>
-          <p:cNvPr id="19" name="Shape 16"/>
-          <p:cNvSpPr/>
-          <p:nvPr/>
-        </p:nvSpPr>
-        <p:spPr>
-          <a:xfrm>
-            <a:off x="6035040" y="1828800"/>
-            <a:ext cx="2606040" cy="2103120"/>
-          </a:xfrm>
-          <a:prstGeom prst="rect">
-            <a:avLst/>
-          </a:prstGeom>
-          <a:solidFill>
-            <a:srgbClr val="F7F7F5"/>
+            <a:srgbClr val="FFFFFF"/>
           </a:solidFill>
           <a:ln w="9525">
             <a:solidFill>
@@ -12676,34 +13717,195 @@
       </p:sp>
       <p:sp>
         <p:nvSpPr>
-          <p:cNvPr id="20" name="Shape 17"/>
+          <p:cNvPr id="22" name="Text 19"/>
+          <p:cNvSpPr txBox="1"/>
+          <p:nvPr/>
+        </p:nvSpPr>
+        <p:spPr>
+          <a:xfrm>
+            <a:off x="685800" y="3154680"/>
+            <a:ext cx="1645920" cy="320040"/>
+          </a:xfrm>
+          <a:prstGeom prst="rect">
+            <a:avLst/>
+          </a:prstGeom>
+          <a:noFill/>
+          <a:ln/>
+        </p:spPr>
+        <p:txBody>
+          <a:bodyPr wrap="square" lIns="0" tIns="0" rIns="0" bIns="0" rtlCol="0" anchor="t"/>
+          <a:lstStyle/>
+          <a:p>
+            <a:pPr indent="0" marL="0">
+              <a:buNone/>
+            </a:pPr>
+            <a:r>
+              <a:rPr lang="en-US" sz="1400" b="1" spc="-50" kern="0" dirty="0">
+                <a:solidFill>
+                  <a:srgbClr val="1C1C1C"/>
+                </a:solidFill>
+                <a:latin typeface="Geist" pitchFamily="34" charset="0"/>
+                <a:ea typeface="Geist" pitchFamily="34" charset="-122"/>
+                <a:cs typeface="Geist" pitchFamily="34" charset="-120"/>
+              </a:rPr>
+              <a:t>Procurement</a:t>
+            </a:r>
+            <a:endParaRPr lang="en-US" sz="1400" dirty="0"/>
+          </a:p>
+        </p:txBody>
+      </p:sp>
+      <p:sp>
+        <p:nvSpPr>
+          <p:cNvPr id="23" name="Text 20"/>
+          <p:cNvSpPr txBox="1"/>
+          <p:nvPr/>
+        </p:nvSpPr>
+        <p:spPr>
+          <a:xfrm>
+            <a:off x="2194560" y="3172968"/>
+            <a:ext cx="685800" cy="274320"/>
+          </a:xfrm>
+          <a:prstGeom prst="rect">
+            <a:avLst/>
+          </a:prstGeom>
+          <a:noFill/>
+          <a:ln/>
+        </p:spPr>
+        <p:txBody>
+          <a:bodyPr wrap="square" lIns="0" tIns="0" rIns="0" bIns="0" rtlCol="0" anchor="ctr"/>
+          <a:lstStyle/>
+          <a:p>
+            <a:pPr algn="r" indent="0" marL="0">
+              <a:buNone/>
+            </a:pPr>
+            <a:r>
+              <a:rPr lang="en-US" sz="800" dirty="0">
+                <a:solidFill>
+                  <a:srgbClr val="FF5700"/>
+                </a:solidFill>
+                <a:latin typeface="IBM Plex Mono" pitchFamily="34" charset="0"/>
+                <a:ea typeface="IBM Plex Mono" pitchFamily="34" charset="-122"/>
+                <a:cs typeface="IBM Plex Mono" pitchFamily="34" charset="-120"/>
+              </a:rPr>
+              <a:t>Ep 6–8</a:t>
+            </a:r>
+            <a:endParaRPr lang="en-US" sz="800" dirty="0"/>
+          </a:p>
+        </p:txBody>
+      </p:sp>
+      <p:sp>
+        <p:nvSpPr>
+          <p:cNvPr id="24" name="Text 21"/>
+          <p:cNvSpPr txBox="1"/>
+          <p:nvPr/>
+        </p:nvSpPr>
+        <p:spPr>
+          <a:xfrm>
+            <a:off x="685800" y="3520440"/>
+            <a:ext cx="2194560" cy="548640"/>
+          </a:xfrm>
+          <a:prstGeom prst="rect">
+            <a:avLst/>
+          </a:prstGeom>
+          <a:noFill/>
+          <a:ln/>
+        </p:spPr>
+        <p:txBody>
+          <a:bodyPr wrap="square" lIns="0" tIns="0" rIns="0" bIns="0" rtlCol="0" anchor="t"/>
+          <a:lstStyle/>
+          <a:p>
+            <a:pPr indent="0" marL="0">
+              <a:buNone/>
+            </a:pPr>
+            <a:r>
+              <a:rPr lang="en-US" sz="1050" dirty="0">
+                <a:solidFill>
+                  <a:srgbClr val="6B7280"/>
+                </a:solidFill>
+                <a:latin typeface="Geist" pitchFamily="34" charset="0"/>
+                <a:ea typeface="Geist" pitchFamily="34" charset="-122"/>
+                <a:cs typeface="Geist" pitchFamily="34" charset="-120"/>
+              </a:rPr>
+              <a:t>supplier search · PO approval</a:t>
+            </a:r>
+            <a:endParaRPr lang="en-US" sz="1050" dirty="0"/>
+          </a:p>
+        </p:txBody>
+      </p:sp>
+      <p:sp>
+        <p:nvSpPr>
+          <p:cNvPr id="25" name="Shape 22"/>
           <p:cNvSpPr/>
           <p:nvPr/>
         </p:nvSpPr>
         <p:spPr>
           <a:xfrm>
-            <a:off x="6263640" y="2057400"/>
-            <a:ext cx="329184" cy="329184"/>
+            <a:off x="3246120" y="3017520"/>
+            <a:ext cx="2606040" cy="1097280"/>
           </a:xfrm>
           <a:prstGeom prst="rect">
             <a:avLst/>
           </a:prstGeom>
           <a:solidFill>
-            <a:srgbClr val="0E7C7B"/>
+            <a:srgbClr val="FFFFFF"/>
           </a:solidFill>
-          <a:ln/>
-        </p:spPr>
-      </p:sp>
-      <p:sp>
-        <p:nvSpPr>
-          <p:cNvPr id="21" name="Text 18"/>
-          <p:cNvSpPr txBox="1"/>
-          <p:nvPr/>
-        </p:nvSpPr>
-        <p:spPr>
-          <a:xfrm>
-            <a:off x="6263640" y="2057400"/>
-            <a:ext cx="329184" cy="329184"/>
+          <a:ln w="9525">
+            <a:solidFill>
+              <a:srgbClr val="E5E5E5"/>
+            </a:solidFill>
+            <a:prstDash val="solid"/>
+          </a:ln>
+        </p:spPr>
+      </p:sp>
+      <p:sp>
+        <p:nvSpPr>
+          <p:cNvPr id="26" name="Text 23"/>
+          <p:cNvSpPr txBox="1"/>
+          <p:nvPr/>
+        </p:nvSpPr>
+        <p:spPr>
+          <a:xfrm>
+            <a:off x="3474720" y="3154680"/>
+            <a:ext cx="1645920" cy="320040"/>
+          </a:xfrm>
+          <a:prstGeom prst="rect">
+            <a:avLst/>
+          </a:prstGeom>
+          <a:noFill/>
+          <a:ln/>
+        </p:spPr>
+        <p:txBody>
+          <a:bodyPr wrap="square" lIns="0" tIns="0" rIns="0" bIns="0" rtlCol="0" anchor="t"/>
+          <a:lstStyle/>
+          <a:p>
+            <a:pPr indent="0" marL="0">
+              <a:buNone/>
+            </a:pPr>
+            <a:r>
+              <a:rPr lang="en-US" sz="1400" b="1" spc="-50" kern="0" dirty="0">
+                <a:solidFill>
+                  <a:srgbClr val="1C1C1C"/>
+                </a:solidFill>
+                <a:latin typeface="Geist" pitchFamily="34" charset="0"/>
+                <a:ea typeface="Geist" pitchFamily="34" charset="-122"/>
+                <a:cs typeface="Geist" pitchFamily="34" charset="-120"/>
+              </a:rPr>
+              <a:t>HR</a:t>
+            </a:r>
+            <a:endParaRPr lang="en-US" sz="1400" dirty="0"/>
+          </a:p>
+        </p:txBody>
+      </p:sp>
+      <p:sp>
+        <p:nvSpPr>
+          <p:cNvPr id="27" name="Text 24"/>
+          <p:cNvSpPr txBox="1"/>
+          <p:nvPr/>
+        </p:nvSpPr>
+        <p:spPr>
+          <a:xfrm>
+            <a:off x="4983480" y="3172968"/>
+            <a:ext cx="685800" cy="274320"/>
           </a:xfrm>
           <a:prstGeom prst="rect">
             <a:avLst/>
@@ -12715,34 +13917,34 @@
           <a:bodyPr wrap="square" lIns="0" tIns="0" rIns="0" bIns="0" rtlCol="0" anchor="ctr"/>
           <a:lstStyle/>
           <a:p>
-            <a:pPr algn="ctr" indent="0" marL="0">
-              <a:buNone/>
-            </a:pPr>
-            <a:r>
-              <a:rPr lang="en-US" sz="1200" b="1" dirty="0">
-                <a:solidFill>
-                  <a:srgbClr val="FFFFFF"/>
-                </a:solidFill>
-                <a:latin typeface="Geist" pitchFamily="34" charset="0"/>
-                <a:ea typeface="Geist" pitchFamily="34" charset="-122"/>
-                <a:cs typeface="Geist" pitchFamily="34" charset="-120"/>
-              </a:rPr>
-              <a:t>✓</a:t>
-            </a:r>
-            <a:endParaRPr lang="en-US" sz="1200" dirty="0"/>
-          </a:p>
-        </p:txBody>
-      </p:sp>
-      <p:sp>
-        <p:nvSpPr>
-          <p:cNvPr id="22" name="Text 19"/>
-          <p:cNvSpPr txBox="1"/>
-          <p:nvPr/>
-        </p:nvSpPr>
-        <p:spPr>
-          <a:xfrm>
-            <a:off x="6263640" y="2514600"/>
-            <a:ext cx="2194560" cy="365760"/>
+            <a:pPr algn="r" indent="0" marL="0">
+              <a:buNone/>
+            </a:pPr>
+            <a:r>
+              <a:rPr lang="en-US" sz="800" dirty="0">
+                <a:solidFill>
+                  <a:srgbClr val="FF5700"/>
+                </a:solidFill>
+                <a:latin typeface="IBM Plex Mono" pitchFamily="34" charset="0"/>
+                <a:ea typeface="IBM Plex Mono" pitchFamily="34" charset="-122"/>
+                <a:cs typeface="IBM Plex Mono" pitchFamily="34" charset="-120"/>
+              </a:rPr>
+              <a:t>later</a:t>
+            </a:r>
+            <a:endParaRPr lang="en-US" sz="800" dirty="0"/>
+          </a:p>
+        </p:txBody>
+      </p:sp>
+      <p:sp>
+        <p:nvSpPr>
+          <p:cNvPr id="28" name="Text 25"/>
+          <p:cNvSpPr txBox="1"/>
+          <p:nvPr/>
+        </p:nvSpPr>
+        <p:spPr>
+          <a:xfrm>
+            <a:off x="3474720" y="3520440"/>
+            <a:ext cx="2194560" cy="548640"/>
           </a:xfrm>
           <a:prstGeom prst="rect">
             <a:avLst/>
@@ -12758,6 +13960,70 @@
               <a:buNone/>
             </a:pPr>
             <a:r>
+              <a:rPr lang="en-US" sz="1050" dirty="0">
+                <a:solidFill>
+                  <a:srgbClr val="6B7280"/>
+                </a:solidFill>
+                <a:latin typeface="Geist" pitchFamily="34" charset="0"/>
+                <a:ea typeface="Geist" pitchFamily="34" charset="-122"/>
+                <a:cs typeface="Geist" pitchFamily="34" charset="-120"/>
+              </a:rPr>
+              <a:t>leave · expense approvals</a:t>
+            </a:r>
+            <a:endParaRPr lang="en-US" sz="1050" dirty="0"/>
+          </a:p>
+        </p:txBody>
+      </p:sp>
+      <p:sp>
+        <p:nvSpPr>
+          <p:cNvPr id="29" name="Shape 26"/>
+          <p:cNvSpPr/>
+          <p:nvPr/>
+        </p:nvSpPr>
+        <p:spPr>
+          <a:xfrm>
+            <a:off x="6035040" y="3017520"/>
+            <a:ext cx="2606040" cy="1097280"/>
+          </a:xfrm>
+          <a:prstGeom prst="rect">
+            <a:avLst/>
+          </a:prstGeom>
+          <a:solidFill>
+            <a:srgbClr val="FFFFFF"/>
+          </a:solidFill>
+          <a:ln w="9525">
+            <a:solidFill>
+              <a:srgbClr val="E5E5E5"/>
+            </a:solidFill>
+            <a:prstDash val="solid"/>
+          </a:ln>
+        </p:spPr>
+      </p:sp>
+      <p:sp>
+        <p:nvSpPr>
+          <p:cNvPr id="30" name="Text 27"/>
+          <p:cNvSpPr txBox="1"/>
+          <p:nvPr/>
+        </p:nvSpPr>
+        <p:spPr>
+          <a:xfrm>
+            <a:off x="6263640" y="3154680"/>
+            <a:ext cx="1645920" cy="320040"/>
+          </a:xfrm>
+          <a:prstGeom prst="rect">
+            <a:avLst/>
+          </a:prstGeom>
+          <a:noFill/>
+          <a:ln/>
+        </p:spPr>
+        <p:txBody>
+          <a:bodyPr wrap="square" lIns="0" tIns="0" rIns="0" bIns="0" rtlCol="0" anchor="t"/>
+          <a:lstStyle/>
+          <a:p>
+            <a:pPr indent="0" marL="0">
+              <a:buNone/>
+            </a:pPr>
+            <a:r>
               <a:rPr lang="en-US" sz="1400" b="1" spc="-50" kern="0" dirty="0">
                 <a:solidFill>
                   <a:srgbClr val="1C1C1C"/>
@@ -12766,7 +14032,7 @@
                 <a:ea typeface="Geist" pitchFamily="34" charset="-122"/>
                 <a:cs typeface="Geist" pitchFamily="34" charset="-120"/>
               </a:rPr>
-              <a:t>Agent identity</a:t>
+              <a:t>Platform</a:t>
             </a:r>
             <a:endParaRPr lang="en-US" sz="1400" dirty="0"/>
           </a:p>
@@ -12774,14 +14040,53 @@
       </p:sp>
       <p:sp>
         <p:nvSpPr>
-          <p:cNvPr id="23" name="Text 20"/>
-          <p:cNvSpPr txBox="1"/>
-          <p:nvPr/>
-        </p:nvSpPr>
-        <p:spPr>
-          <a:xfrm>
-            <a:off x="6263640" y="2880360"/>
-            <a:ext cx="2194560" cy="1005840"/>
+          <p:cNvPr id="31" name="Text 28"/>
+          <p:cNvSpPr txBox="1"/>
+          <p:nvPr/>
+        </p:nvSpPr>
+        <p:spPr>
+          <a:xfrm>
+            <a:off x="7772400" y="3172968"/>
+            <a:ext cx="685800" cy="274320"/>
+          </a:xfrm>
+          <a:prstGeom prst="rect">
+            <a:avLst/>
+          </a:prstGeom>
+          <a:noFill/>
+          <a:ln/>
+        </p:spPr>
+        <p:txBody>
+          <a:bodyPr wrap="square" lIns="0" tIns="0" rIns="0" bIns="0" rtlCol="0" anchor="ctr"/>
+          <a:lstStyle/>
+          <a:p>
+            <a:pPr algn="r" indent="0" marL="0">
+              <a:buNone/>
+            </a:pPr>
+            <a:r>
+              <a:rPr lang="en-US" sz="800" dirty="0">
+                <a:solidFill>
+                  <a:srgbClr val="FF5700"/>
+                </a:solidFill>
+                <a:latin typeface="IBM Plex Mono" pitchFamily="34" charset="0"/>
+                <a:ea typeface="IBM Plex Mono" pitchFamily="34" charset="-122"/>
+                <a:cs typeface="IBM Plex Mono" pitchFamily="34" charset="-120"/>
+              </a:rPr>
+              <a:t>Ep 4, 9–11, 15, 25</a:t>
+            </a:r>
+            <a:endParaRPr lang="en-US" sz="800" dirty="0"/>
+          </a:p>
+        </p:txBody>
+      </p:sp>
+      <p:sp>
+        <p:nvSpPr>
+          <p:cNvPr id="32" name="Text 29"/>
+          <p:cNvSpPr txBox="1"/>
+          <p:nvPr/>
+        </p:nvSpPr>
+        <p:spPr>
+          <a:xfrm>
+            <a:off x="6263640" y="3520440"/>
+            <a:ext cx="2194560" cy="548640"/>
           </a:xfrm>
           <a:prstGeom prst="rect">
             <a:avLst/>
@@ -12797,7 +14102,7 @@
               <a:buNone/>
             </a:pPr>
             <a:r>
-              <a:rPr lang="en-US" sz="1100" dirty="0">
+              <a:rPr lang="en-US" sz="1050" dirty="0">
                 <a:solidFill>
                   <a:srgbClr val="6B7280"/>
                 </a:solidFill>
@@ -12805,21 +14110,21 @@
                 <a:ea typeface="Geist" pitchFamily="34" charset="-122"/>
                 <a:cs typeface="Geist" pitchFamily="34" charset="-120"/>
               </a:rPr>
-              <a:t>Its own principal, scoped per company, per user, per task. Least-privilege tools. Auditable.</a:t>
-            </a:r>
-            <a:endParaRPr lang="en-US" sz="1100" dirty="0"/>
-          </a:p>
-        </p:txBody>
-      </p:sp>
-      <p:sp>
-        <p:nvSpPr>
-          <p:cNvPr id="24" name="Text 21"/>
-          <p:cNvSpPr txBox="1"/>
-          <p:nvPr/>
-        </p:nvSpPr>
-        <p:spPr>
-          <a:xfrm>
-            <a:off x="457200" y="4160520"/>
+              <a:t>identity · tenancy · evals · tracing · guardrails · cost</a:t>
+            </a:r>
+            <a:endParaRPr lang="en-US" sz="1050" dirty="0"/>
+          </a:p>
+        </p:txBody>
+      </p:sp>
+      <p:sp>
+        <p:nvSpPr>
+          <p:cNvPr id="33" name="Text 30"/>
+          <p:cNvSpPr txBox="1"/>
+          <p:nvPr/>
+        </p:nvSpPr>
+        <p:spPr>
+          <a:xfrm>
+            <a:off x="457200" y="4297680"/>
             <a:ext cx="8229600" cy="274320"/>
           </a:xfrm>
           <a:prstGeom prst="rect">
@@ -12844,7 +14149,7 @@
                 <a:ea typeface="Geist" pitchFamily="34" charset="-122"/>
                 <a:cs typeface="Geist" pitchFamily="34" charset="-120"/>
               </a:rPr>
-              <a:t>Episode 15 goes deep on delegated auth and least-privilege tools.</a:t>
+              <a:t>Every one is a loop over tools with an approval in the middle.</a:t>
             </a:r>
             <a:endParaRPr lang="en-US" sz="1000" dirty="0"/>
           </a:p>

--- a/episodes/01-what-is-an-agent/slides/ep01-what-is-an-agent.pptx
+++ b/episodes/01-what-is-an-agent/slides/ep01-what-is-an-agent.pptx
@@ -18,9 +18,10 @@
     <p:sldId id="266" r:id="rId12"/>
     <p:sldId id="267" r:id="rId13"/>
     <p:sldId id="268" r:id="rId14"/>
+    <p:sldId id="269" r:id="rId15"/>
   </p:sldIdLst>
   <p:notesMasterIdLst>
-    <p:notesMasterId r:id="rId15"/>
+    <p:notesMasterId r:id="rId16"/>
   </p:notesMasterIdLst>
   <p:sldSz cx="9144000" cy="5143500"/>
   <p:notesSz cx="5143500" cy="9144000"/>
@@ -602,7 +603,7 @@
           <a:p>
             <a:r>
               <a:rPr lang="en-US" dirty="0"/>
-              <a:t>First breakpoint. The agent posts a credit note to the ledger — as whom? Walk the three options. The enterprise answer is the third: its own identity, scoped per company, per user, per task, least-privilege tools.</a:t>
+              <a:t>The series map. Every one of these is a loop over tools with an approval in the middle. We build them in this order: sales returns first (next episode), then MCP, then the platform concerns.</a:t>
             </a:r>
             <a:endParaRPr lang="en-US" dirty="0"/>
           </a:p>
@@ -690,7 +691,7 @@
           <a:p>
             <a:r>
               <a:rPr lang="en-US" dirty="0"/>
-              <a:t>Second breakpoint: one ERP, many companies. Memory, tools and retrieval each have to be isolated per company — or you've shipped a data leak with a chat window. The company filter is a column on every table from day one, set by the deployment, never by the model.</a:t>
+              <a:t>First breakpoint. The agent posts a credit note to the ledger — as whom? Walk the three options. The enterprise answer is the third: its own identity, scoped per company, per user, per task, least-privilege tools.</a:t>
             </a:r>
             <a:endParaRPr lang="en-US" dirty="0"/>
           </a:p>
@@ -778,7 +779,7 @@
           <a:p>
             <a:r>
               <a:rPr lang="en-US" dirty="0"/>
-              <a:t>Third breakpoint. Who approved the credit note? How do you audit a decision the model made at step 7 of 12? Four things before an agent touches production — each one is an episode.</a:t>
+              <a:t>Second breakpoint: one ERP, many companies. Memory, tools and retrieval each have to be isolated per company — or you've shipped a data leak with a chat window. The company filter is a column on every table from day one, set by the deployment, never by the model.</a:t>
             </a:r>
             <a:endParaRPr lang="en-US" dirty="0"/>
           </a:p>
@@ -866,7 +867,7 @@
           <a:p>
             <a:r>
               <a:rPr lang="en-US" dirty="0"/>
-              <a:t>Recap in 30 seconds, then the call to action: next episode we build the first agent live, inside the ERP.</a:t>
+              <a:t>Third breakpoint. Who approved the credit note? How do you audit a decision the model made at step 7 of 12? Four things before an agent touches production — each one is an episode.</a:t>
             </a:r>
             <a:endParaRPr lang="en-US" dirty="0"/>
           </a:p>
@@ -890,6 +891,94 @@
             <a:fld id="{F7021451-1387-4CA6-816F-3879F97B5CBC}" type="slidenum">
               <a:rPr lang="en-US"/>
               <a:t>13</a:t>
+            </a:fld>
+            <a:endParaRPr lang="en-US"/>
+          </a:p>
+        </p:txBody>
+      </p:sp>
+    </p:spTree>
+    <p:extLst>
+      <p:ext uri="{BB962C8B-B14F-4D97-AF65-F5344CB8AC3E}">
+        <p14:creationId xmlns:p14="http://schemas.microsoft.com/office/powerpoint/2010/main" val="1024086991"/>
+      </p:ext>
+    </p:extLst>
+  </p:cSld>
+  <p:clrMapOvr>
+    <a:masterClrMapping/>
+  </p:clrMapOvr>
+</p:notes>
+</file>
+
+<file path=ppt/notesSlides/notesSlide14.xml><?xml version="1.0" encoding="utf-8"?>
+<p:notes xmlns:a="http://schemas.openxmlformats.org/drawingml/2006/main" xmlns:r="http://schemas.openxmlformats.org/officeDocument/2006/relationships" xmlns:p="http://schemas.openxmlformats.org/presentationml/2006/main">
+  <p:cSld>
+    <p:spTree>
+      <p:nvGrpSpPr>
+        <p:cNvPr id="1" name=""/>
+        <p:cNvGrpSpPr/>
+        <p:nvPr/>
+      </p:nvGrpSpPr>
+      <p:grpSpPr>
+        <a:xfrm>
+          <a:off x="0" y="0"/>
+          <a:ext cx="0" cy="0"/>
+          <a:chOff x="0" y="0"/>
+          <a:chExt cx="0" cy="0"/>
+        </a:xfrm>
+      </p:grpSpPr>
+      <p:sp>
+        <p:nvSpPr>
+          <p:cNvPr id="2" name="Slide Image Placeholder 1"/>
+          <p:cNvSpPr>
+            <a:spLocks noGrp="1" noRot="1" noChangeAspect="1"/>
+          </p:cNvSpPr>
+          <p:nvPr>
+            <p:ph type="sldImg"/>
+          </p:nvPr>
+        </p:nvSpPr>
+        <p:spPr/>
+      </p:sp>
+      <p:sp>
+        <p:nvSpPr>
+          <p:cNvPr id="3" name="Notes Placeholder 2"/>
+          <p:cNvSpPr>
+            <a:spLocks noGrp="1"/>
+          </p:cNvSpPr>
+          <p:nvPr>
+            <p:ph type="body" idx="1"/>
+          </p:nvPr>
+        </p:nvSpPr>
+        <p:spPr/>
+        <p:txBody>
+          <a:bodyPr/>
+          <a:lstStyle/>
+          <a:p>
+            <a:r>
+              <a:rPr lang="en-US" dirty="0"/>
+              <a:t>Recap in 30 seconds, then the call to action: next episode we build the first agent live, inside the ERP.</a:t>
+            </a:r>
+            <a:endParaRPr lang="en-US" dirty="0"/>
+          </a:p>
+        </p:txBody>
+      </p:sp>
+      <p:sp>
+        <p:nvSpPr>
+          <p:cNvPr id="4" name="Slide Number Placeholder 3"/>
+          <p:cNvSpPr>
+            <a:spLocks noGrp="1"/>
+          </p:cNvSpPr>
+          <p:nvPr>
+            <p:ph type="sldNum" sz="quarter" idx="10"/>
+          </p:nvPr>
+        </p:nvSpPr>
+        <p:spPr/>
+        <p:txBody>
+          <a:bodyPr/>
+          <a:lstStyle/>
+          <a:p>
+            <a:fld id="{F7021451-1387-4CA6-816F-3879F97B5CBC}" type="slidenum">
+              <a:rPr lang="en-US"/>
+              <a:t>14</a:t>
             </a:fld>
             <a:endParaRPr lang="en-US"/>
           </a:p>
@@ -1570,7 +1659,7 @@
           <a:p>
             <a:r>
               <a:rPr lang="en-US" dirty="0"/>
-              <a:t>The series map. Every one of these is a loop over tools with an approval in the middle. We build them in this order: sales returns first (next episode), then MCP, then the platform concerns.</a:t>
+              <a:t>One ERP problem, four ways. SCHEDULER: every night at 02:00 run reorder_check.py — for every item below reorder level, create a PO for the default qty at the default supplier. The scheduler decided WHEN; the script author decided WHAT, once, for all items forever. If the default supplier is on holiday, the PO goes out anyway. WORKFLOW: fixed steps — below level, check open POs, draft PO, approval if over 50k, wait for GRN, close. Every transition drawn on a whiteboard before go-live. A supplier saying 'we can ship half, rest in 3 weeks' matches no transition, so it lands in an exception queue. RULES ENGINE: a table procurement maintains — Audio and stock under 20, order 100 from S-500; lead_days over 7, order 1.5x; March, hold non-essentials. Business users can edit it, but a new SKU category with no rule means nothing happens, silently. AGENT: goal 'keep WH-204 in stock without over-ordering', tools for stock, open POs, quotes, forecast, approval, create_po. It sees 12 left, notices an open PO covers 50, finds the forecast needs 80 next week, gets two quotes, sees the usual supplier's lead time jumped to 14 days, picks the alternate at 5% more, and asks a human because the value crosses the threshold. Nobody wrote that sequence. The cost: tomorrow it might choose differently — hence the approval gate, the PO cap, and an eval set of past reorder situations. Close with: in a mature ERP the agent sits on top of the other three.</a:t>
             </a:r>
             <a:endParaRPr lang="en-US" dirty="0"/>
           </a:p>
@@ -2617,7 +2706,7 @@
                 <a:ea typeface="IBM Plex Mono" pitchFamily="34" charset="-122"/>
                 <a:cs typeface="IBM Plex Mono" pitchFamily="34" charset="-120"/>
               </a:rPr>
-              <a:t>WHAT BREAKS IN THE ENTERPRISE · 1 OF 3</a:t>
+              <a:t>THE SERIES</a:t>
             </a:r>
             <a:endParaRPr lang="en-US" sz="1000" dirty="0"/>
           </a:p>
@@ -2648,7 +2737,7 @@
               <a:buNone/>
             </a:pPr>
             <a:r>
-              <a:rPr lang="en-US" sz="2300" b="1" spc="-100" kern="0" dirty="0">
+              <a:rPr lang="en-US" sz="2800" b="1" spc="-100" kern="0" dirty="0">
                 <a:solidFill>
                   <a:srgbClr val="1C1C1C"/>
                 </a:solidFill>
@@ -2656,9 +2745,9 @@
                 <a:ea typeface="Geist" pitchFamily="34" charset="-122"/>
                 <a:cs typeface="Geist" pitchFamily="34" charset="-120"/>
               </a:rPr>
-              <a:t>Identity: the agent posts to the ledger — as whom?</a:t>
-            </a:r>
-            <a:endParaRPr lang="en-US" sz="2300" dirty="0"/>
+              <a:t>Where agents live in an ERP</a:t>
+            </a:r>
+            <a:endParaRPr lang="en-US" sz="2800" dirty="0"/>
           </a:p>
         </p:txBody>
       </p:sp>
@@ -2748,8 +2837,150 @@
         </p:nvSpPr>
         <p:spPr>
           <a:xfrm>
-            <a:off x="457200" y="1828800"/>
-            <a:ext cx="2606040" cy="2103120"/>
+            <a:off x="457200" y="1783080"/>
+            <a:ext cx="2606040" cy="1097280"/>
+          </a:xfrm>
+          <a:prstGeom prst="rect">
+            <a:avLst/>
+          </a:prstGeom>
+          <a:solidFill>
+            <a:srgbClr val="F7F7F5"/>
+          </a:solidFill>
+          <a:ln w="9525">
+            <a:solidFill>
+              <a:srgbClr val="E5E5E5"/>
+            </a:solidFill>
+            <a:prstDash val="solid"/>
+          </a:ln>
+        </p:spPr>
+      </p:sp>
+      <p:sp>
+        <p:nvSpPr>
+          <p:cNvPr id="10" name="Text 7"/>
+          <p:cNvSpPr txBox="1"/>
+          <p:nvPr/>
+        </p:nvSpPr>
+        <p:spPr>
+          <a:xfrm>
+            <a:off x="685800" y="1920240"/>
+            <a:ext cx="1645920" cy="320040"/>
+          </a:xfrm>
+          <a:prstGeom prst="rect">
+            <a:avLst/>
+          </a:prstGeom>
+          <a:noFill/>
+          <a:ln/>
+        </p:spPr>
+        <p:txBody>
+          <a:bodyPr wrap="square" lIns="0" tIns="0" rIns="0" bIns="0" rtlCol="0" anchor="t"/>
+          <a:lstStyle/>
+          <a:p>
+            <a:pPr indent="0" marL="0">
+              <a:buNone/>
+            </a:pPr>
+            <a:r>
+              <a:rPr lang="en-US" sz="1400" b="1" spc="-50" kern="0" dirty="0">
+                <a:solidFill>
+                  <a:srgbClr val="1C1C1C"/>
+                </a:solidFill>
+                <a:latin typeface="Geist" pitchFamily="34" charset="0"/>
+                <a:ea typeface="Geist" pitchFamily="34" charset="-122"/>
+                <a:cs typeface="Geist" pitchFamily="34" charset="-120"/>
+              </a:rPr>
+              <a:t>Sales / CRM</a:t>
+            </a:r>
+            <a:endParaRPr lang="en-US" sz="1400" dirty="0"/>
+          </a:p>
+        </p:txBody>
+      </p:sp>
+      <p:sp>
+        <p:nvSpPr>
+          <p:cNvPr id="11" name="Text 8"/>
+          <p:cNvSpPr txBox="1"/>
+          <p:nvPr/>
+        </p:nvSpPr>
+        <p:spPr>
+          <a:xfrm>
+            <a:off x="2194560" y="1938528"/>
+            <a:ext cx="685800" cy="274320"/>
+          </a:xfrm>
+          <a:prstGeom prst="rect">
+            <a:avLst/>
+          </a:prstGeom>
+          <a:noFill/>
+          <a:ln/>
+        </p:spPr>
+        <p:txBody>
+          <a:bodyPr wrap="square" lIns="0" tIns="0" rIns="0" bIns="0" rtlCol="0" anchor="ctr"/>
+          <a:lstStyle/>
+          <a:p>
+            <a:pPr algn="r" indent="0" marL="0">
+              <a:buNone/>
+            </a:pPr>
+            <a:r>
+              <a:rPr lang="en-US" sz="800" dirty="0">
+                <a:solidFill>
+                  <a:srgbClr val="FF5700"/>
+                </a:solidFill>
+                <a:latin typeface="IBM Plex Mono" pitchFamily="34" charset="0"/>
+                <a:ea typeface="IBM Plex Mono" pitchFamily="34" charset="-122"/>
+                <a:cs typeface="IBM Plex Mono" pitchFamily="34" charset="-120"/>
+              </a:rPr>
+              <a:t>Ep 2</a:t>
+            </a:r>
+            <a:endParaRPr lang="en-US" sz="800" dirty="0"/>
+          </a:p>
+        </p:txBody>
+      </p:sp>
+      <p:sp>
+        <p:nvSpPr>
+          <p:cNvPr id="12" name="Text 9"/>
+          <p:cNvSpPr txBox="1"/>
+          <p:nvPr/>
+        </p:nvSpPr>
+        <p:spPr>
+          <a:xfrm>
+            <a:off x="685800" y="2286000"/>
+            <a:ext cx="2194560" cy="548640"/>
+          </a:xfrm>
+          <a:prstGeom prst="rect">
+            <a:avLst/>
+          </a:prstGeom>
+          <a:noFill/>
+          <a:ln/>
+        </p:spPr>
+        <p:txBody>
+          <a:bodyPr wrap="square" lIns="0" tIns="0" rIns="0" bIns="0" rtlCol="0" anchor="t"/>
+          <a:lstStyle/>
+          <a:p>
+            <a:pPr indent="0" marL="0">
+              <a:buNone/>
+            </a:pPr>
+            <a:r>
+              <a:rPr lang="en-US" sz="1050" dirty="0">
+                <a:solidFill>
+                  <a:srgbClr val="6B7280"/>
+                </a:solidFill>
+                <a:latin typeface="Geist" pitchFamily="34" charset="0"/>
+                <a:ea typeface="Geist" pitchFamily="34" charset="-122"/>
+                <a:cs typeface="Geist" pitchFamily="34" charset="-120"/>
+              </a:rPr>
+              <a:t>quote-to-order · returns · lead triage</a:t>
+            </a:r>
+            <a:endParaRPr lang="en-US" sz="1050" dirty="0"/>
+          </a:p>
+        </p:txBody>
+      </p:sp>
+      <p:sp>
+        <p:nvSpPr>
+          <p:cNvPr id="13" name="Shape 10"/>
+          <p:cNvSpPr/>
+          <p:nvPr/>
+        </p:nvSpPr>
+        <p:spPr>
+          <a:xfrm>
+            <a:off x="3246120" y="1783080"/>
+            <a:ext cx="2606040" cy="1097280"/>
           </a:xfrm>
           <a:prstGeom prst="rect">
             <a:avLst/>
@@ -2767,151 +2998,131 @@
       </p:sp>
       <p:sp>
         <p:nvSpPr>
-          <p:cNvPr id="10" name="Shape 7"/>
+          <p:cNvPr id="14" name="Text 11"/>
+          <p:cNvSpPr txBox="1"/>
+          <p:nvPr/>
+        </p:nvSpPr>
+        <p:spPr>
+          <a:xfrm>
+            <a:off x="3474720" y="1920240"/>
+            <a:ext cx="1645920" cy="320040"/>
+          </a:xfrm>
+          <a:prstGeom prst="rect">
+            <a:avLst/>
+          </a:prstGeom>
+          <a:noFill/>
+          <a:ln/>
+        </p:spPr>
+        <p:txBody>
+          <a:bodyPr wrap="square" lIns="0" tIns="0" rIns="0" bIns="0" rtlCol="0" anchor="t"/>
+          <a:lstStyle/>
+          <a:p>
+            <a:pPr indent="0" marL="0">
+              <a:buNone/>
+            </a:pPr>
+            <a:r>
+              <a:rPr lang="en-US" sz="1400" b="1" spc="-50" kern="0" dirty="0">
+                <a:solidFill>
+                  <a:srgbClr val="1C1C1C"/>
+                </a:solidFill>
+                <a:latin typeface="Geist" pitchFamily="34" charset="0"/>
+                <a:ea typeface="Geist" pitchFamily="34" charset="-122"/>
+                <a:cs typeface="Geist" pitchFamily="34" charset="-120"/>
+              </a:rPr>
+              <a:t>Inventory</a:t>
+            </a:r>
+            <a:endParaRPr lang="en-US" sz="1400" dirty="0"/>
+          </a:p>
+        </p:txBody>
+      </p:sp>
+      <p:sp>
+        <p:nvSpPr>
+          <p:cNvPr id="15" name="Text 12"/>
+          <p:cNvSpPr txBox="1"/>
+          <p:nvPr/>
+        </p:nvSpPr>
+        <p:spPr>
+          <a:xfrm>
+            <a:off x="4983480" y="1938528"/>
+            <a:ext cx="685800" cy="274320"/>
+          </a:xfrm>
+          <a:prstGeom prst="rect">
+            <a:avLst/>
+          </a:prstGeom>
+          <a:noFill/>
+          <a:ln/>
+        </p:spPr>
+        <p:txBody>
+          <a:bodyPr wrap="square" lIns="0" tIns="0" rIns="0" bIns="0" rtlCol="0" anchor="ctr"/>
+          <a:lstStyle/>
+          <a:p>
+            <a:pPr algn="r" indent="0" marL="0">
+              <a:buNone/>
+            </a:pPr>
+            <a:r>
+              <a:rPr lang="en-US" sz="800" dirty="0">
+                <a:solidFill>
+                  <a:srgbClr val="FF5700"/>
+                </a:solidFill>
+                <a:latin typeface="IBM Plex Mono" pitchFamily="34" charset="0"/>
+                <a:ea typeface="IBM Plex Mono" pitchFamily="34" charset="-122"/>
+                <a:cs typeface="IBM Plex Mono" pitchFamily="34" charset="-120"/>
+              </a:rPr>
+              <a:t>Ep 6</a:t>
+            </a:r>
+            <a:endParaRPr lang="en-US" sz="800" dirty="0"/>
+          </a:p>
+        </p:txBody>
+      </p:sp>
+      <p:sp>
+        <p:nvSpPr>
+          <p:cNvPr id="16" name="Text 13"/>
+          <p:cNvSpPr txBox="1"/>
+          <p:nvPr/>
+        </p:nvSpPr>
+        <p:spPr>
+          <a:xfrm>
+            <a:off x="3474720" y="2286000"/>
+            <a:ext cx="2194560" cy="548640"/>
+          </a:xfrm>
+          <a:prstGeom prst="rect">
+            <a:avLst/>
+          </a:prstGeom>
+          <a:noFill/>
+          <a:ln/>
+        </p:spPr>
+        <p:txBody>
+          <a:bodyPr wrap="square" lIns="0" tIns="0" rIns="0" bIns="0" rtlCol="0" anchor="t"/>
+          <a:lstStyle/>
+          <a:p>
+            <a:pPr indent="0" marL="0">
+              <a:buNone/>
+            </a:pPr>
+            <a:r>
+              <a:rPr lang="en-US" sz="1050" dirty="0">
+                <a:solidFill>
+                  <a:srgbClr val="6B7280"/>
+                </a:solidFill>
+                <a:latin typeface="Geist" pitchFamily="34" charset="0"/>
+                <a:ea typeface="Geist" pitchFamily="34" charset="-122"/>
+                <a:cs typeface="Geist" pitchFamily="34" charset="-120"/>
+              </a:rPr>
+              <a:t>reorder · stock exceptions</a:t>
+            </a:r>
+            <a:endParaRPr lang="en-US" sz="1050" dirty="0"/>
+          </a:p>
+        </p:txBody>
+      </p:sp>
+      <p:sp>
+        <p:nvSpPr>
+          <p:cNvPr id="17" name="Shape 14"/>
           <p:cNvSpPr/>
           <p:nvPr/>
         </p:nvSpPr>
         <p:spPr>
           <a:xfrm>
-            <a:off x="685800" y="2057400"/>
-            <a:ext cx="329184" cy="329184"/>
-          </a:xfrm>
-          <a:prstGeom prst="rect">
-            <a:avLst/>
-          </a:prstGeom>
-          <a:solidFill>
-            <a:srgbClr val="D14343"/>
-          </a:solidFill>
-          <a:ln/>
-        </p:spPr>
-      </p:sp>
-      <p:sp>
-        <p:nvSpPr>
-          <p:cNvPr id="11" name="Text 8"/>
-          <p:cNvSpPr txBox="1"/>
-          <p:nvPr/>
-        </p:nvSpPr>
-        <p:spPr>
-          <a:xfrm>
-            <a:off x="685800" y="2057400"/>
-            <a:ext cx="329184" cy="329184"/>
-          </a:xfrm>
-          <a:prstGeom prst="rect">
-            <a:avLst/>
-          </a:prstGeom>
-          <a:noFill/>
-          <a:ln/>
-        </p:spPr>
-        <p:txBody>
-          <a:bodyPr wrap="square" lIns="0" tIns="0" rIns="0" bIns="0" rtlCol="0" anchor="ctr"/>
-          <a:lstStyle/>
-          <a:p>
-            <a:pPr algn="ctr" indent="0" marL="0">
-              <a:buNone/>
-            </a:pPr>
-            <a:r>
-              <a:rPr lang="en-US" sz="1200" b="1" dirty="0">
-                <a:solidFill>
-                  <a:srgbClr val="FFFFFF"/>
-                </a:solidFill>
-                <a:latin typeface="Geist" pitchFamily="34" charset="0"/>
-                <a:ea typeface="Geist" pitchFamily="34" charset="-122"/>
-                <a:cs typeface="Geist" pitchFamily="34" charset="-120"/>
-              </a:rPr>
-              <a:t>✕</a:t>
-            </a:r>
-            <a:endParaRPr lang="en-US" sz="1200" dirty="0"/>
-          </a:p>
-        </p:txBody>
-      </p:sp>
-      <p:sp>
-        <p:nvSpPr>
-          <p:cNvPr id="12" name="Text 9"/>
-          <p:cNvSpPr txBox="1"/>
-          <p:nvPr/>
-        </p:nvSpPr>
-        <p:spPr>
-          <a:xfrm>
-            <a:off x="685800" y="2514600"/>
-            <a:ext cx="2194560" cy="365760"/>
-          </a:xfrm>
-          <a:prstGeom prst="rect">
-            <a:avLst/>
-          </a:prstGeom>
-          <a:noFill/>
-          <a:ln/>
-        </p:spPr>
-        <p:txBody>
-          <a:bodyPr wrap="square" lIns="0" tIns="0" rIns="0" bIns="0" rtlCol="0" anchor="t"/>
-          <a:lstStyle/>
-          <a:p>
-            <a:pPr indent="0" marL="0">
-              <a:buNone/>
-            </a:pPr>
-            <a:r>
-              <a:rPr lang="en-US" sz="1400" b="1" spc="-50" kern="0" dirty="0">
-                <a:solidFill>
-                  <a:srgbClr val="1C1C1C"/>
-                </a:solidFill>
-                <a:latin typeface="Geist" pitchFamily="34" charset="0"/>
-                <a:ea typeface="Geist" pitchFamily="34" charset="-122"/>
-                <a:cs typeface="Geist" pitchFamily="34" charset="-120"/>
-              </a:rPr>
-              <a:t>Service account</a:t>
-            </a:r>
-            <a:endParaRPr lang="en-US" sz="1400" dirty="0"/>
-          </a:p>
-        </p:txBody>
-      </p:sp>
-      <p:sp>
-        <p:nvSpPr>
-          <p:cNvPr id="13" name="Text 10"/>
-          <p:cNvSpPr txBox="1"/>
-          <p:nvPr/>
-        </p:nvSpPr>
-        <p:spPr>
-          <a:xfrm>
-            <a:off x="685800" y="2880360"/>
-            <a:ext cx="2194560" cy="1005840"/>
-          </a:xfrm>
-          <a:prstGeom prst="rect">
-            <a:avLst/>
-          </a:prstGeom>
-          <a:noFill/>
-          <a:ln/>
-        </p:spPr>
-        <p:txBody>
-          <a:bodyPr wrap="square" lIns="0" tIns="0" rIns="0" bIns="0" rtlCol="0" anchor="t"/>
-          <a:lstStyle/>
-          <a:p>
-            <a:pPr indent="0" marL="0">
-              <a:buNone/>
-            </a:pPr>
-            <a:r>
-              <a:rPr lang="en-US" sz="1100" dirty="0">
-                <a:solidFill>
-                  <a:srgbClr val="6B7280"/>
-                </a:solidFill>
-                <a:latin typeface="Geist" pitchFamily="34" charset="0"/>
-                <a:ea typeface="Geist" pitchFamily="34" charset="-122"/>
-                <a:cs typeface="Geist" pitchFamily="34" charset="-120"/>
-              </a:rPr>
-              <a:t>Simple. Over-privileged. One prompt injection away from every company's books.</a:t>
-            </a:r>
-            <a:endParaRPr lang="en-US" sz="1100" dirty="0"/>
-          </a:p>
-        </p:txBody>
-      </p:sp>
-      <p:sp>
-        <p:nvSpPr>
-          <p:cNvPr id="14" name="Shape 11"/>
-          <p:cNvSpPr/>
-          <p:nvPr/>
-        </p:nvSpPr>
-        <p:spPr>
-          <a:xfrm>
-            <a:off x="3246120" y="1828800"/>
-            <a:ext cx="2606040" cy="2103120"/>
+            <a:off x="6035040" y="1783080"/>
+            <a:ext cx="2606040" cy="1097280"/>
           </a:xfrm>
           <a:prstGeom prst="rect">
             <a:avLst/>
@@ -2929,157 +3140,137 @@
       </p:sp>
       <p:sp>
         <p:nvSpPr>
-          <p:cNvPr id="15" name="Shape 12"/>
+          <p:cNvPr id="18" name="Text 15"/>
+          <p:cNvSpPr txBox="1"/>
+          <p:nvPr/>
+        </p:nvSpPr>
+        <p:spPr>
+          <a:xfrm>
+            <a:off x="6263640" y="1920240"/>
+            <a:ext cx="1645920" cy="320040"/>
+          </a:xfrm>
+          <a:prstGeom prst="rect">
+            <a:avLst/>
+          </a:prstGeom>
+          <a:noFill/>
+          <a:ln/>
+        </p:spPr>
+        <p:txBody>
+          <a:bodyPr wrap="square" lIns="0" tIns="0" rIns="0" bIns="0" rtlCol="0" anchor="t"/>
+          <a:lstStyle/>
+          <a:p>
+            <a:pPr indent="0" marL="0">
+              <a:buNone/>
+            </a:pPr>
+            <a:r>
+              <a:rPr lang="en-US" sz="1400" b="1" spc="-50" kern="0" dirty="0">
+                <a:solidFill>
+                  <a:srgbClr val="1C1C1C"/>
+                </a:solidFill>
+                <a:latin typeface="Geist" pitchFamily="34" charset="0"/>
+                <a:ea typeface="Geist" pitchFamily="34" charset="-122"/>
+                <a:cs typeface="Geist" pitchFamily="34" charset="-120"/>
+              </a:rPr>
+              <a:t>Finance</a:t>
+            </a:r>
+            <a:endParaRPr lang="en-US" sz="1400" dirty="0"/>
+          </a:p>
+        </p:txBody>
+      </p:sp>
+      <p:sp>
+        <p:nvSpPr>
+          <p:cNvPr id="19" name="Text 16"/>
+          <p:cNvSpPr txBox="1"/>
+          <p:nvPr/>
+        </p:nvSpPr>
+        <p:spPr>
+          <a:xfrm>
+            <a:off x="7772400" y="1938528"/>
+            <a:ext cx="685800" cy="274320"/>
+          </a:xfrm>
+          <a:prstGeom prst="rect">
+            <a:avLst/>
+          </a:prstGeom>
+          <a:noFill/>
+          <a:ln/>
+        </p:spPr>
+        <p:txBody>
+          <a:bodyPr wrap="square" lIns="0" tIns="0" rIns="0" bIns="0" rtlCol="0" anchor="ctr"/>
+          <a:lstStyle/>
+          <a:p>
+            <a:pPr algn="r" indent="0" marL="0">
+              <a:buNone/>
+            </a:pPr>
+            <a:r>
+              <a:rPr lang="en-US" sz="800" dirty="0">
+                <a:solidFill>
+                  <a:srgbClr val="FF5700"/>
+                </a:solidFill>
+                <a:latin typeface="IBM Plex Mono" pitchFamily="34" charset="0"/>
+                <a:ea typeface="IBM Plex Mono" pitchFamily="34" charset="-122"/>
+                <a:cs typeface="IBM Plex Mono" pitchFamily="34" charset="-120"/>
+              </a:rPr>
+              <a:t>Ep 12, 26</a:t>
+            </a:r>
+            <a:endParaRPr lang="en-US" sz="800" dirty="0"/>
+          </a:p>
+        </p:txBody>
+      </p:sp>
+      <p:sp>
+        <p:nvSpPr>
+          <p:cNvPr id="20" name="Text 17"/>
+          <p:cNvSpPr txBox="1"/>
+          <p:nvPr/>
+        </p:nvSpPr>
+        <p:spPr>
+          <a:xfrm>
+            <a:off x="6263640" y="2286000"/>
+            <a:ext cx="2194560" cy="548640"/>
+          </a:xfrm>
+          <a:prstGeom prst="rect">
+            <a:avLst/>
+          </a:prstGeom>
+          <a:noFill/>
+          <a:ln/>
+        </p:spPr>
+        <p:txBody>
+          <a:bodyPr wrap="square" lIns="0" tIns="0" rIns="0" bIns="0" rtlCol="0" anchor="t"/>
+          <a:lstStyle/>
+          <a:p>
+            <a:pPr indent="0" marL="0">
+              <a:buNone/>
+            </a:pPr>
+            <a:r>
+              <a:rPr lang="en-US" sz="1050" dirty="0">
+                <a:solidFill>
+                  <a:srgbClr val="6B7280"/>
+                </a:solidFill>
+                <a:latin typeface="Geist" pitchFamily="34" charset="0"/>
+                <a:ea typeface="Geist" pitchFamily="34" charset="-122"/>
+                <a:cs typeface="Geist" pitchFamily="34" charset="-120"/>
+              </a:rPr>
+              <a:t>invoice matching · month-end reconciliation</a:t>
+            </a:r>
+            <a:endParaRPr lang="en-US" sz="1050" dirty="0"/>
+          </a:p>
+        </p:txBody>
+      </p:sp>
+      <p:sp>
+        <p:nvSpPr>
+          <p:cNvPr id="21" name="Shape 18"/>
           <p:cNvSpPr/>
           <p:nvPr/>
         </p:nvSpPr>
         <p:spPr>
           <a:xfrm>
-            <a:off x="3474720" y="2057400"/>
-            <a:ext cx="329184" cy="329184"/>
+            <a:off x="457200" y="3017520"/>
+            <a:ext cx="2606040" cy="1097280"/>
           </a:xfrm>
           <a:prstGeom prst="rect">
             <a:avLst/>
           </a:prstGeom>
           <a:solidFill>
-            <a:srgbClr val="FF5700"/>
-          </a:solidFill>
-          <a:ln/>
-        </p:spPr>
-      </p:sp>
-      <p:sp>
-        <p:nvSpPr>
-          <p:cNvPr id="16" name="Text 13"/>
-          <p:cNvSpPr txBox="1"/>
-          <p:nvPr/>
-        </p:nvSpPr>
-        <p:spPr>
-          <a:xfrm>
-            <a:off x="3474720" y="2057400"/>
-            <a:ext cx="329184" cy="329184"/>
-          </a:xfrm>
-          <a:prstGeom prst="rect">
-            <a:avLst/>
-          </a:prstGeom>
-          <a:noFill/>
-          <a:ln/>
-        </p:spPr>
-        <p:txBody>
-          <a:bodyPr wrap="square" lIns="0" tIns="0" rIns="0" bIns="0" rtlCol="0" anchor="ctr"/>
-          <a:lstStyle/>
-          <a:p>
-            <a:pPr algn="ctr" indent="0" marL="0">
-              <a:buNone/>
-            </a:pPr>
-            <a:r>
-              <a:rPr lang="en-US" sz="1200" b="1" dirty="0">
-                <a:solidFill>
-                  <a:srgbClr val="FFFFFF"/>
-                </a:solidFill>
-                <a:latin typeface="Geist" pitchFamily="34" charset="0"/>
-                <a:ea typeface="Geist" pitchFamily="34" charset="-122"/>
-                <a:cs typeface="Geist" pitchFamily="34" charset="-120"/>
-              </a:rPr>
-              <a:t>~</a:t>
-            </a:r>
-            <a:endParaRPr lang="en-US" sz="1200" dirty="0"/>
-          </a:p>
-        </p:txBody>
-      </p:sp>
-      <p:sp>
-        <p:nvSpPr>
-          <p:cNvPr id="17" name="Text 14"/>
-          <p:cNvSpPr txBox="1"/>
-          <p:nvPr/>
-        </p:nvSpPr>
-        <p:spPr>
-          <a:xfrm>
-            <a:off x="3474720" y="2514600"/>
-            <a:ext cx="2194560" cy="365760"/>
-          </a:xfrm>
-          <a:prstGeom prst="rect">
-            <a:avLst/>
-          </a:prstGeom>
-          <a:noFill/>
-          <a:ln/>
-        </p:spPr>
-        <p:txBody>
-          <a:bodyPr wrap="square" lIns="0" tIns="0" rIns="0" bIns="0" rtlCol="0" anchor="t"/>
-          <a:lstStyle/>
-          <a:p>
-            <a:pPr indent="0" marL="0">
-              <a:buNone/>
-            </a:pPr>
-            <a:r>
-              <a:rPr lang="en-US" sz="1400" b="1" spc="-50" kern="0" dirty="0">
-                <a:solidFill>
-                  <a:srgbClr val="1C1C1C"/>
-                </a:solidFill>
-                <a:latin typeface="Geist" pitchFamily="34" charset="0"/>
-                <a:ea typeface="Geist" pitchFamily="34" charset="-122"/>
-                <a:cs typeface="Geist" pitchFamily="34" charset="-120"/>
-              </a:rPr>
-              <a:t>The user's token</a:t>
-            </a:r>
-            <a:endParaRPr lang="en-US" sz="1400" dirty="0"/>
-          </a:p>
-        </p:txBody>
-      </p:sp>
-      <p:sp>
-        <p:nvSpPr>
-          <p:cNvPr id="18" name="Text 15"/>
-          <p:cNvSpPr txBox="1"/>
-          <p:nvPr/>
-        </p:nvSpPr>
-        <p:spPr>
-          <a:xfrm>
-            <a:off x="3474720" y="2880360"/>
-            <a:ext cx="2194560" cy="1005840"/>
-          </a:xfrm>
-          <a:prstGeom prst="rect">
-            <a:avLst/>
-          </a:prstGeom>
-          <a:noFill/>
-          <a:ln/>
-        </p:spPr>
-        <p:txBody>
-          <a:bodyPr wrap="square" lIns="0" tIns="0" rIns="0" bIns="0" rtlCol="0" anchor="t"/>
-          <a:lstStyle/>
-          <a:p>
-            <a:pPr indent="0" marL="0">
-              <a:buNone/>
-            </a:pPr>
-            <a:r>
-              <a:rPr lang="en-US" sz="1100" dirty="0">
-                <a:solidFill>
-                  <a:srgbClr val="6B7280"/>
-                </a:solidFill>
-                <a:latin typeface="Geist" pitchFamily="34" charset="0"/>
-                <a:ea typeface="Geist" pitchFamily="34" charset="-122"/>
-                <a:cs typeface="Geist" pitchFamily="34" charset="-120"/>
-              </a:rPr>
-              <a:t>Scoped right — but how do you delegate it safely to a process that runs for minutes?</a:t>
-            </a:r>
-            <a:endParaRPr lang="en-US" sz="1100" dirty="0"/>
-          </a:p>
-        </p:txBody>
-      </p:sp>
-      <p:sp>
-        <p:nvSpPr>
-          <p:cNvPr id="19" name="Shape 16"/>
-          <p:cNvSpPr/>
-          <p:nvPr/>
-        </p:nvSpPr>
-        <p:spPr>
-          <a:xfrm>
-            <a:off x="6035040" y="1828800"/>
-            <a:ext cx="2606040" cy="2103120"/>
-          </a:xfrm>
-          <a:prstGeom prst="rect">
-            <a:avLst/>
-          </a:prstGeom>
-          <a:solidFill>
-            <a:srgbClr val="F7F7F5"/>
+            <a:srgbClr val="FFFFFF"/>
           </a:solidFill>
           <a:ln w="9525">
             <a:solidFill>
@@ -3091,34 +3282,195 @@
       </p:sp>
       <p:sp>
         <p:nvSpPr>
-          <p:cNvPr id="20" name="Shape 17"/>
+          <p:cNvPr id="22" name="Text 19"/>
+          <p:cNvSpPr txBox="1"/>
+          <p:nvPr/>
+        </p:nvSpPr>
+        <p:spPr>
+          <a:xfrm>
+            <a:off x="685800" y="3154680"/>
+            <a:ext cx="1645920" cy="320040"/>
+          </a:xfrm>
+          <a:prstGeom prst="rect">
+            <a:avLst/>
+          </a:prstGeom>
+          <a:noFill/>
+          <a:ln/>
+        </p:spPr>
+        <p:txBody>
+          <a:bodyPr wrap="square" lIns="0" tIns="0" rIns="0" bIns="0" rtlCol="0" anchor="t"/>
+          <a:lstStyle/>
+          <a:p>
+            <a:pPr indent="0" marL="0">
+              <a:buNone/>
+            </a:pPr>
+            <a:r>
+              <a:rPr lang="en-US" sz="1400" b="1" spc="-50" kern="0" dirty="0">
+                <a:solidFill>
+                  <a:srgbClr val="1C1C1C"/>
+                </a:solidFill>
+                <a:latin typeface="Geist" pitchFamily="34" charset="0"/>
+                <a:ea typeface="Geist" pitchFamily="34" charset="-122"/>
+                <a:cs typeface="Geist" pitchFamily="34" charset="-120"/>
+              </a:rPr>
+              <a:t>Procurement</a:t>
+            </a:r>
+            <a:endParaRPr lang="en-US" sz="1400" dirty="0"/>
+          </a:p>
+        </p:txBody>
+      </p:sp>
+      <p:sp>
+        <p:nvSpPr>
+          <p:cNvPr id="23" name="Text 20"/>
+          <p:cNvSpPr txBox="1"/>
+          <p:nvPr/>
+        </p:nvSpPr>
+        <p:spPr>
+          <a:xfrm>
+            <a:off x="2194560" y="3172968"/>
+            <a:ext cx="685800" cy="274320"/>
+          </a:xfrm>
+          <a:prstGeom prst="rect">
+            <a:avLst/>
+          </a:prstGeom>
+          <a:noFill/>
+          <a:ln/>
+        </p:spPr>
+        <p:txBody>
+          <a:bodyPr wrap="square" lIns="0" tIns="0" rIns="0" bIns="0" rtlCol="0" anchor="ctr"/>
+          <a:lstStyle/>
+          <a:p>
+            <a:pPr algn="r" indent="0" marL="0">
+              <a:buNone/>
+            </a:pPr>
+            <a:r>
+              <a:rPr lang="en-US" sz="800" dirty="0">
+                <a:solidFill>
+                  <a:srgbClr val="FF5700"/>
+                </a:solidFill>
+                <a:latin typeface="IBM Plex Mono" pitchFamily="34" charset="0"/>
+                <a:ea typeface="IBM Plex Mono" pitchFamily="34" charset="-122"/>
+                <a:cs typeface="IBM Plex Mono" pitchFamily="34" charset="-120"/>
+              </a:rPr>
+              <a:t>Ep 6–8</a:t>
+            </a:r>
+            <a:endParaRPr lang="en-US" sz="800" dirty="0"/>
+          </a:p>
+        </p:txBody>
+      </p:sp>
+      <p:sp>
+        <p:nvSpPr>
+          <p:cNvPr id="24" name="Text 21"/>
+          <p:cNvSpPr txBox="1"/>
+          <p:nvPr/>
+        </p:nvSpPr>
+        <p:spPr>
+          <a:xfrm>
+            <a:off x="685800" y="3520440"/>
+            <a:ext cx="2194560" cy="548640"/>
+          </a:xfrm>
+          <a:prstGeom prst="rect">
+            <a:avLst/>
+          </a:prstGeom>
+          <a:noFill/>
+          <a:ln/>
+        </p:spPr>
+        <p:txBody>
+          <a:bodyPr wrap="square" lIns="0" tIns="0" rIns="0" bIns="0" rtlCol="0" anchor="t"/>
+          <a:lstStyle/>
+          <a:p>
+            <a:pPr indent="0" marL="0">
+              <a:buNone/>
+            </a:pPr>
+            <a:r>
+              <a:rPr lang="en-US" sz="1050" dirty="0">
+                <a:solidFill>
+                  <a:srgbClr val="6B7280"/>
+                </a:solidFill>
+                <a:latin typeface="Geist" pitchFamily="34" charset="0"/>
+                <a:ea typeface="Geist" pitchFamily="34" charset="-122"/>
+                <a:cs typeface="Geist" pitchFamily="34" charset="-120"/>
+              </a:rPr>
+              <a:t>supplier search · PO approval</a:t>
+            </a:r>
+            <a:endParaRPr lang="en-US" sz="1050" dirty="0"/>
+          </a:p>
+        </p:txBody>
+      </p:sp>
+      <p:sp>
+        <p:nvSpPr>
+          <p:cNvPr id="25" name="Shape 22"/>
           <p:cNvSpPr/>
           <p:nvPr/>
         </p:nvSpPr>
         <p:spPr>
           <a:xfrm>
-            <a:off x="6263640" y="2057400"/>
-            <a:ext cx="329184" cy="329184"/>
+            <a:off x="3246120" y="3017520"/>
+            <a:ext cx="2606040" cy="1097280"/>
           </a:xfrm>
           <a:prstGeom prst="rect">
             <a:avLst/>
           </a:prstGeom>
           <a:solidFill>
-            <a:srgbClr val="0E7C7B"/>
+            <a:srgbClr val="FFFFFF"/>
           </a:solidFill>
-          <a:ln/>
-        </p:spPr>
-      </p:sp>
-      <p:sp>
-        <p:nvSpPr>
-          <p:cNvPr id="21" name="Text 18"/>
-          <p:cNvSpPr txBox="1"/>
-          <p:nvPr/>
-        </p:nvSpPr>
-        <p:spPr>
-          <a:xfrm>
-            <a:off x="6263640" y="2057400"/>
-            <a:ext cx="329184" cy="329184"/>
+          <a:ln w="9525">
+            <a:solidFill>
+              <a:srgbClr val="E5E5E5"/>
+            </a:solidFill>
+            <a:prstDash val="solid"/>
+          </a:ln>
+        </p:spPr>
+      </p:sp>
+      <p:sp>
+        <p:nvSpPr>
+          <p:cNvPr id="26" name="Text 23"/>
+          <p:cNvSpPr txBox="1"/>
+          <p:nvPr/>
+        </p:nvSpPr>
+        <p:spPr>
+          <a:xfrm>
+            <a:off x="3474720" y="3154680"/>
+            <a:ext cx="1645920" cy="320040"/>
+          </a:xfrm>
+          <a:prstGeom prst="rect">
+            <a:avLst/>
+          </a:prstGeom>
+          <a:noFill/>
+          <a:ln/>
+        </p:spPr>
+        <p:txBody>
+          <a:bodyPr wrap="square" lIns="0" tIns="0" rIns="0" bIns="0" rtlCol="0" anchor="t"/>
+          <a:lstStyle/>
+          <a:p>
+            <a:pPr indent="0" marL="0">
+              <a:buNone/>
+            </a:pPr>
+            <a:r>
+              <a:rPr lang="en-US" sz="1400" b="1" spc="-50" kern="0" dirty="0">
+                <a:solidFill>
+                  <a:srgbClr val="1C1C1C"/>
+                </a:solidFill>
+                <a:latin typeface="Geist" pitchFamily="34" charset="0"/>
+                <a:ea typeface="Geist" pitchFamily="34" charset="-122"/>
+                <a:cs typeface="Geist" pitchFamily="34" charset="-120"/>
+              </a:rPr>
+              <a:t>HR</a:t>
+            </a:r>
+            <a:endParaRPr lang="en-US" sz="1400" dirty="0"/>
+          </a:p>
+        </p:txBody>
+      </p:sp>
+      <p:sp>
+        <p:nvSpPr>
+          <p:cNvPr id="27" name="Text 24"/>
+          <p:cNvSpPr txBox="1"/>
+          <p:nvPr/>
+        </p:nvSpPr>
+        <p:spPr>
+          <a:xfrm>
+            <a:off x="4983480" y="3172968"/>
+            <a:ext cx="685800" cy="274320"/>
           </a:xfrm>
           <a:prstGeom prst="rect">
             <a:avLst/>
@@ -3130,34 +3482,34 @@
           <a:bodyPr wrap="square" lIns="0" tIns="0" rIns="0" bIns="0" rtlCol="0" anchor="ctr"/>
           <a:lstStyle/>
           <a:p>
-            <a:pPr algn="ctr" indent="0" marL="0">
-              <a:buNone/>
-            </a:pPr>
-            <a:r>
-              <a:rPr lang="en-US" sz="1200" b="1" dirty="0">
-                <a:solidFill>
-                  <a:srgbClr val="FFFFFF"/>
-                </a:solidFill>
-                <a:latin typeface="Geist" pitchFamily="34" charset="0"/>
-                <a:ea typeface="Geist" pitchFamily="34" charset="-122"/>
-                <a:cs typeface="Geist" pitchFamily="34" charset="-120"/>
-              </a:rPr>
-              <a:t>✓</a:t>
-            </a:r>
-            <a:endParaRPr lang="en-US" sz="1200" dirty="0"/>
-          </a:p>
-        </p:txBody>
-      </p:sp>
-      <p:sp>
-        <p:nvSpPr>
-          <p:cNvPr id="22" name="Text 19"/>
-          <p:cNvSpPr txBox="1"/>
-          <p:nvPr/>
-        </p:nvSpPr>
-        <p:spPr>
-          <a:xfrm>
-            <a:off x="6263640" y="2514600"/>
-            <a:ext cx="2194560" cy="365760"/>
+            <a:pPr algn="r" indent="0" marL="0">
+              <a:buNone/>
+            </a:pPr>
+            <a:r>
+              <a:rPr lang="en-US" sz="800" dirty="0">
+                <a:solidFill>
+                  <a:srgbClr val="FF5700"/>
+                </a:solidFill>
+                <a:latin typeface="IBM Plex Mono" pitchFamily="34" charset="0"/>
+                <a:ea typeface="IBM Plex Mono" pitchFamily="34" charset="-122"/>
+                <a:cs typeface="IBM Plex Mono" pitchFamily="34" charset="-120"/>
+              </a:rPr>
+              <a:t>later</a:t>
+            </a:r>
+            <a:endParaRPr lang="en-US" sz="800" dirty="0"/>
+          </a:p>
+        </p:txBody>
+      </p:sp>
+      <p:sp>
+        <p:nvSpPr>
+          <p:cNvPr id="28" name="Text 25"/>
+          <p:cNvSpPr txBox="1"/>
+          <p:nvPr/>
+        </p:nvSpPr>
+        <p:spPr>
+          <a:xfrm>
+            <a:off x="3474720" y="3520440"/>
+            <a:ext cx="2194560" cy="548640"/>
           </a:xfrm>
           <a:prstGeom prst="rect">
             <a:avLst/>
@@ -3173,6 +3525,70 @@
               <a:buNone/>
             </a:pPr>
             <a:r>
+              <a:rPr lang="en-US" sz="1050" dirty="0">
+                <a:solidFill>
+                  <a:srgbClr val="6B7280"/>
+                </a:solidFill>
+                <a:latin typeface="Geist" pitchFamily="34" charset="0"/>
+                <a:ea typeface="Geist" pitchFamily="34" charset="-122"/>
+                <a:cs typeface="Geist" pitchFamily="34" charset="-120"/>
+              </a:rPr>
+              <a:t>leave · expense approvals</a:t>
+            </a:r>
+            <a:endParaRPr lang="en-US" sz="1050" dirty="0"/>
+          </a:p>
+        </p:txBody>
+      </p:sp>
+      <p:sp>
+        <p:nvSpPr>
+          <p:cNvPr id="29" name="Shape 26"/>
+          <p:cNvSpPr/>
+          <p:nvPr/>
+        </p:nvSpPr>
+        <p:spPr>
+          <a:xfrm>
+            <a:off x="6035040" y="3017520"/>
+            <a:ext cx="2606040" cy="1097280"/>
+          </a:xfrm>
+          <a:prstGeom prst="rect">
+            <a:avLst/>
+          </a:prstGeom>
+          <a:solidFill>
+            <a:srgbClr val="FFFFFF"/>
+          </a:solidFill>
+          <a:ln w="9525">
+            <a:solidFill>
+              <a:srgbClr val="E5E5E5"/>
+            </a:solidFill>
+            <a:prstDash val="solid"/>
+          </a:ln>
+        </p:spPr>
+      </p:sp>
+      <p:sp>
+        <p:nvSpPr>
+          <p:cNvPr id="30" name="Text 27"/>
+          <p:cNvSpPr txBox="1"/>
+          <p:nvPr/>
+        </p:nvSpPr>
+        <p:spPr>
+          <a:xfrm>
+            <a:off x="6263640" y="3154680"/>
+            <a:ext cx="1645920" cy="320040"/>
+          </a:xfrm>
+          <a:prstGeom prst="rect">
+            <a:avLst/>
+          </a:prstGeom>
+          <a:noFill/>
+          <a:ln/>
+        </p:spPr>
+        <p:txBody>
+          <a:bodyPr wrap="square" lIns="0" tIns="0" rIns="0" bIns="0" rtlCol="0" anchor="t"/>
+          <a:lstStyle/>
+          <a:p>
+            <a:pPr indent="0" marL="0">
+              <a:buNone/>
+            </a:pPr>
+            <a:r>
               <a:rPr lang="en-US" sz="1400" b="1" spc="-50" kern="0" dirty="0">
                 <a:solidFill>
                   <a:srgbClr val="1C1C1C"/>
@@ -3181,7 +3597,7 @@
                 <a:ea typeface="Geist" pitchFamily="34" charset="-122"/>
                 <a:cs typeface="Geist" pitchFamily="34" charset="-120"/>
               </a:rPr>
-              <a:t>Agent identity</a:t>
+              <a:t>Platform</a:t>
             </a:r>
             <a:endParaRPr lang="en-US" sz="1400" dirty="0"/>
           </a:p>
@@ -3189,14 +3605,53 @@
       </p:sp>
       <p:sp>
         <p:nvSpPr>
-          <p:cNvPr id="23" name="Text 20"/>
-          <p:cNvSpPr txBox="1"/>
-          <p:nvPr/>
-        </p:nvSpPr>
-        <p:spPr>
-          <a:xfrm>
-            <a:off x="6263640" y="2880360"/>
-            <a:ext cx="2194560" cy="1005840"/>
+          <p:cNvPr id="31" name="Text 28"/>
+          <p:cNvSpPr txBox="1"/>
+          <p:nvPr/>
+        </p:nvSpPr>
+        <p:spPr>
+          <a:xfrm>
+            <a:off x="7772400" y="3172968"/>
+            <a:ext cx="685800" cy="274320"/>
+          </a:xfrm>
+          <a:prstGeom prst="rect">
+            <a:avLst/>
+          </a:prstGeom>
+          <a:noFill/>
+          <a:ln/>
+        </p:spPr>
+        <p:txBody>
+          <a:bodyPr wrap="square" lIns="0" tIns="0" rIns="0" bIns="0" rtlCol="0" anchor="ctr"/>
+          <a:lstStyle/>
+          <a:p>
+            <a:pPr algn="r" indent="0" marL="0">
+              <a:buNone/>
+            </a:pPr>
+            <a:r>
+              <a:rPr lang="en-US" sz="800" dirty="0">
+                <a:solidFill>
+                  <a:srgbClr val="FF5700"/>
+                </a:solidFill>
+                <a:latin typeface="IBM Plex Mono" pitchFamily="34" charset="0"/>
+                <a:ea typeface="IBM Plex Mono" pitchFamily="34" charset="-122"/>
+                <a:cs typeface="IBM Plex Mono" pitchFamily="34" charset="-120"/>
+              </a:rPr>
+              <a:t>Ep 4, 9–11, 15, 25</a:t>
+            </a:r>
+            <a:endParaRPr lang="en-US" sz="800" dirty="0"/>
+          </a:p>
+        </p:txBody>
+      </p:sp>
+      <p:sp>
+        <p:nvSpPr>
+          <p:cNvPr id="32" name="Text 29"/>
+          <p:cNvSpPr txBox="1"/>
+          <p:nvPr/>
+        </p:nvSpPr>
+        <p:spPr>
+          <a:xfrm>
+            <a:off x="6263640" y="3520440"/>
+            <a:ext cx="2194560" cy="548640"/>
           </a:xfrm>
           <a:prstGeom prst="rect">
             <a:avLst/>
@@ -3212,7 +3667,7 @@
               <a:buNone/>
             </a:pPr>
             <a:r>
-              <a:rPr lang="en-US" sz="1100" dirty="0">
+              <a:rPr lang="en-US" sz="1050" dirty="0">
                 <a:solidFill>
                   <a:srgbClr val="6B7280"/>
                 </a:solidFill>
@@ -3220,21 +3675,21 @@
                 <a:ea typeface="Geist" pitchFamily="34" charset="-122"/>
                 <a:cs typeface="Geist" pitchFamily="34" charset="-120"/>
               </a:rPr>
-              <a:t>Its own principal, scoped per company, per user, per task. Least-privilege tools. Auditable.</a:t>
-            </a:r>
-            <a:endParaRPr lang="en-US" sz="1100" dirty="0"/>
-          </a:p>
-        </p:txBody>
-      </p:sp>
-      <p:sp>
-        <p:nvSpPr>
-          <p:cNvPr id="24" name="Text 21"/>
-          <p:cNvSpPr txBox="1"/>
-          <p:nvPr/>
-        </p:nvSpPr>
-        <p:spPr>
-          <a:xfrm>
-            <a:off x="457200" y="4160520"/>
+              <a:t>identity · tenancy · evals · tracing · guardrails · cost</a:t>
+            </a:r>
+            <a:endParaRPr lang="en-US" sz="1050" dirty="0"/>
+          </a:p>
+        </p:txBody>
+      </p:sp>
+      <p:sp>
+        <p:nvSpPr>
+          <p:cNvPr id="33" name="Text 30"/>
+          <p:cNvSpPr txBox="1"/>
+          <p:nvPr/>
+        </p:nvSpPr>
+        <p:spPr>
+          <a:xfrm>
+            <a:off x="457200" y="4297680"/>
             <a:ext cx="8229600" cy="274320"/>
           </a:xfrm>
           <a:prstGeom prst="rect">
@@ -3259,7 +3714,7 @@
                 <a:ea typeface="Geist" pitchFamily="34" charset="-122"/>
                 <a:cs typeface="Geist" pitchFamily="34" charset="-120"/>
               </a:rPr>
-              <a:t>Episode 15 goes deep on delegated auth and least-privilege tools.</a:t>
+              <a:t>Every one is a loop over tools with an approval in the middle.</a:t>
             </a:r>
             <a:endParaRPr lang="en-US" sz="1000" dirty="0"/>
           </a:p>
@@ -3424,7 +3879,7 @@
                 <a:ea typeface="IBM Plex Mono" pitchFamily="34" charset="-122"/>
                 <a:cs typeface="IBM Plex Mono" pitchFamily="34" charset="-120"/>
               </a:rPr>
-              <a:t>WHAT BREAKS IN THE ENTERPRISE · 2 OF 3</a:t>
+              <a:t>WHAT BREAKS IN THE ENTERPRISE · 1 OF 3</a:t>
             </a:r>
             <a:endParaRPr lang="en-US" sz="1000" dirty="0"/>
           </a:p>
@@ -3455,7 +3910,7 @@
               <a:buNone/>
             </a:pPr>
             <a:r>
-              <a:rPr lang="en-US" sz="2800" b="1" spc="-100" kern="0" dirty="0">
+              <a:rPr lang="en-US" sz="2300" b="1" spc="-100" kern="0" dirty="0">
                 <a:solidFill>
                   <a:srgbClr val="1C1C1C"/>
                 </a:solidFill>
@@ -3463,9 +3918,9 @@
                 <a:ea typeface="Geist" pitchFamily="34" charset="-122"/>
                 <a:cs typeface="Geist" pitchFamily="34" charset="-120"/>
               </a:rPr>
-              <a:t>Tenancy: one ERP, many companies</a:t>
-            </a:r>
-            <a:endParaRPr lang="en-US" sz="2800" dirty="0"/>
+              <a:t>Identity: the agent posts to the ledger — as whom?</a:t>
+            </a:r>
+            <a:endParaRPr lang="en-US" sz="2300" dirty="0"/>
           </a:p>
         </p:txBody>
       </p:sp>
@@ -3555,113 +4010,8 @@
         </p:nvSpPr>
         <p:spPr>
           <a:xfrm>
-            <a:off x="457200" y="2423160"/>
-            <a:ext cx="1828800" cy="1188720"/>
-          </a:xfrm>
-          <a:prstGeom prst="rect">
-            <a:avLst/>
-          </a:prstGeom>
-          <a:solidFill>
-            <a:srgbClr val="FFFFFF"/>
-          </a:solidFill>
-          <a:ln w="15875">
-            <a:solidFill>
-              <a:srgbClr val="FF5700"/>
-            </a:solidFill>
-            <a:prstDash val="solid"/>
-          </a:ln>
-        </p:spPr>
-      </p:sp>
-      <p:sp>
-        <p:nvSpPr>
-          <p:cNvPr id="10" name="Text 7"/>
-          <p:cNvSpPr txBox="1"/>
-          <p:nvPr/>
-        </p:nvSpPr>
-        <p:spPr>
-          <a:xfrm>
-            <a:off x="457200" y="2423160"/>
-            <a:ext cx="1828800" cy="1188720"/>
-          </a:xfrm>
-          <a:prstGeom prst="rect">
-            <a:avLst/>
-          </a:prstGeom>
-          <a:noFill/>
-          <a:ln/>
-        </p:spPr>
-        <p:txBody>
-          <a:bodyPr wrap="square" lIns="635" tIns="635" rIns="635" bIns="635" rtlCol="0" anchor="ctr"/>
-          <a:lstStyle/>
-          <a:p>
-            <a:pPr algn="ctr" indent="0" marL="0">
-              <a:buNone/>
-            </a:pPr>
-            <a:r>
-              <a:rPr lang="en-US" sz="1300" b="1" dirty="0">
-                <a:solidFill>
-                  <a:srgbClr val="FF5700"/>
-                </a:solidFill>
-                <a:latin typeface="Geist" pitchFamily="34" charset="0"/>
-                <a:ea typeface="Geist" pitchFamily="34" charset="-122"/>
-                <a:cs typeface="Geist" pitchFamily="34" charset="-120"/>
-              </a:rPr>
-              <a:t>Agent</a:t>
-            </a:r>
-            <a:endParaRPr lang="en-US" sz="1300" dirty="0"/>
-          </a:p>
-          <a:p>
-            <a:pPr algn="ctr" indent="0" marL="0">
-              <a:buNone/>
-            </a:pPr>
-            <a:r>
-              <a:rPr lang="en-US" sz="1300" b="1" dirty="0">
-                <a:solidFill>
-                  <a:srgbClr val="FF5700"/>
-                </a:solidFill>
-                <a:latin typeface="Geist" pitchFamily="34" charset="0"/>
-                <a:ea typeface="Geist" pitchFamily="34" charset="-122"/>
-                <a:cs typeface="Geist" pitchFamily="34" charset="-120"/>
-              </a:rPr>
-              <a:t>(model + loop)</a:t>
-            </a:r>
-            <a:endParaRPr lang="en-US" sz="1300" dirty="0"/>
-          </a:p>
-        </p:txBody>
-      </p:sp>
-      <p:sp>
-        <p:nvSpPr>
-          <p:cNvPr id="11" name="Shape 8"/>
-          <p:cNvSpPr/>
-          <p:nvPr/>
-        </p:nvSpPr>
-        <p:spPr>
-          <a:xfrm>
-            <a:off x="2377440" y="2286000"/>
-            <a:ext cx="457200" cy="0"/>
-          </a:xfrm>
-          <a:prstGeom prst="line">
-            <a:avLst/>
-          </a:prstGeom>
-          <a:noFill/>
-          <a:ln w="15875">
-            <a:solidFill>
-              <a:srgbClr val="919191"/>
-            </a:solidFill>
-            <a:prstDash val="solid"/>
-            <a:tailEnd type="triangle"/>
-          </a:ln>
-        </p:spPr>
-      </p:sp>
-      <p:sp>
-        <p:nvSpPr>
-          <p:cNvPr id="12" name="Shape 9"/>
-          <p:cNvSpPr/>
-          <p:nvPr/>
-        </p:nvSpPr>
-        <p:spPr>
-          <a:xfrm>
-            <a:off x="2926080" y="1965960"/>
-            <a:ext cx="2651760" cy="685800"/>
+            <a:off x="457200" y="1828800"/>
+            <a:ext cx="2606040" cy="2103120"/>
           </a:xfrm>
           <a:prstGeom prst="rect">
             <a:avLst/>
@@ -3679,14 +4029,112 @@
       </p:sp>
       <p:sp>
         <p:nvSpPr>
+          <p:cNvPr id="10" name="Shape 7"/>
+          <p:cNvSpPr/>
+          <p:nvPr/>
+        </p:nvSpPr>
+        <p:spPr>
+          <a:xfrm>
+            <a:off x="685800" y="2057400"/>
+            <a:ext cx="329184" cy="329184"/>
+          </a:xfrm>
+          <a:prstGeom prst="rect">
+            <a:avLst/>
+          </a:prstGeom>
+          <a:solidFill>
+            <a:srgbClr val="D14343"/>
+          </a:solidFill>
+          <a:ln/>
+        </p:spPr>
+      </p:sp>
+      <p:sp>
+        <p:nvSpPr>
+          <p:cNvPr id="11" name="Text 8"/>
+          <p:cNvSpPr txBox="1"/>
+          <p:nvPr/>
+        </p:nvSpPr>
+        <p:spPr>
+          <a:xfrm>
+            <a:off x="685800" y="2057400"/>
+            <a:ext cx="329184" cy="329184"/>
+          </a:xfrm>
+          <a:prstGeom prst="rect">
+            <a:avLst/>
+          </a:prstGeom>
+          <a:noFill/>
+          <a:ln/>
+        </p:spPr>
+        <p:txBody>
+          <a:bodyPr wrap="square" lIns="0" tIns="0" rIns="0" bIns="0" rtlCol="0" anchor="ctr"/>
+          <a:lstStyle/>
+          <a:p>
+            <a:pPr algn="ctr" indent="0" marL="0">
+              <a:buNone/>
+            </a:pPr>
+            <a:r>
+              <a:rPr lang="en-US" sz="1200" b="1" dirty="0">
+                <a:solidFill>
+                  <a:srgbClr val="FFFFFF"/>
+                </a:solidFill>
+                <a:latin typeface="Geist" pitchFamily="34" charset="0"/>
+                <a:ea typeface="Geist" pitchFamily="34" charset="-122"/>
+                <a:cs typeface="Geist" pitchFamily="34" charset="-120"/>
+              </a:rPr>
+              <a:t>✕</a:t>
+            </a:r>
+            <a:endParaRPr lang="en-US" sz="1200" dirty="0"/>
+          </a:p>
+        </p:txBody>
+      </p:sp>
+      <p:sp>
+        <p:nvSpPr>
+          <p:cNvPr id="12" name="Text 9"/>
+          <p:cNvSpPr txBox="1"/>
+          <p:nvPr/>
+        </p:nvSpPr>
+        <p:spPr>
+          <a:xfrm>
+            <a:off x="685800" y="2514600"/>
+            <a:ext cx="2194560" cy="365760"/>
+          </a:xfrm>
+          <a:prstGeom prst="rect">
+            <a:avLst/>
+          </a:prstGeom>
+          <a:noFill/>
+          <a:ln/>
+        </p:spPr>
+        <p:txBody>
+          <a:bodyPr wrap="square" lIns="0" tIns="0" rIns="0" bIns="0" rtlCol="0" anchor="t"/>
+          <a:lstStyle/>
+          <a:p>
+            <a:pPr indent="0" marL="0">
+              <a:buNone/>
+            </a:pPr>
+            <a:r>
+              <a:rPr lang="en-US" sz="1400" b="1" spc="-50" kern="0" dirty="0">
+                <a:solidFill>
+                  <a:srgbClr val="1C1C1C"/>
+                </a:solidFill>
+                <a:latin typeface="Geist" pitchFamily="34" charset="0"/>
+                <a:ea typeface="Geist" pitchFamily="34" charset="-122"/>
+                <a:cs typeface="Geist" pitchFamily="34" charset="-120"/>
+              </a:rPr>
+              <a:t>Service account</a:t>
+            </a:r>
+            <a:endParaRPr lang="en-US" sz="1400" dirty="0"/>
+          </a:p>
+        </p:txBody>
+      </p:sp>
+      <p:sp>
+        <p:nvSpPr>
           <p:cNvPr id="13" name="Text 10"/>
           <p:cNvSpPr txBox="1"/>
           <p:nvPr/>
         </p:nvSpPr>
         <p:spPr>
           <a:xfrm>
-            <a:off x="3108960" y="2039112"/>
-            <a:ext cx="2286000" cy="274320"/>
+            <a:off x="685800" y="2880360"/>
+            <a:ext cx="2194560" cy="1005840"/>
           </a:xfrm>
           <a:prstGeom prst="rect">
             <a:avLst/>
@@ -3702,46 +4150,7 @@
               <a:buNone/>
             </a:pPr>
             <a:r>
-              <a:rPr lang="en-US" sz="1300" b="1" spc="-50" kern="0" dirty="0">
-                <a:solidFill>
-                  <a:srgbClr val="1C1C1C"/>
-                </a:solidFill>
-                <a:latin typeface="Geist" pitchFamily="34" charset="0"/>
-                <a:ea typeface="Geist" pitchFamily="34" charset="-122"/>
-                <a:cs typeface="Geist" pitchFamily="34" charset="-120"/>
-              </a:rPr>
-              <a:t>Memory</a:t>
-            </a:r>
-            <a:endParaRPr lang="en-US" sz="1300" dirty="0"/>
-          </a:p>
-        </p:txBody>
-      </p:sp>
-      <p:sp>
-        <p:nvSpPr>
-          <p:cNvPr id="14" name="Text 11"/>
-          <p:cNvSpPr txBox="1"/>
-          <p:nvPr/>
-        </p:nvSpPr>
-        <p:spPr>
-          <a:xfrm>
-            <a:off x="3108960" y="2331720"/>
-            <a:ext cx="2377440" cy="320040"/>
-          </a:xfrm>
-          <a:prstGeom prst="rect">
-            <a:avLst/>
-          </a:prstGeom>
-          <a:noFill/>
-          <a:ln/>
-        </p:spPr>
-        <p:txBody>
-          <a:bodyPr wrap="square" lIns="0" tIns="0" rIns="0" bIns="0" rtlCol="0" anchor="t"/>
-          <a:lstStyle/>
-          <a:p>
-            <a:pPr indent="0" marL="0">
-              <a:buNone/>
-            </a:pPr>
-            <a:r>
-              <a:rPr lang="en-US" sz="950" dirty="0">
+              <a:rPr lang="en-US" sz="1100" dirty="0">
                 <a:solidFill>
                   <a:srgbClr val="6B7280"/>
                 </a:solidFill>
@@ -3749,22 +4158,22 @@
                 <a:ea typeface="Geist" pitchFamily="34" charset="-122"/>
                 <a:cs typeface="Geist" pitchFamily="34" charset="-120"/>
               </a:rPr>
-              <a:t>per-company store, never shared context</a:t>
-            </a:r>
-            <a:endParaRPr lang="en-US" sz="950" dirty="0"/>
-          </a:p>
-        </p:txBody>
-      </p:sp>
-      <p:sp>
-        <p:nvSpPr>
-          <p:cNvPr id="15" name="Shape 12"/>
+              <a:t>Simple. Over-privileged. One prompt injection away from every company's books.</a:t>
+            </a:r>
+            <a:endParaRPr lang="en-US" sz="1100" dirty="0"/>
+          </a:p>
+        </p:txBody>
+      </p:sp>
+      <p:sp>
+        <p:nvSpPr>
+          <p:cNvPr id="14" name="Shape 11"/>
           <p:cNvSpPr/>
           <p:nvPr/>
         </p:nvSpPr>
         <p:spPr>
           <a:xfrm>
-            <a:off x="5852160" y="2075688"/>
-            <a:ext cx="822960" cy="457200"/>
+            <a:off x="3246120" y="1828800"/>
+            <a:ext cx="2606040" cy="2103120"/>
           </a:xfrm>
           <a:prstGeom prst="rect">
             <a:avLst/>
@@ -3782,59 +4191,157 @@
       </p:sp>
       <p:sp>
         <p:nvSpPr>
+          <p:cNvPr id="15" name="Shape 12"/>
+          <p:cNvSpPr/>
+          <p:nvPr/>
+        </p:nvSpPr>
+        <p:spPr>
+          <a:xfrm>
+            <a:off x="3474720" y="2057400"/>
+            <a:ext cx="329184" cy="329184"/>
+          </a:xfrm>
+          <a:prstGeom prst="rect">
+            <a:avLst/>
+          </a:prstGeom>
+          <a:solidFill>
+            <a:srgbClr val="FF5700"/>
+          </a:solidFill>
+          <a:ln/>
+        </p:spPr>
+      </p:sp>
+      <p:sp>
+        <p:nvSpPr>
           <p:cNvPr id="16" name="Text 13"/>
           <p:cNvSpPr txBox="1"/>
           <p:nvPr/>
         </p:nvSpPr>
         <p:spPr>
           <a:xfrm>
-            <a:off x="5852160" y="2075688"/>
-            <a:ext cx="822960" cy="457200"/>
-          </a:xfrm>
-          <a:prstGeom prst="rect">
-            <a:avLst/>
-          </a:prstGeom>
-          <a:noFill/>
-          <a:ln/>
-        </p:spPr>
-        <p:txBody>
-          <a:bodyPr wrap="square" lIns="635" tIns="635" rIns="635" bIns="635" rtlCol="0" anchor="ctr"/>
+            <a:off x="3474720" y="2057400"/>
+            <a:ext cx="329184" cy="329184"/>
+          </a:xfrm>
+          <a:prstGeom prst="rect">
+            <a:avLst/>
+          </a:prstGeom>
+          <a:noFill/>
+          <a:ln/>
+        </p:spPr>
+        <p:txBody>
+          <a:bodyPr wrap="square" lIns="0" tIns="0" rIns="0" bIns="0" rtlCol="0" anchor="ctr"/>
           <a:lstStyle/>
           <a:p>
             <a:pPr algn="ctr" indent="0" marL="0">
               <a:buNone/>
             </a:pPr>
             <a:r>
-              <a:rPr lang="en-US" sz="900" b="1" dirty="0">
-                <a:solidFill>
-                  <a:srgbClr val="0E7C7B"/>
-                </a:solidFill>
-                <a:latin typeface="Geist" pitchFamily="34" charset="0"/>
-                <a:ea typeface="Geist" pitchFamily="34" charset="-122"/>
-                <a:cs typeface="Geist" pitchFamily="34" charset="-120"/>
-              </a:rPr>
-              <a:t>ACME</a:t>
-            </a:r>
-            <a:endParaRPr lang="en-US" sz="900" dirty="0"/>
-          </a:p>
-        </p:txBody>
-      </p:sp>
-      <p:sp>
-        <p:nvSpPr>
-          <p:cNvPr id="17" name="Shape 14"/>
+              <a:rPr lang="en-US" sz="1200" b="1" dirty="0">
+                <a:solidFill>
+                  <a:srgbClr val="FFFFFF"/>
+                </a:solidFill>
+                <a:latin typeface="Geist" pitchFamily="34" charset="0"/>
+                <a:ea typeface="Geist" pitchFamily="34" charset="-122"/>
+                <a:cs typeface="Geist" pitchFamily="34" charset="-120"/>
+              </a:rPr>
+              <a:t>~</a:t>
+            </a:r>
+            <a:endParaRPr lang="en-US" sz="1200" dirty="0"/>
+          </a:p>
+        </p:txBody>
+      </p:sp>
+      <p:sp>
+        <p:nvSpPr>
+          <p:cNvPr id="17" name="Text 14"/>
+          <p:cNvSpPr txBox="1"/>
+          <p:nvPr/>
+        </p:nvSpPr>
+        <p:spPr>
+          <a:xfrm>
+            <a:off x="3474720" y="2514600"/>
+            <a:ext cx="2194560" cy="365760"/>
+          </a:xfrm>
+          <a:prstGeom prst="rect">
+            <a:avLst/>
+          </a:prstGeom>
+          <a:noFill/>
+          <a:ln/>
+        </p:spPr>
+        <p:txBody>
+          <a:bodyPr wrap="square" lIns="0" tIns="0" rIns="0" bIns="0" rtlCol="0" anchor="t"/>
+          <a:lstStyle/>
+          <a:p>
+            <a:pPr indent="0" marL="0">
+              <a:buNone/>
+            </a:pPr>
+            <a:r>
+              <a:rPr lang="en-US" sz="1400" b="1" spc="-50" kern="0" dirty="0">
+                <a:solidFill>
+                  <a:srgbClr val="1C1C1C"/>
+                </a:solidFill>
+                <a:latin typeface="Geist" pitchFamily="34" charset="0"/>
+                <a:ea typeface="Geist" pitchFamily="34" charset="-122"/>
+                <a:cs typeface="Geist" pitchFamily="34" charset="-120"/>
+              </a:rPr>
+              <a:t>The user's token</a:t>
+            </a:r>
+            <a:endParaRPr lang="en-US" sz="1400" dirty="0"/>
+          </a:p>
+        </p:txBody>
+      </p:sp>
+      <p:sp>
+        <p:nvSpPr>
+          <p:cNvPr id="18" name="Text 15"/>
+          <p:cNvSpPr txBox="1"/>
+          <p:nvPr/>
+        </p:nvSpPr>
+        <p:spPr>
+          <a:xfrm>
+            <a:off x="3474720" y="2880360"/>
+            <a:ext cx="2194560" cy="1005840"/>
+          </a:xfrm>
+          <a:prstGeom prst="rect">
+            <a:avLst/>
+          </a:prstGeom>
+          <a:noFill/>
+          <a:ln/>
+        </p:spPr>
+        <p:txBody>
+          <a:bodyPr wrap="square" lIns="0" tIns="0" rIns="0" bIns="0" rtlCol="0" anchor="t"/>
+          <a:lstStyle/>
+          <a:p>
+            <a:pPr indent="0" marL="0">
+              <a:buNone/>
+            </a:pPr>
+            <a:r>
+              <a:rPr lang="en-US" sz="1100" dirty="0">
+                <a:solidFill>
+                  <a:srgbClr val="6B7280"/>
+                </a:solidFill>
+                <a:latin typeface="Geist" pitchFamily="34" charset="0"/>
+                <a:ea typeface="Geist" pitchFamily="34" charset="-122"/>
+                <a:cs typeface="Geist" pitchFamily="34" charset="-120"/>
+              </a:rPr>
+              <a:t>Scoped right — but how do you delegate it safely to a process that runs for minutes?</a:t>
+            </a:r>
+            <a:endParaRPr lang="en-US" sz="1100" dirty="0"/>
+          </a:p>
+        </p:txBody>
+      </p:sp>
+      <p:sp>
+        <p:nvSpPr>
+          <p:cNvPr id="19" name="Shape 16"/>
           <p:cNvSpPr/>
           <p:nvPr/>
         </p:nvSpPr>
         <p:spPr>
           <a:xfrm>
-            <a:off x="6812280" y="2075688"/>
-            <a:ext cx="822960" cy="457200"/>
+            <a:off x="6035040" y="1828800"/>
+            <a:ext cx="2606040" cy="2103120"/>
           </a:xfrm>
           <a:prstGeom prst="rect">
             <a:avLst/>
           </a:prstGeom>
           <a:solidFill>
-            <a:srgbClr val="FFFFFF"/>
+            <a:srgbClr val="F7F7F5"/>
           </a:solidFill>
           <a:ln w="9525">
             <a:solidFill>
@@ -3846,155 +4353,101 @@
       </p:sp>
       <p:sp>
         <p:nvSpPr>
-          <p:cNvPr id="18" name="Text 15"/>
-          <p:cNvSpPr txBox="1"/>
-          <p:nvPr/>
-        </p:nvSpPr>
-        <p:spPr>
-          <a:xfrm>
-            <a:off x="6812280" y="2075688"/>
-            <a:ext cx="822960" cy="457200"/>
-          </a:xfrm>
-          <a:prstGeom prst="rect">
-            <a:avLst/>
-          </a:prstGeom>
-          <a:noFill/>
-          <a:ln/>
-        </p:spPr>
-        <p:txBody>
-          <a:bodyPr wrap="square" lIns="635" tIns="635" rIns="635" bIns="635" rtlCol="0" anchor="ctr"/>
+          <p:cNvPr id="20" name="Shape 17"/>
+          <p:cNvSpPr/>
+          <p:nvPr/>
+        </p:nvSpPr>
+        <p:spPr>
+          <a:xfrm>
+            <a:off x="6263640" y="2057400"/>
+            <a:ext cx="329184" cy="329184"/>
+          </a:xfrm>
+          <a:prstGeom prst="rect">
+            <a:avLst/>
+          </a:prstGeom>
+          <a:solidFill>
+            <a:srgbClr val="0E7C7B"/>
+          </a:solidFill>
+          <a:ln/>
+        </p:spPr>
+      </p:sp>
+      <p:sp>
+        <p:nvSpPr>
+          <p:cNvPr id="21" name="Text 18"/>
+          <p:cNvSpPr txBox="1"/>
+          <p:nvPr/>
+        </p:nvSpPr>
+        <p:spPr>
+          <a:xfrm>
+            <a:off x="6263640" y="2057400"/>
+            <a:ext cx="329184" cy="329184"/>
+          </a:xfrm>
+          <a:prstGeom prst="rect">
+            <a:avLst/>
+          </a:prstGeom>
+          <a:noFill/>
+          <a:ln/>
+        </p:spPr>
+        <p:txBody>
+          <a:bodyPr wrap="square" lIns="0" tIns="0" rIns="0" bIns="0" rtlCol="0" anchor="ctr"/>
           <a:lstStyle/>
           <a:p>
             <a:pPr algn="ctr" indent="0" marL="0">
               <a:buNone/>
             </a:pPr>
             <a:r>
-              <a:rPr lang="en-US" sz="900" b="1" dirty="0">
-                <a:solidFill>
-                  <a:srgbClr val="0E7C7B"/>
-                </a:solidFill>
-                <a:latin typeface="Geist" pitchFamily="34" charset="0"/>
-                <a:ea typeface="Geist" pitchFamily="34" charset="-122"/>
-                <a:cs typeface="Geist" pitchFamily="34" charset="-120"/>
-              </a:rPr>
-              <a:t>NORTH</a:t>
-            </a:r>
-            <a:endParaRPr lang="en-US" sz="900" dirty="0"/>
-          </a:p>
-        </p:txBody>
-      </p:sp>
-      <p:sp>
-        <p:nvSpPr>
-          <p:cNvPr id="19" name="Shape 16"/>
-          <p:cNvSpPr/>
-          <p:nvPr/>
-        </p:nvSpPr>
-        <p:spPr>
-          <a:xfrm>
-            <a:off x="7772400" y="2075688"/>
-            <a:ext cx="822960" cy="457200"/>
-          </a:xfrm>
-          <a:prstGeom prst="rect">
-            <a:avLst/>
-          </a:prstGeom>
-          <a:solidFill>
-            <a:srgbClr val="FFFFFF"/>
-          </a:solidFill>
-          <a:ln w="9525">
-            <a:solidFill>
-              <a:srgbClr val="E5E5E5"/>
-            </a:solidFill>
-            <a:prstDash val="solid"/>
-          </a:ln>
-        </p:spPr>
-      </p:sp>
-      <p:sp>
-        <p:nvSpPr>
-          <p:cNvPr id="20" name="Text 17"/>
-          <p:cNvSpPr txBox="1"/>
-          <p:nvPr/>
-        </p:nvSpPr>
-        <p:spPr>
-          <a:xfrm>
-            <a:off x="7772400" y="2075688"/>
-            <a:ext cx="822960" cy="457200"/>
-          </a:xfrm>
-          <a:prstGeom prst="rect">
-            <a:avLst/>
-          </a:prstGeom>
-          <a:noFill/>
-          <a:ln/>
-        </p:spPr>
-        <p:txBody>
-          <a:bodyPr wrap="square" lIns="635" tIns="635" rIns="635" bIns="635" rtlCol="0" anchor="ctr"/>
-          <a:lstStyle/>
-          <a:p>
-            <a:pPr algn="ctr" indent="0" marL="0">
-              <a:buNone/>
-            </a:pPr>
-            <a:r>
-              <a:rPr lang="en-US" sz="900" b="1" dirty="0">
-                <a:solidFill>
-                  <a:srgbClr val="0E7C7B"/>
-                </a:solidFill>
-                <a:latin typeface="Geist" pitchFamily="34" charset="0"/>
-                <a:ea typeface="Geist" pitchFamily="34" charset="-122"/>
-                <a:cs typeface="Geist" pitchFamily="34" charset="-120"/>
-              </a:rPr>
-              <a:t>C3</a:t>
-            </a:r>
-            <a:endParaRPr lang="en-US" sz="900" dirty="0"/>
-          </a:p>
-        </p:txBody>
-      </p:sp>
-      <p:sp>
-        <p:nvSpPr>
-          <p:cNvPr id="21" name="Shape 18"/>
-          <p:cNvSpPr/>
-          <p:nvPr/>
-        </p:nvSpPr>
-        <p:spPr>
-          <a:xfrm>
-            <a:off x="2377440" y="3108960"/>
-            <a:ext cx="457200" cy="0"/>
-          </a:xfrm>
-          <a:prstGeom prst="line">
-            <a:avLst/>
-          </a:prstGeom>
-          <a:noFill/>
-          <a:ln w="15875">
-            <a:solidFill>
-              <a:srgbClr val="919191"/>
-            </a:solidFill>
-            <a:prstDash val="solid"/>
-            <a:tailEnd type="triangle"/>
-          </a:ln>
-        </p:spPr>
-      </p:sp>
-      <p:sp>
-        <p:nvSpPr>
-          <p:cNvPr id="22" name="Shape 19"/>
-          <p:cNvSpPr/>
-          <p:nvPr/>
-        </p:nvSpPr>
-        <p:spPr>
-          <a:xfrm>
-            <a:off x="2926080" y="2788920"/>
-            <a:ext cx="2651760" cy="685800"/>
-          </a:xfrm>
-          <a:prstGeom prst="rect">
-            <a:avLst/>
-          </a:prstGeom>
-          <a:solidFill>
-            <a:srgbClr val="FFFFFF"/>
-          </a:solidFill>
-          <a:ln w="9525">
-            <a:solidFill>
-              <a:srgbClr val="E5E5E5"/>
-            </a:solidFill>
-            <a:prstDash val="solid"/>
-          </a:ln>
-        </p:spPr>
+              <a:rPr lang="en-US" sz="1200" b="1" dirty="0">
+                <a:solidFill>
+                  <a:srgbClr val="FFFFFF"/>
+                </a:solidFill>
+                <a:latin typeface="Geist" pitchFamily="34" charset="0"/>
+                <a:ea typeface="Geist" pitchFamily="34" charset="-122"/>
+                <a:cs typeface="Geist" pitchFamily="34" charset="-120"/>
+              </a:rPr>
+              <a:t>✓</a:t>
+            </a:r>
+            <a:endParaRPr lang="en-US" sz="1200" dirty="0"/>
+          </a:p>
+        </p:txBody>
+      </p:sp>
+      <p:sp>
+        <p:nvSpPr>
+          <p:cNvPr id="22" name="Text 19"/>
+          <p:cNvSpPr txBox="1"/>
+          <p:nvPr/>
+        </p:nvSpPr>
+        <p:spPr>
+          <a:xfrm>
+            <a:off x="6263640" y="2514600"/>
+            <a:ext cx="2194560" cy="365760"/>
+          </a:xfrm>
+          <a:prstGeom prst="rect">
+            <a:avLst/>
+          </a:prstGeom>
+          <a:noFill/>
+          <a:ln/>
+        </p:spPr>
+        <p:txBody>
+          <a:bodyPr wrap="square" lIns="0" tIns="0" rIns="0" bIns="0" rtlCol="0" anchor="t"/>
+          <a:lstStyle/>
+          <a:p>
+            <a:pPr indent="0" marL="0">
+              <a:buNone/>
+            </a:pPr>
+            <a:r>
+              <a:rPr lang="en-US" sz="1400" b="1" spc="-50" kern="0" dirty="0">
+                <a:solidFill>
+                  <a:srgbClr val="1C1C1C"/>
+                </a:solidFill>
+                <a:latin typeface="Geist" pitchFamily="34" charset="0"/>
+                <a:ea typeface="Geist" pitchFamily="34" charset="-122"/>
+                <a:cs typeface="Geist" pitchFamily="34" charset="-120"/>
+              </a:rPr>
+              <a:t>Agent identity</a:t>
+            </a:r>
+            <a:endParaRPr lang="en-US" sz="1400" dirty="0"/>
+          </a:p>
+        </p:txBody>
       </p:sp>
       <p:sp>
         <p:nvSpPr>
@@ -4004,8 +4457,8 @@
         </p:nvSpPr>
         <p:spPr>
           <a:xfrm>
-            <a:off x="3108960" y="2862072"/>
-            <a:ext cx="2286000" cy="274320"/>
+            <a:off x="6263640" y="2880360"/>
+            <a:ext cx="2194560" cy="1005840"/>
           </a:xfrm>
           <a:prstGeom prst="rect">
             <a:avLst/>
@@ -4021,17 +4474,17 @@
               <a:buNone/>
             </a:pPr>
             <a:r>
-              <a:rPr lang="en-US" sz="1300" b="1" spc="-50" kern="0" dirty="0">
-                <a:solidFill>
-                  <a:srgbClr val="1C1C1C"/>
-                </a:solidFill>
-                <a:latin typeface="Geist" pitchFamily="34" charset="0"/>
-                <a:ea typeface="Geist" pitchFamily="34" charset="-122"/>
-                <a:cs typeface="Geist" pitchFamily="34" charset="-120"/>
-              </a:rPr>
-              <a:t>Tools</a:t>
-            </a:r>
-            <a:endParaRPr lang="en-US" sz="1300" dirty="0"/>
+              <a:rPr lang="en-US" sz="1100" dirty="0">
+                <a:solidFill>
+                  <a:srgbClr val="6B7280"/>
+                </a:solidFill>
+                <a:latin typeface="Geist" pitchFamily="34" charset="0"/>
+                <a:ea typeface="Geist" pitchFamily="34" charset="-122"/>
+                <a:cs typeface="Geist" pitchFamily="34" charset="-120"/>
+              </a:rPr>
+              <a:t>Its own principal, scoped per company, per user, per task. Least-privilege tools. Auditable.</a:t>
+            </a:r>
+            <a:endParaRPr lang="en-US" sz="1100" dirty="0"/>
           </a:p>
         </p:txBody>
       </p:sp>
@@ -4043,8 +4496,8 @@
         </p:nvSpPr>
         <p:spPr>
           <a:xfrm>
-            <a:off x="3108960" y="3154680"/>
-            <a:ext cx="2377440" cy="320040"/>
+            <a:off x="457200" y="4160520"/>
+            <a:ext cx="8229600" cy="274320"/>
           </a:xfrm>
           <a:prstGeom prst="rect">
             <a:avLst/>
@@ -4060,595 +4513,6 @@
               <a:buNone/>
             </a:pPr>
             <a:r>
-              <a:rPr lang="en-US" sz="950" dirty="0">
-                <a:solidFill>
-                  <a:srgbClr val="6B7280"/>
-                </a:solidFill>
-                <a:latin typeface="Geist" pitchFamily="34" charset="0"/>
-                <a:ea typeface="Geist" pitchFamily="34" charset="-122"/>
-                <a:cs typeface="Geist" pitchFamily="34" charset="-120"/>
-              </a:rPr>
-              <a:t>company_id injected server-side on every call</a:t>
-            </a:r>
-            <a:endParaRPr lang="en-US" sz="950" dirty="0"/>
-          </a:p>
-        </p:txBody>
-      </p:sp>
-      <p:sp>
-        <p:nvSpPr>
-          <p:cNvPr id="25" name="Shape 22"/>
-          <p:cNvSpPr/>
-          <p:nvPr/>
-        </p:nvSpPr>
-        <p:spPr>
-          <a:xfrm>
-            <a:off x="5852160" y="2898648"/>
-            <a:ext cx="822960" cy="457200"/>
-          </a:xfrm>
-          <a:prstGeom prst="rect">
-            <a:avLst/>
-          </a:prstGeom>
-          <a:solidFill>
-            <a:srgbClr val="FFFFFF"/>
-          </a:solidFill>
-          <a:ln w="9525">
-            <a:solidFill>
-              <a:srgbClr val="E5E5E5"/>
-            </a:solidFill>
-            <a:prstDash val="solid"/>
-          </a:ln>
-        </p:spPr>
-      </p:sp>
-      <p:sp>
-        <p:nvSpPr>
-          <p:cNvPr id="26" name="Text 23"/>
-          <p:cNvSpPr txBox="1"/>
-          <p:nvPr/>
-        </p:nvSpPr>
-        <p:spPr>
-          <a:xfrm>
-            <a:off x="5852160" y="2898648"/>
-            <a:ext cx="822960" cy="457200"/>
-          </a:xfrm>
-          <a:prstGeom prst="rect">
-            <a:avLst/>
-          </a:prstGeom>
-          <a:noFill/>
-          <a:ln/>
-        </p:spPr>
-        <p:txBody>
-          <a:bodyPr wrap="square" lIns="635" tIns="635" rIns="635" bIns="635" rtlCol="0" anchor="ctr"/>
-          <a:lstStyle/>
-          <a:p>
-            <a:pPr algn="ctr" indent="0" marL="0">
-              <a:buNone/>
-            </a:pPr>
-            <a:r>
-              <a:rPr lang="en-US" sz="900" b="1" dirty="0">
-                <a:solidFill>
-                  <a:srgbClr val="0E7C7B"/>
-                </a:solidFill>
-                <a:latin typeface="Geist" pitchFamily="34" charset="0"/>
-                <a:ea typeface="Geist" pitchFamily="34" charset="-122"/>
-                <a:cs typeface="Geist" pitchFamily="34" charset="-120"/>
-              </a:rPr>
-              <a:t>ACME</a:t>
-            </a:r>
-            <a:endParaRPr lang="en-US" sz="900" dirty="0"/>
-          </a:p>
-        </p:txBody>
-      </p:sp>
-      <p:sp>
-        <p:nvSpPr>
-          <p:cNvPr id="27" name="Shape 24"/>
-          <p:cNvSpPr/>
-          <p:nvPr/>
-        </p:nvSpPr>
-        <p:spPr>
-          <a:xfrm>
-            <a:off x="6812280" y="2898648"/>
-            <a:ext cx="822960" cy="457200"/>
-          </a:xfrm>
-          <a:prstGeom prst="rect">
-            <a:avLst/>
-          </a:prstGeom>
-          <a:solidFill>
-            <a:srgbClr val="FFFFFF"/>
-          </a:solidFill>
-          <a:ln w="9525">
-            <a:solidFill>
-              <a:srgbClr val="E5E5E5"/>
-            </a:solidFill>
-            <a:prstDash val="solid"/>
-          </a:ln>
-        </p:spPr>
-      </p:sp>
-      <p:sp>
-        <p:nvSpPr>
-          <p:cNvPr id="28" name="Text 25"/>
-          <p:cNvSpPr txBox="1"/>
-          <p:nvPr/>
-        </p:nvSpPr>
-        <p:spPr>
-          <a:xfrm>
-            <a:off x="6812280" y="2898648"/>
-            <a:ext cx="822960" cy="457200"/>
-          </a:xfrm>
-          <a:prstGeom prst="rect">
-            <a:avLst/>
-          </a:prstGeom>
-          <a:noFill/>
-          <a:ln/>
-        </p:spPr>
-        <p:txBody>
-          <a:bodyPr wrap="square" lIns="635" tIns="635" rIns="635" bIns="635" rtlCol="0" anchor="ctr"/>
-          <a:lstStyle/>
-          <a:p>
-            <a:pPr algn="ctr" indent="0" marL="0">
-              <a:buNone/>
-            </a:pPr>
-            <a:r>
-              <a:rPr lang="en-US" sz="900" b="1" dirty="0">
-                <a:solidFill>
-                  <a:srgbClr val="0E7C7B"/>
-                </a:solidFill>
-                <a:latin typeface="Geist" pitchFamily="34" charset="0"/>
-                <a:ea typeface="Geist" pitchFamily="34" charset="-122"/>
-                <a:cs typeface="Geist" pitchFamily="34" charset="-120"/>
-              </a:rPr>
-              <a:t>NORTH</a:t>
-            </a:r>
-            <a:endParaRPr lang="en-US" sz="900" dirty="0"/>
-          </a:p>
-        </p:txBody>
-      </p:sp>
-      <p:sp>
-        <p:nvSpPr>
-          <p:cNvPr id="29" name="Shape 26"/>
-          <p:cNvSpPr/>
-          <p:nvPr/>
-        </p:nvSpPr>
-        <p:spPr>
-          <a:xfrm>
-            <a:off x="7772400" y="2898648"/>
-            <a:ext cx="822960" cy="457200"/>
-          </a:xfrm>
-          <a:prstGeom prst="rect">
-            <a:avLst/>
-          </a:prstGeom>
-          <a:solidFill>
-            <a:srgbClr val="FFFFFF"/>
-          </a:solidFill>
-          <a:ln w="9525">
-            <a:solidFill>
-              <a:srgbClr val="E5E5E5"/>
-            </a:solidFill>
-            <a:prstDash val="solid"/>
-          </a:ln>
-        </p:spPr>
-      </p:sp>
-      <p:sp>
-        <p:nvSpPr>
-          <p:cNvPr id="30" name="Text 27"/>
-          <p:cNvSpPr txBox="1"/>
-          <p:nvPr/>
-        </p:nvSpPr>
-        <p:spPr>
-          <a:xfrm>
-            <a:off x="7772400" y="2898648"/>
-            <a:ext cx="822960" cy="457200"/>
-          </a:xfrm>
-          <a:prstGeom prst="rect">
-            <a:avLst/>
-          </a:prstGeom>
-          <a:noFill/>
-          <a:ln/>
-        </p:spPr>
-        <p:txBody>
-          <a:bodyPr wrap="square" lIns="635" tIns="635" rIns="635" bIns="635" rtlCol="0" anchor="ctr"/>
-          <a:lstStyle/>
-          <a:p>
-            <a:pPr algn="ctr" indent="0" marL="0">
-              <a:buNone/>
-            </a:pPr>
-            <a:r>
-              <a:rPr lang="en-US" sz="900" b="1" dirty="0">
-                <a:solidFill>
-                  <a:srgbClr val="0E7C7B"/>
-                </a:solidFill>
-                <a:latin typeface="Geist" pitchFamily="34" charset="0"/>
-                <a:ea typeface="Geist" pitchFamily="34" charset="-122"/>
-                <a:cs typeface="Geist" pitchFamily="34" charset="-120"/>
-              </a:rPr>
-              <a:t>C3</a:t>
-            </a:r>
-            <a:endParaRPr lang="en-US" sz="900" dirty="0"/>
-          </a:p>
-        </p:txBody>
-      </p:sp>
-      <p:sp>
-        <p:nvSpPr>
-          <p:cNvPr id="31" name="Shape 28"/>
-          <p:cNvSpPr/>
-          <p:nvPr/>
-        </p:nvSpPr>
-        <p:spPr>
-          <a:xfrm>
-            <a:off x="2377440" y="3931920"/>
-            <a:ext cx="457200" cy="0"/>
-          </a:xfrm>
-          <a:prstGeom prst="line">
-            <a:avLst/>
-          </a:prstGeom>
-          <a:noFill/>
-          <a:ln w="15875">
-            <a:solidFill>
-              <a:srgbClr val="919191"/>
-            </a:solidFill>
-            <a:prstDash val="solid"/>
-            <a:tailEnd type="triangle"/>
-          </a:ln>
-        </p:spPr>
-      </p:sp>
-      <p:sp>
-        <p:nvSpPr>
-          <p:cNvPr id="32" name="Shape 29"/>
-          <p:cNvSpPr/>
-          <p:nvPr/>
-        </p:nvSpPr>
-        <p:spPr>
-          <a:xfrm>
-            <a:off x="2926080" y="3611880"/>
-            <a:ext cx="2651760" cy="685800"/>
-          </a:xfrm>
-          <a:prstGeom prst="rect">
-            <a:avLst/>
-          </a:prstGeom>
-          <a:solidFill>
-            <a:srgbClr val="FFFFFF"/>
-          </a:solidFill>
-          <a:ln w="9525">
-            <a:solidFill>
-              <a:srgbClr val="E5E5E5"/>
-            </a:solidFill>
-            <a:prstDash val="solid"/>
-          </a:ln>
-        </p:spPr>
-      </p:sp>
-      <p:sp>
-        <p:nvSpPr>
-          <p:cNvPr id="33" name="Text 30"/>
-          <p:cNvSpPr txBox="1"/>
-          <p:nvPr/>
-        </p:nvSpPr>
-        <p:spPr>
-          <a:xfrm>
-            <a:off x="3108960" y="3685032"/>
-            <a:ext cx="2286000" cy="274320"/>
-          </a:xfrm>
-          <a:prstGeom prst="rect">
-            <a:avLst/>
-          </a:prstGeom>
-          <a:noFill/>
-          <a:ln/>
-        </p:spPr>
-        <p:txBody>
-          <a:bodyPr wrap="square" lIns="0" tIns="0" rIns="0" bIns="0" rtlCol="0" anchor="t"/>
-          <a:lstStyle/>
-          <a:p>
-            <a:pPr indent="0" marL="0">
-              <a:buNone/>
-            </a:pPr>
-            <a:r>
-              <a:rPr lang="en-US" sz="1300" b="1" spc="-50" kern="0" dirty="0">
-                <a:solidFill>
-                  <a:srgbClr val="1C1C1C"/>
-                </a:solidFill>
-                <a:latin typeface="Geist" pitchFamily="34" charset="0"/>
-                <a:ea typeface="Geist" pitchFamily="34" charset="-122"/>
-                <a:cs typeface="Geist" pitchFamily="34" charset="-120"/>
-              </a:rPr>
-              <a:t>Retrieval</a:t>
-            </a:r>
-            <a:endParaRPr lang="en-US" sz="1300" dirty="0"/>
-          </a:p>
-        </p:txBody>
-      </p:sp>
-      <p:sp>
-        <p:nvSpPr>
-          <p:cNvPr id="34" name="Text 31"/>
-          <p:cNvSpPr txBox="1"/>
-          <p:nvPr/>
-        </p:nvSpPr>
-        <p:spPr>
-          <a:xfrm>
-            <a:off x="3108960" y="3977640"/>
-            <a:ext cx="2377440" cy="320040"/>
-          </a:xfrm>
-          <a:prstGeom prst="rect">
-            <a:avLst/>
-          </a:prstGeom>
-          <a:noFill/>
-          <a:ln/>
-        </p:spPr>
-        <p:txBody>
-          <a:bodyPr wrap="square" lIns="0" tIns="0" rIns="0" bIns="0" rtlCol="0" anchor="t"/>
-          <a:lstStyle/>
-          <a:p>
-            <a:pPr indent="0" marL="0">
-              <a:buNone/>
-            </a:pPr>
-            <a:r>
-              <a:rPr lang="en-US" sz="950" dirty="0">
-                <a:solidFill>
-                  <a:srgbClr val="6B7280"/>
-                </a:solidFill>
-                <a:latin typeface="Geist" pitchFamily="34" charset="0"/>
-                <a:ea typeface="Geist" pitchFamily="34" charset="-122"/>
-                <a:cs typeface="Geist" pitchFamily="34" charset="-120"/>
-              </a:rPr>
-              <a:t>index partitioned, filtered before ranking</a:t>
-            </a:r>
-            <a:endParaRPr lang="en-US" sz="950" dirty="0"/>
-          </a:p>
-        </p:txBody>
-      </p:sp>
-      <p:sp>
-        <p:nvSpPr>
-          <p:cNvPr id="35" name="Shape 32"/>
-          <p:cNvSpPr/>
-          <p:nvPr/>
-        </p:nvSpPr>
-        <p:spPr>
-          <a:xfrm>
-            <a:off x="5852160" y="3721608"/>
-            <a:ext cx="822960" cy="457200"/>
-          </a:xfrm>
-          <a:prstGeom prst="rect">
-            <a:avLst/>
-          </a:prstGeom>
-          <a:solidFill>
-            <a:srgbClr val="FFFFFF"/>
-          </a:solidFill>
-          <a:ln w="9525">
-            <a:solidFill>
-              <a:srgbClr val="E5E5E5"/>
-            </a:solidFill>
-            <a:prstDash val="solid"/>
-          </a:ln>
-        </p:spPr>
-      </p:sp>
-      <p:sp>
-        <p:nvSpPr>
-          <p:cNvPr id="36" name="Text 33"/>
-          <p:cNvSpPr txBox="1"/>
-          <p:nvPr/>
-        </p:nvSpPr>
-        <p:spPr>
-          <a:xfrm>
-            <a:off x="5852160" y="3721608"/>
-            <a:ext cx="822960" cy="457200"/>
-          </a:xfrm>
-          <a:prstGeom prst="rect">
-            <a:avLst/>
-          </a:prstGeom>
-          <a:noFill/>
-          <a:ln/>
-        </p:spPr>
-        <p:txBody>
-          <a:bodyPr wrap="square" lIns="635" tIns="635" rIns="635" bIns="635" rtlCol="0" anchor="ctr"/>
-          <a:lstStyle/>
-          <a:p>
-            <a:pPr algn="ctr" indent="0" marL="0">
-              <a:buNone/>
-            </a:pPr>
-            <a:r>
-              <a:rPr lang="en-US" sz="900" b="1" dirty="0">
-                <a:solidFill>
-                  <a:srgbClr val="0E7C7B"/>
-                </a:solidFill>
-                <a:latin typeface="Geist" pitchFamily="34" charset="0"/>
-                <a:ea typeface="Geist" pitchFamily="34" charset="-122"/>
-                <a:cs typeface="Geist" pitchFamily="34" charset="-120"/>
-              </a:rPr>
-              <a:t>ACME</a:t>
-            </a:r>
-            <a:endParaRPr lang="en-US" sz="900" dirty="0"/>
-          </a:p>
-        </p:txBody>
-      </p:sp>
-      <p:sp>
-        <p:nvSpPr>
-          <p:cNvPr id="37" name="Shape 34"/>
-          <p:cNvSpPr/>
-          <p:nvPr/>
-        </p:nvSpPr>
-        <p:spPr>
-          <a:xfrm>
-            <a:off x="6812280" y="3721608"/>
-            <a:ext cx="822960" cy="457200"/>
-          </a:xfrm>
-          <a:prstGeom prst="rect">
-            <a:avLst/>
-          </a:prstGeom>
-          <a:solidFill>
-            <a:srgbClr val="FFFFFF"/>
-          </a:solidFill>
-          <a:ln w="9525">
-            <a:solidFill>
-              <a:srgbClr val="E5E5E5"/>
-            </a:solidFill>
-            <a:prstDash val="solid"/>
-          </a:ln>
-        </p:spPr>
-      </p:sp>
-      <p:sp>
-        <p:nvSpPr>
-          <p:cNvPr id="38" name="Text 35"/>
-          <p:cNvSpPr txBox="1"/>
-          <p:nvPr/>
-        </p:nvSpPr>
-        <p:spPr>
-          <a:xfrm>
-            <a:off x="6812280" y="3721608"/>
-            <a:ext cx="822960" cy="457200"/>
-          </a:xfrm>
-          <a:prstGeom prst="rect">
-            <a:avLst/>
-          </a:prstGeom>
-          <a:noFill/>
-          <a:ln/>
-        </p:spPr>
-        <p:txBody>
-          <a:bodyPr wrap="square" lIns="635" tIns="635" rIns="635" bIns="635" rtlCol="0" anchor="ctr"/>
-          <a:lstStyle/>
-          <a:p>
-            <a:pPr algn="ctr" indent="0" marL="0">
-              <a:buNone/>
-            </a:pPr>
-            <a:r>
-              <a:rPr lang="en-US" sz="900" b="1" dirty="0">
-                <a:solidFill>
-                  <a:srgbClr val="0E7C7B"/>
-                </a:solidFill>
-                <a:latin typeface="Geist" pitchFamily="34" charset="0"/>
-                <a:ea typeface="Geist" pitchFamily="34" charset="-122"/>
-                <a:cs typeface="Geist" pitchFamily="34" charset="-120"/>
-              </a:rPr>
-              <a:t>NORTH</a:t>
-            </a:r>
-            <a:endParaRPr lang="en-US" sz="900" dirty="0"/>
-          </a:p>
-        </p:txBody>
-      </p:sp>
-      <p:sp>
-        <p:nvSpPr>
-          <p:cNvPr id="39" name="Shape 36"/>
-          <p:cNvSpPr/>
-          <p:nvPr/>
-        </p:nvSpPr>
-        <p:spPr>
-          <a:xfrm>
-            <a:off x="7772400" y="3721608"/>
-            <a:ext cx="822960" cy="457200"/>
-          </a:xfrm>
-          <a:prstGeom prst="rect">
-            <a:avLst/>
-          </a:prstGeom>
-          <a:solidFill>
-            <a:srgbClr val="FFFFFF"/>
-          </a:solidFill>
-          <a:ln w="9525">
-            <a:solidFill>
-              <a:srgbClr val="E5E5E5"/>
-            </a:solidFill>
-            <a:prstDash val="solid"/>
-          </a:ln>
-        </p:spPr>
-      </p:sp>
-      <p:sp>
-        <p:nvSpPr>
-          <p:cNvPr id="40" name="Text 37"/>
-          <p:cNvSpPr txBox="1"/>
-          <p:nvPr/>
-        </p:nvSpPr>
-        <p:spPr>
-          <a:xfrm>
-            <a:off x="7772400" y="3721608"/>
-            <a:ext cx="822960" cy="457200"/>
-          </a:xfrm>
-          <a:prstGeom prst="rect">
-            <a:avLst/>
-          </a:prstGeom>
-          <a:noFill/>
-          <a:ln/>
-        </p:spPr>
-        <p:txBody>
-          <a:bodyPr wrap="square" lIns="635" tIns="635" rIns="635" bIns="635" rtlCol="0" anchor="ctr"/>
-          <a:lstStyle/>
-          <a:p>
-            <a:pPr algn="ctr" indent="0" marL="0">
-              <a:buNone/>
-            </a:pPr>
-            <a:r>
-              <a:rPr lang="en-US" sz="900" b="1" dirty="0">
-                <a:solidFill>
-                  <a:srgbClr val="0E7C7B"/>
-                </a:solidFill>
-                <a:latin typeface="Geist" pitchFamily="34" charset="0"/>
-                <a:ea typeface="Geist" pitchFamily="34" charset="-122"/>
-                <a:cs typeface="Geist" pitchFamily="34" charset="-120"/>
-              </a:rPr>
-              <a:t>C3</a:t>
-            </a:r>
-            <a:endParaRPr lang="en-US" sz="900" dirty="0"/>
-          </a:p>
-        </p:txBody>
-      </p:sp>
-      <p:sp>
-        <p:nvSpPr>
-          <p:cNvPr id="41" name="Text 38"/>
-          <p:cNvSpPr txBox="1"/>
-          <p:nvPr/>
-        </p:nvSpPr>
-        <p:spPr>
-          <a:xfrm>
-            <a:off x="5852160" y="1691640"/>
-            <a:ext cx="2834640" cy="274320"/>
-          </a:xfrm>
-          <a:prstGeom prst="rect">
-            <a:avLst/>
-          </a:prstGeom>
-          <a:noFill/>
-          <a:ln/>
-        </p:spPr>
-        <p:txBody>
-          <a:bodyPr wrap="square" lIns="0" tIns="0" rIns="0" bIns="0" rtlCol="0" anchor="t"/>
-          <a:lstStyle/>
-          <a:p>
-            <a:pPr indent="0" marL="0">
-              <a:buNone/>
-            </a:pPr>
-            <a:r>
-              <a:rPr lang="en-US" sz="800" dirty="0">
-                <a:solidFill>
-                  <a:srgbClr val="0E7C7B"/>
-                </a:solidFill>
-                <a:latin typeface="IBM Plex Mono" pitchFamily="34" charset="0"/>
-                <a:ea typeface="IBM Plex Mono" pitchFamily="34" charset="-122"/>
-                <a:cs typeface="IBM Plex Mono" pitchFamily="34" charset="-120"/>
-              </a:rPr>
-              <a:t>COMPANIES — ISOLATED AT EVERY LAYER</a:t>
-            </a:r>
-            <a:endParaRPr lang="en-US" sz="800" dirty="0"/>
-          </a:p>
-        </p:txBody>
-      </p:sp>
-      <p:sp>
-        <p:nvSpPr>
-          <p:cNvPr id="42" name="Text 39"/>
-          <p:cNvSpPr txBox="1"/>
-          <p:nvPr/>
-        </p:nvSpPr>
-        <p:spPr>
-          <a:xfrm>
-            <a:off x="457200" y="4343400"/>
-            <a:ext cx="8229600" cy="274320"/>
-          </a:xfrm>
-          <a:prstGeom prst="rect">
-            <a:avLst/>
-          </a:prstGeom>
-          <a:noFill/>
-          <a:ln/>
-        </p:spPr>
-        <p:txBody>
-          <a:bodyPr wrap="square" lIns="0" tIns="0" rIns="0" bIns="0" rtlCol="0" anchor="t"/>
-          <a:lstStyle/>
-          <a:p>
-            <a:pPr indent="0" marL="0">
-              <a:buNone/>
-            </a:pPr>
-            <a:r>
               <a:rPr lang="en-US" sz="1000" dirty="0">
                 <a:solidFill>
                   <a:srgbClr val="919191"/>
@@ -4657,7 +4521,7 @@
                 <a:ea typeface="Geist" pitchFamily="34" charset="-122"/>
                 <a:cs typeface="Geist" pitchFamily="34" charset="-120"/>
               </a:rPr>
-              <a:t>Get one lane wrong and you've built a data leak with a chat window.</a:t>
+              <a:t>Episode 15 goes deep on delegated auth and least-privilege tools.</a:t>
             </a:r>
             <a:endParaRPr lang="en-US" sz="1000" dirty="0"/>
           </a:p>
@@ -4822,7 +4686,7 @@
                 <a:ea typeface="IBM Plex Mono" pitchFamily="34" charset="-122"/>
                 <a:cs typeface="IBM Plex Mono" pitchFamily="34" charset="-120"/>
               </a:rPr>
-              <a:t>WHAT BREAKS IN THE ENTERPRISE · 3 OF 3</a:t>
+              <a:t>WHAT BREAKS IN THE ENTERPRISE · 2 OF 3</a:t>
             </a:r>
             <a:endParaRPr lang="en-US" sz="1000" dirty="0"/>
           </a:p>
@@ -4853,7 +4717,7 @@
               <a:buNone/>
             </a:pPr>
             <a:r>
-              <a:rPr lang="en-US" sz="2300" b="1" spc="-100" kern="0" dirty="0">
+              <a:rPr lang="en-US" sz="2800" b="1" spc="-100" kern="0" dirty="0">
                 <a:solidFill>
                   <a:srgbClr val="1C1C1C"/>
                 </a:solidFill>
@@ -4861,9 +4725,9 @@
                 <a:ea typeface="Geist" pitchFamily="34" charset="-122"/>
                 <a:cs typeface="Geist" pitchFamily="34" charset="-120"/>
               </a:rPr>
-              <a:t>Accountability: who answers for step 7 of 12?</a:t>
-            </a:r>
-            <a:endParaRPr lang="en-US" sz="2300" dirty="0"/>
+              <a:t>Tenancy: one ERP, many companies</a:t>
+            </a:r>
+            <a:endParaRPr lang="en-US" sz="2800" dirty="0"/>
           </a:p>
         </p:txBody>
       </p:sp>
@@ -4953,8 +4817,113 @@
         </p:nvSpPr>
         <p:spPr>
           <a:xfrm>
-            <a:off x="457200" y="1783080"/>
-            <a:ext cx="4023360" cy="1097280"/>
+            <a:off x="457200" y="2423160"/>
+            <a:ext cx="1828800" cy="1188720"/>
+          </a:xfrm>
+          <a:prstGeom prst="rect">
+            <a:avLst/>
+          </a:prstGeom>
+          <a:solidFill>
+            <a:srgbClr val="FFFFFF"/>
+          </a:solidFill>
+          <a:ln w="15875">
+            <a:solidFill>
+              <a:srgbClr val="FF5700"/>
+            </a:solidFill>
+            <a:prstDash val="solid"/>
+          </a:ln>
+        </p:spPr>
+      </p:sp>
+      <p:sp>
+        <p:nvSpPr>
+          <p:cNvPr id="10" name="Text 7"/>
+          <p:cNvSpPr txBox="1"/>
+          <p:nvPr/>
+        </p:nvSpPr>
+        <p:spPr>
+          <a:xfrm>
+            <a:off x="457200" y="2423160"/>
+            <a:ext cx="1828800" cy="1188720"/>
+          </a:xfrm>
+          <a:prstGeom prst="rect">
+            <a:avLst/>
+          </a:prstGeom>
+          <a:noFill/>
+          <a:ln/>
+        </p:spPr>
+        <p:txBody>
+          <a:bodyPr wrap="square" lIns="635" tIns="635" rIns="635" bIns="635" rtlCol="0" anchor="ctr"/>
+          <a:lstStyle/>
+          <a:p>
+            <a:pPr algn="ctr" indent="0" marL="0">
+              <a:buNone/>
+            </a:pPr>
+            <a:r>
+              <a:rPr lang="en-US" sz="1300" b="1" dirty="0">
+                <a:solidFill>
+                  <a:srgbClr val="FF5700"/>
+                </a:solidFill>
+                <a:latin typeface="Geist" pitchFamily="34" charset="0"/>
+                <a:ea typeface="Geist" pitchFamily="34" charset="-122"/>
+                <a:cs typeface="Geist" pitchFamily="34" charset="-120"/>
+              </a:rPr>
+              <a:t>Agent</a:t>
+            </a:r>
+            <a:endParaRPr lang="en-US" sz="1300" dirty="0"/>
+          </a:p>
+          <a:p>
+            <a:pPr algn="ctr" indent="0" marL="0">
+              <a:buNone/>
+            </a:pPr>
+            <a:r>
+              <a:rPr lang="en-US" sz="1300" b="1" dirty="0">
+                <a:solidFill>
+                  <a:srgbClr val="FF5700"/>
+                </a:solidFill>
+                <a:latin typeface="Geist" pitchFamily="34" charset="0"/>
+                <a:ea typeface="Geist" pitchFamily="34" charset="-122"/>
+                <a:cs typeface="Geist" pitchFamily="34" charset="-120"/>
+              </a:rPr>
+              <a:t>(model + loop)</a:t>
+            </a:r>
+            <a:endParaRPr lang="en-US" sz="1300" dirty="0"/>
+          </a:p>
+        </p:txBody>
+      </p:sp>
+      <p:sp>
+        <p:nvSpPr>
+          <p:cNvPr id="11" name="Shape 8"/>
+          <p:cNvSpPr/>
+          <p:nvPr/>
+        </p:nvSpPr>
+        <p:spPr>
+          <a:xfrm>
+            <a:off x="2377440" y="2286000"/>
+            <a:ext cx="457200" cy="0"/>
+          </a:xfrm>
+          <a:prstGeom prst="line">
+            <a:avLst/>
+          </a:prstGeom>
+          <a:noFill/>
+          <a:ln w="15875">
+            <a:solidFill>
+              <a:srgbClr val="919191"/>
+            </a:solidFill>
+            <a:prstDash val="solid"/>
+            <a:tailEnd type="triangle"/>
+          </a:ln>
+        </p:spPr>
+      </p:sp>
+      <p:sp>
+        <p:nvSpPr>
+          <p:cNvPr id="12" name="Shape 9"/>
+          <p:cNvSpPr/>
+          <p:nvPr/>
+        </p:nvSpPr>
+        <p:spPr>
+          <a:xfrm>
+            <a:off x="2926080" y="1965960"/>
+            <a:ext cx="2651760" cy="685800"/>
           </a:xfrm>
           <a:prstGeom prst="rect">
             <a:avLst/>
@@ -4972,151 +4941,92 @@
       </p:sp>
       <p:sp>
         <p:nvSpPr>
-          <p:cNvPr id="10" name="Shape 7"/>
+          <p:cNvPr id="13" name="Text 10"/>
+          <p:cNvSpPr txBox="1"/>
+          <p:nvPr/>
+        </p:nvSpPr>
+        <p:spPr>
+          <a:xfrm>
+            <a:off x="3108960" y="2039112"/>
+            <a:ext cx="2286000" cy="274320"/>
+          </a:xfrm>
+          <a:prstGeom prst="rect">
+            <a:avLst/>
+          </a:prstGeom>
+          <a:noFill/>
+          <a:ln/>
+        </p:spPr>
+        <p:txBody>
+          <a:bodyPr wrap="square" lIns="0" tIns="0" rIns="0" bIns="0" rtlCol="0" anchor="t"/>
+          <a:lstStyle/>
+          <a:p>
+            <a:pPr indent="0" marL="0">
+              <a:buNone/>
+            </a:pPr>
+            <a:r>
+              <a:rPr lang="en-US" sz="1300" b="1" spc="-50" kern="0" dirty="0">
+                <a:solidFill>
+                  <a:srgbClr val="1C1C1C"/>
+                </a:solidFill>
+                <a:latin typeface="Geist" pitchFamily="34" charset="0"/>
+                <a:ea typeface="Geist" pitchFamily="34" charset="-122"/>
+                <a:cs typeface="Geist" pitchFamily="34" charset="-120"/>
+              </a:rPr>
+              <a:t>Memory</a:t>
+            </a:r>
+            <a:endParaRPr lang="en-US" sz="1300" dirty="0"/>
+          </a:p>
+        </p:txBody>
+      </p:sp>
+      <p:sp>
+        <p:nvSpPr>
+          <p:cNvPr id="14" name="Text 11"/>
+          <p:cNvSpPr txBox="1"/>
+          <p:nvPr/>
+        </p:nvSpPr>
+        <p:spPr>
+          <a:xfrm>
+            <a:off x="3108960" y="2331720"/>
+            <a:ext cx="2377440" cy="320040"/>
+          </a:xfrm>
+          <a:prstGeom prst="rect">
+            <a:avLst/>
+          </a:prstGeom>
+          <a:noFill/>
+          <a:ln/>
+        </p:spPr>
+        <p:txBody>
+          <a:bodyPr wrap="square" lIns="0" tIns="0" rIns="0" bIns="0" rtlCol="0" anchor="t"/>
+          <a:lstStyle/>
+          <a:p>
+            <a:pPr indent="0" marL="0">
+              <a:buNone/>
+            </a:pPr>
+            <a:r>
+              <a:rPr lang="en-US" sz="950" dirty="0">
+                <a:solidFill>
+                  <a:srgbClr val="6B7280"/>
+                </a:solidFill>
+                <a:latin typeface="Geist" pitchFamily="34" charset="0"/>
+                <a:ea typeface="Geist" pitchFamily="34" charset="-122"/>
+                <a:cs typeface="Geist" pitchFamily="34" charset="-120"/>
+              </a:rPr>
+              <a:t>per-company store, never shared context</a:t>
+            </a:r>
+            <a:endParaRPr lang="en-US" sz="950" dirty="0"/>
+          </a:p>
+        </p:txBody>
+      </p:sp>
+      <p:sp>
+        <p:nvSpPr>
+          <p:cNvPr id="15" name="Shape 12"/>
           <p:cNvSpPr/>
           <p:nvPr/>
         </p:nvSpPr>
         <p:spPr>
           <a:xfrm>
-            <a:off x="685800" y="1984248"/>
-            <a:ext cx="310896" cy="310896"/>
-          </a:xfrm>
-          <a:prstGeom prst="rect">
-            <a:avLst/>
-          </a:prstGeom>
-          <a:solidFill>
-            <a:srgbClr val="FF5700"/>
-          </a:solidFill>
-          <a:ln/>
-        </p:spPr>
-      </p:sp>
-      <p:sp>
-        <p:nvSpPr>
-          <p:cNvPr id="11" name="Text 8"/>
-          <p:cNvSpPr txBox="1"/>
-          <p:nvPr/>
-        </p:nvSpPr>
-        <p:spPr>
-          <a:xfrm>
-            <a:off x="685800" y="1984248"/>
-            <a:ext cx="310896" cy="310896"/>
-          </a:xfrm>
-          <a:prstGeom prst="rect">
-            <a:avLst/>
-          </a:prstGeom>
-          <a:noFill/>
-          <a:ln/>
-        </p:spPr>
-        <p:txBody>
-          <a:bodyPr wrap="square" lIns="0" tIns="0" rIns="0" bIns="0" rtlCol="0" anchor="ctr"/>
-          <a:lstStyle/>
-          <a:p>
-            <a:pPr algn="ctr" indent="0" marL="0">
-              <a:buNone/>
-            </a:pPr>
-            <a:r>
-              <a:rPr lang="en-US" sz="1100" b="1" dirty="0">
-                <a:solidFill>
-                  <a:srgbClr val="FFFFFF"/>
-                </a:solidFill>
-                <a:latin typeface="IBM Plex Mono" pitchFamily="34" charset="0"/>
-                <a:ea typeface="IBM Plex Mono" pitchFamily="34" charset="-122"/>
-                <a:cs typeface="IBM Plex Mono" pitchFamily="34" charset="-120"/>
-              </a:rPr>
-              <a:t>1</a:t>
-            </a:r>
-            <a:endParaRPr lang="en-US" sz="1100" dirty="0"/>
-          </a:p>
-        </p:txBody>
-      </p:sp>
-      <p:sp>
-        <p:nvSpPr>
-          <p:cNvPr id="12" name="Text 9"/>
-          <p:cNvSpPr txBox="1"/>
-          <p:nvPr/>
-        </p:nvSpPr>
-        <p:spPr>
-          <a:xfrm>
-            <a:off x="1143000" y="1947672"/>
-            <a:ext cx="3200400" cy="365760"/>
-          </a:xfrm>
-          <a:prstGeom prst="rect">
-            <a:avLst/>
-          </a:prstGeom>
-          <a:noFill/>
-          <a:ln/>
-        </p:spPr>
-        <p:txBody>
-          <a:bodyPr wrap="square" lIns="0" tIns="0" rIns="0" bIns="0" rtlCol="0" anchor="t"/>
-          <a:lstStyle/>
-          <a:p>
-            <a:pPr indent="0" marL="0">
-              <a:buNone/>
-            </a:pPr>
-            <a:r>
-              <a:rPr lang="en-US" sz="1400" b="1" spc="-50" kern="0" dirty="0">
-                <a:solidFill>
-                  <a:srgbClr val="1C1C1C"/>
-                </a:solidFill>
-                <a:latin typeface="Geist" pitchFamily="34" charset="0"/>
-                <a:ea typeface="Geist" pitchFamily="34" charset="-122"/>
-                <a:cs typeface="Geist" pitchFamily="34" charset="-120"/>
-              </a:rPr>
-              <a:t>Trace every step</a:t>
-            </a:r>
-            <a:endParaRPr lang="en-US" sz="1400" dirty="0"/>
-          </a:p>
-        </p:txBody>
-      </p:sp>
-      <p:sp>
-        <p:nvSpPr>
-          <p:cNvPr id="13" name="Text 10"/>
-          <p:cNvSpPr txBox="1"/>
-          <p:nvPr/>
-        </p:nvSpPr>
-        <p:spPr>
-          <a:xfrm>
-            <a:off x="1143000" y="2313432"/>
-            <a:ext cx="3200400" cy="502920"/>
-          </a:xfrm>
-          <a:prstGeom prst="rect">
-            <a:avLst/>
-          </a:prstGeom>
-          <a:noFill/>
-          <a:ln/>
-        </p:spPr>
-        <p:txBody>
-          <a:bodyPr wrap="square" lIns="0" tIns="0" rIns="0" bIns="0" rtlCol="0" anchor="t"/>
-          <a:lstStyle/>
-          <a:p>
-            <a:pPr indent="0" marL="0">
-              <a:buNone/>
-            </a:pPr>
-            <a:r>
-              <a:rPr lang="en-US" sz="1050" dirty="0">
-                <a:solidFill>
-                  <a:srgbClr val="6B7280"/>
-                </a:solidFill>
-                <a:latin typeface="Geist" pitchFamily="34" charset="0"/>
-                <a:ea typeface="Geist" pitchFamily="34" charset="-122"/>
-                <a:cs typeface="Geist" pitchFamily="34" charset="-120"/>
-              </a:rPr>
-              <a:t>every model call, tool call and result, tied to a user and a company</a:t>
-            </a:r>
-            <a:endParaRPr lang="en-US" sz="1050" dirty="0"/>
-          </a:p>
-        </p:txBody>
-      </p:sp>
-      <p:sp>
-        <p:nvSpPr>
-          <p:cNvPr id="14" name="Shape 11"/>
-          <p:cNvSpPr/>
-          <p:nvPr/>
-        </p:nvSpPr>
-        <p:spPr>
-          <a:xfrm>
-            <a:off x="4663440" y="1783080"/>
-            <a:ext cx="4023360" cy="1097280"/>
+            <a:off x="5852160" y="2075688"/>
+            <a:ext cx="822960" cy="457200"/>
           </a:xfrm>
           <a:prstGeom prst="rect">
             <a:avLst/>
@@ -5134,151 +5044,53 @@
       </p:sp>
       <p:sp>
         <p:nvSpPr>
-          <p:cNvPr id="15" name="Shape 12"/>
+          <p:cNvPr id="16" name="Text 13"/>
+          <p:cNvSpPr txBox="1"/>
+          <p:nvPr/>
+        </p:nvSpPr>
+        <p:spPr>
+          <a:xfrm>
+            <a:off x="5852160" y="2075688"/>
+            <a:ext cx="822960" cy="457200"/>
+          </a:xfrm>
+          <a:prstGeom prst="rect">
+            <a:avLst/>
+          </a:prstGeom>
+          <a:noFill/>
+          <a:ln/>
+        </p:spPr>
+        <p:txBody>
+          <a:bodyPr wrap="square" lIns="635" tIns="635" rIns="635" bIns="635" rtlCol="0" anchor="ctr"/>
+          <a:lstStyle/>
+          <a:p>
+            <a:pPr algn="ctr" indent="0" marL="0">
+              <a:buNone/>
+            </a:pPr>
+            <a:r>
+              <a:rPr lang="en-US" sz="900" b="1" dirty="0">
+                <a:solidFill>
+                  <a:srgbClr val="0E7C7B"/>
+                </a:solidFill>
+                <a:latin typeface="Geist" pitchFamily="34" charset="0"/>
+                <a:ea typeface="Geist" pitchFamily="34" charset="-122"/>
+                <a:cs typeface="Geist" pitchFamily="34" charset="-120"/>
+              </a:rPr>
+              <a:t>ACME</a:t>
+            </a:r>
+            <a:endParaRPr lang="en-US" sz="900" dirty="0"/>
+          </a:p>
+        </p:txBody>
+      </p:sp>
+      <p:sp>
+        <p:nvSpPr>
+          <p:cNvPr id="17" name="Shape 14"/>
           <p:cNvSpPr/>
           <p:nvPr/>
         </p:nvSpPr>
         <p:spPr>
           <a:xfrm>
-            <a:off x="4892040" y="1984248"/>
-            <a:ext cx="310896" cy="310896"/>
-          </a:xfrm>
-          <a:prstGeom prst="rect">
-            <a:avLst/>
-          </a:prstGeom>
-          <a:solidFill>
-            <a:srgbClr val="FF5700"/>
-          </a:solidFill>
-          <a:ln/>
-        </p:spPr>
-      </p:sp>
-      <p:sp>
-        <p:nvSpPr>
-          <p:cNvPr id="16" name="Text 13"/>
-          <p:cNvSpPr txBox="1"/>
-          <p:nvPr/>
-        </p:nvSpPr>
-        <p:spPr>
-          <a:xfrm>
-            <a:off x="4892040" y="1984248"/>
-            <a:ext cx="310896" cy="310896"/>
-          </a:xfrm>
-          <a:prstGeom prst="rect">
-            <a:avLst/>
-          </a:prstGeom>
-          <a:noFill/>
-          <a:ln/>
-        </p:spPr>
-        <p:txBody>
-          <a:bodyPr wrap="square" lIns="0" tIns="0" rIns="0" bIns="0" rtlCol="0" anchor="ctr"/>
-          <a:lstStyle/>
-          <a:p>
-            <a:pPr algn="ctr" indent="0" marL="0">
-              <a:buNone/>
-            </a:pPr>
-            <a:r>
-              <a:rPr lang="en-US" sz="1100" b="1" dirty="0">
-                <a:solidFill>
-                  <a:srgbClr val="FFFFFF"/>
-                </a:solidFill>
-                <a:latin typeface="IBM Plex Mono" pitchFamily="34" charset="0"/>
-                <a:ea typeface="IBM Plex Mono" pitchFamily="34" charset="-122"/>
-                <a:cs typeface="IBM Plex Mono" pitchFamily="34" charset="-120"/>
-              </a:rPr>
-              <a:t>2</a:t>
-            </a:r>
-            <a:endParaRPr lang="en-US" sz="1100" dirty="0"/>
-          </a:p>
-        </p:txBody>
-      </p:sp>
-      <p:sp>
-        <p:nvSpPr>
-          <p:cNvPr id="17" name="Text 14"/>
-          <p:cNvSpPr txBox="1"/>
-          <p:nvPr/>
-        </p:nvSpPr>
-        <p:spPr>
-          <a:xfrm>
-            <a:off x="5349240" y="1947672"/>
-            <a:ext cx="3200400" cy="365760"/>
-          </a:xfrm>
-          <a:prstGeom prst="rect">
-            <a:avLst/>
-          </a:prstGeom>
-          <a:noFill/>
-          <a:ln/>
-        </p:spPr>
-        <p:txBody>
-          <a:bodyPr wrap="square" lIns="0" tIns="0" rIns="0" bIns="0" rtlCol="0" anchor="t"/>
-          <a:lstStyle/>
-          <a:p>
-            <a:pPr indent="0" marL="0">
-              <a:buNone/>
-            </a:pPr>
-            <a:r>
-              <a:rPr lang="en-US" sz="1400" b="1" spc="-50" kern="0" dirty="0">
-                <a:solidFill>
-                  <a:srgbClr val="1C1C1C"/>
-                </a:solidFill>
-                <a:latin typeface="Geist" pitchFamily="34" charset="0"/>
-                <a:ea typeface="Geist" pitchFamily="34" charset="-122"/>
-                <a:cs typeface="Geist" pitchFamily="34" charset="-120"/>
-              </a:rPr>
-              <a:t>Human-in-the-loop</a:t>
-            </a:r>
-            <a:endParaRPr lang="en-US" sz="1400" dirty="0"/>
-          </a:p>
-        </p:txBody>
-      </p:sp>
-      <p:sp>
-        <p:nvSpPr>
-          <p:cNvPr id="18" name="Text 15"/>
-          <p:cNvSpPr txBox="1"/>
-          <p:nvPr/>
-        </p:nvSpPr>
-        <p:spPr>
-          <a:xfrm>
-            <a:off x="5349240" y="2313432"/>
-            <a:ext cx="3200400" cy="502920"/>
-          </a:xfrm>
-          <a:prstGeom prst="rect">
-            <a:avLst/>
-          </a:prstGeom>
-          <a:noFill/>
-          <a:ln/>
-        </p:spPr>
-        <p:txBody>
-          <a:bodyPr wrap="square" lIns="0" tIns="0" rIns="0" bIns="0" rtlCol="0" anchor="t"/>
-          <a:lstStyle/>
-          <a:p>
-            <a:pPr indent="0" marL="0">
-              <a:buNone/>
-            </a:pPr>
-            <a:r>
-              <a:rPr lang="en-US" sz="1050" dirty="0">
-                <a:solidFill>
-                  <a:srgbClr val="6B7280"/>
-                </a:solidFill>
-                <a:latin typeface="Geist" pitchFamily="34" charset="0"/>
-                <a:ea typeface="Geist" pitchFamily="34" charset="-122"/>
-                <a:cs typeface="Geist" pitchFamily="34" charset="-120"/>
-              </a:rPr>
-              <a:t>irreversible or high-value actions pause for a person — by design, not by prompt</a:t>
-            </a:r>
-            <a:endParaRPr lang="en-US" sz="1050" dirty="0"/>
-          </a:p>
-        </p:txBody>
-      </p:sp>
-      <p:sp>
-        <p:nvSpPr>
-          <p:cNvPr id="19" name="Shape 16"/>
-          <p:cNvSpPr/>
-          <p:nvPr/>
-        </p:nvSpPr>
-        <p:spPr>
-          <a:xfrm>
-            <a:off x="457200" y="3017520"/>
-            <a:ext cx="4023360" cy="1097280"/>
+            <a:off x="6812280" y="2075688"/>
+            <a:ext cx="822960" cy="457200"/>
           </a:xfrm>
           <a:prstGeom prst="rect">
             <a:avLst/>
@@ -5296,151 +5108,53 @@
       </p:sp>
       <p:sp>
         <p:nvSpPr>
-          <p:cNvPr id="20" name="Shape 17"/>
+          <p:cNvPr id="18" name="Text 15"/>
+          <p:cNvSpPr txBox="1"/>
+          <p:nvPr/>
+        </p:nvSpPr>
+        <p:spPr>
+          <a:xfrm>
+            <a:off x="6812280" y="2075688"/>
+            <a:ext cx="822960" cy="457200"/>
+          </a:xfrm>
+          <a:prstGeom prst="rect">
+            <a:avLst/>
+          </a:prstGeom>
+          <a:noFill/>
+          <a:ln/>
+        </p:spPr>
+        <p:txBody>
+          <a:bodyPr wrap="square" lIns="635" tIns="635" rIns="635" bIns="635" rtlCol="0" anchor="ctr"/>
+          <a:lstStyle/>
+          <a:p>
+            <a:pPr algn="ctr" indent="0" marL="0">
+              <a:buNone/>
+            </a:pPr>
+            <a:r>
+              <a:rPr lang="en-US" sz="900" b="1" dirty="0">
+                <a:solidFill>
+                  <a:srgbClr val="0E7C7B"/>
+                </a:solidFill>
+                <a:latin typeface="Geist" pitchFamily="34" charset="0"/>
+                <a:ea typeface="Geist" pitchFamily="34" charset="-122"/>
+                <a:cs typeface="Geist" pitchFamily="34" charset="-120"/>
+              </a:rPr>
+              <a:t>NORTH</a:t>
+            </a:r>
+            <a:endParaRPr lang="en-US" sz="900" dirty="0"/>
+          </a:p>
+        </p:txBody>
+      </p:sp>
+      <p:sp>
+        <p:nvSpPr>
+          <p:cNvPr id="19" name="Shape 16"/>
           <p:cNvSpPr/>
           <p:nvPr/>
         </p:nvSpPr>
         <p:spPr>
           <a:xfrm>
-            <a:off x="685800" y="3218688"/>
-            <a:ext cx="310896" cy="310896"/>
-          </a:xfrm>
-          <a:prstGeom prst="rect">
-            <a:avLst/>
-          </a:prstGeom>
-          <a:solidFill>
-            <a:srgbClr val="FF5700"/>
-          </a:solidFill>
-          <a:ln/>
-        </p:spPr>
-      </p:sp>
-      <p:sp>
-        <p:nvSpPr>
-          <p:cNvPr id="21" name="Text 18"/>
-          <p:cNvSpPr txBox="1"/>
-          <p:nvPr/>
-        </p:nvSpPr>
-        <p:spPr>
-          <a:xfrm>
-            <a:off x="685800" y="3218688"/>
-            <a:ext cx="310896" cy="310896"/>
-          </a:xfrm>
-          <a:prstGeom prst="rect">
-            <a:avLst/>
-          </a:prstGeom>
-          <a:noFill/>
-          <a:ln/>
-        </p:spPr>
-        <p:txBody>
-          <a:bodyPr wrap="square" lIns="0" tIns="0" rIns="0" bIns="0" rtlCol="0" anchor="ctr"/>
-          <a:lstStyle/>
-          <a:p>
-            <a:pPr algn="ctr" indent="0" marL="0">
-              <a:buNone/>
-            </a:pPr>
-            <a:r>
-              <a:rPr lang="en-US" sz="1100" b="1" dirty="0">
-                <a:solidFill>
-                  <a:srgbClr val="FFFFFF"/>
-                </a:solidFill>
-                <a:latin typeface="IBM Plex Mono" pitchFamily="34" charset="0"/>
-                <a:ea typeface="IBM Plex Mono" pitchFamily="34" charset="-122"/>
-                <a:cs typeface="IBM Plex Mono" pitchFamily="34" charset="-120"/>
-              </a:rPr>
-              <a:t>3</a:t>
-            </a:r>
-            <a:endParaRPr lang="en-US" sz="1100" dirty="0"/>
-          </a:p>
-        </p:txBody>
-      </p:sp>
-      <p:sp>
-        <p:nvSpPr>
-          <p:cNvPr id="22" name="Text 19"/>
-          <p:cNvSpPr txBox="1"/>
-          <p:nvPr/>
-        </p:nvSpPr>
-        <p:spPr>
-          <a:xfrm>
-            <a:off x="1143000" y="3182112"/>
-            <a:ext cx="3200400" cy="365760"/>
-          </a:xfrm>
-          <a:prstGeom prst="rect">
-            <a:avLst/>
-          </a:prstGeom>
-          <a:noFill/>
-          <a:ln/>
-        </p:spPr>
-        <p:txBody>
-          <a:bodyPr wrap="square" lIns="0" tIns="0" rIns="0" bIns="0" rtlCol="0" anchor="t"/>
-          <a:lstStyle/>
-          <a:p>
-            <a:pPr indent="0" marL="0">
-              <a:buNone/>
-            </a:pPr>
-            <a:r>
-              <a:rPr lang="en-US" sz="1400" b="1" spc="-50" kern="0" dirty="0">
-                <a:solidFill>
-                  <a:srgbClr val="1C1C1C"/>
-                </a:solidFill>
-                <a:latin typeface="Geist" pitchFamily="34" charset="0"/>
-                <a:ea typeface="Geist" pitchFamily="34" charset="-122"/>
-                <a:cs typeface="Geist" pitchFamily="34" charset="-120"/>
-              </a:rPr>
-              <a:t>Caps on steps, cost, time</a:t>
-            </a:r>
-            <a:endParaRPr lang="en-US" sz="1400" dirty="0"/>
-          </a:p>
-        </p:txBody>
-      </p:sp>
-      <p:sp>
-        <p:nvSpPr>
-          <p:cNvPr id="23" name="Text 20"/>
-          <p:cNvSpPr txBox="1"/>
-          <p:nvPr/>
-        </p:nvSpPr>
-        <p:spPr>
-          <a:xfrm>
-            <a:off x="1143000" y="3547872"/>
-            <a:ext cx="3200400" cy="502920"/>
-          </a:xfrm>
-          <a:prstGeom prst="rect">
-            <a:avLst/>
-          </a:prstGeom>
-          <a:noFill/>
-          <a:ln/>
-        </p:spPr>
-        <p:txBody>
-          <a:bodyPr wrap="square" lIns="0" tIns="0" rIns="0" bIns="0" rtlCol="0" anchor="t"/>
-          <a:lstStyle/>
-          <a:p>
-            <a:pPr indent="0" marL="0">
-              <a:buNone/>
-            </a:pPr>
-            <a:r>
-              <a:rPr lang="en-US" sz="1050" dirty="0">
-                <a:solidFill>
-                  <a:srgbClr val="6B7280"/>
-                </a:solidFill>
-                <a:latin typeface="Geist" pitchFamily="34" charset="0"/>
-                <a:ea typeface="Geist" pitchFamily="34" charset="-122"/>
-                <a:cs typeface="Geist" pitchFamily="34" charset="-120"/>
-              </a:rPr>
-              <a:t>a runaway loop is a budget incident; the cap is the circuit breaker</a:t>
-            </a:r>
-            <a:endParaRPr lang="en-US" sz="1050" dirty="0"/>
-          </a:p>
-        </p:txBody>
-      </p:sp>
-      <p:sp>
-        <p:nvSpPr>
-          <p:cNvPr id="24" name="Shape 21"/>
-          <p:cNvSpPr/>
-          <p:nvPr/>
-        </p:nvSpPr>
-        <p:spPr>
-          <a:xfrm>
-            <a:off x="4663440" y="3017520"/>
-            <a:ext cx="4023360" cy="1097280"/>
+            <a:off x="7772400" y="2075688"/>
+            <a:ext cx="822960" cy="457200"/>
           </a:xfrm>
           <a:prstGeom prst="rect">
             <a:avLst/>
@@ -5458,22 +5172,193 @@
       </p:sp>
       <p:sp>
         <p:nvSpPr>
+          <p:cNvPr id="20" name="Text 17"/>
+          <p:cNvSpPr txBox="1"/>
+          <p:nvPr/>
+        </p:nvSpPr>
+        <p:spPr>
+          <a:xfrm>
+            <a:off x="7772400" y="2075688"/>
+            <a:ext cx="822960" cy="457200"/>
+          </a:xfrm>
+          <a:prstGeom prst="rect">
+            <a:avLst/>
+          </a:prstGeom>
+          <a:noFill/>
+          <a:ln/>
+        </p:spPr>
+        <p:txBody>
+          <a:bodyPr wrap="square" lIns="635" tIns="635" rIns="635" bIns="635" rtlCol="0" anchor="ctr"/>
+          <a:lstStyle/>
+          <a:p>
+            <a:pPr algn="ctr" indent="0" marL="0">
+              <a:buNone/>
+            </a:pPr>
+            <a:r>
+              <a:rPr lang="en-US" sz="900" b="1" dirty="0">
+                <a:solidFill>
+                  <a:srgbClr val="0E7C7B"/>
+                </a:solidFill>
+                <a:latin typeface="Geist" pitchFamily="34" charset="0"/>
+                <a:ea typeface="Geist" pitchFamily="34" charset="-122"/>
+                <a:cs typeface="Geist" pitchFamily="34" charset="-120"/>
+              </a:rPr>
+              <a:t>C3</a:t>
+            </a:r>
+            <a:endParaRPr lang="en-US" sz="900" dirty="0"/>
+          </a:p>
+        </p:txBody>
+      </p:sp>
+      <p:sp>
+        <p:nvSpPr>
+          <p:cNvPr id="21" name="Shape 18"/>
+          <p:cNvSpPr/>
+          <p:nvPr/>
+        </p:nvSpPr>
+        <p:spPr>
+          <a:xfrm>
+            <a:off x="2377440" y="3108960"/>
+            <a:ext cx="457200" cy="0"/>
+          </a:xfrm>
+          <a:prstGeom prst="line">
+            <a:avLst/>
+          </a:prstGeom>
+          <a:noFill/>
+          <a:ln w="15875">
+            <a:solidFill>
+              <a:srgbClr val="919191"/>
+            </a:solidFill>
+            <a:prstDash val="solid"/>
+            <a:tailEnd type="triangle"/>
+          </a:ln>
+        </p:spPr>
+      </p:sp>
+      <p:sp>
+        <p:nvSpPr>
+          <p:cNvPr id="22" name="Shape 19"/>
+          <p:cNvSpPr/>
+          <p:nvPr/>
+        </p:nvSpPr>
+        <p:spPr>
+          <a:xfrm>
+            <a:off x="2926080" y="2788920"/>
+            <a:ext cx="2651760" cy="685800"/>
+          </a:xfrm>
+          <a:prstGeom prst="rect">
+            <a:avLst/>
+          </a:prstGeom>
+          <a:solidFill>
+            <a:srgbClr val="FFFFFF"/>
+          </a:solidFill>
+          <a:ln w="9525">
+            <a:solidFill>
+              <a:srgbClr val="E5E5E5"/>
+            </a:solidFill>
+            <a:prstDash val="solid"/>
+          </a:ln>
+        </p:spPr>
+      </p:sp>
+      <p:sp>
+        <p:nvSpPr>
+          <p:cNvPr id="23" name="Text 20"/>
+          <p:cNvSpPr txBox="1"/>
+          <p:nvPr/>
+        </p:nvSpPr>
+        <p:spPr>
+          <a:xfrm>
+            <a:off x="3108960" y="2862072"/>
+            <a:ext cx="2286000" cy="274320"/>
+          </a:xfrm>
+          <a:prstGeom prst="rect">
+            <a:avLst/>
+          </a:prstGeom>
+          <a:noFill/>
+          <a:ln/>
+        </p:spPr>
+        <p:txBody>
+          <a:bodyPr wrap="square" lIns="0" tIns="0" rIns="0" bIns="0" rtlCol="0" anchor="t"/>
+          <a:lstStyle/>
+          <a:p>
+            <a:pPr indent="0" marL="0">
+              <a:buNone/>
+            </a:pPr>
+            <a:r>
+              <a:rPr lang="en-US" sz="1300" b="1" spc="-50" kern="0" dirty="0">
+                <a:solidFill>
+                  <a:srgbClr val="1C1C1C"/>
+                </a:solidFill>
+                <a:latin typeface="Geist" pitchFamily="34" charset="0"/>
+                <a:ea typeface="Geist" pitchFamily="34" charset="-122"/>
+                <a:cs typeface="Geist" pitchFamily="34" charset="-120"/>
+              </a:rPr>
+              <a:t>Tools</a:t>
+            </a:r>
+            <a:endParaRPr lang="en-US" sz="1300" dirty="0"/>
+          </a:p>
+        </p:txBody>
+      </p:sp>
+      <p:sp>
+        <p:nvSpPr>
+          <p:cNvPr id="24" name="Text 21"/>
+          <p:cNvSpPr txBox="1"/>
+          <p:nvPr/>
+        </p:nvSpPr>
+        <p:spPr>
+          <a:xfrm>
+            <a:off x="3108960" y="3154680"/>
+            <a:ext cx="2377440" cy="320040"/>
+          </a:xfrm>
+          <a:prstGeom prst="rect">
+            <a:avLst/>
+          </a:prstGeom>
+          <a:noFill/>
+          <a:ln/>
+        </p:spPr>
+        <p:txBody>
+          <a:bodyPr wrap="square" lIns="0" tIns="0" rIns="0" bIns="0" rtlCol="0" anchor="t"/>
+          <a:lstStyle/>
+          <a:p>
+            <a:pPr indent="0" marL="0">
+              <a:buNone/>
+            </a:pPr>
+            <a:r>
+              <a:rPr lang="en-US" sz="950" dirty="0">
+                <a:solidFill>
+                  <a:srgbClr val="6B7280"/>
+                </a:solidFill>
+                <a:latin typeface="Geist" pitchFamily="34" charset="0"/>
+                <a:ea typeface="Geist" pitchFamily="34" charset="-122"/>
+                <a:cs typeface="Geist" pitchFamily="34" charset="-120"/>
+              </a:rPr>
+              <a:t>company_id injected server-side on every call</a:t>
+            </a:r>
+            <a:endParaRPr lang="en-US" sz="950" dirty="0"/>
+          </a:p>
+        </p:txBody>
+      </p:sp>
+      <p:sp>
+        <p:nvSpPr>
           <p:cNvPr id="25" name="Shape 22"/>
           <p:cNvSpPr/>
           <p:nvPr/>
         </p:nvSpPr>
         <p:spPr>
           <a:xfrm>
-            <a:off x="4892040" y="3218688"/>
-            <a:ext cx="310896" cy="310896"/>
+            <a:off x="5852160" y="2898648"/>
+            <a:ext cx="822960" cy="457200"/>
           </a:xfrm>
           <a:prstGeom prst="rect">
             <a:avLst/>
           </a:prstGeom>
           <a:solidFill>
-            <a:srgbClr val="FF5700"/>
+            <a:srgbClr val="FFFFFF"/>
           </a:solidFill>
-          <a:ln/>
+          <a:ln w="9525">
+            <a:solidFill>
+              <a:srgbClr val="E5E5E5"/>
+            </a:solidFill>
+            <a:prstDash val="solid"/>
+          </a:ln>
         </p:spPr>
       </p:sp>
       <p:sp>
@@ -5484,47 +5369,533 @@
         </p:nvSpPr>
         <p:spPr>
           <a:xfrm>
-            <a:off x="4892040" y="3218688"/>
-            <a:ext cx="310896" cy="310896"/>
-          </a:xfrm>
-          <a:prstGeom prst="rect">
-            <a:avLst/>
-          </a:prstGeom>
-          <a:noFill/>
-          <a:ln/>
-        </p:spPr>
-        <p:txBody>
-          <a:bodyPr wrap="square" lIns="0" tIns="0" rIns="0" bIns="0" rtlCol="0" anchor="ctr"/>
+            <a:off x="5852160" y="2898648"/>
+            <a:ext cx="822960" cy="457200"/>
+          </a:xfrm>
+          <a:prstGeom prst="rect">
+            <a:avLst/>
+          </a:prstGeom>
+          <a:noFill/>
+          <a:ln/>
+        </p:spPr>
+        <p:txBody>
+          <a:bodyPr wrap="square" lIns="635" tIns="635" rIns="635" bIns="635" rtlCol="0" anchor="ctr"/>
           <a:lstStyle/>
           <a:p>
             <a:pPr algn="ctr" indent="0" marL="0">
               <a:buNone/>
             </a:pPr>
             <a:r>
-              <a:rPr lang="en-US" sz="1100" b="1" dirty="0">
-                <a:solidFill>
-                  <a:srgbClr val="FFFFFF"/>
+              <a:rPr lang="en-US" sz="900" b="1" dirty="0">
+                <a:solidFill>
+                  <a:srgbClr val="0E7C7B"/>
+                </a:solidFill>
+                <a:latin typeface="Geist" pitchFamily="34" charset="0"/>
+                <a:ea typeface="Geist" pitchFamily="34" charset="-122"/>
+                <a:cs typeface="Geist" pitchFamily="34" charset="-120"/>
+              </a:rPr>
+              <a:t>ACME</a:t>
+            </a:r>
+            <a:endParaRPr lang="en-US" sz="900" dirty="0"/>
+          </a:p>
+        </p:txBody>
+      </p:sp>
+      <p:sp>
+        <p:nvSpPr>
+          <p:cNvPr id="27" name="Shape 24"/>
+          <p:cNvSpPr/>
+          <p:nvPr/>
+        </p:nvSpPr>
+        <p:spPr>
+          <a:xfrm>
+            <a:off x="6812280" y="2898648"/>
+            <a:ext cx="822960" cy="457200"/>
+          </a:xfrm>
+          <a:prstGeom prst="rect">
+            <a:avLst/>
+          </a:prstGeom>
+          <a:solidFill>
+            <a:srgbClr val="FFFFFF"/>
+          </a:solidFill>
+          <a:ln w="9525">
+            <a:solidFill>
+              <a:srgbClr val="E5E5E5"/>
+            </a:solidFill>
+            <a:prstDash val="solid"/>
+          </a:ln>
+        </p:spPr>
+      </p:sp>
+      <p:sp>
+        <p:nvSpPr>
+          <p:cNvPr id="28" name="Text 25"/>
+          <p:cNvSpPr txBox="1"/>
+          <p:nvPr/>
+        </p:nvSpPr>
+        <p:spPr>
+          <a:xfrm>
+            <a:off x="6812280" y="2898648"/>
+            <a:ext cx="822960" cy="457200"/>
+          </a:xfrm>
+          <a:prstGeom prst="rect">
+            <a:avLst/>
+          </a:prstGeom>
+          <a:noFill/>
+          <a:ln/>
+        </p:spPr>
+        <p:txBody>
+          <a:bodyPr wrap="square" lIns="635" tIns="635" rIns="635" bIns="635" rtlCol="0" anchor="ctr"/>
+          <a:lstStyle/>
+          <a:p>
+            <a:pPr algn="ctr" indent="0" marL="0">
+              <a:buNone/>
+            </a:pPr>
+            <a:r>
+              <a:rPr lang="en-US" sz="900" b="1" dirty="0">
+                <a:solidFill>
+                  <a:srgbClr val="0E7C7B"/>
+                </a:solidFill>
+                <a:latin typeface="Geist" pitchFamily="34" charset="0"/>
+                <a:ea typeface="Geist" pitchFamily="34" charset="-122"/>
+                <a:cs typeface="Geist" pitchFamily="34" charset="-120"/>
+              </a:rPr>
+              <a:t>NORTH</a:t>
+            </a:r>
+            <a:endParaRPr lang="en-US" sz="900" dirty="0"/>
+          </a:p>
+        </p:txBody>
+      </p:sp>
+      <p:sp>
+        <p:nvSpPr>
+          <p:cNvPr id="29" name="Shape 26"/>
+          <p:cNvSpPr/>
+          <p:nvPr/>
+        </p:nvSpPr>
+        <p:spPr>
+          <a:xfrm>
+            <a:off x="7772400" y="2898648"/>
+            <a:ext cx="822960" cy="457200"/>
+          </a:xfrm>
+          <a:prstGeom prst="rect">
+            <a:avLst/>
+          </a:prstGeom>
+          <a:solidFill>
+            <a:srgbClr val="FFFFFF"/>
+          </a:solidFill>
+          <a:ln w="9525">
+            <a:solidFill>
+              <a:srgbClr val="E5E5E5"/>
+            </a:solidFill>
+            <a:prstDash val="solid"/>
+          </a:ln>
+        </p:spPr>
+      </p:sp>
+      <p:sp>
+        <p:nvSpPr>
+          <p:cNvPr id="30" name="Text 27"/>
+          <p:cNvSpPr txBox="1"/>
+          <p:nvPr/>
+        </p:nvSpPr>
+        <p:spPr>
+          <a:xfrm>
+            <a:off x="7772400" y="2898648"/>
+            <a:ext cx="822960" cy="457200"/>
+          </a:xfrm>
+          <a:prstGeom prst="rect">
+            <a:avLst/>
+          </a:prstGeom>
+          <a:noFill/>
+          <a:ln/>
+        </p:spPr>
+        <p:txBody>
+          <a:bodyPr wrap="square" lIns="635" tIns="635" rIns="635" bIns="635" rtlCol="0" anchor="ctr"/>
+          <a:lstStyle/>
+          <a:p>
+            <a:pPr algn="ctr" indent="0" marL="0">
+              <a:buNone/>
+            </a:pPr>
+            <a:r>
+              <a:rPr lang="en-US" sz="900" b="1" dirty="0">
+                <a:solidFill>
+                  <a:srgbClr val="0E7C7B"/>
+                </a:solidFill>
+                <a:latin typeface="Geist" pitchFamily="34" charset="0"/>
+                <a:ea typeface="Geist" pitchFamily="34" charset="-122"/>
+                <a:cs typeface="Geist" pitchFamily="34" charset="-120"/>
+              </a:rPr>
+              <a:t>C3</a:t>
+            </a:r>
+            <a:endParaRPr lang="en-US" sz="900" dirty="0"/>
+          </a:p>
+        </p:txBody>
+      </p:sp>
+      <p:sp>
+        <p:nvSpPr>
+          <p:cNvPr id="31" name="Shape 28"/>
+          <p:cNvSpPr/>
+          <p:nvPr/>
+        </p:nvSpPr>
+        <p:spPr>
+          <a:xfrm>
+            <a:off x="2377440" y="3931920"/>
+            <a:ext cx="457200" cy="0"/>
+          </a:xfrm>
+          <a:prstGeom prst="line">
+            <a:avLst/>
+          </a:prstGeom>
+          <a:noFill/>
+          <a:ln w="15875">
+            <a:solidFill>
+              <a:srgbClr val="919191"/>
+            </a:solidFill>
+            <a:prstDash val="solid"/>
+            <a:tailEnd type="triangle"/>
+          </a:ln>
+        </p:spPr>
+      </p:sp>
+      <p:sp>
+        <p:nvSpPr>
+          <p:cNvPr id="32" name="Shape 29"/>
+          <p:cNvSpPr/>
+          <p:nvPr/>
+        </p:nvSpPr>
+        <p:spPr>
+          <a:xfrm>
+            <a:off x="2926080" y="3611880"/>
+            <a:ext cx="2651760" cy="685800"/>
+          </a:xfrm>
+          <a:prstGeom prst="rect">
+            <a:avLst/>
+          </a:prstGeom>
+          <a:solidFill>
+            <a:srgbClr val="FFFFFF"/>
+          </a:solidFill>
+          <a:ln w="9525">
+            <a:solidFill>
+              <a:srgbClr val="E5E5E5"/>
+            </a:solidFill>
+            <a:prstDash val="solid"/>
+          </a:ln>
+        </p:spPr>
+      </p:sp>
+      <p:sp>
+        <p:nvSpPr>
+          <p:cNvPr id="33" name="Text 30"/>
+          <p:cNvSpPr txBox="1"/>
+          <p:nvPr/>
+        </p:nvSpPr>
+        <p:spPr>
+          <a:xfrm>
+            <a:off x="3108960" y="3685032"/>
+            <a:ext cx="2286000" cy="274320"/>
+          </a:xfrm>
+          <a:prstGeom prst="rect">
+            <a:avLst/>
+          </a:prstGeom>
+          <a:noFill/>
+          <a:ln/>
+        </p:spPr>
+        <p:txBody>
+          <a:bodyPr wrap="square" lIns="0" tIns="0" rIns="0" bIns="0" rtlCol="0" anchor="t"/>
+          <a:lstStyle/>
+          <a:p>
+            <a:pPr indent="0" marL="0">
+              <a:buNone/>
+            </a:pPr>
+            <a:r>
+              <a:rPr lang="en-US" sz="1300" b="1" spc="-50" kern="0" dirty="0">
+                <a:solidFill>
+                  <a:srgbClr val="1C1C1C"/>
+                </a:solidFill>
+                <a:latin typeface="Geist" pitchFamily="34" charset="0"/>
+                <a:ea typeface="Geist" pitchFamily="34" charset="-122"/>
+                <a:cs typeface="Geist" pitchFamily="34" charset="-120"/>
+              </a:rPr>
+              <a:t>Retrieval</a:t>
+            </a:r>
+            <a:endParaRPr lang="en-US" sz="1300" dirty="0"/>
+          </a:p>
+        </p:txBody>
+      </p:sp>
+      <p:sp>
+        <p:nvSpPr>
+          <p:cNvPr id="34" name="Text 31"/>
+          <p:cNvSpPr txBox="1"/>
+          <p:nvPr/>
+        </p:nvSpPr>
+        <p:spPr>
+          <a:xfrm>
+            <a:off x="3108960" y="3977640"/>
+            <a:ext cx="2377440" cy="320040"/>
+          </a:xfrm>
+          <a:prstGeom prst="rect">
+            <a:avLst/>
+          </a:prstGeom>
+          <a:noFill/>
+          <a:ln/>
+        </p:spPr>
+        <p:txBody>
+          <a:bodyPr wrap="square" lIns="0" tIns="0" rIns="0" bIns="0" rtlCol="0" anchor="t"/>
+          <a:lstStyle/>
+          <a:p>
+            <a:pPr indent="0" marL="0">
+              <a:buNone/>
+            </a:pPr>
+            <a:r>
+              <a:rPr lang="en-US" sz="950" dirty="0">
+                <a:solidFill>
+                  <a:srgbClr val="6B7280"/>
+                </a:solidFill>
+                <a:latin typeface="Geist" pitchFamily="34" charset="0"/>
+                <a:ea typeface="Geist" pitchFamily="34" charset="-122"/>
+                <a:cs typeface="Geist" pitchFamily="34" charset="-120"/>
+              </a:rPr>
+              <a:t>index partitioned, filtered before ranking</a:t>
+            </a:r>
+            <a:endParaRPr lang="en-US" sz="950" dirty="0"/>
+          </a:p>
+        </p:txBody>
+      </p:sp>
+      <p:sp>
+        <p:nvSpPr>
+          <p:cNvPr id="35" name="Shape 32"/>
+          <p:cNvSpPr/>
+          <p:nvPr/>
+        </p:nvSpPr>
+        <p:spPr>
+          <a:xfrm>
+            <a:off x="5852160" y="3721608"/>
+            <a:ext cx="822960" cy="457200"/>
+          </a:xfrm>
+          <a:prstGeom prst="rect">
+            <a:avLst/>
+          </a:prstGeom>
+          <a:solidFill>
+            <a:srgbClr val="FFFFFF"/>
+          </a:solidFill>
+          <a:ln w="9525">
+            <a:solidFill>
+              <a:srgbClr val="E5E5E5"/>
+            </a:solidFill>
+            <a:prstDash val="solid"/>
+          </a:ln>
+        </p:spPr>
+      </p:sp>
+      <p:sp>
+        <p:nvSpPr>
+          <p:cNvPr id="36" name="Text 33"/>
+          <p:cNvSpPr txBox="1"/>
+          <p:nvPr/>
+        </p:nvSpPr>
+        <p:spPr>
+          <a:xfrm>
+            <a:off x="5852160" y="3721608"/>
+            <a:ext cx="822960" cy="457200"/>
+          </a:xfrm>
+          <a:prstGeom prst="rect">
+            <a:avLst/>
+          </a:prstGeom>
+          <a:noFill/>
+          <a:ln/>
+        </p:spPr>
+        <p:txBody>
+          <a:bodyPr wrap="square" lIns="635" tIns="635" rIns="635" bIns="635" rtlCol="0" anchor="ctr"/>
+          <a:lstStyle/>
+          <a:p>
+            <a:pPr algn="ctr" indent="0" marL="0">
+              <a:buNone/>
+            </a:pPr>
+            <a:r>
+              <a:rPr lang="en-US" sz="900" b="1" dirty="0">
+                <a:solidFill>
+                  <a:srgbClr val="0E7C7B"/>
+                </a:solidFill>
+                <a:latin typeface="Geist" pitchFamily="34" charset="0"/>
+                <a:ea typeface="Geist" pitchFamily="34" charset="-122"/>
+                <a:cs typeface="Geist" pitchFamily="34" charset="-120"/>
+              </a:rPr>
+              <a:t>ACME</a:t>
+            </a:r>
+            <a:endParaRPr lang="en-US" sz="900" dirty="0"/>
+          </a:p>
+        </p:txBody>
+      </p:sp>
+      <p:sp>
+        <p:nvSpPr>
+          <p:cNvPr id="37" name="Shape 34"/>
+          <p:cNvSpPr/>
+          <p:nvPr/>
+        </p:nvSpPr>
+        <p:spPr>
+          <a:xfrm>
+            <a:off x="6812280" y="3721608"/>
+            <a:ext cx="822960" cy="457200"/>
+          </a:xfrm>
+          <a:prstGeom prst="rect">
+            <a:avLst/>
+          </a:prstGeom>
+          <a:solidFill>
+            <a:srgbClr val="FFFFFF"/>
+          </a:solidFill>
+          <a:ln w="9525">
+            <a:solidFill>
+              <a:srgbClr val="E5E5E5"/>
+            </a:solidFill>
+            <a:prstDash val="solid"/>
+          </a:ln>
+        </p:spPr>
+      </p:sp>
+      <p:sp>
+        <p:nvSpPr>
+          <p:cNvPr id="38" name="Text 35"/>
+          <p:cNvSpPr txBox="1"/>
+          <p:nvPr/>
+        </p:nvSpPr>
+        <p:spPr>
+          <a:xfrm>
+            <a:off x="6812280" y="3721608"/>
+            <a:ext cx="822960" cy="457200"/>
+          </a:xfrm>
+          <a:prstGeom prst="rect">
+            <a:avLst/>
+          </a:prstGeom>
+          <a:noFill/>
+          <a:ln/>
+        </p:spPr>
+        <p:txBody>
+          <a:bodyPr wrap="square" lIns="635" tIns="635" rIns="635" bIns="635" rtlCol="0" anchor="ctr"/>
+          <a:lstStyle/>
+          <a:p>
+            <a:pPr algn="ctr" indent="0" marL="0">
+              <a:buNone/>
+            </a:pPr>
+            <a:r>
+              <a:rPr lang="en-US" sz="900" b="1" dirty="0">
+                <a:solidFill>
+                  <a:srgbClr val="0E7C7B"/>
+                </a:solidFill>
+                <a:latin typeface="Geist" pitchFamily="34" charset="0"/>
+                <a:ea typeface="Geist" pitchFamily="34" charset="-122"/>
+                <a:cs typeface="Geist" pitchFamily="34" charset="-120"/>
+              </a:rPr>
+              <a:t>NORTH</a:t>
+            </a:r>
+            <a:endParaRPr lang="en-US" sz="900" dirty="0"/>
+          </a:p>
+        </p:txBody>
+      </p:sp>
+      <p:sp>
+        <p:nvSpPr>
+          <p:cNvPr id="39" name="Shape 36"/>
+          <p:cNvSpPr/>
+          <p:nvPr/>
+        </p:nvSpPr>
+        <p:spPr>
+          <a:xfrm>
+            <a:off x="7772400" y="3721608"/>
+            <a:ext cx="822960" cy="457200"/>
+          </a:xfrm>
+          <a:prstGeom prst="rect">
+            <a:avLst/>
+          </a:prstGeom>
+          <a:solidFill>
+            <a:srgbClr val="FFFFFF"/>
+          </a:solidFill>
+          <a:ln w="9525">
+            <a:solidFill>
+              <a:srgbClr val="E5E5E5"/>
+            </a:solidFill>
+            <a:prstDash val="solid"/>
+          </a:ln>
+        </p:spPr>
+      </p:sp>
+      <p:sp>
+        <p:nvSpPr>
+          <p:cNvPr id="40" name="Text 37"/>
+          <p:cNvSpPr txBox="1"/>
+          <p:nvPr/>
+        </p:nvSpPr>
+        <p:spPr>
+          <a:xfrm>
+            <a:off x="7772400" y="3721608"/>
+            <a:ext cx="822960" cy="457200"/>
+          </a:xfrm>
+          <a:prstGeom prst="rect">
+            <a:avLst/>
+          </a:prstGeom>
+          <a:noFill/>
+          <a:ln/>
+        </p:spPr>
+        <p:txBody>
+          <a:bodyPr wrap="square" lIns="635" tIns="635" rIns="635" bIns="635" rtlCol="0" anchor="ctr"/>
+          <a:lstStyle/>
+          <a:p>
+            <a:pPr algn="ctr" indent="0" marL="0">
+              <a:buNone/>
+            </a:pPr>
+            <a:r>
+              <a:rPr lang="en-US" sz="900" b="1" dirty="0">
+                <a:solidFill>
+                  <a:srgbClr val="0E7C7B"/>
+                </a:solidFill>
+                <a:latin typeface="Geist" pitchFamily="34" charset="0"/>
+                <a:ea typeface="Geist" pitchFamily="34" charset="-122"/>
+                <a:cs typeface="Geist" pitchFamily="34" charset="-120"/>
+              </a:rPr>
+              <a:t>C3</a:t>
+            </a:r>
+            <a:endParaRPr lang="en-US" sz="900" dirty="0"/>
+          </a:p>
+        </p:txBody>
+      </p:sp>
+      <p:sp>
+        <p:nvSpPr>
+          <p:cNvPr id="41" name="Text 38"/>
+          <p:cNvSpPr txBox="1"/>
+          <p:nvPr/>
+        </p:nvSpPr>
+        <p:spPr>
+          <a:xfrm>
+            <a:off x="5852160" y="1691640"/>
+            <a:ext cx="2834640" cy="274320"/>
+          </a:xfrm>
+          <a:prstGeom prst="rect">
+            <a:avLst/>
+          </a:prstGeom>
+          <a:noFill/>
+          <a:ln/>
+        </p:spPr>
+        <p:txBody>
+          <a:bodyPr wrap="square" lIns="0" tIns="0" rIns="0" bIns="0" rtlCol="0" anchor="t"/>
+          <a:lstStyle/>
+          <a:p>
+            <a:pPr indent="0" marL="0">
+              <a:buNone/>
+            </a:pPr>
+            <a:r>
+              <a:rPr lang="en-US" sz="800" dirty="0">
+                <a:solidFill>
+                  <a:srgbClr val="0E7C7B"/>
                 </a:solidFill>
                 <a:latin typeface="IBM Plex Mono" pitchFamily="34" charset="0"/>
                 <a:ea typeface="IBM Plex Mono" pitchFamily="34" charset="-122"/>
                 <a:cs typeface="IBM Plex Mono" pitchFamily="34" charset="-120"/>
               </a:rPr>
-              <a:t>4</a:t>
-            </a:r>
-            <a:endParaRPr lang="en-US" sz="1100" dirty="0"/>
-          </a:p>
-        </p:txBody>
-      </p:sp>
-      <p:sp>
-        <p:nvSpPr>
-          <p:cNvPr id="27" name="Text 24"/>
-          <p:cNvSpPr txBox="1"/>
-          <p:nvPr/>
-        </p:nvSpPr>
-        <p:spPr>
-          <a:xfrm>
-            <a:off x="5349240" y="3182112"/>
-            <a:ext cx="3200400" cy="365760"/>
+              <a:t>COMPANIES — ISOLATED AT EVERY LAYER</a:t>
+            </a:r>
+            <a:endParaRPr lang="en-US" sz="800" dirty="0"/>
+          </a:p>
+        </p:txBody>
+      </p:sp>
+      <p:sp>
+        <p:nvSpPr>
+          <p:cNvPr id="42" name="Text 39"/>
+          <p:cNvSpPr txBox="1"/>
+          <p:nvPr/>
+        </p:nvSpPr>
+        <p:spPr>
+          <a:xfrm>
+            <a:off x="457200" y="4343400"/>
+            <a:ext cx="8229600" cy="274320"/>
           </a:xfrm>
           <a:prstGeom prst="rect">
             <a:avLst/>
@@ -5540,84 +5911,6 @@
               <a:buNone/>
             </a:pPr>
             <a:r>
-              <a:rPr lang="en-US" sz="1400" b="1" spc="-50" kern="0" dirty="0">
-                <a:solidFill>
-                  <a:srgbClr val="1C1C1C"/>
-                </a:solidFill>
-                <a:latin typeface="Geist" pitchFamily="34" charset="0"/>
-                <a:ea typeface="Geist" pitchFamily="34" charset="-122"/>
-                <a:cs typeface="Geist" pitchFamily="34" charset="-120"/>
-              </a:rPr>
-              <a:t>Evals before release</a:t>
-            </a:r>
-            <a:endParaRPr lang="en-US" sz="1400" dirty="0"/>
-          </a:p>
-        </p:txBody>
-      </p:sp>
-      <p:sp>
-        <p:nvSpPr>
-          <p:cNvPr id="28" name="Text 25"/>
-          <p:cNvSpPr txBox="1"/>
-          <p:nvPr/>
-        </p:nvSpPr>
-        <p:spPr>
-          <a:xfrm>
-            <a:off x="5349240" y="3547872"/>
-            <a:ext cx="3200400" cy="502920"/>
-          </a:xfrm>
-          <a:prstGeom prst="rect">
-            <a:avLst/>
-          </a:prstGeom>
-          <a:noFill/>
-          <a:ln/>
-        </p:spPr>
-        <p:txBody>
-          <a:bodyPr wrap="square" lIns="0" tIns="0" rIns="0" bIns="0" rtlCol="0" anchor="t"/>
-          <a:lstStyle/>
-          <a:p>
-            <a:pPr indent="0" marL="0">
-              <a:buNone/>
-            </a:pPr>
-            <a:r>
-              <a:rPr lang="en-US" sz="1050" dirty="0">
-                <a:solidFill>
-                  <a:srgbClr val="6B7280"/>
-                </a:solidFill>
-                <a:latin typeface="Geist" pitchFamily="34" charset="0"/>
-                <a:ea typeface="Geist" pitchFamily="34" charset="-122"/>
-                <a:cs typeface="Geist" pitchFamily="34" charset="-120"/>
-              </a:rPr>
-              <a:t>a test set of real tasks, scored, run on every change — like any other software</a:t>
-            </a:r>
-            <a:endParaRPr lang="en-US" sz="1050" dirty="0"/>
-          </a:p>
-        </p:txBody>
-      </p:sp>
-      <p:sp>
-        <p:nvSpPr>
-          <p:cNvPr id="29" name="Text 26"/>
-          <p:cNvSpPr txBox="1"/>
-          <p:nvPr/>
-        </p:nvSpPr>
-        <p:spPr>
-          <a:xfrm>
-            <a:off x="457200" y="4297680"/>
-            <a:ext cx="8229600" cy="274320"/>
-          </a:xfrm>
-          <a:prstGeom prst="rect">
-            <a:avLst/>
-          </a:prstGeom>
-          <a:noFill/>
-          <a:ln/>
-        </p:spPr>
-        <p:txBody>
-          <a:bodyPr wrap="square" lIns="0" tIns="0" rIns="0" bIns="0" rtlCol="0" anchor="t"/>
-          <a:lstStyle/>
-          <a:p>
-            <a:pPr indent="0" marL="0">
-              <a:buNone/>
-            </a:pPr>
-            <a:r>
               <a:rPr lang="en-US" sz="1000" dirty="0">
                 <a:solidFill>
                   <a:srgbClr val="919191"/>
@@ -5626,7 +5919,7 @@
                 <a:ea typeface="Geist" pitchFamily="34" charset="-122"/>
                 <a:cs typeface="Geist" pitchFamily="34" charset="-120"/>
               </a:rPr>
-              <a:t>Episodes 9, 10, 18 and 25 cover each of these in depth.</a:t>
+              <a:t>Get one lane wrong and you've built a data leak with a chat window.</a:t>
             </a:r>
             <a:endParaRPr lang="en-US" sz="1000" dirty="0"/>
           </a:p>
@@ -5679,6 +5972,975 @@
         </p:nvSpPr>
         <p:spPr>
           <a:xfrm>
+            <a:off x="457200" y="274320"/>
+            <a:ext cx="8229600" cy="248920"/>
+          </a:xfrm>
+          <a:prstGeom prst="rect">
+            <a:avLst/>
+          </a:prstGeom>
+          <a:noFill/>
+          <a:ln/>
+        </p:spPr>
+        <p:txBody>
+          <a:bodyPr wrap="square" lIns="0" tIns="0" rIns="0" bIns="0" rtlCol="0" anchor="ctr"/>
+          <a:lstStyle/>
+          <a:p>
+            <a:pPr indent="0" marL="0">
+              <a:buNone/>
+            </a:pPr>
+            <a:r>
+              <a:rPr lang="en-US" sz="1400" b="1" spc="100" kern="0" dirty="0">
+                <a:solidFill>
+                  <a:srgbClr val="1C1C1C"/>
+                </a:solidFill>
+                <a:latin typeface="Geist" pitchFamily="34" charset="0"/>
+                <a:ea typeface="Geist" pitchFamily="34" charset="-122"/>
+                <a:cs typeface="Geist" pitchFamily="34" charset="-120"/>
+              </a:rPr>
+              <a:t>learn  with  </a:t>
+            </a:r>
+            <a:pPr indent="0" marL="0">
+              <a:buNone/>
+            </a:pPr>
+            <a:r>
+              <a:rPr lang="en-US" sz="1400" b="1" spc="100" kern="0" dirty="0">
+                <a:solidFill>
+                  <a:srgbClr val="FF5700"/>
+                </a:solidFill>
+                <a:latin typeface="Geist" pitchFamily="34" charset="0"/>
+                <a:ea typeface="Geist" pitchFamily="34" charset="-122"/>
+                <a:cs typeface="Geist" pitchFamily="34" charset="-120"/>
+              </a:rPr>
+              <a:t>harsha</a:t>
+            </a:r>
+            <a:pPr indent="0" marL="0">
+              <a:buNone/>
+            </a:pPr>
+            <a:r>
+              <a:rPr lang="en-US" sz="600" b="1" spc="100" kern="0" dirty="0">
+                <a:solidFill>
+                  <a:srgbClr val="FF5700"/>
+                </a:solidFill>
+                <a:latin typeface="Geist" pitchFamily="34" charset="0"/>
+                <a:ea typeface="Geist" pitchFamily="34" charset="-122"/>
+                <a:cs typeface="Geist" pitchFamily="34" charset="-120"/>
+              </a:rPr>
+              <a:t>  ■</a:t>
+            </a:r>
+            <a:endParaRPr lang="en-US" sz="1400" dirty="0"/>
+          </a:p>
+        </p:txBody>
+      </p:sp>
+      <p:sp>
+        <p:nvSpPr>
+          <p:cNvPr id="4" name="Shape 1"/>
+          <p:cNvSpPr/>
+          <p:nvPr/>
+        </p:nvSpPr>
+        <p:spPr>
+          <a:xfrm>
+            <a:off x="457200" y="905256"/>
+            <a:ext cx="91440" cy="91440"/>
+          </a:xfrm>
+          <a:prstGeom prst="rect">
+            <a:avLst/>
+          </a:prstGeom>
+          <a:solidFill>
+            <a:srgbClr val="FF5700"/>
+          </a:solidFill>
+          <a:ln/>
+        </p:spPr>
+      </p:sp>
+      <p:sp>
+        <p:nvSpPr>
+          <p:cNvPr id="5" name="Text 2"/>
+          <p:cNvSpPr txBox="1"/>
+          <p:nvPr/>
+        </p:nvSpPr>
+        <p:spPr>
+          <a:xfrm>
+            <a:off x="621792" y="804672"/>
+            <a:ext cx="6400800" cy="292608"/>
+          </a:xfrm>
+          <a:prstGeom prst="rect">
+            <a:avLst/>
+          </a:prstGeom>
+          <a:noFill/>
+          <a:ln/>
+        </p:spPr>
+        <p:txBody>
+          <a:bodyPr wrap="square" lIns="0" tIns="0" rIns="0" bIns="0" rtlCol="0" anchor="ctr"/>
+          <a:lstStyle/>
+          <a:p>
+            <a:pPr indent="0" marL="0">
+              <a:buNone/>
+            </a:pPr>
+            <a:r>
+              <a:rPr lang="en-US" sz="1000" spc="400" kern="0" dirty="0">
+                <a:solidFill>
+                  <a:srgbClr val="FF5700"/>
+                </a:solidFill>
+                <a:latin typeface="IBM Plex Mono" pitchFamily="34" charset="0"/>
+                <a:ea typeface="IBM Plex Mono" pitchFamily="34" charset="-122"/>
+                <a:cs typeface="IBM Plex Mono" pitchFamily="34" charset="-120"/>
+              </a:rPr>
+              <a:t>WHAT BREAKS IN THE ENTERPRISE · 3 OF 3</a:t>
+            </a:r>
+            <a:endParaRPr lang="en-US" sz="1000" dirty="0"/>
+          </a:p>
+        </p:txBody>
+      </p:sp>
+      <p:sp>
+        <p:nvSpPr>
+          <p:cNvPr id="6" name="Text 3"/>
+          <p:cNvSpPr txBox="1"/>
+          <p:nvPr/>
+        </p:nvSpPr>
+        <p:spPr>
+          <a:xfrm>
+            <a:off x="457200" y="1078992"/>
+            <a:ext cx="8229600" cy="640080"/>
+          </a:xfrm>
+          <a:prstGeom prst="rect">
+            <a:avLst/>
+          </a:prstGeom>
+          <a:noFill/>
+          <a:ln/>
+        </p:spPr>
+        <p:txBody>
+          <a:bodyPr wrap="square" lIns="0" tIns="0" rIns="0" bIns="0" rtlCol="0" anchor="ctr"/>
+          <a:lstStyle/>
+          <a:p>
+            <a:pPr indent="0" marL="0">
+              <a:buNone/>
+            </a:pPr>
+            <a:r>
+              <a:rPr lang="en-US" sz="2300" b="1" spc="-100" kern="0" dirty="0">
+                <a:solidFill>
+                  <a:srgbClr val="1C1C1C"/>
+                </a:solidFill>
+                <a:latin typeface="Geist" pitchFamily="34" charset="0"/>
+                <a:ea typeface="Geist" pitchFamily="34" charset="-122"/>
+                <a:cs typeface="Geist" pitchFamily="34" charset="-120"/>
+              </a:rPr>
+              <a:t>Accountability: who answers for step 7 of 12?</a:t>
+            </a:r>
+            <a:endParaRPr lang="en-US" sz="2300" dirty="0"/>
+          </a:p>
+        </p:txBody>
+      </p:sp>
+      <p:sp>
+        <p:nvSpPr>
+          <p:cNvPr id="7" name="Text 4"/>
+          <p:cNvSpPr txBox="1"/>
+          <p:nvPr/>
+        </p:nvSpPr>
+        <p:spPr>
+          <a:xfrm>
+            <a:off x="457200" y="4754880"/>
+            <a:ext cx="5943600" cy="228600"/>
+          </a:xfrm>
+          <a:prstGeom prst="rect">
+            <a:avLst/>
+          </a:prstGeom>
+          <a:noFill/>
+          <a:ln/>
+        </p:spPr>
+        <p:txBody>
+          <a:bodyPr wrap="square" lIns="0" tIns="0" rIns="0" bIns="0" rtlCol="0" anchor="ctr"/>
+          <a:lstStyle/>
+          <a:p>
+            <a:pPr indent="0" marL="0">
+              <a:buNone/>
+            </a:pPr>
+            <a:r>
+              <a:rPr lang="en-US" sz="800" spc="100" kern="0" dirty="0">
+                <a:solidFill>
+                  <a:srgbClr val="919191"/>
+                </a:solidFill>
+                <a:latin typeface="IBM Plex Mono" pitchFamily="34" charset="0"/>
+                <a:ea typeface="IBM Plex Mono" pitchFamily="34" charset="-122"/>
+                <a:cs typeface="IBM Plex Mono" pitchFamily="34" charset="-120"/>
+              </a:rPr>
+              <a:t>Arthashastra Learning · The Agentic Enterprise</a:t>
+            </a:r>
+            <a:endParaRPr lang="en-US" sz="800" dirty="0"/>
+          </a:p>
+        </p:txBody>
+      </p:sp>
+      <p:sp>
+        <p:nvSpPr>
+          <p:cNvPr id="8" name="Text 5"/>
+          <p:cNvSpPr txBox="1"/>
+          <p:nvPr/>
+        </p:nvSpPr>
+        <p:spPr>
+          <a:xfrm>
+            <a:off x="6858000" y="4754880"/>
+            <a:ext cx="1828800" cy="228600"/>
+          </a:xfrm>
+          <a:prstGeom prst="rect">
+            <a:avLst/>
+          </a:prstGeom>
+          <a:noFill/>
+          <a:ln/>
+        </p:spPr>
+        <p:txBody>
+          <a:bodyPr wrap="square" lIns="0" tIns="0" rIns="0" bIns="0" rtlCol="0" anchor="ctr"/>
+          <a:lstStyle/>
+          <a:p>
+            <a:pPr algn="r" indent="0" marL="0">
+              <a:buNone/>
+            </a:pPr>
+            <a:r>
+              <a:rPr lang="en-US" sz="800" spc="100" kern="0" dirty="0">
+                <a:solidFill>
+                  <a:srgbClr val="919191"/>
+                </a:solidFill>
+                <a:latin typeface="IBM Plex Mono" pitchFamily="34" charset="0"/>
+                <a:ea typeface="IBM Plex Mono" pitchFamily="34" charset="-122"/>
+                <a:cs typeface="IBM Plex Mono" pitchFamily="34" charset="-120"/>
+              </a:rPr>
+              <a:t>arthashastra.ai</a:t>
+            </a:r>
+            <a:endParaRPr lang="en-US" sz="800" dirty="0"/>
+          </a:p>
+        </p:txBody>
+      </p:sp>
+      <p:sp>
+        <p:nvSpPr>
+          <p:cNvPr id="9" name="Shape 6"/>
+          <p:cNvSpPr/>
+          <p:nvPr/>
+        </p:nvSpPr>
+        <p:spPr>
+          <a:xfrm>
+            <a:off x="457200" y="1783080"/>
+            <a:ext cx="4023360" cy="1097280"/>
+          </a:xfrm>
+          <a:prstGeom prst="rect">
+            <a:avLst/>
+          </a:prstGeom>
+          <a:solidFill>
+            <a:srgbClr val="FFFFFF"/>
+          </a:solidFill>
+          <a:ln w="9525">
+            <a:solidFill>
+              <a:srgbClr val="E5E5E5"/>
+            </a:solidFill>
+            <a:prstDash val="solid"/>
+          </a:ln>
+        </p:spPr>
+      </p:sp>
+      <p:sp>
+        <p:nvSpPr>
+          <p:cNvPr id="10" name="Shape 7"/>
+          <p:cNvSpPr/>
+          <p:nvPr/>
+        </p:nvSpPr>
+        <p:spPr>
+          <a:xfrm>
+            <a:off x="685800" y="1984248"/>
+            <a:ext cx="310896" cy="310896"/>
+          </a:xfrm>
+          <a:prstGeom prst="rect">
+            <a:avLst/>
+          </a:prstGeom>
+          <a:solidFill>
+            <a:srgbClr val="FF5700"/>
+          </a:solidFill>
+          <a:ln/>
+        </p:spPr>
+      </p:sp>
+      <p:sp>
+        <p:nvSpPr>
+          <p:cNvPr id="11" name="Text 8"/>
+          <p:cNvSpPr txBox="1"/>
+          <p:nvPr/>
+        </p:nvSpPr>
+        <p:spPr>
+          <a:xfrm>
+            <a:off x="685800" y="1984248"/>
+            <a:ext cx="310896" cy="310896"/>
+          </a:xfrm>
+          <a:prstGeom prst="rect">
+            <a:avLst/>
+          </a:prstGeom>
+          <a:noFill/>
+          <a:ln/>
+        </p:spPr>
+        <p:txBody>
+          <a:bodyPr wrap="square" lIns="0" tIns="0" rIns="0" bIns="0" rtlCol="0" anchor="ctr"/>
+          <a:lstStyle/>
+          <a:p>
+            <a:pPr algn="ctr" indent="0" marL="0">
+              <a:buNone/>
+            </a:pPr>
+            <a:r>
+              <a:rPr lang="en-US" sz="1100" b="1" dirty="0">
+                <a:solidFill>
+                  <a:srgbClr val="FFFFFF"/>
+                </a:solidFill>
+                <a:latin typeface="IBM Plex Mono" pitchFamily="34" charset="0"/>
+                <a:ea typeface="IBM Plex Mono" pitchFamily="34" charset="-122"/>
+                <a:cs typeface="IBM Plex Mono" pitchFamily="34" charset="-120"/>
+              </a:rPr>
+              <a:t>1</a:t>
+            </a:r>
+            <a:endParaRPr lang="en-US" sz="1100" dirty="0"/>
+          </a:p>
+        </p:txBody>
+      </p:sp>
+      <p:sp>
+        <p:nvSpPr>
+          <p:cNvPr id="12" name="Text 9"/>
+          <p:cNvSpPr txBox="1"/>
+          <p:nvPr/>
+        </p:nvSpPr>
+        <p:spPr>
+          <a:xfrm>
+            <a:off x="1143000" y="1947672"/>
+            <a:ext cx="3200400" cy="365760"/>
+          </a:xfrm>
+          <a:prstGeom prst="rect">
+            <a:avLst/>
+          </a:prstGeom>
+          <a:noFill/>
+          <a:ln/>
+        </p:spPr>
+        <p:txBody>
+          <a:bodyPr wrap="square" lIns="0" tIns="0" rIns="0" bIns="0" rtlCol="0" anchor="t"/>
+          <a:lstStyle/>
+          <a:p>
+            <a:pPr indent="0" marL="0">
+              <a:buNone/>
+            </a:pPr>
+            <a:r>
+              <a:rPr lang="en-US" sz="1400" b="1" spc="-50" kern="0" dirty="0">
+                <a:solidFill>
+                  <a:srgbClr val="1C1C1C"/>
+                </a:solidFill>
+                <a:latin typeface="Geist" pitchFamily="34" charset="0"/>
+                <a:ea typeface="Geist" pitchFamily="34" charset="-122"/>
+                <a:cs typeface="Geist" pitchFamily="34" charset="-120"/>
+              </a:rPr>
+              <a:t>Trace every step</a:t>
+            </a:r>
+            <a:endParaRPr lang="en-US" sz="1400" dirty="0"/>
+          </a:p>
+        </p:txBody>
+      </p:sp>
+      <p:sp>
+        <p:nvSpPr>
+          <p:cNvPr id="13" name="Text 10"/>
+          <p:cNvSpPr txBox="1"/>
+          <p:nvPr/>
+        </p:nvSpPr>
+        <p:spPr>
+          <a:xfrm>
+            <a:off x="1143000" y="2313432"/>
+            <a:ext cx="3200400" cy="502920"/>
+          </a:xfrm>
+          <a:prstGeom prst="rect">
+            <a:avLst/>
+          </a:prstGeom>
+          <a:noFill/>
+          <a:ln/>
+        </p:spPr>
+        <p:txBody>
+          <a:bodyPr wrap="square" lIns="0" tIns="0" rIns="0" bIns="0" rtlCol="0" anchor="t"/>
+          <a:lstStyle/>
+          <a:p>
+            <a:pPr indent="0" marL="0">
+              <a:buNone/>
+            </a:pPr>
+            <a:r>
+              <a:rPr lang="en-US" sz="1050" dirty="0">
+                <a:solidFill>
+                  <a:srgbClr val="6B7280"/>
+                </a:solidFill>
+                <a:latin typeface="Geist" pitchFamily="34" charset="0"/>
+                <a:ea typeface="Geist" pitchFamily="34" charset="-122"/>
+                <a:cs typeface="Geist" pitchFamily="34" charset="-120"/>
+              </a:rPr>
+              <a:t>every model call, tool call and result, tied to a user and a company</a:t>
+            </a:r>
+            <a:endParaRPr lang="en-US" sz="1050" dirty="0"/>
+          </a:p>
+        </p:txBody>
+      </p:sp>
+      <p:sp>
+        <p:nvSpPr>
+          <p:cNvPr id="14" name="Shape 11"/>
+          <p:cNvSpPr/>
+          <p:nvPr/>
+        </p:nvSpPr>
+        <p:spPr>
+          <a:xfrm>
+            <a:off x="4663440" y="1783080"/>
+            <a:ext cx="4023360" cy="1097280"/>
+          </a:xfrm>
+          <a:prstGeom prst="rect">
+            <a:avLst/>
+          </a:prstGeom>
+          <a:solidFill>
+            <a:srgbClr val="FFFFFF"/>
+          </a:solidFill>
+          <a:ln w="9525">
+            <a:solidFill>
+              <a:srgbClr val="E5E5E5"/>
+            </a:solidFill>
+            <a:prstDash val="solid"/>
+          </a:ln>
+        </p:spPr>
+      </p:sp>
+      <p:sp>
+        <p:nvSpPr>
+          <p:cNvPr id="15" name="Shape 12"/>
+          <p:cNvSpPr/>
+          <p:nvPr/>
+        </p:nvSpPr>
+        <p:spPr>
+          <a:xfrm>
+            <a:off x="4892040" y="1984248"/>
+            <a:ext cx="310896" cy="310896"/>
+          </a:xfrm>
+          <a:prstGeom prst="rect">
+            <a:avLst/>
+          </a:prstGeom>
+          <a:solidFill>
+            <a:srgbClr val="FF5700"/>
+          </a:solidFill>
+          <a:ln/>
+        </p:spPr>
+      </p:sp>
+      <p:sp>
+        <p:nvSpPr>
+          <p:cNvPr id="16" name="Text 13"/>
+          <p:cNvSpPr txBox="1"/>
+          <p:nvPr/>
+        </p:nvSpPr>
+        <p:spPr>
+          <a:xfrm>
+            <a:off x="4892040" y="1984248"/>
+            <a:ext cx="310896" cy="310896"/>
+          </a:xfrm>
+          <a:prstGeom prst="rect">
+            <a:avLst/>
+          </a:prstGeom>
+          <a:noFill/>
+          <a:ln/>
+        </p:spPr>
+        <p:txBody>
+          <a:bodyPr wrap="square" lIns="0" tIns="0" rIns="0" bIns="0" rtlCol="0" anchor="ctr"/>
+          <a:lstStyle/>
+          <a:p>
+            <a:pPr algn="ctr" indent="0" marL="0">
+              <a:buNone/>
+            </a:pPr>
+            <a:r>
+              <a:rPr lang="en-US" sz="1100" b="1" dirty="0">
+                <a:solidFill>
+                  <a:srgbClr val="FFFFFF"/>
+                </a:solidFill>
+                <a:latin typeface="IBM Plex Mono" pitchFamily="34" charset="0"/>
+                <a:ea typeface="IBM Plex Mono" pitchFamily="34" charset="-122"/>
+                <a:cs typeface="IBM Plex Mono" pitchFamily="34" charset="-120"/>
+              </a:rPr>
+              <a:t>2</a:t>
+            </a:r>
+            <a:endParaRPr lang="en-US" sz="1100" dirty="0"/>
+          </a:p>
+        </p:txBody>
+      </p:sp>
+      <p:sp>
+        <p:nvSpPr>
+          <p:cNvPr id="17" name="Text 14"/>
+          <p:cNvSpPr txBox="1"/>
+          <p:nvPr/>
+        </p:nvSpPr>
+        <p:spPr>
+          <a:xfrm>
+            <a:off x="5349240" y="1947672"/>
+            <a:ext cx="3200400" cy="365760"/>
+          </a:xfrm>
+          <a:prstGeom prst="rect">
+            <a:avLst/>
+          </a:prstGeom>
+          <a:noFill/>
+          <a:ln/>
+        </p:spPr>
+        <p:txBody>
+          <a:bodyPr wrap="square" lIns="0" tIns="0" rIns="0" bIns="0" rtlCol="0" anchor="t"/>
+          <a:lstStyle/>
+          <a:p>
+            <a:pPr indent="0" marL="0">
+              <a:buNone/>
+            </a:pPr>
+            <a:r>
+              <a:rPr lang="en-US" sz="1400" b="1" spc="-50" kern="0" dirty="0">
+                <a:solidFill>
+                  <a:srgbClr val="1C1C1C"/>
+                </a:solidFill>
+                <a:latin typeface="Geist" pitchFamily="34" charset="0"/>
+                <a:ea typeface="Geist" pitchFamily="34" charset="-122"/>
+                <a:cs typeface="Geist" pitchFamily="34" charset="-120"/>
+              </a:rPr>
+              <a:t>Human-in-the-loop</a:t>
+            </a:r>
+            <a:endParaRPr lang="en-US" sz="1400" dirty="0"/>
+          </a:p>
+        </p:txBody>
+      </p:sp>
+      <p:sp>
+        <p:nvSpPr>
+          <p:cNvPr id="18" name="Text 15"/>
+          <p:cNvSpPr txBox="1"/>
+          <p:nvPr/>
+        </p:nvSpPr>
+        <p:spPr>
+          <a:xfrm>
+            <a:off x="5349240" y="2313432"/>
+            <a:ext cx="3200400" cy="502920"/>
+          </a:xfrm>
+          <a:prstGeom prst="rect">
+            <a:avLst/>
+          </a:prstGeom>
+          <a:noFill/>
+          <a:ln/>
+        </p:spPr>
+        <p:txBody>
+          <a:bodyPr wrap="square" lIns="0" tIns="0" rIns="0" bIns="0" rtlCol="0" anchor="t"/>
+          <a:lstStyle/>
+          <a:p>
+            <a:pPr indent="0" marL="0">
+              <a:buNone/>
+            </a:pPr>
+            <a:r>
+              <a:rPr lang="en-US" sz="1050" dirty="0">
+                <a:solidFill>
+                  <a:srgbClr val="6B7280"/>
+                </a:solidFill>
+                <a:latin typeface="Geist" pitchFamily="34" charset="0"/>
+                <a:ea typeface="Geist" pitchFamily="34" charset="-122"/>
+                <a:cs typeface="Geist" pitchFamily="34" charset="-120"/>
+              </a:rPr>
+              <a:t>irreversible or high-value actions pause for a person — by design, not by prompt</a:t>
+            </a:r>
+            <a:endParaRPr lang="en-US" sz="1050" dirty="0"/>
+          </a:p>
+        </p:txBody>
+      </p:sp>
+      <p:sp>
+        <p:nvSpPr>
+          <p:cNvPr id="19" name="Shape 16"/>
+          <p:cNvSpPr/>
+          <p:nvPr/>
+        </p:nvSpPr>
+        <p:spPr>
+          <a:xfrm>
+            <a:off x="457200" y="3017520"/>
+            <a:ext cx="4023360" cy="1097280"/>
+          </a:xfrm>
+          <a:prstGeom prst="rect">
+            <a:avLst/>
+          </a:prstGeom>
+          <a:solidFill>
+            <a:srgbClr val="FFFFFF"/>
+          </a:solidFill>
+          <a:ln w="9525">
+            <a:solidFill>
+              <a:srgbClr val="E5E5E5"/>
+            </a:solidFill>
+            <a:prstDash val="solid"/>
+          </a:ln>
+        </p:spPr>
+      </p:sp>
+      <p:sp>
+        <p:nvSpPr>
+          <p:cNvPr id="20" name="Shape 17"/>
+          <p:cNvSpPr/>
+          <p:nvPr/>
+        </p:nvSpPr>
+        <p:spPr>
+          <a:xfrm>
+            <a:off x="685800" y="3218688"/>
+            <a:ext cx="310896" cy="310896"/>
+          </a:xfrm>
+          <a:prstGeom prst="rect">
+            <a:avLst/>
+          </a:prstGeom>
+          <a:solidFill>
+            <a:srgbClr val="FF5700"/>
+          </a:solidFill>
+          <a:ln/>
+        </p:spPr>
+      </p:sp>
+      <p:sp>
+        <p:nvSpPr>
+          <p:cNvPr id="21" name="Text 18"/>
+          <p:cNvSpPr txBox="1"/>
+          <p:nvPr/>
+        </p:nvSpPr>
+        <p:spPr>
+          <a:xfrm>
+            <a:off x="685800" y="3218688"/>
+            <a:ext cx="310896" cy="310896"/>
+          </a:xfrm>
+          <a:prstGeom prst="rect">
+            <a:avLst/>
+          </a:prstGeom>
+          <a:noFill/>
+          <a:ln/>
+        </p:spPr>
+        <p:txBody>
+          <a:bodyPr wrap="square" lIns="0" tIns="0" rIns="0" bIns="0" rtlCol="0" anchor="ctr"/>
+          <a:lstStyle/>
+          <a:p>
+            <a:pPr algn="ctr" indent="0" marL="0">
+              <a:buNone/>
+            </a:pPr>
+            <a:r>
+              <a:rPr lang="en-US" sz="1100" b="1" dirty="0">
+                <a:solidFill>
+                  <a:srgbClr val="FFFFFF"/>
+                </a:solidFill>
+                <a:latin typeface="IBM Plex Mono" pitchFamily="34" charset="0"/>
+                <a:ea typeface="IBM Plex Mono" pitchFamily="34" charset="-122"/>
+                <a:cs typeface="IBM Plex Mono" pitchFamily="34" charset="-120"/>
+              </a:rPr>
+              <a:t>3</a:t>
+            </a:r>
+            <a:endParaRPr lang="en-US" sz="1100" dirty="0"/>
+          </a:p>
+        </p:txBody>
+      </p:sp>
+      <p:sp>
+        <p:nvSpPr>
+          <p:cNvPr id="22" name="Text 19"/>
+          <p:cNvSpPr txBox="1"/>
+          <p:nvPr/>
+        </p:nvSpPr>
+        <p:spPr>
+          <a:xfrm>
+            <a:off x="1143000" y="3182112"/>
+            <a:ext cx="3200400" cy="365760"/>
+          </a:xfrm>
+          <a:prstGeom prst="rect">
+            <a:avLst/>
+          </a:prstGeom>
+          <a:noFill/>
+          <a:ln/>
+        </p:spPr>
+        <p:txBody>
+          <a:bodyPr wrap="square" lIns="0" tIns="0" rIns="0" bIns="0" rtlCol="0" anchor="t"/>
+          <a:lstStyle/>
+          <a:p>
+            <a:pPr indent="0" marL="0">
+              <a:buNone/>
+            </a:pPr>
+            <a:r>
+              <a:rPr lang="en-US" sz="1400" b="1" spc="-50" kern="0" dirty="0">
+                <a:solidFill>
+                  <a:srgbClr val="1C1C1C"/>
+                </a:solidFill>
+                <a:latin typeface="Geist" pitchFamily="34" charset="0"/>
+                <a:ea typeface="Geist" pitchFamily="34" charset="-122"/>
+                <a:cs typeface="Geist" pitchFamily="34" charset="-120"/>
+              </a:rPr>
+              <a:t>Caps on steps, cost, time</a:t>
+            </a:r>
+            <a:endParaRPr lang="en-US" sz="1400" dirty="0"/>
+          </a:p>
+        </p:txBody>
+      </p:sp>
+      <p:sp>
+        <p:nvSpPr>
+          <p:cNvPr id="23" name="Text 20"/>
+          <p:cNvSpPr txBox="1"/>
+          <p:nvPr/>
+        </p:nvSpPr>
+        <p:spPr>
+          <a:xfrm>
+            <a:off x="1143000" y="3547872"/>
+            <a:ext cx="3200400" cy="502920"/>
+          </a:xfrm>
+          <a:prstGeom prst="rect">
+            <a:avLst/>
+          </a:prstGeom>
+          <a:noFill/>
+          <a:ln/>
+        </p:spPr>
+        <p:txBody>
+          <a:bodyPr wrap="square" lIns="0" tIns="0" rIns="0" bIns="0" rtlCol="0" anchor="t"/>
+          <a:lstStyle/>
+          <a:p>
+            <a:pPr indent="0" marL="0">
+              <a:buNone/>
+            </a:pPr>
+            <a:r>
+              <a:rPr lang="en-US" sz="1050" dirty="0">
+                <a:solidFill>
+                  <a:srgbClr val="6B7280"/>
+                </a:solidFill>
+                <a:latin typeface="Geist" pitchFamily="34" charset="0"/>
+                <a:ea typeface="Geist" pitchFamily="34" charset="-122"/>
+                <a:cs typeface="Geist" pitchFamily="34" charset="-120"/>
+              </a:rPr>
+              <a:t>a runaway loop is a budget incident; the cap is the circuit breaker</a:t>
+            </a:r>
+            <a:endParaRPr lang="en-US" sz="1050" dirty="0"/>
+          </a:p>
+        </p:txBody>
+      </p:sp>
+      <p:sp>
+        <p:nvSpPr>
+          <p:cNvPr id="24" name="Shape 21"/>
+          <p:cNvSpPr/>
+          <p:nvPr/>
+        </p:nvSpPr>
+        <p:spPr>
+          <a:xfrm>
+            <a:off x="4663440" y="3017520"/>
+            <a:ext cx="4023360" cy="1097280"/>
+          </a:xfrm>
+          <a:prstGeom prst="rect">
+            <a:avLst/>
+          </a:prstGeom>
+          <a:solidFill>
+            <a:srgbClr val="FFFFFF"/>
+          </a:solidFill>
+          <a:ln w="9525">
+            <a:solidFill>
+              <a:srgbClr val="E5E5E5"/>
+            </a:solidFill>
+            <a:prstDash val="solid"/>
+          </a:ln>
+        </p:spPr>
+      </p:sp>
+      <p:sp>
+        <p:nvSpPr>
+          <p:cNvPr id="25" name="Shape 22"/>
+          <p:cNvSpPr/>
+          <p:nvPr/>
+        </p:nvSpPr>
+        <p:spPr>
+          <a:xfrm>
+            <a:off x="4892040" y="3218688"/>
+            <a:ext cx="310896" cy="310896"/>
+          </a:xfrm>
+          <a:prstGeom prst="rect">
+            <a:avLst/>
+          </a:prstGeom>
+          <a:solidFill>
+            <a:srgbClr val="FF5700"/>
+          </a:solidFill>
+          <a:ln/>
+        </p:spPr>
+      </p:sp>
+      <p:sp>
+        <p:nvSpPr>
+          <p:cNvPr id="26" name="Text 23"/>
+          <p:cNvSpPr txBox="1"/>
+          <p:nvPr/>
+        </p:nvSpPr>
+        <p:spPr>
+          <a:xfrm>
+            <a:off x="4892040" y="3218688"/>
+            <a:ext cx="310896" cy="310896"/>
+          </a:xfrm>
+          <a:prstGeom prst="rect">
+            <a:avLst/>
+          </a:prstGeom>
+          <a:noFill/>
+          <a:ln/>
+        </p:spPr>
+        <p:txBody>
+          <a:bodyPr wrap="square" lIns="0" tIns="0" rIns="0" bIns="0" rtlCol="0" anchor="ctr"/>
+          <a:lstStyle/>
+          <a:p>
+            <a:pPr algn="ctr" indent="0" marL="0">
+              <a:buNone/>
+            </a:pPr>
+            <a:r>
+              <a:rPr lang="en-US" sz="1100" b="1" dirty="0">
+                <a:solidFill>
+                  <a:srgbClr val="FFFFFF"/>
+                </a:solidFill>
+                <a:latin typeface="IBM Plex Mono" pitchFamily="34" charset="0"/>
+                <a:ea typeface="IBM Plex Mono" pitchFamily="34" charset="-122"/>
+                <a:cs typeface="IBM Plex Mono" pitchFamily="34" charset="-120"/>
+              </a:rPr>
+              <a:t>4</a:t>
+            </a:r>
+            <a:endParaRPr lang="en-US" sz="1100" dirty="0"/>
+          </a:p>
+        </p:txBody>
+      </p:sp>
+      <p:sp>
+        <p:nvSpPr>
+          <p:cNvPr id="27" name="Text 24"/>
+          <p:cNvSpPr txBox="1"/>
+          <p:nvPr/>
+        </p:nvSpPr>
+        <p:spPr>
+          <a:xfrm>
+            <a:off x="5349240" y="3182112"/>
+            <a:ext cx="3200400" cy="365760"/>
+          </a:xfrm>
+          <a:prstGeom prst="rect">
+            <a:avLst/>
+          </a:prstGeom>
+          <a:noFill/>
+          <a:ln/>
+        </p:spPr>
+        <p:txBody>
+          <a:bodyPr wrap="square" lIns="0" tIns="0" rIns="0" bIns="0" rtlCol="0" anchor="t"/>
+          <a:lstStyle/>
+          <a:p>
+            <a:pPr indent="0" marL="0">
+              <a:buNone/>
+            </a:pPr>
+            <a:r>
+              <a:rPr lang="en-US" sz="1400" b="1" spc="-50" kern="0" dirty="0">
+                <a:solidFill>
+                  <a:srgbClr val="1C1C1C"/>
+                </a:solidFill>
+                <a:latin typeface="Geist" pitchFamily="34" charset="0"/>
+                <a:ea typeface="Geist" pitchFamily="34" charset="-122"/>
+                <a:cs typeface="Geist" pitchFamily="34" charset="-120"/>
+              </a:rPr>
+              <a:t>Evals before release</a:t>
+            </a:r>
+            <a:endParaRPr lang="en-US" sz="1400" dirty="0"/>
+          </a:p>
+        </p:txBody>
+      </p:sp>
+      <p:sp>
+        <p:nvSpPr>
+          <p:cNvPr id="28" name="Text 25"/>
+          <p:cNvSpPr txBox="1"/>
+          <p:nvPr/>
+        </p:nvSpPr>
+        <p:spPr>
+          <a:xfrm>
+            <a:off x="5349240" y="3547872"/>
+            <a:ext cx="3200400" cy="502920"/>
+          </a:xfrm>
+          <a:prstGeom prst="rect">
+            <a:avLst/>
+          </a:prstGeom>
+          <a:noFill/>
+          <a:ln/>
+        </p:spPr>
+        <p:txBody>
+          <a:bodyPr wrap="square" lIns="0" tIns="0" rIns="0" bIns="0" rtlCol="0" anchor="t"/>
+          <a:lstStyle/>
+          <a:p>
+            <a:pPr indent="0" marL="0">
+              <a:buNone/>
+            </a:pPr>
+            <a:r>
+              <a:rPr lang="en-US" sz="1050" dirty="0">
+                <a:solidFill>
+                  <a:srgbClr val="6B7280"/>
+                </a:solidFill>
+                <a:latin typeface="Geist" pitchFamily="34" charset="0"/>
+                <a:ea typeface="Geist" pitchFamily="34" charset="-122"/>
+                <a:cs typeface="Geist" pitchFamily="34" charset="-120"/>
+              </a:rPr>
+              <a:t>a test set of real tasks, scored, run on every change — like any other software</a:t>
+            </a:r>
+            <a:endParaRPr lang="en-US" sz="1050" dirty="0"/>
+          </a:p>
+        </p:txBody>
+      </p:sp>
+      <p:sp>
+        <p:nvSpPr>
+          <p:cNvPr id="29" name="Text 26"/>
+          <p:cNvSpPr txBox="1"/>
+          <p:nvPr/>
+        </p:nvSpPr>
+        <p:spPr>
+          <a:xfrm>
+            <a:off x="457200" y="4297680"/>
+            <a:ext cx="8229600" cy="274320"/>
+          </a:xfrm>
+          <a:prstGeom prst="rect">
+            <a:avLst/>
+          </a:prstGeom>
+          <a:noFill/>
+          <a:ln/>
+        </p:spPr>
+        <p:txBody>
+          <a:bodyPr wrap="square" lIns="0" tIns="0" rIns="0" bIns="0" rtlCol="0" anchor="t"/>
+          <a:lstStyle/>
+          <a:p>
+            <a:pPr indent="0" marL="0">
+              <a:buNone/>
+            </a:pPr>
+            <a:r>
+              <a:rPr lang="en-US" sz="1000" dirty="0">
+                <a:solidFill>
+                  <a:srgbClr val="919191"/>
+                </a:solidFill>
+                <a:latin typeface="Geist" pitchFamily="34" charset="0"/>
+                <a:ea typeface="Geist" pitchFamily="34" charset="-122"/>
+                <a:cs typeface="Geist" pitchFamily="34" charset="-120"/>
+              </a:rPr>
+              <a:t>Episodes 9, 10, 18 and 25 cover each of these in depth.</a:t>
+            </a:r>
+            <a:endParaRPr lang="en-US" sz="1000" dirty="0"/>
+          </a:p>
+        </p:txBody>
+      </p:sp>
+    </p:spTree>
+  </p:cSld>
+  <p:clrMapOvr>
+    <a:masterClrMapping/>
+  </p:clrMapOvr>
+</p:sld>
+</file>
+
+<file path=ppt/slides/slide14.xml><?xml version="1.0" encoding="utf-8"?>
+<p:sld xmlns:a="http://schemas.openxmlformats.org/drawingml/2006/main" xmlns:r="http://schemas.openxmlformats.org/officeDocument/2006/relationships" xmlns:p="http://schemas.openxmlformats.org/presentationml/2006/main">
+  <p:cSld name="Slide 14">
+    <p:bg>
+      <p:bgPr>
+        <a:blipFill dpi="0" rotWithShape="1">
+          <a:blip r:embed="rId1">
+            <a:lum/>
+          </a:blip>
+          <a:srcRect/>
+          <a:stretch>
+            <a:fillRect/>
+          </a:stretch>
+        </a:blipFill>
+        <a:effectLst/>
+      </p:bgPr>
+    </p:bg>
+    <p:spTree>
+      <p:nvGrpSpPr>
+        <p:cNvPr id="1" name=""/>
+        <p:cNvGrpSpPr/>
+        <p:nvPr/>
+      </p:nvGrpSpPr>
+      <p:grpSpPr>
+        <a:xfrm>
+          <a:off x="0" y="0"/>
+          <a:ext cx="0" cy="0"/>
+          <a:chOff x="0" y="0"/>
+          <a:chExt cx="0" cy="0"/>
+        </a:xfrm>
+      </p:grpSpPr>
+      <p:sp>
+        <p:nvSpPr>
+          <p:cNvPr id="3" name="Text 0"/>
+          <p:cNvSpPr txBox="1"/>
+          <p:nvPr/>
+        </p:nvSpPr>
+        <p:spPr>
+          <a:xfrm>
             <a:off x="548640" y="384048"/>
             <a:ext cx="8229600" cy="320040"/>
           </a:xfrm>
@@ -13141,7 +14403,7 @@
                 <a:ea typeface="IBM Plex Mono" pitchFamily="34" charset="-122"/>
                 <a:cs typeface="IBM Plex Mono" pitchFamily="34" charset="-120"/>
               </a:rPr>
-              <a:t>THE SERIES</a:t>
+              <a:t>EXAMPLE</a:t>
             </a:r>
             <a:endParaRPr lang="en-US" sz="1000" dirty="0"/>
           </a:p>
@@ -13172,7 +14434,7 @@
               <a:buNone/>
             </a:pPr>
             <a:r>
-              <a:rPr lang="en-US" sz="2800" b="1" spc="-100" kern="0" dirty="0">
+              <a:rPr lang="en-US" sz="2300" b="1" spc="-100" kern="0" dirty="0">
                 <a:solidFill>
                   <a:srgbClr val="1C1C1C"/>
                 </a:solidFill>
@@ -13180,9 +14442,9 @@
                 <a:ea typeface="Geist" pitchFamily="34" charset="-122"/>
                 <a:cs typeface="Geist" pitchFamily="34" charset="-120"/>
               </a:rPr>
-              <a:t>Where agents live in an ERP</a:t>
-            </a:r>
-            <a:endParaRPr lang="en-US" sz="2800" dirty="0"/>
+              <a:t>Same problem, four ways: WH-204 is running low</a:t>
+            </a:r>
+            <a:endParaRPr lang="en-US" sz="2300" dirty="0"/>
           </a:p>
         </p:txBody>
       </p:sp>
@@ -13273,7 +14535,550 @@
         <p:spPr>
           <a:xfrm>
             <a:off x="457200" y="1783080"/>
-            <a:ext cx="2606040" cy="1097280"/>
+            <a:ext cx="4023360" cy="1097280"/>
+          </a:xfrm>
+          <a:prstGeom prst="rect">
+            <a:avLst/>
+          </a:prstGeom>
+          <a:solidFill>
+            <a:srgbClr val="FFFFFF"/>
+          </a:solidFill>
+          <a:ln w="9525">
+            <a:solidFill>
+              <a:srgbClr val="E5E5E5"/>
+            </a:solidFill>
+            <a:prstDash val="solid"/>
+          </a:ln>
+        </p:spPr>
+      </p:sp>
+      <p:sp>
+        <p:nvSpPr>
+          <p:cNvPr id="10" name="Text 7"/>
+          <p:cNvSpPr txBox="1"/>
+          <p:nvPr/>
+        </p:nvSpPr>
+        <p:spPr>
+          <a:xfrm>
+            <a:off x="640080" y="1874520"/>
+            <a:ext cx="2286000" cy="274320"/>
+          </a:xfrm>
+          <a:prstGeom prst="rect">
+            <a:avLst/>
+          </a:prstGeom>
+          <a:noFill/>
+          <a:ln/>
+        </p:spPr>
+        <p:txBody>
+          <a:bodyPr wrap="square" lIns="0" tIns="0" rIns="0" bIns="0" rtlCol="0" anchor="t"/>
+          <a:lstStyle/>
+          <a:p>
+            <a:pPr indent="0" marL="0">
+              <a:buNone/>
+            </a:pPr>
+            <a:r>
+              <a:rPr lang="en-US" sz="1300" b="1" spc="-50" kern="0" dirty="0">
+                <a:solidFill>
+                  <a:srgbClr val="1C1C1C"/>
+                </a:solidFill>
+                <a:latin typeface="Geist" pitchFamily="34" charset="0"/>
+                <a:ea typeface="Geist" pitchFamily="34" charset="-122"/>
+                <a:cs typeface="Geist" pitchFamily="34" charset="-120"/>
+              </a:rPr>
+              <a:t>Scheduler</a:t>
+            </a:r>
+            <a:endParaRPr lang="en-US" sz="1300" dirty="0"/>
+          </a:p>
+        </p:txBody>
+      </p:sp>
+      <p:sp>
+        <p:nvSpPr>
+          <p:cNvPr id="11" name="Text 8"/>
+          <p:cNvSpPr txBox="1"/>
+          <p:nvPr/>
+        </p:nvSpPr>
+        <p:spPr>
+          <a:xfrm>
+            <a:off x="2286000" y="1911096"/>
+            <a:ext cx="2011680" cy="228600"/>
+          </a:xfrm>
+          <a:prstGeom prst="rect">
+            <a:avLst/>
+          </a:prstGeom>
+          <a:noFill/>
+          <a:ln/>
+        </p:spPr>
+        <p:txBody>
+          <a:bodyPr wrap="square" lIns="0" tIns="0" rIns="0" bIns="0" rtlCol="0" anchor="ctr"/>
+          <a:lstStyle/>
+          <a:p>
+            <a:pPr algn="r" indent="0" marL="0">
+              <a:buNone/>
+            </a:pPr>
+            <a:r>
+              <a:rPr lang="en-US" sz="700" dirty="0">
+                <a:solidFill>
+                  <a:srgbClr val="919191"/>
+                </a:solidFill>
+                <a:latin typeface="IBM Plex Mono" pitchFamily="34" charset="0"/>
+                <a:ea typeface="IBM Plex Mono" pitchFamily="34" charset="-122"/>
+                <a:cs typeface="IBM Plex Mono" pitchFamily="34" charset="-120"/>
+              </a:rPr>
+              <a:t>DECIDED BEFORE IT RAN</a:t>
+            </a:r>
+            <a:endParaRPr lang="en-US" sz="700" dirty="0"/>
+          </a:p>
+        </p:txBody>
+      </p:sp>
+      <p:sp>
+        <p:nvSpPr>
+          <p:cNvPr id="12" name="Text 9"/>
+          <p:cNvSpPr txBox="1"/>
+          <p:nvPr/>
+        </p:nvSpPr>
+        <p:spPr>
+          <a:xfrm>
+            <a:off x="640080" y="2167128"/>
+            <a:ext cx="3657600" cy="457200"/>
+          </a:xfrm>
+          <a:prstGeom prst="rect">
+            <a:avLst/>
+          </a:prstGeom>
+          <a:noFill/>
+          <a:ln/>
+        </p:spPr>
+        <p:txBody>
+          <a:bodyPr wrap="square" lIns="0" tIns="0" rIns="0" bIns="0" rtlCol="0" anchor="t"/>
+          <a:lstStyle/>
+          <a:p>
+            <a:pPr indent="0" marL="0">
+              <a:buNone/>
+            </a:pPr>
+            <a:r>
+              <a:rPr lang="en-US" sz="900" dirty="0">
+                <a:solidFill>
+                  <a:srgbClr val="1C1C1C"/>
+                </a:solidFill>
+                <a:latin typeface="Geist" pitchFamily="34" charset="0"/>
+                <a:ea typeface="Geist" pitchFamily="34" charset="-122"/>
+                <a:cs typeface="Geist" pitchFamily="34" charset="-120"/>
+              </a:rPr>
+              <a:t>02:00 nightly: every item below reorder level → PO for default qty at default supplier</a:t>
+            </a:r>
+            <a:endParaRPr lang="en-US" sz="900" dirty="0"/>
+          </a:p>
+        </p:txBody>
+      </p:sp>
+      <p:sp>
+        <p:nvSpPr>
+          <p:cNvPr id="13" name="Text 10"/>
+          <p:cNvSpPr txBox="1"/>
+          <p:nvPr/>
+        </p:nvSpPr>
+        <p:spPr>
+          <a:xfrm>
+            <a:off x="640080" y="2587752"/>
+            <a:ext cx="3657600" cy="274320"/>
+          </a:xfrm>
+          <a:prstGeom prst="rect">
+            <a:avLst/>
+          </a:prstGeom>
+          <a:noFill/>
+          <a:ln/>
+        </p:spPr>
+        <p:txBody>
+          <a:bodyPr wrap="square" lIns="0" tIns="0" rIns="0" bIns="0" rtlCol="0" anchor="t"/>
+          <a:lstStyle/>
+          <a:p>
+            <a:pPr indent="0" marL="0">
+              <a:buNone/>
+            </a:pPr>
+            <a:r>
+              <a:rPr lang="en-US" sz="850" dirty="0">
+                <a:solidFill>
+                  <a:srgbClr val="6B7280"/>
+                </a:solidFill>
+                <a:latin typeface="Geist" pitchFamily="34" charset="0"/>
+                <a:ea typeface="Geist" pitchFamily="34" charset="-122"/>
+                <a:cs typeface="Geist" pitchFamily="34" charset="-120"/>
+              </a:rPr>
+              <a:t>Supplier on holiday? The PO goes out anyway.</a:t>
+            </a:r>
+            <a:endParaRPr lang="en-US" sz="850" dirty="0"/>
+          </a:p>
+        </p:txBody>
+      </p:sp>
+      <p:sp>
+        <p:nvSpPr>
+          <p:cNvPr id="14" name="Shape 11"/>
+          <p:cNvSpPr/>
+          <p:nvPr/>
+        </p:nvSpPr>
+        <p:spPr>
+          <a:xfrm>
+            <a:off x="4663440" y="1783080"/>
+            <a:ext cx="4023360" cy="1097280"/>
+          </a:xfrm>
+          <a:prstGeom prst="rect">
+            <a:avLst/>
+          </a:prstGeom>
+          <a:solidFill>
+            <a:srgbClr val="FFFFFF"/>
+          </a:solidFill>
+          <a:ln w="9525">
+            <a:solidFill>
+              <a:srgbClr val="E5E5E5"/>
+            </a:solidFill>
+            <a:prstDash val="solid"/>
+          </a:ln>
+        </p:spPr>
+      </p:sp>
+      <p:sp>
+        <p:nvSpPr>
+          <p:cNvPr id="15" name="Text 12"/>
+          <p:cNvSpPr txBox="1"/>
+          <p:nvPr/>
+        </p:nvSpPr>
+        <p:spPr>
+          <a:xfrm>
+            <a:off x="4846320" y="1874520"/>
+            <a:ext cx="2286000" cy="274320"/>
+          </a:xfrm>
+          <a:prstGeom prst="rect">
+            <a:avLst/>
+          </a:prstGeom>
+          <a:noFill/>
+          <a:ln/>
+        </p:spPr>
+        <p:txBody>
+          <a:bodyPr wrap="square" lIns="0" tIns="0" rIns="0" bIns="0" rtlCol="0" anchor="t"/>
+          <a:lstStyle/>
+          <a:p>
+            <a:pPr indent="0" marL="0">
+              <a:buNone/>
+            </a:pPr>
+            <a:r>
+              <a:rPr lang="en-US" sz="1300" b="1" spc="-50" kern="0" dirty="0">
+                <a:solidFill>
+                  <a:srgbClr val="1C1C1C"/>
+                </a:solidFill>
+                <a:latin typeface="Geist" pitchFamily="34" charset="0"/>
+                <a:ea typeface="Geist" pitchFamily="34" charset="-122"/>
+                <a:cs typeface="Geist" pitchFamily="34" charset="-120"/>
+              </a:rPr>
+              <a:t>Workflow</a:t>
+            </a:r>
+            <a:endParaRPr lang="en-US" sz="1300" dirty="0"/>
+          </a:p>
+        </p:txBody>
+      </p:sp>
+      <p:sp>
+        <p:nvSpPr>
+          <p:cNvPr id="16" name="Text 13"/>
+          <p:cNvSpPr txBox="1"/>
+          <p:nvPr/>
+        </p:nvSpPr>
+        <p:spPr>
+          <a:xfrm>
+            <a:off x="6492240" y="1911096"/>
+            <a:ext cx="2011680" cy="228600"/>
+          </a:xfrm>
+          <a:prstGeom prst="rect">
+            <a:avLst/>
+          </a:prstGeom>
+          <a:noFill/>
+          <a:ln/>
+        </p:spPr>
+        <p:txBody>
+          <a:bodyPr wrap="square" lIns="0" tIns="0" rIns="0" bIns="0" rtlCol="0" anchor="ctr"/>
+          <a:lstStyle/>
+          <a:p>
+            <a:pPr algn="r" indent="0" marL="0">
+              <a:buNone/>
+            </a:pPr>
+            <a:r>
+              <a:rPr lang="en-US" sz="700" dirty="0">
+                <a:solidFill>
+                  <a:srgbClr val="919191"/>
+                </a:solidFill>
+                <a:latin typeface="IBM Plex Mono" pitchFamily="34" charset="0"/>
+                <a:ea typeface="IBM Plex Mono" pitchFamily="34" charset="-122"/>
+                <a:cs typeface="IBM Plex Mono" pitchFamily="34" charset="-120"/>
+              </a:rPr>
+              <a:t>DECIDED BEFORE IT RAN</a:t>
+            </a:r>
+            <a:endParaRPr lang="en-US" sz="700" dirty="0"/>
+          </a:p>
+        </p:txBody>
+      </p:sp>
+      <p:sp>
+        <p:nvSpPr>
+          <p:cNvPr id="17" name="Text 14"/>
+          <p:cNvSpPr txBox="1"/>
+          <p:nvPr/>
+        </p:nvSpPr>
+        <p:spPr>
+          <a:xfrm>
+            <a:off x="4846320" y="2167128"/>
+            <a:ext cx="3657600" cy="457200"/>
+          </a:xfrm>
+          <a:prstGeom prst="rect">
+            <a:avLst/>
+          </a:prstGeom>
+          <a:noFill/>
+          <a:ln/>
+        </p:spPr>
+        <p:txBody>
+          <a:bodyPr wrap="square" lIns="0" tIns="0" rIns="0" bIns="0" rtlCol="0" anchor="t"/>
+          <a:lstStyle/>
+          <a:p>
+            <a:pPr indent="0" marL="0">
+              <a:buNone/>
+            </a:pPr>
+            <a:r>
+              <a:rPr lang="en-US" sz="900" dirty="0">
+                <a:solidFill>
+                  <a:srgbClr val="1C1C1C"/>
+                </a:solidFill>
+                <a:latin typeface="Geist" pitchFamily="34" charset="0"/>
+                <a:ea typeface="Geist" pitchFamily="34" charset="-122"/>
+                <a:cs typeface="Geist" pitchFamily="34" charset="-120"/>
+              </a:rPr>
+              <a:t>below level → check open POs → draft PO → approval if &gt; 50k → wait for GRN → close</a:t>
+            </a:r>
+            <a:endParaRPr lang="en-US" sz="900" dirty="0"/>
+          </a:p>
+        </p:txBody>
+      </p:sp>
+      <p:sp>
+        <p:nvSpPr>
+          <p:cNvPr id="18" name="Text 15"/>
+          <p:cNvSpPr txBox="1"/>
+          <p:nvPr/>
+        </p:nvSpPr>
+        <p:spPr>
+          <a:xfrm>
+            <a:off x="4846320" y="2587752"/>
+            <a:ext cx="3657600" cy="274320"/>
+          </a:xfrm>
+          <a:prstGeom prst="rect">
+            <a:avLst/>
+          </a:prstGeom>
+          <a:noFill/>
+          <a:ln/>
+        </p:spPr>
+        <p:txBody>
+          <a:bodyPr wrap="square" lIns="0" tIns="0" rIns="0" bIns="0" rtlCol="0" anchor="t"/>
+          <a:lstStyle/>
+          <a:p>
+            <a:pPr indent="0" marL="0">
+              <a:buNone/>
+            </a:pPr>
+            <a:r>
+              <a:rPr lang="en-US" sz="850" dirty="0">
+                <a:solidFill>
+                  <a:srgbClr val="6B7280"/>
+                </a:solidFill>
+                <a:latin typeface="Geist" pitchFamily="34" charset="0"/>
+                <a:ea typeface="Geist" pitchFamily="34" charset="-122"/>
+                <a:cs typeface="Geist" pitchFamily="34" charset="-120"/>
+              </a:rPr>
+              <a:t>"We can ship half, rest in 3 weeks" matches no transition → exception queue.</a:t>
+            </a:r>
+            <a:endParaRPr lang="en-US" sz="850" dirty="0"/>
+          </a:p>
+        </p:txBody>
+      </p:sp>
+      <p:sp>
+        <p:nvSpPr>
+          <p:cNvPr id="19" name="Shape 16"/>
+          <p:cNvSpPr/>
+          <p:nvPr/>
+        </p:nvSpPr>
+        <p:spPr>
+          <a:xfrm>
+            <a:off x="457200" y="2990088"/>
+            <a:ext cx="4023360" cy="1097280"/>
+          </a:xfrm>
+          <a:prstGeom prst="rect">
+            <a:avLst/>
+          </a:prstGeom>
+          <a:solidFill>
+            <a:srgbClr val="FFFFFF"/>
+          </a:solidFill>
+          <a:ln w="9525">
+            <a:solidFill>
+              <a:srgbClr val="E5E5E5"/>
+            </a:solidFill>
+            <a:prstDash val="solid"/>
+          </a:ln>
+        </p:spPr>
+      </p:sp>
+      <p:sp>
+        <p:nvSpPr>
+          <p:cNvPr id="20" name="Text 17"/>
+          <p:cNvSpPr txBox="1"/>
+          <p:nvPr/>
+        </p:nvSpPr>
+        <p:spPr>
+          <a:xfrm>
+            <a:off x="640080" y="3081528"/>
+            <a:ext cx="2286000" cy="274320"/>
+          </a:xfrm>
+          <a:prstGeom prst="rect">
+            <a:avLst/>
+          </a:prstGeom>
+          <a:noFill/>
+          <a:ln/>
+        </p:spPr>
+        <p:txBody>
+          <a:bodyPr wrap="square" lIns="0" tIns="0" rIns="0" bIns="0" rtlCol="0" anchor="t"/>
+          <a:lstStyle/>
+          <a:p>
+            <a:pPr indent="0" marL="0">
+              <a:buNone/>
+            </a:pPr>
+            <a:r>
+              <a:rPr lang="en-US" sz="1300" b="1" spc="-50" kern="0" dirty="0">
+                <a:solidFill>
+                  <a:srgbClr val="1C1C1C"/>
+                </a:solidFill>
+                <a:latin typeface="Geist" pitchFamily="34" charset="0"/>
+                <a:ea typeface="Geist" pitchFamily="34" charset="-122"/>
+                <a:cs typeface="Geist" pitchFamily="34" charset="-120"/>
+              </a:rPr>
+              <a:t>Rules engine</a:t>
+            </a:r>
+            <a:endParaRPr lang="en-US" sz="1300" dirty="0"/>
+          </a:p>
+        </p:txBody>
+      </p:sp>
+      <p:sp>
+        <p:nvSpPr>
+          <p:cNvPr id="21" name="Text 18"/>
+          <p:cNvSpPr txBox="1"/>
+          <p:nvPr/>
+        </p:nvSpPr>
+        <p:spPr>
+          <a:xfrm>
+            <a:off x="2286000" y="3118104"/>
+            <a:ext cx="2011680" cy="228600"/>
+          </a:xfrm>
+          <a:prstGeom prst="rect">
+            <a:avLst/>
+          </a:prstGeom>
+          <a:noFill/>
+          <a:ln/>
+        </p:spPr>
+        <p:txBody>
+          <a:bodyPr wrap="square" lIns="0" tIns="0" rIns="0" bIns="0" rtlCol="0" anchor="ctr"/>
+          <a:lstStyle/>
+          <a:p>
+            <a:pPr algn="r" indent="0" marL="0">
+              <a:buNone/>
+            </a:pPr>
+            <a:r>
+              <a:rPr lang="en-US" sz="700" dirty="0">
+                <a:solidFill>
+                  <a:srgbClr val="919191"/>
+                </a:solidFill>
+                <a:latin typeface="IBM Plex Mono" pitchFamily="34" charset="0"/>
+                <a:ea typeface="IBM Plex Mono" pitchFamily="34" charset="-122"/>
+                <a:cs typeface="IBM Plex Mono" pitchFamily="34" charset="-120"/>
+              </a:rPr>
+              <a:t>DECIDED BEFORE IT RAN</a:t>
+            </a:r>
+            <a:endParaRPr lang="en-US" sz="700" dirty="0"/>
+          </a:p>
+        </p:txBody>
+      </p:sp>
+      <p:sp>
+        <p:nvSpPr>
+          <p:cNvPr id="22" name="Text 19"/>
+          <p:cNvSpPr txBox="1"/>
+          <p:nvPr/>
+        </p:nvSpPr>
+        <p:spPr>
+          <a:xfrm>
+            <a:off x="640080" y="3374136"/>
+            <a:ext cx="3657600" cy="457200"/>
+          </a:xfrm>
+          <a:prstGeom prst="rect">
+            <a:avLst/>
+          </a:prstGeom>
+          <a:noFill/>
+          <a:ln/>
+        </p:spPr>
+        <p:txBody>
+          <a:bodyPr wrap="square" lIns="0" tIns="0" rIns="0" bIns="0" rtlCol="0" anchor="t"/>
+          <a:lstStyle/>
+          <a:p>
+            <a:pPr indent="0" marL="0">
+              <a:buNone/>
+            </a:pPr>
+            <a:r>
+              <a:rPr lang="en-US" sz="900" dirty="0">
+                <a:solidFill>
+                  <a:srgbClr val="1C1C1C"/>
+                </a:solidFill>
+                <a:latin typeface="Geist" pitchFamily="34" charset="0"/>
+                <a:ea typeface="Geist" pitchFamily="34" charset="-122"/>
+                <a:cs typeface="Geist" pitchFamily="34" charset="-120"/>
+              </a:rPr>
+              <a:t>Audio &amp; stock &lt; 20 → order 100 from S-500 · lead &gt; 7 days → 1.5× qty · March → hold</a:t>
+            </a:r>
+            <a:endParaRPr lang="en-US" sz="900" dirty="0"/>
+          </a:p>
+        </p:txBody>
+      </p:sp>
+      <p:sp>
+        <p:nvSpPr>
+          <p:cNvPr id="23" name="Text 20"/>
+          <p:cNvSpPr txBox="1"/>
+          <p:nvPr/>
+        </p:nvSpPr>
+        <p:spPr>
+          <a:xfrm>
+            <a:off x="640080" y="3794760"/>
+            <a:ext cx="3657600" cy="274320"/>
+          </a:xfrm>
+          <a:prstGeom prst="rect">
+            <a:avLst/>
+          </a:prstGeom>
+          <a:noFill/>
+          <a:ln/>
+        </p:spPr>
+        <p:txBody>
+          <a:bodyPr wrap="square" lIns="0" tIns="0" rIns="0" bIns="0" rtlCol="0" anchor="t"/>
+          <a:lstStyle/>
+          <a:p>
+            <a:pPr indent="0" marL="0">
+              <a:buNone/>
+            </a:pPr>
+            <a:r>
+              <a:rPr lang="en-US" sz="850" dirty="0">
+                <a:solidFill>
+                  <a:srgbClr val="6B7280"/>
+                </a:solidFill>
+                <a:latin typeface="Geist" pitchFamily="34" charset="0"/>
+                <a:ea typeface="Geist" pitchFamily="34" charset="-122"/>
+                <a:cs typeface="Geist" pitchFamily="34" charset="-120"/>
+              </a:rPr>
+              <a:t>New SKU category with no rule → nothing happens, silently.</a:t>
+            </a:r>
+            <a:endParaRPr lang="en-US" sz="850" dirty="0"/>
+          </a:p>
+        </p:txBody>
+      </p:sp>
+      <p:sp>
+        <p:nvSpPr>
+          <p:cNvPr id="24" name="Shape 21"/>
+          <p:cNvSpPr/>
+          <p:nvPr/>
+        </p:nvSpPr>
+        <p:spPr>
+          <a:xfrm>
+            <a:off x="4663440" y="2990088"/>
+            <a:ext cx="4023360" cy="1097280"/>
           </a:xfrm>
           <a:prstGeom prst="rect">
             <a:avLst/>
@@ -13291,14 +15096,14 @@
       </p:sp>
       <p:sp>
         <p:nvSpPr>
-          <p:cNvPr id="10" name="Text 7"/>
-          <p:cNvSpPr txBox="1"/>
-          <p:nvPr/>
-        </p:nvSpPr>
-        <p:spPr>
-          <a:xfrm>
-            <a:off x="685800" y="1920240"/>
-            <a:ext cx="1645920" cy="320040"/>
+          <p:cNvPr id="25" name="Text 22"/>
+          <p:cNvSpPr txBox="1"/>
+          <p:nvPr/>
+        </p:nvSpPr>
+        <p:spPr>
+          <a:xfrm>
+            <a:off x="4846320" y="3081528"/>
+            <a:ext cx="2286000" cy="274320"/>
           </a:xfrm>
           <a:prstGeom prst="rect">
             <a:avLst/>
@@ -13314,7 +15119,7 @@
               <a:buNone/>
             </a:pPr>
             <a:r>
-              <a:rPr lang="en-US" sz="1400" b="1" spc="-50" kern="0" dirty="0">
+              <a:rPr lang="en-US" sz="1300" b="1" spc="-50" kern="0" dirty="0">
                 <a:solidFill>
                   <a:srgbClr val="1C1C1C"/>
                 </a:solidFill>
@@ -13322,22 +15127,22 @@
                 <a:ea typeface="Geist" pitchFamily="34" charset="-122"/>
                 <a:cs typeface="Geist" pitchFamily="34" charset="-120"/>
               </a:rPr>
-              <a:t>Sales / CRM</a:t>
-            </a:r>
-            <a:endParaRPr lang="en-US" sz="1400" dirty="0"/>
-          </a:p>
-        </p:txBody>
-      </p:sp>
-      <p:sp>
-        <p:nvSpPr>
-          <p:cNvPr id="11" name="Text 8"/>
-          <p:cNvSpPr txBox="1"/>
-          <p:nvPr/>
-        </p:nvSpPr>
-        <p:spPr>
-          <a:xfrm>
-            <a:off x="2194560" y="1938528"/>
-            <a:ext cx="685800" cy="274320"/>
+              <a:t>Agent</a:t>
+            </a:r>
+            <a:endParaRPr lang="en-US" sz="1300" dirty="0"/>
+          </a:p>
+        </p:txBody>
+      </p:sp>
+      <p:sp>
+        <p:nvSpPr>
+          <p:cNvPr id="26" name="Text 23"/>
+          <p:cNvSpPr txBox="1"/>
+          <p:nvPr/>
+        </p:nvSpPr>
+        <p:spPr>
+          <a:xfrm>
+            <a:off x="6492240" y="3118104"/>
+            <a:ext cx="2011680" cy="228600"/>
           </a:xfrm>
           <a:prstGeom prst="rect">
             <a:avLst/>
@@ -13353,7 +15158,7 @@
               <a:buNone/>
             </a:pPr>
             <a:r>
-              <a:rPr lang="en-US" sz="800" dirty="0">
+              <a:rPr lang="en-US" sz="700" dirty="0">
                 <a:solidFill>
                   <a:srgbClr val="FF5700"/>
                 </a:solidFill>
@@ -13361,22 +15166,22 @@
                 <a:ea typeface="IBM Plex Mono" pitchFamily="34" charset="-122"/>
                 <a:cs typeface="IBM Plex Mono" pitchFamily="34" charset="-120"/>
               </a:rPr>
-              <a:t>Ep 2</a:t>
-            </a:r>
-            <a:endParaRPr lang="en-US" sz="800" dirty="0"/>
-          </a:p>
-        </p:txBody>
-      </p:sp>
-      <p:sp>
-        <p:nvSpPr>
-          <p:cNvPr id="12" name="Text 9"/>
-          <p:cNvSpPr txBox="1"/>
-          <p:nvPr/>
-        </p:nvSpPr>
-        <p:spPr>
-          <a:xfrm>
-            <a:off x="685800" y="2286000"/>
-            <a:ext cx="2194560" cy="548640"/>
+              <a:t>DECIDES AS IT RUNS</a:t>
+            </a:r>
+            <a:endParaRPr lang="en-US" sz="700" dirty="0"/>
+          </a:p>
+        </p:txBody>
+      </p:sp>
+      <p:sp>
+        <p:nvSpPr>
+          <p:cNvPr id="27" name="Text 24"/>
+          <p:cNvSpPr txBox="1"/>
+          <p:nvPr/>
+        </p:nvSpPr>
+        <p:spPr>
+          <a:xfrm>
+            <a:off x="4846320" y="3374136"/>
+            <a:ext cx="3657600" cy="457200"/>
           </a:xfrm>
           <a:prstGeom prst="rect">
             <a:avLst/>
@@ -13392,36 +15197,75 @@
               <a:buNone/>
             </a:pPr>
             <a:r>
-              <a:rPr lang="en-US" sz="1050" dirty="0">
-                <a:solidFill>
-                  <a:srgbClr val="6B7280"/>
-                </a:solidFill>
-                <a:latin typeface="Geist" pitchFamily="34" charset="0"/>
-                <a:ea typeface="Geist" pitchFamily="34" charset="-122"/>
-                <a:cs typeface="Geist" pitchFamily="34" charset="-120"/>
-              </a:rPr>
-              <a:t>quote-to-order · returns · lead triage</a:t>
-            </a:r>
-            <a:endParaRPr lang="en-US" sz="1050" dirty="0"/>
-          </a:p>
-        </p:txBody>
-      </p:sp>
-      <p:sp>
-        <p:nvSpPr>
-          <p:cNvPr id="13" name="Shape 10"/>
+              <a:rPr lang="en-US" sz="900" dirty="0">
+                <a:solidFill>
+                  <a:srgbClr val="1C1C1C"/>
+                </a:solidFill>
+                <a:latin typeface="Geist" pitchFamily="34" charset="0"/>
+                <a:ea typeface="Geist" pitchFamily="34" charset="-122"/>
+                <a:cs typeface="Geist" pitchFamily="34" charset="-120"/>
+              </a:rPr>
+              <a:t>Goal: keep WH-204 in stock without over-ordering. Sees 12 left, open PO covers 50, forecast needs 80, usual supplier now 14 days → alternate at +5% → asks a human (over threshold)</a:t>
+            </a:r>
+            <a:endParaRPr lang="en-US" sz="900" dirty="0"/>
+          </a:p>
+        </p:txBody>
+      </p:sp>
+      <p:sp>
+        <p:nvSpPr>
+          <p:cNvPr id="28" name="Text 25"/>
+          <p:cNvSpPr txBox="1"/>
+          <p:nvPr/>
+        </p:nvSpPr>
+        <p:spPr>
+          <a:xfrm>
+            <a:off x="4846320" y="3794760"/>
+            <a:ext cx="3657600" cy="274320"/>
+          </a:xfrm>
+          <a:prstGeom prst="rect">
+            <a:avLst/>
+          </a:prstGeom>
+          <a:noFill/>
+          <a:ln/>
+        </p:spPr>
+        <p:txBody>
+          <a:bodyPr wrap="square" lIns="0" tIns="0" rIns="0" bIns="0" rtlCol="0" anchor="t"/>
+          <a:lstStyle/>
+          <a:p>
+            <a:pPr indent="0" marL="0">
+              <a:buNone/>
+            </a:pPr>
+            <a:r>
+              <a:rPr lang="en-US" sz="850" dirty="0">
+                <a:solidFill>
+                  <a:srgbClr val="FF5700"/>
+                </a:solidFill>
+                <a:latin typeface="Geist" pitchFamily="34" charset="0"/>
+                <a:ea typeface="Geist" pitchFamily="34" charset="-122"/>
+                <a:cs typeface="Geist" pitchFamily="34" charset="-120"/>
+              </a:rPr>
+              <a:t>Nobody wrote that sequence. Tomorrow it may choose differently — so: approval gate, PO cap, evals.</a:t>
+            </a:r>
+            <a:endParaRPr lang="en-US" sz="850" dirty="0"/>
+          </a:p>
+        </p:txBody>
+      </p:sp>
+      <p:sp>
+        <p:nvSpPr>
+          <p:cNvPr id="29" name="Shape 26"/>
           <p:cNvSpPr/>
           <p:nvPr/>
         </p:nvSpPr>
         <p:spPr>
           <a:xfrm>
-            <a:off x="3246120" y="1783080"/>
-            <a:ext cx="2606040" cy="1097280"/>
+            <a:off x="457200" y="4206240"/>
+            <a:ext cx="8229600" cy="457200"/>
           </a:xfrm>
           <a:prstGeom prst="rect">
             <a:avLst/>
           </a:prstGeom>
           <a:solidFill>
-            <a:srgbClr val="FFFFFF"/>
+            <a:srgbClr val="F7F7F5"/>
           </a:solidFill>
           <a:ln w="9525">
             <a:solidFill>
@@ -13433,53 +15277,14 @@
       </p:sp>
       <p:sp>
         <p:nvSpPr>
-          <p:cNvPr id="14" name="Text 11"/>
-          <p:cNvSpPr txBox="1"/>
-          <p:nvPr/>
-        </p:nvSpPr>
-        <p:spPr>
-          <a:xfrm>
-            <a:off x="3474720" y="1920240"/>
-            <a:ext cx="1645920" cy="320040"/>
-          </a:xfrm>
-          <a:prstGeom prst="rect">
-            <a:avLst/>
-          </a:prstGeom>
-          <a:noFill/>
-          <a:ln/>
-        </p:spPr>
-        <p:txBody>
-          <a:bodyPr wrap="square" lIns="0" tIns="0" rIns="0" bIns="0" rtlCol="0" anchor="t"/>
-          <a:lstStyle/>
-          <a:p>
-            <a:pPr indent="0" marL="0">
-              <a:buNone/>
-            </a:pPr>
-            <a:r>
-              <a:rPr lang="en-US" sz="1400" b="1" spc="-50" kern="0" dirty="0">
-                <a:solidFill>
-                  <a:srgbClr val="1C1C1C"/>
-                </a:solidFill>
-                <a:latin typeface="Geist" pitchFamily="34" charset="0"/>
-                <a:ea typeface="Geist" pitchFamily="34" charset="-122"/>
-                <a:cs typeface="Geist" pitchFamily="34" charset="-120"/>
-              </a:rPr>
-              <a:t>Inventory</a:t>
-            </a:r>
-            <a:endParaRPr lang="en-US" sz="1400" dirty="0"/>
-          </a:p>
-        </p:txBody>
-      </p:sp>
-      <p:sp>
-        <p:nvSpPr>
-          <p:cNvPr id="15" name="Text 12"/>
-          <p:cNvSpPr txBox="1"/>
-          <p:nvPr/>
-        </p:nvSpPr>
-        <p:spPr>
-          <a:xfrm>
-            <a:off x="4983480" y="1938528"/>
-            <a:ext cx="685800" cy="274320"/>
+          <p:cNvPr id="30" name="Text 27"/>
+          <p:cNvSpPr txBox="1"/>
+          <p:nvPr/>
+        </p:nvSpPr>
+        <p:spPr>
+          <a:xfrm>
+            <a:off x="685800" y="4206240"/>
+            <a:ext cx="7772400" cy="457200"/>
           </a:xfrm>
           <a:prstGeom prst="rect">
             <a:avLst/>
@@ -13491,11 +15296,11 @@
           <a:bodyPr wrap="square" lIns="0" tIns="0" rIns="0" bIns="0" rtlCol="0" anchor="ctr"/>
           <a:lstStyle/>
           <a:p>
-            <a:pPr algn="r" indent="0" marL="0">
-              <a:buNone/>
-            </a:pPr>
-            <a:r>
-              <a:rPr lang="en-US" sz="800" dirty="0">
+            <a:pPr indent="0" marL="0">
+              <a:buNone/>
+            </a:pPr>
+            <a:r>
+              <a:rPr lang="en-US" sz="900" spc="200" kern="0" dirty="0">
                 <a:solidFill>
                   <a:srgbClr val="FF5700"/>
                 </a:solidFill>
@@ -13503,102 +15308,13 @@
                 <a:ea typeface="IBM Plex Mono" pitchFamily="34" charset="-122"/>
                 <a:cs typeface="IBM Plex Mono" pitchFamily="34" charset="-120"/>
               </a:rPr>
-              <a:t>Ep 6</a:t>
-            </a:r>
-            <a:endParaRPr lang="en-US" sz="800" dirty="0"/>
-          </a:p>
-        </p:txBody>
-      </p:sp>
-      <p:sp>
-        <p:nvSpPr>
-          <p:cNvPr id="16" name="Text 13"/>
-          <p:cNvSpPr txBox="1"/>
-          <p:nvPr/>
-        </p:nvSpPr>
-        <p:spPr>
-          <a:xfrm>
-            <a:off x="3474720" y="2286000"/>
-            <a:ext cx="2194560" cy="548640"/>
-          </a:xfrm>
-          <a:prstGeom prst="rect">
-            <a:avLst/>
-          </a:prstGeom>
-          <a:noFill/>
-          <a:ln/>
-        </p:spPr>
-        <p:txBody>
-          <a:bodyPr wrap="square" lIns="0" tIns="0" rIns="0" bIns="0" rtlCol="0" anchor="t"/>
-          <a:lstStyle/>
-          <a:p>
-            <a:pPr indent="0" marL="0">
-              <a:buNone/>
-            </a:pPr>
-            <a:r>
-              <a:rPr lang="en-US" sz="1050" dirty="0">
-                <a:solidFill>
-                  <a:srgbClr val="6B7280"/>
-                </a:solidFill>
-                <a:latin typeface="Geist" pitchFamily="34" charset="0"/>
-                <a:ea typeface="Geist" pitchFamily="34" charset="-122"/>
-                <a:cs typeface="Geist" pitchFamily="34" charset="-120"/>
-              </a:rPr>
-              <a:t>reorder · stock exceptions</a:t>
-            </a:r>
-            <a:endParaRPr lang="en-US" sz="1050" dirty="0"/>
-          </a:p>
-        </p:txBody>
-      </p:sp>
-      <p:sp>
-        <p:nvSpPr>
-          <p:cNvPr id="17" name="Shape 14"/>
-          <p:cNvSpPr/>
-          <p:nvPr/>
-        </p:nvSpPr>
-        <p:spPr>
-          <a:xfrm>
-            <a:off x="6035040" y="1783080"/>
-            <a:ext cx="2606040" cy="1097280"/>
-          </a:xfrm>
-          <a:prstGeom prst="rect">
-            <a:avLst/>
-          </a:prstGeom>
-          <a:solidFill>
-            <a:srgbClr val="FFFFFF"/>
-          </a:solidFill>
-          <a:ln w="9525">
-            <a:solidFill>
-              <a:srgbClr val="E5E5E5"/>
-            </a:solidFill>
-            <a:prstDash val="solid"/>
-          </a:ln>
-        </p:spPr>
-      </p:sp>
-      <p:sp>
-        <p:nvSpPr>
-          <p:cNvPr id="18" name="Text 15"/>
-          <p:cNvSpPr txBox="1"/>
-          <p:nvPr/>
-        </p:nvSpPr>
-        <p:spPr>
-          <a:xfrm>
-            <a:off x="6263640" y="1920240"/>
-            <a:ext cx="1645920" cy="320040"/>
-          </a:xfrm>
-          <a:prstGeom prst="rect">
-            <a:avLst/>
-          </a:prstGeom>
-          <a:noFill/>
-          <a:ln/>
-        </p:spPr>
-        <p:txBody>
-          <a:bodyPr wrap="square" lIns="0" tIns="0" rIns="0" bIns="0" rtlCol="0" anchor="t"/>
-          <a:lstStyle/>
-          <a:p>
-            <a:pPr indent="0" marL="0">
-              <a:buNone/>
-            </a:pPr>
-            <a:r>
-              <a:rPr lang="en-US" sz="1400" b="1" spc="-50" kern="0" dirty="0">
+              <a:t>IN A MATURE ERP  </a:t>
+            </a:r>
+            <a:pPr indent="0" marL="0">
+              <a:buNone/>
+            </a:pPr>
+            <a:r>
+              <a:rPr lang="en-US" sz="1150" dirty="0">
                 <a:solidFill>
                   <a:srgbClr val="1C1C1C"/>
                 </a:solidFill>
@@ -13606,552 +15322,9 @@
                 <a:ea typeface="Geist" pitchFamily="34" charset="-122"/>
                 <a:cs typeface="Geist" pitchFamily="34" charset="-120"/>
               </a:rPr>
-              <a:t>Finance</a:t>
-            </a:r>
-            <a:endParaRPr lang="en-US" sz="1400" dirty="0"/>
-          </a:p>
-        </p:txBody>
-      </p:sp>
-      <p:sp>
-        <p:nvSpPr>
-          <p:cNvPr id="19" name="Text 16"/>
-          <p:cNvSpPr txBox="1"/>
-          <p:nvPr/>
-        </p:nvSpPr>
-        <p:spPr>
-          <a:xfrm>
-            <a:off x="7772400" y="1938528"/>
-            <a:ext cx="685800" cy="274320"/>
-          </a:xfrm>
-          <a:prstGeom prst="rect">
-            <a:avLst/>
-          </a:prstGeom>
-          <a:noFill/>
-          <a:ln/>
-        </p:spPr>
-        <p:txBody>
-          <a:bodyPr wrap="square" lIns="0" tIns="0" rIns="0" bIns="0" rtlCol="0" anchor="ctr"/>
-          <a:lstStyle/>
-          <a:p>
-            <a:pPr algn="r" indent="0" marL="0">
-              <a:buNone/>
-            </a:pPr>
-            <a:r>
-              <a:rPr lang="en-US" sz="800" dirty="0">
-                <a:solidFill>
-                  <a:srgbClr val="FF5700"/>
-                </a:solidFill>
-                <a:latin typeface="IBM Plex Mono" pitchFamily="34" charset="0"/>
-                <a:ea typeface="IBM Plex Mono" pitchFamily="34" charset="-122"/>
-                <a:cs typeface="IBM Plex Mono" pitchFamily="34" charset="-120"/>
-              </a:rPr>
-              <a:t>Ep 12, 26</a:t>
-            </a:r>
-            <a:endParaRPr lang="en-US" sz="800" dirty="0"/>
-          </a:p>
-        </p:txBody>
-      </p:sp>
-      <p:sp>
-        <p:nvSpPr>
-          <p:cNvPr id="20" name="Text 17"/>
-          <p:cNvSpPr txBox="1"/>
-          <p:nvPr/>
-        </p:nvSpPr>
-        <p:spPr>
-          <a:xfrm>
-            <a:off x="6263640" y="2286000"/>
-            <a:ext cx="2194560" cy="548640"/>
-          </a:xfrm>
-          <a:prstGeom prst="rect">
-            <a:avLst/>
-          </a:prstGeom>
-          <a:noFill/>
-          <a:ln/>
-        </p:spPr>
-        <p:txBody>
-          <a:bodyPr wrap="square" lIns="0" tIns="0" rIns="0" bIns="0" rtlCol="0" anchor="t"/>
-          <a:lstStyle/>
-          <a:p>
-            <a:pPr indent="0" marL="0">
-              <a:buNone/>
-            </a:pPr>
-            <a:r>
-              <a:rPr lang="en-US" sz="1050" dirty="0">
-                <a:solidFill>
-                  <a:srgbClr val="6B7280"/>
-                </a:solidFill>
-                <a:latin typeface="Geist" pitchFamily="34" charset="0"/>
-                <a:ea typeface="Geist" pitchFamily="34" charset="-122"/>
-                <a:cs typeface="Geist" pitchFamily="34" charset="-120"/>
-              </a:rPr>
-              <a:t>invoice matching · month-end reconciliation</a:t>
-            </a:r>
-            <a:endParaRPr lang="en-US" sz="1050" dirty="0"/>
-          </a:p>
-        </p:txBody>
-      </p:sp>
-      <p:sp>
-        <p:nvSpPr>
-          <p:cNvPr id="21" name="Shape 18"/>
-          <p:cNvSpPr/>
-          <p:nvPr/>
-        </p:nvSpPr>
-        <p:spPr>
-          <a:xfrm>
-            <a:off x="457200" y="3017520"/>
-            <a:ext cx="2606040" cy="1097280"/>
-          </a:xfrm>
-          <a:prstGeom prst="rect">
-            <a:avLst/>
-          </a:prstGeom>
-          <a:solidFill>
-            <a:srgbClr val="FFFFFF"/>
-          </a:solidFill>
-          <a:ln w="9525">
-            <a:solidFill>
-              <a:srgbClr val="E5E5E5"/>
-            </a:solidFill>
-            <a:prstDash val="solid"/>
-          </a:ln>
-        </p:spPr>
-      </p:sp>
-      <p:sp>
-        <p:nvSpPr>
-          <p:cNvPr id="22" name="Text 19"/>
-          <p:cNvSpPr txBox="1"/>
-          <p:nvPr/>
-        </p:nvSpPr>
-        <p:spPr>
-          <a:xfrm>
-            <a:off x="685800" y="3154680"/>
-            <a:ext cx="1645920" cy="320040"/>
-          </a:xfrm>
-          <a:prstGeom prst="rect">
-            <a:avLst/>
-          </a:prstGeom>
-          <a:noFill/>
-          <a:ln/>
-        </p:spPr>
-        <p:txBody>
-          <a:bodyPr wrap="square" lIns="0" tIns="0" rIns="0" bIns="0" rtlCol="0" anchor="t"/>
-          <a:lstStyle/>
-          <a:p>
-            <a:pPr indent="0" marL="0">
-              <a:buNone/>
-            </a:pPr>
-            <a:r>
-              <a:rPr lang="en-US" sz="1400" b="1" spc="-50" kern="0" dirty="0">
-                <a:solidFill>
-                  <a:srgbClr val="1C1C1C"/>
-                </a:solidFill>
-                <a:latin typeface="Geist" pitchFamily="34" charset="0"/>
-                <a:ea typeface="Geist" pitchFamily="34" charset="-122"/>
-                <a:cs typeface="Geist" pitchFamily="34" charset="-120"/>
-              </a:rPr>
-              <a:t>Procurement</a:t>
-            </a:r>
-            <a:endParaRPr lang="en-US" sz="1400" dirty="0"/>
-          </a:p>
-        </p:txBody>
-      </p:sp>
-      <p:sp>
-        <p:nvSpPr>
-          <p:cNvPr id="23" name="Text 20"/>
-          <p:cNvSpPr txBox="1"/>
-          <p:nvPr/>
-        </p:nvSpPr>
-        <p:spPr>
-          <a:xfrm>
-            <a:off x="2194560" y="3172968"/>
-            <a:ext cx="685800" cy="274320"/>
-          </a:xfrm>
-          <a:prstGeom prst="rect">
-            <a:avLst/>
-          </a:prstGeom>
-          <a:noFill/>
-          <a:ln/>
-        </p:spPr>
-        <p:txBody>
-          <a:bodyPr wrap="square" lIns="0" tIns="0" rIns="0" bIns="0" rtlCol="0" anchor="ctr"/>
-          <a:lstStyle/>
-          <a:p>
-            <a:pPr algn="r" indent="0" marL="0">
-              <a:buNone/>
-            </a:pPr>
-            <a:r>
-              <a:rPr lang="en-US" sz="800" dirty="0">
-                <a:solidFill>
-                  <a:srgbClr val="FF5700"/>
-                </a:solidFill>
-                <a:latin typeface="IBM Plex Mono" pitchFamily="34" charset="0"/>
-                <a:ea typeface="IBM Plex Mono" pitchFamily="34" charset="-122"/>
-                <a:cs typeface="IBM Plex Mono" pitchFamily="34" charset="-120"/>
-              </a:rPr>
-              <a:t>Ep 6–8</a:t>
-            </a:r>
-            <a:endParaRPr lang="en-US" sz="800" dirty="0"/>
-          </a:p>
-        </p:txBody>
-      </p:sp>
-      <p:sp>
-        <p:nvSpPr>
-          <p:cNvPr id="24" name="Text 21"/>
-          <p:cNvSpPr txBox="1"/>
-          <p:nvPr/>
-        </p:nvSpPr>
-        <p:spPr>
-          <a:xfrm>
-            <a:off x="685800" y="3520440"/>
-            <a:ext cx="2194560" cy="548640"/>
-          </a:xfrm>
-          <a:prstGeom prst="rect">
-            <a:avLst/>
-          </a:prstGeom>
-          <a:noFill/>
-          <a:ln/>
-        </p:spPr>
-        <p:txBody>
-          <a:bodyPr wrap="square" lIns="0" tIns="0" rIns="0" bIns="0" rtlCol="0" anchor="t"/>
-          <a:lstStyle/>
-          <a:p>
-            <a:pPr indent="0" marL="0">
-              <a:buNone/>
-            </a:pPr>
-            <a:r>
-              <a:rPr lang="en-US" sz="1050" dirty="0">
-                <a:solidFill>
-                  <a:srgbClr val="6B7280"/>
-                </a:solidFill>
-                <a:latin typeface="Geist" pitchFamily="34" charset="0"/>
-                <a:ea typeface="Geist" pitchFamily="34" charset="-122"/>
-                <a:cs typeface="Geist" pitchFamily="34" charset="-120"/>
-              </a:rPr>
-              <a:t>supplier search · PO approval</a:t>
-            </a:r>
-            <a:endParaRPr lang="en-US" sz="1050" dirty="0"/>
-          </a:p>
-        </p:txBody>
-      </p:sp>
-      <p:sp>
-        <p:nvSpPr>
-          <p:cNvPr id="25" name="Shape 22"/>
-          <p:cNvSpPr/>
-          <p:nvPr/>
-        </p:nvSpPr>
-        <p:spPr>
-          <a:xfrm>
-            <a:off x="3246120" y="3017520"/>
-            <a:ext cx="2606040" cy="1097280"/>
-          </a:xfrm>
-          <a:prstGeom prst="rect">
-            <a:avLst/>
-          </a:prstGeom>
-          <a:solidFill>
-            <a:srgbClr val="FFFFFF"/>
-          </a:solidFill>
-          <a:ln w="9525">
-            <a:solidFill>
-              <a:srgbClr val="E5E5E5"/>
-            </a:solidFill>
-            <a:prstDash val="solid"/>
-          </a:ln>
-        </p:spPr>
-      </p:sp>
-      <p:sp>
-        <p:nvSpPr>
-          <p:cNvPr id="26" name="Text 23"/>
-          <p:cNvSpPr txBox="1"/>
-          <p:nvPr/>
-        </p:nvSpPr>
-        <p:spPr>
-          <a:xfrm>
-            <a:off x="3474720" y="3154680"/>
-            <a:ext cx="1645920" cy="320040"/>
-          </a:xfrm>
-          <a:prstGeom prst="rect">
-            <a:avLst/>
-          </a:prstGeom>
-          <a:noFill/>
-          <a:ln/>
-        </p:spPr>
-        <p:txBody>
-          <a:bodyPr wrap="square" lIns="0" tIns="0" rIns="0" bIns="0" rtlCol="0" anchor="t"/>
-          <a:lstStyle/>
-          <a:p>
-            <a:pPr indent="0" marL="0">
-              <a:buNone/>
-            </a:pPr>
-            <a:r>
-              <a:rPr lang="en-US" sz="1400" b="1" spc="-50" kern="0" dirty="0">
-                <a:solidFill>
-                  <a:srgbClr val="1C1C1C"/>
-                </a:solidFill>
-                <a:latin typeface="Geist" pitchFamily="34" charset="0"/>
-                <a:ea typeface="Geist" pitchFamily="34" charset="-122"/>
-                <a:cs typeface="Geist" pitchFamily="34" charset="-120"/>
-              </a:rPr>
-              <a:t>HR</a:t>
-            </a:r>
-            <a:endParaRPr lang="en-US" sz="1400" dirty="0"/>
-          </a:p>
-        </p:txBody>
-      </p:sp>
-      <p:sp>
-        <p:nvSpPr>
-          <p:cNvPr id="27" name="Text 24"/>
-          <p:cNvSpPr txBox="1"/>
-          <p:nvPr/>
-        </p:nvSpPr>
-        <p:spPr>
-          <a:xfrm>
-            <a:off x="4983480" y="3172968"/>
-            <a:ext cx="685800" cy="274320"/>
-          </a:xfrm>
-          <a:prstGeom prst="rect">
-            <a:avLst/>
-          </a:prstGeom>
-          <a:noFill/>
-          <a:ln/>
-        </p:spPr>
-        <p:txBody>
-          <a:bodyPr wrap="square" lIns="0" tIns="0" rIns="0" bIns="0" rtlCol="0" anchor="ctr"/>
-          <a:lstStyle/>
-          <a:p>
-            <a:pPr algn="r" indent="0" marL="0">
-              <a:buNone/>
-            </a:pPr>
-            <a:r>
-              <a:rPr lang="en-US" sz="800" dirty="0">
-                <a:solidFill>
-                  <a:srgbClr val="FF5700"/>
-                </a:solidFill>
-                <a:latin typeface="IBM Plex Mono" pitchFamily="34" charset="0"/>
-                <a:ea typeface="IBM Plex Mono" pitchFamily="34" charset="-122"/>
-                <a:cs typeface="IBM Plex Mono" pitchFamily="34" charset="-120"/>
-              </a:rPr>
-              <a:t>later</a:t>
-            </a:r>
-            <a:endParaRPr lang="en-US" sz="800" dirty="0"/>
-          </a:p>
-        </p:txBody>
-      </p:sp>
-      <p:sp>
-        <p:nvSpPr>
-          <p:cNvPr id="28" name="Text 25"/>
-          <p:cNvSpPr txBox="1"/>
-          <p:nvPr/>
-        </p:nvSpPr>
-        <p:spPr>
-          <a:xfrm>
-            <a:off x="3474720" y="3520440"/>
-            <a:ext cx="2194560" cy="548640"/>
-          </a:xfrm>
-          <a:prstGeom prst="rect">
-            <a:avLst/>
-          </a:prstGeom>
-          <a:noFill/>
-          <a:ln/>
-        </p:spPr>
-        <p:txBody>
-          <a:bodyPr wrap="square" lIns="0" tIns="0" rIns="0" bIns="0" rtlCol="0" anchor="t"/>
-          <a:lstStyle/>
-          <a:p>
-            <a:pPr indent="0" marL="0">
-              <a:buNone/>
-            </a:pPr>
-            <a:r>
-              <a:rPr lang="en-US" sz="1050" dirty="0">
-                <a:solidFill>
-                  <a:srgbClr val="6B7280"/>
-                </a:solidFill>
-                <a:latin typeface="Geist" pitchFamily="34" charset="0"/>
-                <a:ea typeface="Geist" pitchFamily="34" charset="-122"/>
-                <a:cs typeface="Geist" pitchFamily="34" charset="-120"/>
-              </a:rPr>
-              <a:t>leave · expense approvals</a:t>
-            </a:r>
-            <a:endParaRPr lang="en-US" sz="1050" dirty="0"/>
-          </a:p>
-        </p:txBody>
-      </p:sp>
-      <p:sp>
-        <p:nvSpPr>
-          <p:cNvPr id="29" name="Shape 26"/>
-          <p:cNvSpPr/>
-          <p:nvPr/>
-        </p:nvSpPr>
-        <p:spPr>
-          <a:xfrm>
-            <a:off x="6035040" y="3017520"/>
-            <a:ext cx="2606040" cy="1097280"/>
-          </a:xfrm>
-          <a:prstGeom prst="rect">
-            <a:avLst/>
-          </a:prstGeom>
-          <a:solidFill>
-            <a:srgbClr val="FFFFFF"/>
-          </a:solidFill>
-          <a:ln w="9525">
-            <a:solidFill>
-              <a:srgbClr val="E5E5E5"/>
-            </a:solidFill>
-            <a:prstDash val="solid"/>
-          </a:ln>
-        </p:spPr>
-      </p:sp>
-      <p:sp>
-        <p:nvSpPr>
-          <p:cNvPr id="30" name="Text 27"/>
-          <p:cNvSpPr txBox="1"/>
-          <p:nvPr/>
-        </p:nvSpPr>
-        <p:spPr>
-          <a:xfrm>
-            <a:off x="6263640" y="3154680"/>
-            <a:ext cx="1645920" cy="320040"/>
-          </a:xfrm>
-          <a:prstGeom prst="rect">
-            <a:avLst/>
-          </a:prstGeom>
-          <a:noFill/>
-          <a:ln/>
-        </p:spPr>
-        <p:txBody>
-          <a:bodyPr wrap="square" lIns="0" tIns="0" rIns="0" bIns="0" rtlCol="0" anchor="t"/>
-          <a:lstStyle/>
-          <a:p>
-            <a:pPr indent="0" marL="0">
-              <a:buNone/>
-            </a:pPr>
-            <a:r>
-              <a:rPr lang="en-US" sz="1400" b="1" spc="-50" kern="0" dirty="0">
-                <a:solidFill>
-                  <a:srgbClr val="1C1C1C"/>
-                </a:solidFill>
-                <a:latin typeface="Geist" pitchFamily="34" charset="0"/>
-                <a:ea typeface="Geist" pitchFamily="34" charset="-122"/>
-                <a:cs typeface="Geist" pitchFamily="34" charset="-120"/>
-              </a:rPr>
-              <a:t>Platform</a:t>
-            </a:r>
-            <a:endParaRPr lang="en-US" sz="1400" dirty="0"/>
-          </a:p>
-        </p:txBody>
-      </p:sp>
-      <p:sp>
-        <p:nvSpPr>
-          <p:cNvPr id="31" name="Text 28"/>
-          <p:cNvSpPr txBox="1"/>
-          <p:nvPr/>
-        </p:nvSpPr>
-        <p:spPr>
-          <a:xfrm>
-            <a:off x="7772400" y="3172968"/>
-            <a:ext cx="685800" cy="274320"/>
-          </a:xfrm>
-          <a:prstGeom prst="rect">
-            <a:avLst/>
-          </a:prstGeom>
-          <a:noFill/>
-          <a:ln/>
-        </p:spPr>
-        <p:txBody>
-          <a:bodyPr wrap="square" lIns="0" tIns="0" rIns="0" bIns="0" rtlCol="0" anchor="ctr"/>
-          <a:lstStyle/>
-          <a:p>
-            <a:pPr algn="r" indent="0" marL="0">
-              <a:buNone/>
-            </a:pPr>
-            <a:r>
-              <a:rPr lang="en-US" sz="800" dirty="0">
-                <a:solidFill>
-                  <a:srgbClr val="FF5700"/>
-                </a:solidFill>
-                <a:latin typeface="IBM Plex Mono" pitchFamily="34" charset="0"/>
-                <a:ea typeface="IBM Plex Mono" pitchFamily="34" charset="-122"/>
-                <a:cs typeface="IBM Plex Mono" pitchFamily="34" charset="-120"/>
-              </a:rPr>
-              <a:t>Ep 4, 9–11, 15, 25</a:t>
-            </a:r>
-            <a:endParaRPr lang="en-US" sz="800" dirty="0"/>
-          </a:p>
-        </p:txBody>
-      </p:sp>
-      <p:sp>
-        <p:nvSpPr>
-          <p:cNvPr id="32" name="Text 29"/>
-          <p:cNvSpPr txBox="1"/>
-          <p:nvPr/>
-        </p:nvSpPr>
-        <p:spPr>
-          <a:xfrm>
-            <a:off x="6263640" y="3520440"/>
-            <a:ext cx="2194560" cy="548640"/>
-          </a:xfrm>
-          <a:prstGeom prst="rect">
-            <a:avLst/>
-          </a:prstGeom>
-          <a:noFill/>
-          <a:ln/>
-        </p:spPr>
-        <p:txBody>
-          <a:bodyPr wrap="square" lIns="0" tIns="0" rIns="0" bIns="0" rtlCol="0" anchor="t"/>
-          <a:lstStyle/>
-          <a:p>
-            <a:pPr indent="0" marL="0">
-              <a:buNone/>
-            </a:pPr>
-            <a:r>
-              <a:rPr lang="en-US" sz="1050" dirty="0">
-                <a:solidFill>
-                  <a:srgbClr val="6B7280"/>
-                </a:solidFill>
-                <a:latin typeface="Geist" pitchFamily="34" charset="0"/>
-                <a:ea typeface="Geist" pitchFamily="34" charset="-122"/>
-                <a:cs typeface="Geist" pitchFamily="34" charset="-120"/>
-              </a:rPr>
-              <a:t>identity · tenancy · evals · tracing · guardrails · cost</a:t>
-            </a:r>
-            <a:endParaRPr lang="en-US" sz="1050" dirty="0"/>
-          </a:p>
-        </p:txBody>
-      </p:sp>
-      <p:sp>
-        <p:nvSpPr>
-          <p:cNvPr id="33" name="Text 30"/>
-          <p:cNvSpPr txBox="1"/>
-          <p:nvPr/>
-        </p:nvSpPr>
-        <p:spPr>
-          <a:xfrm>
-            <a:off x="457200" y="4297680"/>
-            <a:ext cx="8229600" cy="274320"/>
-          </a:xfrm>
-          <a:prstGeom prst="rect">
-            <a:avLst/>
-          </a:prstGeom>
-          <a:noFill/>
-          <a:ln/>
-        </p:spPr>
-        <p:txBody>
-          <a:bodyPr wrap="square" lIns="0" tIns="0" rIns="0" bIns="0" rtlCol="0" anchor="t"/>
-          <a:lstStyle/>
-          <a:p>
-            <a:pPr indent="0" marL="0">
-              <a:buNone/>
-            </a:pPr>
-            <a:r>
-              <a:rPr lang="en-US" sz="1000" dirty="0">
-                <a:solidFill>
-                  <a:srgbClr val="919191"/>
-                </a:solidFill>
-                <a:latin typeface="Geist" pitchFamily="34" charset="0"/>
-                <a:ea typeface="Geist" pitchFamily="34" charset="-122"/>
-                <a:cs typeface="Geist" pitchFamily="34" charset="-120"/>
-              </a:rPr>
-              <a:t>Every one is a loop over tools with an approval in the middle.</a:t>
-            </a:r>
-            <a:endParaRPr lang="en-US" sz="1000" dirty="0"/>
+              <a:t>the agent sits on top of the other three: the scheduler wakes it, the workflow gives it approval and audit, the rules engine sets the limits it may not break.</a:t>
+            </a:r>
+            <a:endParaRPr lang="en-US" sz="900" dirty="0"/>
           </a:p>
         </p:txBody>
       </p:sp>

--- a/episodes/01-what-is-an-agent/slides/ep01-what-is-an-agent.pptx
+++ b/episodes/01-what-is-an-agent/slides/ep01-what-is-an-agent.pptx
@@ -19,9 +19,10 @@
     <p:sldId id="267" r:id="rId13"/>
     <p:sldId id="268" r:id="rId14"/>
     <p:sldId id="269" r:id="rId15"/>
+    <p:sldId id="270" r:id="rId16"/>
   </p:sldIdLst>
   <p:notesMasterIdLst>
-    <p:notesMasterId r:id="rId16"/>
+    <p:notesMasterId r:id="rId17"/>
   </p:notesMasterIdLst>
   <p:sldSz cx="9144000" cy="5143500"/>
   <p:notesSz cx="5143500" cy="9144000"/>
@@ -955,7 +956,7 @@
           <a:p>
             <a:r>
               <a:rPr lang="en-US" dirty="0"/>
-              <a:t>Recap in 30 seconds, then the call to action: next episode we build the first agent live, inside the ERP.</a:t>
+              <a:t>Policies are the rules about what the agent MAY do, written by the business. Guardrails are the mechanisms that enforce them whatever the model decides. A policy in the system prompt is a request; a guardrail in code is a guarantee. The model can be wrong, misled by an injected instruction in a customer message, or drift between versions — so every policy that matters gets a guardrail too. Walk the five layers. Then point out that Episode 2's agent already has four of them without naming them: check_return_policy encodes the thresholds, request_approval is the human gate, MAX_STEPS is a runtime cap, qty-over-sold is a tool guardrail. Input and output checks are the gap Episode 25 fills.</a:t>
             </a:r>
             <a:endParaRPr lang="en-US" dirty="0"/>
           </a:p>
@@ -979,6 +980,94 @@
             <a:fld id="{F7021451-1387-4CA6-816F-3879F97B5CBC}" type="slidenum">
               <a:rPr lang="en-US"/>
               <a:t>14</a:t>
+            </a:fld>
+            <a:endParaRPr lang="en-US"/>
+          </a:p>
+        </p:txBody>
+      </p:sp>
+    </p:spTree>
+    <p:extLst>
+      <p:ext uri="{BB962C8B-B14F-4D97-AF65-F5344CB8AC3E}">
+        <p14:creationId xmlns:p14="http://schemas.microsoft.com/office/powerpoint/2010/main" val="1024086991"/>
+      </p:ext>
+    </p:extLst>
+  </p:cSld>
+  <p:clrMapOvr>
+    <a:masterClrMapping/>
+  </p:clrMapOvr>
+</p:notes>
+</file>
+
+<file path=ppt/notesSlides/notesSlide15.xml><?xml version="1.0" encoding="utf-8"?>
+<p:notes xmlns:a="http://schemas.openxmlformats.org/drawingml/2006/main" xmlns:r="http://schemas.openxmlformats.org/officeDocument/2006/relationships" xmlns:p="http://schemas.openxmlformats.org/presentationml/2006/main">
+  <p:cSld>
+    <p:spTree>
+      <p:nvGrpSpPr>
+        <p:cNvPr id="1" name=""/>
+        <p:cNvGrpSpPr/>
+        <p:nvPr/>
+      </p:nvGrpSpPr>
+      <p:grpSpPr>
+        <a:xfrm>
+          <a:off x="0" y="0"/>
+          <a:ext cx="0" cy="0"/>
+          <a:chOff x="0" y="0"/>
+          <a:chExt cx="0" cy="0"/>
+        </a:xfrm>
+      </p:grpSpPr>
+      <p:sp>
+        <p:nvSpPr>
+          <p:cNvPr id="2" name="Slide Image Placeholder 1"/>
+          <p:cNvSpPr>
+            <a:spLocks noGrp="1" noRot="1" noChangeAspect="1"/>
+          </p:cNvSpPr>
+          <p:nvPr>
+            <p:ph type="sldImg"/>
+          </p:nvPr>
+        </p:nvSpPr>
+        <p:spPr/>
+      </p:sp>
+      <p:sp>
+        <p:nvSpPr>
+          <p:cNvPr id="3" name="Notes Placeholder 2"/>
+          <p:cNvSpPr>
+            <a:spLocks noGrp="1"/>
+          </p:cNvSpPr>
+          <p:nvPr>
+            <p:ph type="body" idx="1"/>
+          </p:nvPr>
+        </p:nvSpPr>
+        <p:spPr/>
+        <p:txBody>
+          <a:bodyPr/>
+          <a:lstStyle/>
+          <a:p>
+            <a:r>
+              <a:rPr lang="en-US" dirty="0"/>
+              <a:t>Recap in 30 seconds, then the call to action: next episode we build the first agent live, inside the ERP.</a:t>
+            </a:r>
+            <a:endParaRPr lang="en-US" dirty="0"/>
+          </a:p>
+        </p:txBody>
+      </p:sp>
+      <p:sp>
+        <p:nvSpPr>
+          <p:cNvPr id="4" name="Slide Number Placeholder 3"/>
+          <p:cNvSpPr>
+            <a:spLocks noGrp="1"/>
+          </p:cNvSpPr>
+          <p:nvPr>
+            <p:ph type="sldNum" sz="quarter" idx="10"/>
+          </p:nvPr>
+        </p:nvSpPr>
+        <p:spPr/>
+        <p:txBody>
+          <a:bodyPr/>
+          <a:lstStyle/>
+          <a:p>
+            <a:fld id="{F7021451-1387-4CA6-816F-3879F97B5CBC}" type="slidenum">
+              <a:rPr lang="en-US"/>
+              <a:t>15</a:t>
             </a:fld>
             <a:endParaRPr lang="en-US"/>
           </a:p>
@@ -6941,6 +7030,1361 @@
         </p:nvSpPr>
         <p:spPr>
           <a:xfrm>
+            <a:off x="457200" y="274320"/>
+            <a:ext cx="8229600" cy="248920"/>
+          </a:xfrm>
+          <a:prstGeom prst="rect">
+            <a:avLst/>
+          </a:prstGeom>
+          <a:noFill/>
+          <a:ln/>
+        </p:spPr>
+        <p:txBody>
+          <a:bodyPr wrap="square" lIns="0" tIns="0" rIns="0" bIns="0" rtlCol="0" anchor="ctr"/>
+          <a:lstStyle/>
+          <a:p>
+            <a:pPr indent="0" marL="0">
+              <a:buNone/>
+            </a:pPr>
+            <a:r>
+              <a:rPr lang="en-US" sz="1400" b="1" spc="100" kern="0" dirty="0">
+                <a:solidFill>
+                  <a:srgbClr val="1C1C1C"/>
+                </a:solidFill>
+                <a:latin typeface="Geist" pitchFamily="34" charset="0"/>
+                <a:ea typeface="Geist" pitchFamily="34" charset="-122"/>
+                <a:cs typeface="Geist" pitchFamily="34" charset="-120"/>
+              </a:rPr>
+              <a:t>learn  with  </a:t>
+            </a:r>
+            <a:pPr indent="0" marL="0">
+              <a:buNone/>
+            </a:pPr>
+            <a:r>
+              <a:rPr lang="en-US" sz="1400" b="1" spc="100" kern="0" dirty="0">
+                <a:solidFill>
+                  <a:srgbClr val="FF5700"/>
+                </a:solidFill>
+                <a:latin typeface="Geist" pitchFamily="34" charset="0"/>
+                <a:ea typeface="Geist" pitchFamily="34" charset="-122"/>
+                <a:cs typeface="Geist" pitchFamily="34" charset="-120"/>
+              </a:rPr>
+              <a:t>harsha</a:t>
+            </a:r>
+            <a:pPr indent="0" marL="0">
+              <a:buNone/>
+            </a:pPr>
+            <a:r>
+              <a:rPr lang="en-US" sz="600" b="1" spc="100" kern="0" dirty="0">
+                <a:solidFill>
+                  <a:srgbClr val="FF5700"/>
+                </a:solidFill>
+                <a:latin typeface="Geist" pitchFamily="34" charset="0"/>
+                <a:ea typeface="Geist" pitchFamily="34" charset="-122"/>
+                <a:cs typeface="Geist" pitchFamily="34" charset="-120"/>
+              </a:rPr>
+              <a:t>  ■</a:t>
+            </a:r>
+            <a:endParaRPr lang="en-US" sz="1400" dirty="0"/>
+          </a:p>
+        </p:txBody>
+      </p:sp>
+      <p:sp>
+        <p:nvSpPr>
+          <p:cNvPr id="4" name="Shape 1"/>
+          <p:cNvSpPr/>
+          <p:nvPr/>
+        </p:nvSpPr>
+        <p:spPr>
+          <a:xfrm>
+            <a:off x="457200" y="905256"/>
+            <a:ext cx="91440" cy="91440"/>
+          </a:xfrm>
+          <a:prstGeom prst="rect">
+            <a:avLst/>
+          </a:prstGeom>
+          <a:solidFill>
+            <a:srgbClr val="FF5700"/>
+          </a:solidFill>
+          <a:ln/>
+        </p:spPr>
+      </p:sp>
+      <p:sp>
+        <p:nvSpPr>
+          <p:cNvPr id="5" name="Text 2"/>
+          <p:cNvSpPr txBox="1"/>
+          <p:nvPr/>
+        </p:nvSpPr>
+        <p:spPr>
+          <a:xfrm>
+            <a:off x="621792" y="804672"/>
+            <a:ext cx="6400800" cy="292608"/>
+          </a:xfrm>
+          <a:prstGeom prst="rect">
+            <a:avLst/>
+          </a:prstGeom>
+          <a:noFill/>
+          <a:ln/>
+        </p:spPr>
+        <p:txBody>
+          <a:bodyPr wrap="square" lIns="0" tIns="0" rIns="0" bIns="0" rtlCol="0" anchor="ctr"/>
+          <a:lstStyle/>
+          <a:p>
+            <a:pPr indent="0" marL="0">
+              <a:buNone/>
+            </a:pPr>
+            <a:r>
+              <a:rPr lang="en-US" sz="1000" spc="400" kern="0" dirty="0">
+                <a:solidFill>
+                  <a:srgbClr val="FF5700"/>
+                </a:solidFill>
+                <a:latin typeface="IBM Plex Mono" pitchFamily="34" charset="0"/>
+                <a:ea typeface="IBM Plex Mono" pitchFamily="34" charset="-122"/>
+                <a:cs typeface="IBM Plex Mono" pitchFamily="34" charset="-120"/>
+              </a:rPr>
+              <a:t>KEEPING IT SAFE</a:t>
+            </a:r>
+            <a:endParaRPr lang="en-US" sz="1000" dirty="0"/>
+          </a:p>
+        </p:txBody>
+      </p:sp>
+      <p:sp>
+        <p:nvSpPr>
+          <p:cNvPr id="6" name="Text 3"/>
+          <p:cNvSpPr txBox="1"/>
+          <p:nvPr/>
+        </p:nvSpPr>
+        <p:spPr>
+          <a:xfrm>
+            <a:off x="457200" y="1078992"/>
+            <a:ext cx="8229600" cy="640080"/>
+          </a:xfrm>
+          <a:prstGeom prst="rect">
+            <a:avLst/>
+          </a:prstGeom>
+          <a:noFill/>
+          <a:ln/>
+        </p:spPr>
+        <p:txBody>
+          <a:bodyPr wrap="square" lIns="0" tIns="0" rIns="0" bIns="0" rtlCol="0" anchor="ctr"/>
+          <a:lstStyle/>
+          <a:p>
+            <a:pPr indent="0" marL="0">
+              <a:buNone/>
+            </a:pPr>
+            <a:r>
+              <a:rPr lang="en-US" sz="2800" b="1" spc="-100" kern="0" dirty="0">
+                <a:solidFill>
+                  <a:srgbClr val="1C1C1C"/>
+                </a:solidFill>
+                <a:latin typeface="Geist" pitchFamily="34" charset="0"/>
+                <a:ea typeface="Geist" pitchFamily="34" charset="-122"/>
+                <a:cs typeface="Geist" pitchFamily="34" charset="-120"/>
+              </a:rPr>
+              <a:t>Policies vs guardrails</a:t>
+            </a:r>
+            <a:endParaRPr lang="en-US" sz="2800" dirty="0"/>
+          </a:p>
+        </p:txBody>
+      </p:sp>
+      <p:sp>
+        <p:nvSpPr>
+          <p:cNvPr id="7" name="Text 4"/>
+          <p:cNvSpPr txBox="1"/>
+          <p:nvPr/>
+        </p:nvSpPr>
+        <p:spPr>
+          <a:xfrm>
+            <a:off x="457200" y="4754880"/>
+            <a:ext cx="5943600" cy="228600"/>
+          </a:xfrm>
+          <a:prstGeom prst="rect">
+            <a:avLst/>
+          </a:prstGeom>
+          <a:noFill/>
+          <a:ln/>
+        </p:spPr>
+        <p:txBody>
+          <a:bodyPr wrap="square" lIns="0" tIns="0" rIns="0" bIns="0" rtlCol="0" anchor="ctr"/>
+          <a:lstStyle/>
+          <a:p>
+            <a:pPr indent="0" marL="0">
+              <a:buNone/>
+            </a:pPr>
+            <a:r>
+              <a:rPr lang="en-US" sz="800" spc="100" kern="0" dirty="0">
+                <a:solidFill>
+                  <a:srgbClr val="919191"/>
+                </a:solidFill>
+                <a:latin typeface="IBM Plex Mono" pitchFamily="34" charset="0"/>
+                <a:ea typeface="IBM Plex Mono" pitchFamily="34" charset="-122"/>
+                <a:cs typeface="IBM Plex Mono" pitchFamily="34" charset="-120"/>
+              </a:rPr>
+              <a:t>Arthashastra Learning · The Agentic Enterprise</a:t>
+            </a:r>
+            <a:endParaRPr lang="en-US" sz="800" dirty="0"/>
+          </a:p>
+        </p:txBody>
+      </p:sp>
+      <p:sp>
+        <p:nvSpPr>
+          <p:cNvPr id="8" name="Text 5"/>
+          <p:cNvSpPr txBox="1"/>
+          <p:nvPr/>
+        </p:nvSpPr>
+        <p:spPr>
+          <a:xfrm>
+            <a:off x="6858000" y="4754880"/>
+            <a:ext cx="1828800" cy="228600"/>
+          </a:xfrm>
+          <a:prstGeom prst="rect">
+            <a:avLst/>
+          </a:prstGeom>
+          <a:noFill/>
+          <a:ln/>
+        </p:spPr>
+        <p:txBody>
+          <a:bodyPr wrap="square" lIns="0" tIns="0" rIns="0" bIns="0" rtlCol="0" anchor="ctr"/>
+          <a:lstStyle/>
+          <a:p>
+            <a:pPr algn="r" indent="0" marL="0">
+              <a:buNone/>
+            </a:pPr>
+            <a:r>
+              <a:rPr lang="en-US" sz="800" spc="100" kern="0" dirty="0">
+                <a:solidFill>
+                  <a:srgbClr val="919191"/>
+                </a:solidFill>
+                <a:latin typeface="IBM Plex Mono" pitchFamily="34" charset="0"/>
+                <a:ea typeface="IBM Plex Mono" pitchFamily="34" charset="-122"/>
+                <a:cs typeface="IBM Plex Mono" pitchFamily="34" charset="-120"/>
+              </a:rPr>
+              <a:t>arthashastra.ai</a:t>
+            </a:r>
+            <a:endParaRPr lang="en-US" sz="800" dirty="0"/>
+          </a:p>
+        </p:txBody>
+      </p:sp>
+      <p:sp>
+        <p:nvSpPr>
+          <p:cNvPr id="9" name="Shape 6"/>
+          <p:cNvSpPr/>
+          <p:nvPr/>
+        </p:nvSpPr>
+        <p:spPr>
+          <a:xfrm>
+            <a:off x="457200" y="1783080"/>
+            <a:ext cx="3017520" cy="2331720"/>
+          </a:xfrm>
+          <a:prstGeom prst="rect">
+            <a:avLst/>
+          </a:prstGeom>
+          <a:solidFill>
+            <a:srgbClr val="F7F7F5"/>
+          </a:solidFill>
+          <a:ln w="9525">
+            <a:solidFill>
+              <a:srgbClr val="E5E5E5"/>
+            </a:solidFill>
+            <a:prstDash val="solid"/>
+          </a:ln>
+        </p:spPr>
+      </p:sp>
+      <p:sp>
+        <p:nvSpPr>
+          <p:cNvPr id="10" name="Text 7"/>
+          <p:cNvSpPr txBox="1"/>
+          <p:nvPr/>
+        </p:nvSpPr>
+        <p:spPr>
+          <a:xfrm>
+            <a:off x="640080" y="1901952"/>
+            <a:ext cx="2651760" cy="320040"/>
+          </a:xfrm>
+          <a:prstGeom prst="rect">
+            <a:avLst/>
+          </a:prstGeom>
+          <a:noFill/>
+          <a:ln/>
+        </p:spPr>
+        <p:txBody>
+          <a:bodyPr wrap="square" lIns="0" tIns="0" rIns="0" bIns="0" rtlCol="0" anchor="t"/>
+          <a:lstStyle/>
+          <a:p>
+            <a:pPr indent="0" marL="0">
+              <a:buNone/>
+            </a:pPr>
+            <a:r>
+              <a:rPr lang="en-US" sz="1500" b="1" spc="-50" kern="0" dirty="0">
+                <a:solidFill>
+                  <a:srgbClr val="1C1C1C"/>
+                </a:solidFill>
+                <a:latin typeface="Geist" pitchFamily="34" charset="0"/>
+                <a:ea typeface="Geist" pitchFamily="34" charset="-122"/>
+                <a:cs typeface="Geist" pitchFamily="34" charset="-120"/>
+              </a:rPr>
+              <a:t>Policies</a:t>
+            </a:r>
+            <a:endParaRPr lang="en-US" sz="1500" dirty="0"/>
+          </a:p>
+        </p:txBody>
+      </p:sp>
+      <p:sp>
+        <p:nvSpPr>
+          <p:cNvPr id="11" name="Text 8"/>
+          <p:cNvSpPr txBox="1"/>
+          <p:nvPr/>
+        </p:nvSpPr>
+        <p:spPr>
+          <a:xfrm>
+            <a:off x="640080" y="2212848"/>
+            <a:ext cx="2651760" cy="228600"/>
+          </a:xfrm>
+          <a:prstGeom prst="rect">
+            <a:avLst/>
+          </a:prstGeom>
+          <a:noFill/>
+          <a:ln/>
+        </p:spPr>
+        <p:txBody>
+          <a:bodyPr wrap="square" lIns="0" tIns="0" rIns="0" bIns="0" rtlCol="0" anchor="t"/>
+          <a:lstStyle/>
+          <a:p>
+            <a:pPr indent="0" marL="0">
+              <a:buNone/>
+            </a:pPr>
+            <a:r>
+              <a:rPr lang="en-US" sz="750" dirty="0">
+                <a:solidFill>
+                  <a:srgbClr val="FF5700"/>
+                </a:solidFill>
+                <a:latin typeface="IBM Plex Mono" pitchFamily="34" charset="0"/>
+                <a:ea typeface="IBM Plex Mono" pitchFamily="34" charset="-122"/>
+                <a:cs typeface="IBM Plex Mono" pitchFamily="34" charset="-120"/>
+              </a:rPr>
+              <a:t>WRITTEN BY THE BUSINESS</a:t>
+            </a:r>
+            <a:endParaRPr lang="en-US" sz="750" dirty="0"/>
+          </a:p>
+        </p:txBody>
+      </p:sp>
+      <p:sp>
+        <p:nvSpPr>
+          <p:cNvPr id="12" name="Text 9"/>
+          <p:cNvSpPr txBox="1"/>
+          <p:nvPr/>
+        </p:nvSpPr>
+        <p:spPr>
+          <a:xfrm>
+            <a:off x="640080" y="2487168"/>
+            <a:ext cx="2697480" cy="1280160"/>
+          </a:xfrm>
+          <a:prstGeom prst="rect">
+            <a:avLst/>
+          </a:prstGeom>
+          <a:noFill/>
+          <a:ln/>
+        </p:spPr>
+        <p:txBody>
+          <a:bodyPr wrap="square" lIns="0" tIns="0" rIns="0" bIns="0" rtlCol="0" anchor="t"/>
+          <a:lstStyle/>
+          <a:p>
+            <a:pPr indent="0" marL="0">
+              <a:buNone/>
+            </a:pPr>
+            <a:r>
+              <a:rPr lang="en-US" sz="950" dirty="0">
+                <a:solidFill>
+                  <a:srgbClr val="1C1C1C"/>
+                </a:solidFill>
+                <a:latin typeface="Geist" pitchFamily="34" charset="0"/>
+                <a:ea typeface="Geist" pitchFamily="34" charset="-122"/>
+                <a:cs typeface="Geist" pitchFamily="34" charset="-120"/>
+              </a:rPr>
+              <a:t>Scope — what it exists to do, what it never touches</a:t>
+            </a:r>
+            <a:endParaRPr lang="en-US" sz="950" dirty="0"/>
+          </a:p>
+          <a:p>
+            <a:pPr indent="0" marL="0">
+              <a:buNone/>
+            </a:pPr>
+            <a:r>
+              <a:rPr lang="en-US" sz="950" dirty="0">
+                <a:solidFill>
+                  <a:srgbClr val="1C1C1C"/>
+                </a:solidFill>
+                <a:latin typeface="Geist" pitchFamily="34" charset="0"/>
+                <a:ea typeface="Geist" pitchFamily="34" charset="-122"/>
+                <a:cs typeface="Geist" pitchFamily="34" charset="-120"/>
+              </a:rPr>
+              <a:t>Thresholds — auto-approve under 25,000; above needs a named approver</a:t>
+            </a:r>
+            <a:endParaRPr lang="en-US" sz="950" dirty="0"/>
+          </a:p>
+          <a:p>
+            <a:pPr indent="0" marL="0">
+              <a:buNone/>
+            </a:pPr>
+            <a:r>
+              <a:rPr lang="en-US" sz="950" dirty="0">
+                <a:solidFill>
+                  <a:srgbClr val="1C1C1C"/>
+                </a:solidFill>
+                <a:latin typeface="Geist" pitchFamily="34" charset="0"/>
+                <a:ea typeface="Geist" pitchFamily="34" charset="-122"/>
+                <a:cs typeface="Geist" pitchFamily="34" charset="-120"/>
+              </a:rPr>
+              <a:t>Data boundaries — one company; no PII in prompts or logs</a:t>
+            </a:r>
+            <a:endParaRPr lang="en-US" sz="950" dirty="0"/>
+          </a:p>
+          <a:p>
+            <a:pPr indent="0" marL="0">
+              <a:buNone/>
+            </a:pPr>
+            <a:r>
+              <a:rPr lang="en-US" sz="950" dirty="0">
+                <a:solidFill>
+                  <a:srgbClr val="1C1C1C"/>
+                </a:solidFill>
+                <a:latin typeface="Geist" pitchFamily="34" charset="0"/>
+                <a:ea typeface="Geist" pitchFamily="34" charset="-122"/>
+                <a:cs typeface="Geist" pitchFamily="34" charset="-120"/>
+              </a:rPr>
+              <a:t>Behaviour — check policy before booking; escalate when unsure</a:t>
+            </a:r>
+            <a:endParaRPr lang="en-US" sz="950" dirty="0"/>
+          </a:p>
+        </p:txBody>
+      </p:sp>
+      <p:sp>
+        <p:nvSpPr>
+          <p:cNvPr id="13" name="Text 10"/>
+          <p:cNvSpPr txBox="1"/>
+          <p:nvPr/>
+        </p:nvSpPr>
+        <p:spPr>
+          <a:xfrm>
+            <a:off x="640080" y="3767328"/>
+            <a:ext cx="2697480" cy="320040"/>
+          </a:xfrm>
+          <a:prstGeom prst="rect">
+            <a:avLst/>
+          </a:prstGeom>
+          <a:noFill/>
+          <a:ln/>
+        </p:spPr>
+        <p:txBody>
+          <a:bodyPr wrap="square" lIns="0" tIns="0" rIns="0" bIns="0" rtlCol="0" anchor="t"/>
+          <a:lstStyle/>
+          <a:p>
+            <a:pPr indent="0" marL="0">
+              <a:buNone/>
+            </a:pPr>
+            <a:r>
+              <a:rPr lang="en-US" sz="850" dirty="0">
+                <a:solidFill>
+                  <a:srgbClr val="6B7280"/>
+                </a:solidFill>
+                <a:latin typeface="Geist" pitchFamily="34" charset="0"/>
+                <a:ea typeface="Geist" pitchFamily="34" charset="-122"/>
+                <a:cs typeface="Geist" pitchFamily="34" charset="-120"/>
+              </a:rPr>
+              <a:t>Goes in the system prompt — a request, not a guarantee.</a:t>
+            </a:r>
+            <a:endParaRPr lang="en-US" sz="850" dirty="0"/>
+          </a:p>
+        </p:txBody>
+      </p:sp>
+      <p:sp>
+        <p:nvSpPr>
+          <p:cNvPr id="14" name="Text 11"/>
+          <p:cNvSpPr txBox="1"/>
+          <p:nvPr/>
+        </p:nvSpPr>
+        <p:spPr>
+          <a:xfrm>
+            <a:off x="3749040" y="1810512"/>
+            <a:ext cx="2743200" cy="274320"/>
+          </a:xfrm>
+          <a:prstGeom prst="rect">
+            <a:avLst/>
+          </a:prstGeom>
+          <a:noFill/>
+          <a:ln/>
+        </p:spPr>
+        <p:txBody>
+          <a:bodyPr wrap="square" lIns="0" tIns="0" rIns="0" bIns="0" rtlCol="0" anchor="t"/>
+          <a:lstStyle/>
+          <a:p>
+            <a:pPr indent="0" marL="0">
+              <a:buNone/>
+            </a:pPr>
+            <a:r>
+              <a:rPr lang="en-US" sz="1500" b="1" spc="-50" kern="0" dirty="0">
+                <a:solidFill>
+                  <a:srgbClr val="1C1C1C"/>
+                </a:solidFill>
+                <a:latin typeface="Geist" pitchFamily="34" charset="0"/>
+                <a:ea typeface="Geist" pitchFamily="34" charset="-122"/>
+                <a:cs typeface="Geist" pitchFamily="34" charset="-120"/>
+              </a:rPr>
+              <a:t>Guardrails</a:t>
+            </a:r>
+            <a:endParaRPr lang="en-US" sz="1500" dirty="0"/>
+          </a:p>
+        </p:txBody>
+      </p:sp>
+      <p:sp>
+        <p:nvSpPr>
+          <p:cNvPr id="15" name="Text 12"/>
+          <p:cNvSpPr txBox="1"/>
+          <p:nvPr/>
+        </p:nvSpPr>
+        <p:spPr>
+          <a:xfrm>
+            <a:off x="6309360" y="1874520"/>
+            <a:ext cx="2377440" cy="228600"/>
+          </a:xfrm>
+          <a:prstGeom prst="rect">
+            <a:avLst/>
+          </a:prstGeom>
+          <a:noFill/>
+          <a:ln/>
+        </p:spPr>
+        <p:txBody>
+          <a:bodyPr wrap="square" lIns="0" tIns="0" rIns="0" bIns="0" rtlCol="0" anchor="t"/>
+          <a:lstStyle/>
+          <a:p>
+            <a:pPr indent="0" marL="0">
+              <a:buNone/>
+            </a:pPr>
+            <a:r>
+              <a:rPr lang="en-US" sz="750" dirty="0">
+                <a:solidFill>
+                  <a:srgbClr val="FF5700"/>
+                </a:solidFill>
+                <a:latin typeface="IBM Plex Mono" pitchFamily="34" charset="0"/>
+                <a:ea typeface="IBM Plex Mono" pitchFamily="34" charset="-122"/>
+                <a:cs typeface="IBM Plex Mono" pitchFamily="34" charset="-120"/>
+              </a:rPr>
+              <a:t>ENFORCED IN CODE</a:t>
+            </a:r>
+            <a:endParaRPr lang="en-US" sz="750" dirty="0"/>
+          </a:p>
+        </p:txBody>
+      </p:sp>
+      <p:sp>
+        <p:nvSpPr>
+          <p:cNvPr id="16" name="Shape 13"/>
+          <p:cNvSpPr/>
+          <p:nvPr/>
+        </p:nvSpPr>
+        <p:spPr>
+          <a:xfrm>
+            <a:off x="3749040" y="2185416"/>
+            <a:ext cx="256032" cy="256032"/>
+          </a:xfrm>
+          <a:prstGeom prst="rect">
+            <a:avLst/>
+          </a:prstGeom>
+          <a:solidFill>
+            <a:srgbClr val="FF5700"/>
+          </a:solidFill>
+          <a:ln/>
+        </p:spPr>
+      </p:sp>
+      <p:sp>
+        <p:nvSpPr>
+          <p:cNvPr id="17" name="Text 14"/>
+          <p:cNvSpPr txBox="1"/>
+          <p:nvPr/>
+        </p:nvSpPr>
+        <p:spPr>
+          <a:xfrm>
+            <a:off x="3749040" y="2185416"/>
+            <a:ext cx="256032" cy="256032"/>
+          </a:xfrm>
+          <a:prstGeom prst="rect">
+            <a:avLst/>
+          </a:prstGeom>
+          <a:noFill/>
+          <a:ln/>
+        </p:spPr>
+        <p:txBody>
+          <a:bodyPr wrap="square" lIns="0" tIns="0" rIns="0" bIns="0" rtlCol="0" anchor="ctr"/>
+          <a:lstStyle/>
+          <a:p>
+            <a:pPr algn="ctr" indent="0" marL="0">
+              <a:buNone/>
+            </a:pPr>
+            <a:r>
+              <a:rPr lang="en-US" sz="1100" b="1" dirty="0">
+                <a:solidFill>
+                  <a:srgbClr val="FFFFFF"/>
+                </a:solidFill>
+                <a:latin typeface="IBM Plex Mono" pitchFamily="34" charset="0"/>
+                <a:ea typeface="IBM Plex Mono" pitchFamily="34" charset="-122"/>
+                <a:cs typeface="IBM Plex Mono" pitchFamily="34" charset="-120"/>
+              </a:rPr>
+              <a:t>1</a:t>
+            </a:r>
+            <a:endParaRPr lang="en-US" sz="1100" dirty="0"/>
+          </a:p>
+        </p:txBody>
+      </p:sp>
+      <p:sp>
+        <p:nvSpPr>
+          <p:cNvPr id="18" name="Text 15"/>
+          <p:cNvSpPr txBox="1"/>
+          <p:nvPr/>
+        </p:nvSpPr>
+        <p:spPr>
+          <a:xfrm>
+            <a:off x="4114800" y="2148840"/>
+            <a:ext cx="1645920" cy="320040"/>
+          </a:xfrm>
+          <a:prstGeom prst="rect">
+            <a:avLst/>
+          </a:prstGeom>
+          <a:noFill/>
+          <a:ln/>
+        </p:spPr>
+        <p:txBody>
+          <a:bodyPr wrap="square" lIns="0" tIns="0" rIns="0" bIns="0" rtlCol="0" anchor="t"/>
+          <a:lstStyle/>
+          <a:p>
+            <a:pPr indent="0" marL="0">
+              <a:buNone/>
+            </a:pPr>
+            <a:r>
+              <a:rPr lang="en-US" sz="1100" b="1" spc="-50" kern="0" dirty="0">
+                <a:solidFill>
+                  <a:srgbClr val="1C1C1C"/>
+                </a:solidFill>
+                <a:latin typeface="Geist" pitchFamily="34" charset="0"/>
+                <a:ea typeface="Geist" pitchFamily="34" charset="-122"/>
+                <a:cs typeface="Geist" pitchFamily="34" charset="-120"/>
+              </a:rPr>
+              <a:t>Input</a:t>
+            </a:r>
+            <a:endParaRPr lang="en-US" sz="1100" dirty="0"/>
+          </a:p>
+        </p:txBody>
+      </p:sp>
+      <p:sp>
+        <p:nvSpPr>
+          <p:cNvPr id="19" name="Text 16"/>
+          <p:cNvSpPr txBox="1"/>
+          <p:nvPr/>
+        </p:nvSpPr>
+        <p:spPr>
+          <a:xfrm>
+            <a:off x="5760720" y="2167128"/>
+            <a:ext cx="2926080" cy="384048"/>
+          </a:xfrm>
+          <a:prstGeom prst="rect">
+            <a:avLst/>
+          </a:prstGeom>
+          <a:noFill/>
+          <a:ln/>
+        </p:spPr>
+        <p:txBody>
+          <a:bodyPr wrap="square" lIns="0" tIns="0" rIns="0" bIns="0" rtlCol="0" anchor="t"/>
+          <a:lstStyle/>
+          <a:p>
+            <a:pPr indent="0" marL="0">
+              <a:buNone/>
+            </a:pPr>
+            <a:r>
+              <a:rPr lang="en-US" sz="850" dirty="0">
+                <a:solidFill>
+                  <a:srgbClr val="6B7280"/>
+                </a:solidFill>
+                <a:latin typeface="Geist" pitchFamily="34" charset="0"/>
+                <a:ea typeface="Geist" pitchFamily="34" charset="-122"/>
+                <a:cs typeface="Geist" pitchFamily="34" charset="-120"/>
+              </a:rPr>
+              <a:t>sanitise the request; catch injected instructions; check identity and company</a:t>
+            </a:r>
+            <a:endParaRPr lang="en-US" sz="850" dirty="0"/>
+          </a:p>
+        </p:txBody>
+      </p:sp>
+      <p:sp>
+        <p:nvSpPr>
+          <p:cNvPr id="20" name="Shape 17"/>
+          <p:cNvSpPr/>
+          <p:nvPr/>
+        </p:nvSpPr>
+        <p:spPr>
+          <a:xfrm>
+            <a:off x="3749040" y="2587752"/>
+            <a:ext cx="256032" cy="256032"/>
+          </a:xfrm>
+          <a:prstGeom prst="rect">
+            <a:avLst/>
+          </a:prstGeom>
+          <a:solidFill>
+            <a:srgbClr val="FF5700"/>
+          </a:solidFill>
+          <a:ln/>
+        </p:spPr>
+      </p:sp>
+      <p:sp>
+        <p:nvSpPr>
+          <p:cNvPr id="21" name="Text 18"/>
+          <p:cNvSpPr txBox="1"/>
+          <p:nvPr/>
+        </p:nvSpPr>
+        <p:spPr>
+          <a:xfrm>
+            <a:off x="3749040" y="2587752"/>
+            <a:ext cx="256032" cy="256032"/>
+          </a:xfrm>
+          <a:prstGeom prst="rect">
+            <a:avLst/>
+          </a:prstGeom>
+          <a:noFill/>
+          <a:ln/>
+        </p:spPr>
+        <p:txBody>
+          <a:bodyPr wrap="square" lIns="0" tIns="0" rIns="0" bIns="0" rtlCol="0" anchor="ctr"/>
+          <a:lstStyle/>
+          <a:p>
+            <a:pPr algn="ctr" indent="0" marL="0">
+              <a:buNone/>
+            </a:pPr>
+            <a:r>
+              <a:rPr lang="en-US" sz="1100" b="1" dirty="0">
+                <a:solidFill>
+                  <a:srgbClr val="FFFFFF"/>
+                </a:solidFill>
+                <a:latin typeface="IBM Plex Mono" pitchFamily="34" charset="0"/>
+                <a:ea typeface="IBM Plex Mono" pitchFamily="34" charset="-122"/>
+                <a:cs typeface="IBM Plex Mono" pitchFamily="34" charset="-120"/>
+              </a:rPr>
+              <a:t>2</a:t>
+            </a:r>
+            <a:endParaRPr lang="en-US" sz="1100" dirty="0"/>
+          </a:p>
+        </p:txBody>
+      </p:sp>
+      <p:sp>
+        <p:nvSpPr>
+          <p:cNvPr id="22" name="Text 19"/>
+          <p:cNvSpPr txBox="1"/>
+          <p:nvPr/>
+        </p:nvSpPr>
+        <p:spPr>
+          <a:xfrm>
+            <a:off x="4114800" y="2551176"/>
+            <a:ext cx="1645920" cy="320040"/>
+          </a:xfrm>
+          <a:prstGeom prst="rect">
+            <a:avLst/>
+          </a:prstGeom>
+          <a:noFill/>
+          <a:ln/>
+        </p:spPr>
+        <p:txBody>
+          <a:bodyPr wrap="square" lIns="0" tIns="0" rIns="0" bIns="0" rtlCol="0" anchor="t"/>
+          <a:lstStyle/>
+          <a:p>
+            <a:pPr indent="0" marL="0">
+              <a:buNone/>
+            </a:pPr>
+            <a:r>
+              <a:rPr lang="en-US" sz="1100" b="1" spc="-50" kern="0" dirty="0">
+                <a:solidFill>
+                  <a:srgbClr val="1C1C1C"/>
+                </a:solidFill>
+                <a:latin typeface="Geist" pitchFamily="34" charset="0"/>
+                <a:ea typeface="Geist" pitchFamily="34" charset="-122"/>
+                <a:cs typeface="Geist" pitchFamily="34" charset="-120"/>
+              </a:rPr>
+              <a:t>Tool</a:t>
+            </a:r>
+            <a:endParaRPr lang="en-US" sz="1100" dirty="0"/>
+          </a:p>
+        </p:txBody>
+      </p:sp>
+      <p:sp>
+        <p:nvSpPr>
+          <p:cNvPr id="23" name="Text 20"/>
+          <p:cNvSpPr txBox="1"/>
+          <p:nvPr/>
+        </p:nvSpPr>
+        <p:spPr>
+          <a:xfrm>
+            <a:off x="5760720" y="2569464"/>
+            <a:ext cx="2926080" cy="384048"/>
+          </a:xfrm>
+          <a:prstGeom prst="rect">
+            <a:avLst/>
+          </a:prstGeom>
+          <a:noFill/>
+          <a:ln/>
+        </p:spPr>
+        <p:txBody>
+          <a:bodyPr wrap="square" lIns="0" tIns="0" rIns="0" bIns="0" rtlCol="0" anchor="t"/>
+          <a:lstStyle/>
+          <a:p>
+            <a:pPr indent="0" marL="0">
+              <a:buNone/>
+            </a:pPr>
+            <a:r>
+              <a:rPr lang="en-US" sz="850" dirty="0">
+                <a:solidFill>
+                  <a:srgbClr val="6B7280"/>
+                </a:solidFill>
+                <a:latin typeface="Geist" pitchFamily="34" charset="0"/>
+                <a:ea typeface="Geist" pitchFamily="34" charset="-122"/>
+                <a:cs typeface="Geist" pitchFamily="34" charset="-120"/>
+              </a:rPr>
+              <a:t>least privilege; schema checks; caps; tenant filter server-side; read-only by default</a:t>
+            </a:r>
+            <a:endParaRPr lang="en-US" sz="850" dirty="0"/>
+          </a:p>
+        </p:txBody>
+      </p:sp>
+      <p:sp>
+        <p:nvSpPr>
+          <p:cNvPr id="24" name="Shape 21"/>
+          <p:cNvSpPr/>
+          <p:nvPr/>
+        </p:nvSpPr>
+        <p:spPr>
+          <a:xfrm>
+            <a:off x="3749040" y="2990088"/>
+            <a:ext cx="256032" cy="256032"/>
+          </a:xfrm>
+          <a:prstGeom prst="rect">
+            <a:avLst/>
+          </a:prstGeom>
+          <a:solidFill>
+            <a:srgbClr val="FF5700"/>
+          </a:solidFill>
+          <a:ln/>
+        </p:spPr>
+      </p:sp>
+      <p:sp>
+        <p:nvSpPr>
+          <p:cNvPr id="25" name="Text 22"/>
+          <p:cNvSpPr txBox="1"/>
+          <p:nvPr/>
+        </p:nvSpPr>
+        <p:spPr>
+          <a:xfrm>
+            <a:off x="3749040" y="2990088"/>
+            <a:ext cx="256032" cy="256032"/>
+          </a:xfrm>
+          <a:prstGeom prst="rect">
+            <a:avLst/>
+          </a:prstGeom>
+          <a:noFill/>
+          <a:ln/>
+        </p:spPr>
+        <p:txBody>
+          <a:bodyPr wrap="square" lIns="0" tIns="0" rIns="0" bIns="0" rtlCol="0" anchor="ctr"/>
+          <a:lstStyle/>
+          <a:p>
+            <a:pPr algn="ctr" indent="0" marL="0">
+              <a:buNone/>
+            </a:pPr>
+            <a:r>
+              <a:rPr lang="en-US" sz="1100" b="1" dirty="0">
+                <a:solidFill>
+                  <a:srgbClr val="FFFFFF"/>
+                </a:solidFill>
+                <a:latin typeface="IBM Plex Mono" pitchFamily="34" charset="0"/>
+                <a:ea typeface="IBM Plex Mono" pitchFamily="34" charset="-122"/>
+                <a:cs typeface="IBM Plex Mono" pitchFamily="34" charset="-120"/>
+              </a:rPr>
+              <a:t>3</a:t>
+            </a:r>
+            <a:endParaRPr lang="en-US" sz="1100" dirty="0"/>
+          </a:p>
+        </p:txBody>
+      </p:sp>
+      <p:sp>
+        <p:nvSpPr>
+          <p:cNvPr id="26" name="Text 23"/>
+          <p:cNvSpPr txBox="1"/>
+          <p:nvPr/>
+        </p:nvSpPr>
+        <p:spPr>
+          <a:xfrm>
+            <a:off x="4114800" y="2953512"/>
+            <a:ext cx="1645920" cy="320040"/>
+          </a:xfrm>
+          <a:prstGeom prst="rect">
+            <a:avLst/>
+          </a:prstGeom>
+          <a:noFill/>
+          <a:ln/>
+        </p:spPr>
+        <p:txBody>
+          <a:bodyPr wrap="square" lIns="0" tIns="0" rIns="0" bIns="0" rtlCol="0" anchor="t"/>
+          <a:lstStyle/>
+          <a:p>
+            <a:pPr indent="0" marL="0">
+              <a:buNone/>
+            </a:pPr>
+            <a:r>
+              <a:rPr lang="en-US" sz="1100" b="1" spc="-50" kern="0" dirty="0">
+                <a:solidFill>
+                  <a:srgbClr val="1C1C1C"/>
+                </a:solidFill>
+                <a:latin typeface="Geist" pitchFamily="34" charset="0"/>
+                <a:ea typeface="Geist" pitchFamily="34" charset="-122"/>
+                <a:cs typeface="Geist" pitchFamily="34" charset="-120"/>
+              </a:rPr>
+              <a:t>Output</a:t>
+            </a:r>
+            <a:endParaRPr lang="en-US" sz="1100" dirty="0"/>
+          </a:p>
+        </p:txBody>
+      </p:sp>
+      <p:sp>
+        <p:nvSpPr>
+          <p:cNvPr id="27" name="Text 24"/>
+          <p:cNvSpPr txBox="1"/>
+          <p:nvPr/>
+        </p:nvSpPr>
+        <p:spPr>
+          <a:xfrm>
+            <a:off x="5760720" y="2971800"/>
+            <a:ext cx="2926080" cy="384048"/>
+          </a:xfrm>
+          <a:prstGeom prst="rect">
+            <a:avLst/>
+          </a:prstGeom>
+          <a:noFill/>
+          <a:ln/>
+        </p:spPr>
+        <p:txBody>
+          <a:bodyPr wrap="square" lIns="0" tIns="0" rIns="0" bIns="0" rtlCol="0" anchor="t"/>
+          <a:lstStyle/>
+          <a:p>
+            <a:pPr indent="0" marL="0">
+              <a:buNone/>
+            </a:pPr>
+            <a:r>
+              <a:rPr lang="en-US" sz="850" dirty="0">
+                <a:solidFill>
+                  <a:srgbClr val="6B7280"/>
+                </a:solidFill>
+                <a:latin typeface="Geist" pitchFamily="34" charset="0"/>
+                <a:ea typeface="Geist" pitchFamily="34" charset="-122"/>
+                <a:cs typeface="Geist" pitchFamily="34" charset="-120"/>
+              </a:rPr>
+              <a:t>no leaked data; no invented document numbers; no claimed actions that didn't happen</a:t>
+            </a:r>
+            <a:endParaRPr lang="en-US" sz="850" dirty="0"/>
+          </a:p>
+        </p:txBody>
+      </p:sp>
+      <p:sp>
+        <p:nvSpPr>
+          <p:cNvPr id="28" name="Shape 25"/>
+          <p:cNvSpPr/>
+          <p:nvPr/>
+        </p:nvSpPr>
+        <p:spPr>
+          <a:xfrm>
+            <a:off x="3749040" y="3392424"/>
+            <a:ext cx="256032" cy="256032"/>
+          </a:xfrm>
+          <a:prstGeom prst="rect">
+            <a:avLst/>
+          </a:prstGeom>
+          <a:solidFill>
+            <a:srgbClr val="FF5700"/>
+          </a:solidFill>
+          <a:ln/>
+        </p:spPr>
+      </p:sp>
+      <p:sp>
+        <p:nvSpPr>
+          <p:cNvPr id="29" name="Text 26"/>
+          <p:cNvSpPr txBox="1"/>
+          <p:nvPr/>
+        </p:nvSpPr>
+        <p:spPr>
+          <a:xfrm>
+            <a:off x="3749040" y="3392424"/>
+            <a:ext cx="256032" cy="256032"/>
+          </a:xfrm>
+          <a:prstGeom prst="rect">
+            <a:avLst/>
+          </a:prstGeom>
+          <a:noFill/>
+          <a:ln/>
+        </p:spPr>
+        <p:txBody>
+          <a:bodyPr wrap="square" lIns="0" tIns="0" rIns="0" bIns="0" rtlCol="0" anchor="ctr"/>
+          <a:lstStyle/>
+          <a:p>
+            <a:pPr algn="ctr" indent="0" marL="0">
+              <a:buNone/>
+            </a:pPr>
+            <a:r>
+              <a:rPr lang="en-US" sz="1100" b="1" dirty="0">
+                <a:solidFill>
+                  <a:srgbClr val="FFFFFF"/>
+                </a:solidFill>
+                <a:latin typeface="IBM Plex Mono" pitchFamily="34" charset="0"/>
+                <a:ea typeface="IBM Plex Mono" pitchFamily="34" charset="-122"/>
+                <a:cs typeface="IBM Plex Mono" pitchFamily="34" charset="-120"/>
+              </a:rPr>
+              <a:t>4</a:t>
+            </a:r>
+            <a:endParaRPr lang="en-US" sz="1100" dirty="0"/>
+          </a:p>
+        </p:txBody>
+      </p:sp>
+      <p:sp>
+        <p:nvSpPr>
+          <p:cNvPr id="30" name="Text 27"/>
+          <p:cNvSpPr txBox="1"/>
+          <p:nvPr/>
+        </p:nvSpPr>
+        <p:spPr>
+          <a:xfrm>
+            <a:off x="4114800" y="3355848"/>
+            <a:ext cx="1645920" cy="320040"/>
+          </a:xfrm>
+          <a:prstGeom prst="rect">
+            <a:avLst/>
+          </a:prstGeom>
+          <a:noFill/>
+          <a:ln/>
+        </p:spPr>
+        <p:txBody>
+          <a:bodyPr wrap="square" lIns="0" tIns="0" rIns="0" bIns="0" rtlCol="0" anchor="t"/>
+          <a:lstStyle/>
+          <a:p>
+            <a:pPr indent="0" marL="0">
+              <a:buNone/>
+            </a:pPr>
+            <a:r>
+              <a:rPr lang="en-US" sz="1100" b="1" spc="-50" kern="0" dirty="0">
+                <a:solidFill>
+                  <a:srgbClr val="1C1C1C"/>
+                </a:solidFill>
+                <a:latin typeface="Geist" pitchFamily="34" charset="0"/>
+                <a:ea typeface="Geist" pitchFamily="34" charset="-122"/>
+                <a:cs typeface="Geist" pitchFamily="34" charset="-120"/>
+              </a:rPr>
+              <a:t>Runtime</a:t>
+            </a:r>
+            <a:endParaRPr lang="en-US" sz="1100" dirty="0"/>
+          </a:p>
+        </p:txBody>
+      </p:sp>
+      <p:sp>
+        <p:nvSpPr>
+          <p:cNvPr id="31" name="Text 28"/>
+          <p:cNvSpPr txBox="1"/>
+          <p:nvPr/>
+        </p:nvSpPr>
+        <p:spPr>
+          <a:xfrm>
+            <a:off x="5760720" y="3374136"/>
+            <a:ext cx="2926080" cy="384048"/>
+          </a:xfrm>
+          <a:prstGeom prst="rect">
+            <a:avLst/>
+          </a:prstGeom>
+          <a:noFill/>
+          <a:ln/>
+        </p:spPr>
+        <p:txBody>
+          <a:bodyPr wrap="square" lIns="0" tIns="0" rIns="0" bIns="0" rtlCol="0" anchor="t"/>
+          <a:lstStyle/>
+          <a:p>
+            <a:pPr indent="0" marL="0">
+              <a:buNone/>
+            </a:pPr>
+            <a:r>
+              <a:rPr lang="en-US" sz="850" dirty="0">
+                <a:solidFill>
+                  <a:srgbClr val="6B7280"/>
+                </a:solidFill>
+                <a:latin typeface="Geist" pitchFamily="34" charset="0"/>
+                <a:ea typeface="Geist" pitchFamily="34" charset="-122"/>
+                <a:cs typeface="Geist" pitchFamily="34" charset="-120"/>
+              </a:rPr>
+              <a:t>step cap; cost budget; timeout; kill switch per agent</a:t>
+            </a:r>
+            <a:endParaRPr lang="en-US" sz="850" dirty="0"/>
+          </a:p>
+        </p:txBody>
+      </p:sp>
+      <p:sp>
+        <p:nvSpPr>
+          <p:cNvPr id="32" name="Shape 29"/>
+          <p:cNvSpPr/>
+          <p:nvPr/>
+        </p:nvSpPr>
+        <p:spPr>
+          <a:xfrm>
+            <a:off x="3749040" y="3794760"/>
+            <a:ext cx="256032" cy="256032"/>
+          </a:xfrm>
+          <a:prstGeom prst="rect">
+            <a:avLst/>
+          </a:prstGeom>
+          <a:solidFill>
+            <a:srgbClr val="FF5700"/>
+          </a:solidFill>
+          <a:ln/>
+        </p:spPr>
+      </p:sp>
+      <p:sp>
+        <p:nvSpPr>
+          <p:cNvPr id="33" name="Text 30"/>
+          <p:cNvSpPr txBox="1"/>
+          <p:nvPr/>
+        </p:nvSpPr>
+        <p:spPr>
+          <a:xfrm>
+            <a:off x="3749040" y="3794760"/>
+            <a:ext cx="256032" cy="256032"/>
+          </a:xfrm>
+          <a:prstGeom prst="rect">
+            <a:avLst/>
+          </a:prstGeom>
+          <a:noFill/>
+          <a:ln/>
+        </p:spPr>
+        <p:txBody>
+          <a:bodyPr wrap="square" lIns="0" tIns="0" rIns="0" bIns="0" rtlCol="0" anchor="ctr"/>
+          <a:lstStyle/>
+          <a:p>
+            <a:pPr algn="ctr" indent="0" marL="0">
+              <a:buNone/>
+            </a:pPr>
+            <a:r>
+              <a:rPr lang="en-US" sz="1100" b="1" dirty="0">
+                <a:solidFill>
+                  <a:srgbClr val="FFFFFF"/>
+                </a:solidFill>
+                <a:latin typeface="IBM Plex Mono" pitchFamily="34" charset="0"/>
+                <a:ea typeface="IBM Plex Mono" pitchFamily="34" charset="-122"/>
+                <a:cs typeface="IBM Plex Mono" pitchFamily="34" charset="-120"/>
+              </a:rPr>
+              <a:t>5</a:t>
+            </a:r>
+            <a:endParaRPr lang="en-US" sz="1100" dirty="0"/>
+          </a:p>
+        </p:txBody>
+      </p:sp>
+      <p:sp>
+        <p:nvSpPr>
+          <p:cNvPr id="34" name="Text 31"/>
+          <p:cNvSpPr txBox="1"/>
+          <p:nvPr/>
+        </p:nvSpPr>
+        <p:spPr>
+          <a:xfrm>
+            <a:off x="4114800" y="3758184"/>
+            <a:ext cx="1645920" cy="320040"/>
+          </a:xfrm>
+          <a:prstGeom prst="rect">
+            <a:avLst/>
+          </a:prstGeom>
+          <a:noFill/>
+          <a:ln/>
+        </p:spPr>
+        <p:txBody>
+          <a:bodyPr wrap="square" lIns="0" tIns="0" rIns="0" bIns="0" rtlCol="0" anchor="t"/>
+          <a:lstStyle/>
+          <a:p>
+            <a:pPr indent="0" marL="0">
+              <a:buNone/>
+            </a:pPr>
+            <a:r>
+              <a:rPr lang="en-US" sz="1100" b="1" spc="-50" kern="0" dirty="0">
+                <a:solidFill>
+                  <a:srgbClr val="1C1C1C"/>
+                </a:solidFill>
+                <a:latin typeface="Geist" pitchFamily="34" charset="0"/>
+                <a:ea typeface="Geist" pitchFamily="34" charset="-122"/>
+                <a:cs typeface="Geist" pitchFamily="34" charset="-120"/>
+              </a:rPr>
+              <a:t>Human-in-the-loop</a:t>
+            </a:r>
+            <a:endParaRPr lang="en-US" sz="1100" dirty="0"/>
+          </a:p>
+        </p:txBody>
+      </p:sp>
+      <p:sp>
+        <p:nvSpPr>
+          <p:cNvPr id="35" name="Text 32"/>
+          <p:cNvSpPr txBox="1"/>
+          <p:nvPr/>
+        </p:nvSpPr>
+        <p:spPr>
+          <a:xfrm>
+            <a:off x="5760720" y="3776472"/>
+            <a:ext cx="2926080" cy="384048"/>
+          </a:xfrm>
+          <a:prstGeom prst="rect">
+            <a:avLst/>
+          </a:prstGeom>
+          <a:noFill/>
+          <a:ln/>
+        </p:spPr>
+        <p:txBody>
+          <a:bodyPr wrap="square" lIns="0" tIns="0" rIns="0" bIns="0" rtlCol="0" anchor="t"/>
+          <a:lstStyle/>
+          <a:p>
+            <a:pPr indent="0" marL="0">
+              <a:buNone/>
+            </a:pPr>
+            <a:r>
+              <a:rPr lang="en-US" sz="850" dirty="0">
+                <a:solidFill>
+                  <a:srgbClr val="6B7280"/>
+                </a:solidFill>
+                <a:latin typeface="Geist" pitchFamily="34" charset="0"/>
+                <a:ea typeface="Geist" pitchFamily="34" charset="-122"/>
+                <a:cs typeface="Geist" pitchFamily="34" charset="-120"/>
+              </a:rPr>
+              <a:t>pause on irreversible or high-value actions, with full context attached</a:t>
+            </a:r>
+            <a:endParaRPr lang="en-US" sz="850" dirty="0"/>
+          </a:p>
+        </p:txBody>
+      </p:sp>
+      <p:sp>
+        <p:nvSpPr>
+          <p:cNvPr id="36" name="Shape 33"/>
+          <p:cNvSpPr/>
+          <p:nvPr/>
+        </p:nvSpPr>
+        <p:spPr>
+          <a:xfrm>
+            <a:off x="457200" y="4206240"/>
+            <a:ext cx="8229600" cy="457200"/>
+          </a:xfrm>
+          <a:prstGeom prst="rect">
+            <a:avLst/>
+          </a:prstGeom>
+          <a:solidFill>
+            <a:srgbClr val="F7F7F5"/>
+          </a:solidFill>
+          <a:ln w="9525">
+            <a:solidFill>
+              <a:srgbClr val="E5E5E5"/>
+            </a:solidFill>
+            <a:prstDash val="solid"/>
+          </a:ln>
+        </p:spPr>
+      </p:sp>
+      <p:sp>
+        <p:nvSpPr>
+          <p:cNvPr id="37" name="Text 34"/>
+          <p:cNvSpPr txBox="1"/>
+          <p:nvPr/>
+        </p:nvSpPr>
+        <p:spPr>
+          <a:xfrm>
+            <a:off x="685800" y="4206240"/>
+            <a:ext cx="7772400" cy="457200"/>
+          </a:xfrm>
+          <a:prstGeom prst="rect">
+            <a:avLst/>
+          </a:prstGeom>
+          <a:noFill/>
+          <a:ln/>
+        </p:spPr>
+        <p:txBody>
+          <a:bodyPr wrap="square" lIns="0" tIns="0" rIns="0" bIns="0" rtlCol="0" anchor="ctr"/>
+          <a:lstStyle/>
+          <a:p>
+            <a:pPr indent="0" marL="0">
+              <a:buNone/>
+            </a:pPr>
+            <a:r>
+              <a:rPr lang="en-US" sz="900" spc="200" kern="0" dirty="0">
+                <a:solidFill>
+                  <a:srgbClr val="FF5700"/>
+                </a:solidFill>
+                <a:latin typeface="IBM Plex Mono" pitchFamily="34" charset="0"/>
+                <a:ea typeface="IBM Plex Mono" pitchFamily="34" charset="-122"/>
+                <a:cs typeface="IBM Plex Mono" pitchFamily="34" charset="-120"/>
+              </a:rPr>
+              <a:t>RULE  </a:t>
+            </a:r>
+            <a:pPr indent="0" marL="0">
+              <a:buNone/>
+            </a:pPr>
+            <a:r>
+              <a:rPr lang="en-US" sz="1150" dirty="0">
+                <a:solidFill>
+                  <a:srgbClr val="1C1C1C"/>
+                </a:solidFill>
+                <a:latin typeface="Geist" pitchFamily="34" charset="0"/>
+                <a:ea typeface="Geist" pitchFamily="34" charset="-122"/>
+                <a:cs typeface="Geist" pitchFamily="34" charset="-120"/>
+              </a:rPr>
+              <a:t>a policy says what it should do; a guardrail makes sure it can't do otherwise. Write both — never rely on the prompt alone. Episode 25 builds the full set.</a:t>
+            </a:r>
+            <a:endParaRPr lang="en-US" sz="900" dirty="0"/>
+          </a:p>
+        </p:txBody>
+      </p:sp>
+    </p:spTree>
+  </p:cSld>
+  <p:clrMapOvr>
+    <a:masterClrMapping/>
+  </p:clrMapOvr>
+</p:sld>
+</file>
+
+<file path=ppt/slides/slide15.xml><?xml version="1.0" encoding="utf-8"?>
+<p:sld xmlns:a="http://schemas.openxmlformats.org/drawingml/2006/main" xmlns:r="http://schemas.openxmlformats.org/officeDocument/2006/relationships" xmlns:p="http://schemas.openxmlformats.org/presentationml/2006/main">
+  <p:cSld name="Slide 15">
+    <p:bg>
+      <p:bgPr>
+        <a:blipFill dpi="0" rotWithShape="1">
+          <a:blip r:embed="rId1">
+            <a:lum/>
+          </a:blip>
+          <a:srcRect/>
+          <a:stretch>
+            <a:fillRect/>
+          </a:stretch>
+        </a:blipFill>
+        <a:effectLst/>
+      </p:bgPr>
+    </p:bg>
+    <p:spTree>
+      <p:nvGrpSpPr>
+        <p:cNvPr id="1" name=""/>
+        <p:cNvGrpSpPr/>
+        <p:nvPr/>
+      </p:nvGrpSpPr>
+      <p:grpSpPr>
+        <a:xfrm>
+          <a:off x="0" y="0"/>
+          <a:ext cx="0" cy="0"/>
+          <a:chOff x="0" y="0"/>
+          <a:chExt cx="0" cy="0"/>
+        </a:xfrm>
+      </p:grpSpPr>
+      <p:sp>
+        <p:nvSpPr>
+          <p:cNvPr id="3" name="Text 0"/>
+          <p:cNvSpPr txBox="1"/>
+          <p:nvPr/>
+        </p:nvSpPr>
+        <p:spPr>
+          <a:xfrm>
             <a:off x="548640" y="384048"/>
             <a:ext cx="8229600" cy="320040"/>
           </a:xfrm>
